--- a/tutorial_HIL_driver.pptx
+++ b/tutorial_HIL_driver.pptx
@@ -43,6 +43,12 @@
     <p:sldId id="288" r:id="rId40"/>
     <p:sldId id="289" r:id="rId41"/>
     <p:sldId id="290" r:id="rId42"/>
+    <p:sldId id="294" r:id="rId46"/>
+    <p:sldId id="295" r:id="rId47"/>
+    <p:sldId id="296" r:id="rId7"/>
+    <p:sldId id="297" r:id="rId6"/>
+    <p:sldId id="298" r:id="rId5"/>
+    <p:sldId id="299" r:id="rId4"/>
     <p:sldId id="291" r:id="rId43"/>
     <p:sldId id="292" r:id="rId44"/>
     <p:sldId id="293" r:id="rId45"/>
@@ -6916,6 +6922,13 @@
             </a:r>
           </a:p>
           <a:p>
+            <a:pPr lvl="1"/>
+            <a:r>
+              <a:rPr sz="1800"/>
+              <a:t>PART 5: Customize the built-in overlay and choose your car</a:t>
+            </a:r>
+          </a:p>
+          <a:p>
             <a:pPr/>
             <a:r>
               <a:rPr sz="2000"/>
@@ -11626,7 +11639,7 @@
           <a:p>
             <a:r>
               <a:rPr sz="1000"/>
-              <a:t>36</a:t>
+              <a:t>42</a:t>
             </a:r>
           </a:p>
         </p:txBody>
@@ -11740,7 +11753,7 @@
           <a:p>
             <a:r>
               <a:rPr sz="1000"/>
-              <a:t>37</a:t>
+              <a:t>43</a:t>
             </a:r>
           </a:p>
         </p:txBody>
@@ -11891,7 +11904,121 @@
           <a:p>
             <a:r>
               <a:rPr sz="1000"/>
-              <a:t>38</a:t>
+              <a:t>44</a:t>
+            </a:r>
+          </a:p>
+        </p:txBody>
+      </p:sp>
+    </p:spTree>
+  </p:cSld>
+  <p:clrMapOvr>
+    <a:masterClrMapping/>
+  </p:clrMapOvr>
+</p:sld>
+</file>
+
+<file path=ppt/slides/slide39.xml><?xml version="1.0" encoding="utf-8"?>
+<p:sld xmlns:a="http://schemas.openxmlformats.org/drawingml/2006/main" xmlns:p="http://schemas.openxmlformats.org/presentationml/2006/main" xmlns:r="http://schemas.openxmlformats.org/officeDocument/2006/relationships">
+  <p:cSld>
+    <p:spTree>
+      <p:nvGrpSpPr>
+        <p:cNvPr id="1" name=""/>
+        <p:cNvGrpSpPr/>
+        <p:nvPr/>
+      </p:nvGrpSpPr>
+      <p:grpSpPr/>
+      <p:sp>
+        <p:nvSpPr>
+          <p:cNvPr id="2" name="Title 1"/>
+          <p:cNvSpPr>
+            <a:spLocks noGrp="1"/>
+          </p:cNvSpPr>
+          <p:nvPr>
+            <p:ph type="title"/>
+          </p:nvPr>
+        </p:nvSpPr>
+        <p:spPr/>
+        <p:txBody>
+          <a:bodyPr/>
+          <a:lstStyle/>
+          <a:p>
+            <a:r>
+              <a:t>Part 5: Choose your car, customize the overlay</a:t>
+            </a:r>
+          </a:p>
+        </p:txBody>
+      </p:sp>
+      <p:sp>
+        <p:nvSpPr>
+          <p:cNvPr id="3" name="Text Placeholder 2"/>
+          <p:cNvSpPr>
+            <a:spLocks noGrp="1"/>
+          </p:cNvSpPr>
+          <p:nvPr>
+            <p:ph type="body" idx="1"/>
+          </p:nvPr>
+        </p:nvSpPr>
+        <p:spPr/>
+        <p:txBody>
+          <a:bodyPr/>
+          <a:lstStyle/>
+          <a:p/>
+        </p:txBody>
+      </p:sp>
+      <p:sp>
+        <p:nvSpPr>
+          <p:cNvPr id="4" name="TextBox 3"/>
+          <p:cNvSpPr txBox="1"/>
+          <p:nvPr/>
+        </p:nvSpPr>
+        <p:spPr>
+          <a:xfrm>
+            <a:off x="310974" y="6645811"/>
+            <a:ext cx="11644805" cy="188527"/>
+          </a:xfrm>
+          <a:prstGeom prst="rect">
+            <a:avLst/>
+          </a:prstGeom>
+          <a:noFill/>
+        </p:spPr>
+        <p:txBody>
+          <a:bodyPr wrap="none">
+            <a:spAutoFit/>
+          </a:bodyPr>
+          <a:lstStyle/>
+          <a:p>
+            <a:r>
+              <a:rPr sz="1000"/>
+              <a:t>University of Wisconsin - Madison</a:t>
+            </a:r>
+          </a:p>
+        </p:txBody>
+      </p:sp>
+      <p:sp>
+        <p:nvSpPr>
+          <p:cNvPr id="5" name="TextBox 4"/>
+          <p:cNvSpPr txBox="1"/>
+          <p:nvPr/>
+        </p:nvSpPr>
+        <p:spPr>
+          <a:xfrm>
+            <a:off x="10249563" y="6646310"/>
+            <a:ext cx="1706217" cy="188028"/>
+          </a:xfrm>
+          <a:prstGeom prst="rect">
+            <a:avLst/>
+          </a:prstGeom>
+          <a:noFill/>
+        </p:spPr>
+        <p:txBody>
+          <a:bodyPr wrap="none">
+            <a:spAutoFit/>
+          </a:bodyPr>
+          <a:lstStyle/>
+          <a:p>
+            <a:r>
+              <a:rPr sz="1000"/>
+              <a:t>36</a:t>
             </a:r>
           </a:p>
         </p:txBody>
@@ -12006,6 +12133,952 @@
             <a:r>
               <a:rPr sz="1000"/>
               <a:t>4</a:t>
+            </a:r>
+          </a:p>
+        </p:txBody>
+      </p:sp>
+    </p:spTree>
+  </p:cSld>
+  <p:clrMapOvr>
+    <a:masterClrMapping/>
+  </p:clrMapOvr>
+</p:sld>
+</file>
+
+<file path=ppt/slides/slide40.xml><?xml version="1.0" encoding="utf-8"?>
+<p:sld xmlns:a="http://schemas.openxmlformats.org/drawingml/2006/main" xmlns:p="http://schemas.openxmlformats.org/presentationml/2006/main" xmlns:r="http://schemas.openxmlformats.org/officeDocument/2006/relationships">
+  <p:cSld>
+    <p:spTree>
+      <p:nvGrpSpPr>
+        <p:cNvPr id="1" name=""/>
+        <p:cNvGrpSpPr/>
+        <p:nvPr/>
+      </p:nvGrpSpPr>
+      <p:grpSpPr/>
+      <p:sp>
+        <p:nvSpPr>
+          <p:cNvPr id="2" name="Title 1"/>
+          <p:cNvSpPr>
+            <a:spLocks noGrp="1"/>
+          </p:cNvSpPr>
+          <p:nvPr>
+            <p:ph type="title"/>
+          </p:nvPr>
+        </p:nvSpPr>
+        <p:spPr/>
+        <p:txBody>
+          <a:bodyPr/>
+          <a:lstStyle/>
+          <a:p>
+            <a:pPr/>
+            <a:r>
+              <a:rPr sz="3302"/>
+              <a:t>One interface, many vehicles - and a HUD you don't have to build</a:t>
+            </a:r>
+          </a:p>
+        </p:txBody>
+      </p:sp>
+      <p:sp>
+        <p:nvSpPr>
+          <p:cNvPr id="3" name="Content Placeholder 2"/>
+          <p:cNvSpPr>
+            <a:spLocks noGrp="1"/>
+          </p:cNvSpPr>
+          <p:nvPr>
+            <p:ph idx="1"/>
+          </p:nvPr>
+        </p:nvSpPr>
+        <p:spPr/>
+        <p:txBody>
+          <a:bodyPr wrap="square"/>
+          <a:lstStyle/>
+          <a:p>
+            <a:pPr/>
+            <a:r>
+              <a:rPr sz="2000"/>
+              <a:t>Every full-vehicle model in Chrono::Vehicle (HMMWV_Full, Sedan, CityBus, Gator, ...) shares the same interface</a:t>
+            </a:r>
+          </a:p>
+          <a:p>
+            <a:pPr/>
+            <a:r>
+              <a:rPr sz="1800">
+                <a:latin typeface="Consolas"/>
+              </a:rPr>
+              <a:t>GetVehicle()</a:t>
+            </a:r>
+            <a:r>
+              <a:rPr sz="2000"/>
+              <a:t> / </a:t>
+            </a:r>
+            <a:r>
+              <a:rPr sz="1800">
+                <a:latin typeface="Consolas"/>
+              </a:rPr>
+              <a:t>GetSystem()</a:t>
+            </a:r>
+            <a:r>
+              <a:rPr sz="2000"/>
+              <a:t> / </a:t>
+            </a:r>
+            <a:r>
+              <a:rPr sz="1800">
+                <a:latin typeface="Consolas"/>
+              </a:rPr>
+              <a:t>Synchronize()</a:t>
+            </a:r>
+            <a:r>
+              <a:rPr sz="2000"/>
+              <a:t> / </a:t>
+            </a:r>
+            <a:r>
+              <a:rPr sz="1800">
+                <a:latin typeface="Consolas"/>
+              </a:rPr>
+              <a:t>Advance()</a:t>
+            </a:r>
+            <a:r>
+              <a:rPr sz="2000"/>
+              <a:t> - the same four calls no matter which model you picked</a:t>
+            </a:r>
+          </a:p>
+          <a:p>
+            <a:pPr/>
+            <a:r>
+              <a:rPr sz="2000"/>
+              <a:t>VEHICLE picks the model; build_vehicle() is the only place that knows the differences (init height, extra setup calls)</a:t>
+            </a:r>
+          </a:p>
+          <a:p>
+            <a:pPr/>
+            <a:r>
+              <a:rPr sz="2000"/>
+              <a:t>The Irrlicht window already ships with an on-screen HUD, plus Chrono's own tabbed info panel and a profiler</a:t>
+            </a:r>
+          </a:p>
+          <a:p>
+            <a:pPr/>
+            <a:r>
+              <a:rPr sz="2000"/>
+              <a:t>None of it is hand-drawn - add or remove pieces with flags on vis, no custom overlay needed</a:t>
+            </a:r>
+          </a:p>
+        </p:txBody>
+      </p:sp>
+      <p:sp>
+        <p:nvSpPr>
+          <p:cNvPr id="4" name="TextBox 3"/>
+          <p:cNvSpPr txBox="1"/>
+          <p:nvPr/>
+        </p:nvSpPr>
+        <p:spPr>
+          <a:xfrm>
+            <a:off x="310974" y="6645811"/>
+            <a:ext cx="11644805" cy="188527"/>
+          </a:xfrm>
+          <a:prstGeom prst="rect">
+            <a:avLst/>
+          </a:prstGeom>
+          <a:noFill/>
+        </p:spPr>
+        <p:txBody>
+          <a:bodyPr wrap="none">
+            <a:spAutoFit/>
+          </a:bodyPr>
+          <a:lstStyle/>
+          <a:p>
+            <a:r>
+              <a:rPr sz="1000"/>
+              <a:t>University of Wisconsin - Madison</a:t>
+            </a:r>
+          </a:p>
+        </p:txBody>
+      </p:sp>
+      <p:sp>
+        <p:nvSpPr>
+          <p:cNvPr id="5" name="TextBox 4"/>
+          <p:cNvSpPr txBox="1"/>
+          <p:nvPr/>
+        </p:nvSpPr>
+        <p:spPr>
+          <a:xfrm>
+            <a:off x="10249563" y="6646310"/>
+            <a:ext cx="1706217" cy="188028"/>
+          </a:xfrm>
+          <a:prstGeom prst="rect">
+            <a:avLst/>
+          </a:prstGeom>
+          <a:noFill/>
+        </p:spPr>
+        <p:txBody>
+          <a:bodyPr wrap="none">
+            <a:spAutoFit/>
+          </a:bodyPr>
+          <a:lstStyle/>
+          <a:p>
+            <a:r>
+              <a:rPr sz="1000"/>
+              <a:t>37</a:t>
+            </a:r>
+          </a:p>
+        </p:txBody>
+      </p:sp>
+    </p:spTree>
+  </p:cSld>
+  <p:clrMapOvr>
+    <a:masterClrMapping/>
+  </p:clrMapOvr>
+</p:sld>
+</file>
+
+<file path=ppt/slides/slide41.xml><?xml version="1.0" encoding="utf-8"?>
+<p:sld xmlns:a="http://schemas.openxmlformats.org/drawingml/2006/main" xmlns:p="http://schemas.openxmlformats.org/presentationml/2006/main" xmlns:r="http://schemas.openxmlformats.org/officeDocument/2006/relationships">
+  <p:cSld>
+    <p:spTree>
+      <p:nvGrpSpPr>
+        <p:cNvPr id="1" name=""/>
+        <p:cNvGrpSpPr/>
+        <p:nvPr/>
+      </p:nvGrpSpPr>
+      <p:grpSpPr/>
+      <p:sp>
+        <p:nvSpPr>
+          <p:cNvPr id="2" name="Title 1"/>
+          <p:cNvSpPr>
+            <a:spLocks noGrp="1"/>
+          </p:cNvSpPr>
+          <p:nvPr>
+            <p:ph type="title"/>
+          </p:nvPr>
+        </p:nvSpPr>
+        <p:spPr/>
+        <p:txBody>
+          <a:bodyPr/>
+          <a:lstStyle/>
+          <a:p>
+            <a:r>
+              <a:t>Choose your car (Lines 284 to 292)</a:t>
+            </a:r>
+          </a:p>
+        </p:txBody>
+      </p:sp>
+      <p:sp>
+        <p:nvSpPr>
+          <p:cNvPr id="3" name="TextBox 2"/>
+          <p:cNvSpPr txBox="1"/>
+          <p:nvPr/>
+        </p:nvSpPr>
+        <p:spPr>
+          <a:xfrm>
+            <a:off x="0" y="1050000"/>
+            <a:ext cx="12192000" cy="5537200"/>
+          </a:xfrm>
+          <a:prstGeom prst="rect">
+            <a:avLst/>
+          </a:prstGeom>
+          <a:solidFill>
+            <a:srgbClr val="000000"/>
+          </a:solidFill>
+        </p:spPr>
+        <p:txBody>
+          <a:bodyPr wrap="none" lIns="300000" rIns="300000">
+            <a:noAutofit/>
+          </a:bodyPr>
+          <a:lstStyle/>
+          <a:p>
+            <a:r>
+              <a:rPr sz="1000">
+                <a:solidFill>
+                  <a:srgbClr val="CCCCCC"/>
+                </a:solidFill>
+                <a:latin typeface="Consolas"/>
+              </a:rPr>
+              <a:t>def main():</a:t>
+            </a:r>
+          </a:p>
+          <a:p>
+            <a:r>
+              <a:rPr sz="1000">
+                <a:solidFill>
+                  <a:srgbClr val="CCCCCC"/>
+                </a:solidFill>
+                <a:latin typeface="Consolas"/>
+              </a:rPr>
+              <a:t>    # -----------------------------------------------------------------------</a:t>
+            </a:r>
+          </a:p>
+          <a:p>
+            <a:r>
+              <a:rPr sz="1000">
+                <a:solidFill>
+                  <a:srgbClr val="CCCCCC"/>
+                </a:solidFill>
+                <a:latin typeface="Consolas"/>
+              </a:rPr>
+              <a:t>    # Create the vehicle (PART 5) and initialize</a:t>
+            </a:r>
+          </a:p>
+          <a:p>
+            <a:r>
+              <a:rPr sz="1000">
+                <a:solidFill>
+                  <a:srgbClr val="CCCCCC"/>
+                </a:solidFill>
+                <a:latin typeface="Consolas"/>
+              </a:rPr>
+              <a:t>    # -----------------------------------------------------------------------</a:t>
+            </a:r>
+          </a:p>
+          <a:p>
+            <a:r>
+              <a:rPr sz="1000">
+                <a:solidFill>
+                  <a:srgbClr val="CCCCCC"/>
+                </a:solidFill>
+                <a:latin typeface="Consolas"/>
+              </a:rPr>
+              <a:t>    vehicle_model, chase_dist = build_vehicle(VEHICLE)</a:t>
+            </a:r>
+          </a:p>
+          <a:p>
+            <a:r>
+              <a:rPr sz="1000">
+                <a:solidFill>
+                  <a:srgbClr val="CCCCCC"/>
+                </a:solidFill>
+                <a:latin typeface="Consolas"/>
+              </a:rPr>
+              <a:t> </a:t>
+            </a:r>
+          </a:p>
+          <a:p>
+            <a:r>
+              <a:rPr sz="1000">
+                <a:solidFill>
+                  <a:srgbClr val="CCCCCC"/>
+                </a:solidFill>
+                <a:latin typeface="Consolas"/>
+              </a:rPr>
+              <a:t>    vehicle = vehicle_model.GetVehicle()</a:t>
+            </a:r>
+          </a:p>
+          <a:p>
+            <a:r>
+              <a:rPr sz="1000">
+                <a:solidFill>
+                  <a:srgbClr val="CCCCCC"/>
+                </a:solidFill>
+                <a:latin typeface="Consolas"/>
+              </a:rPr>
+              <a:t>    system = vehicle_model.GetSystem()</a:t>
+            </a:r>
+          </a:p>
+          <a:p>
+            <a:r>
+              <a:rPr sz="1000">
+                <a:solidFill>
+                  <a:srgbClr val="CCCCCC"/>
+                </a:solidFill>
+                <a:latin typeface="Consolas"/>
+              </a:rPr>
+              <a:t>    system.SetCollisionSystemType(chrono.ChCollisionSystem.Type_BULLET)</a:t>
+            </a:r>
+          </a:p>
+        </p:txBody>
+      </p:sp>
+      <p:sp>
+        <p:nvSpPr>
+          <p:cNvPr id="4" name="TextBox 3"/>
+          <p:cNvSpPr txBox="1"/>
+          <p:nvPr/>
+        </p:nvSpPr>
+        <p:spPr>
+          <a:xfrm>
+            <a:off x="400000" y="6687200"/>
+            <a:ext cx="11392000" cy="-229200"/>
+          </a:xfrm>
+          <a:prstGeom prst="rect">
+            <a:avLst/>
+          </a:prstGeom>
+          <a:noFill/>
+        </p:spPr>
+        <p:txBody>
+          <a:bodyPr/>
+          <a:lstStyle/>
+          <a:p>
+            <a:r>
+              <a:rPr sz="1800"/>
+              <a:t>VEHICLE lives in CONFIGURATION - "hmmwv" | "sedan" | "citybus" | "gator"; everything below this line is unchanged</a:t>
+            </a:r>
+          </a:p>
+        </p:txBody>
+      </p:sp>
+      <p:sp>
+        <p:nvSpPr>
+          <p:cNvPr id="5" name="TextBox 4"/>
+          <p:cNvSpPr txBox="1"/>
+          <p:nvPr/>
+        </p:nvSpPr>
+        <p:spPr>
+          <a:xfrm>
+            <a:off x="310974" y="6645811"/>
+            <a:ext cx="11644805" cy="188527"/>
+          </a:xfrm>
+          <a:prstGeom prst="rect">
+            <a:avLst/>
+          </a:prstGeom>
+          <a:noFill/>
+        </p:spPr>
+        <p:txBody>
+          <a:bodyPr wrap="none">
+            <a:spAutoFit/>
+          </a:bodyPr>
+          <a:lstStyle/>
+          <a:p>
+            <a:r>
+              <a:rPr sz="1000"/>
+              <a:t>University of Wisconsin - Madison</a:t>
+            </a:r>
+          </a:p>
+        </p:txBody>
+      </p:sp>
+      <p:sp>
+        <p:nvSpPr>
+          <p:cNvPr id="6" name="TextBox 5"/>
+          <p:cNvSpPr txBox="1"/>
+          <p:nvPr/>
+        </p:nvSpPr>
+        <p:spPr>
+          <a:xfrm>
+            <a:off x="10249563" y="6646310"/>
+            <a:ext cx="1706217" cy="188028"/>
+          </a:xfrm>
+          <a:prstGeom prst="rect">
+            <a:avLst/>
+          </a:prstGeom>
+          <a:noFill/>
+        </p:spPr>
+        <p:txBody>
+          <a:bodyPr wrap="none">
+            <a:spAutoFit/>
+          </a:bodyPr>
+          <a:lstStyle/>
+          <a:p>
+            <a:r>
+              <a:rPr sz="1000"/>
+              <a:t>38</a:t>
+            </a:r>
+          </a:p>
+        </p:txBody>
+      </p:sp>
+    </p:spTree>
+  </p:cSld>
+  <p:clrMapOvr>
+    <a:masterClrMapping/>
+  </p:clrMapOvr>
+</p:sld>
+</file>
+
+<file path=ppt/slides/slide42.xml><?xml version="1.0" encoding="utf-8"?>
+<p:sld xmlns:a="http://schemas.openxmlformats.org/drawingml/2006/main" xmlns:p="http://schemas.openxmlformats.org/presentationml/2006/main" xmlns:r="http://schemas.openxmlformats.org/officeDocument/2006/relationships">
+  <p:cSld>
+    <p:spTree>
+      <p:nvGrpSpPr>
+        <p:cNvPr id="1" name=""/>
+        <p:cNvGrpSpPr/>
+        <p:nvPr/>
+      </p:nvGrpSpPr>
+      <p:grpSpPr/>
+      <p:sp>
+        <p:nvSpPr>
+          <p:cNvPr id="2" name="Title 1"/>
+          <p:cNvSpPr>
+            <a:spLocks noGrp="1"/>
+          </p:cNvSpPr>
+          <p:nvPr>
+            <p:ph type="title"/>
+          </p:nvPr>
+        </p:nvSpPr>
+        <p:spPr/>
+        <p:txBody>
+          <a:bodyPr/>
+          <a:lstStyle/>
+          <a:p>
+            <a:r>
+              <a:t>Add or remove overlay pieces (Lines 365 to 372)</a:t>
+            </a:r>
+          </a:p>
+        </p:txBody>
+      </p:sp>
+      <p:sp>
+        <p:nvSpPr>
+          <p:cNvPr id="3" name="TextBox 2"/>
+          <p:cNvSpPr txBox="1"/>
+          <p:nvPr/>
+        </p:nvSpPr>
+        <p:spPr>
+          <a:xfrm>
+            <a:off x="0" y="1050000"/>
+            <a:ext cx="12192000" cy="5537200"/>
+          </a:xfrm>
+          <a:prstGeom prst="rect">
+            <a:avLst/>
+          </a:prstGeom>
+          <a:solidFill>
+            <a:srgbClr val="000000"/>
+          </a:solidFill>
+        </p:spPr>
+        <p:txBody>
+          <a:bodyPr wrap="none" lIns="300000" rIns="300000">
+            <a:noAutofit/>
+          </a:bodyPr>
+          <a:lstStyle/>
+          <a:p>
+            <a:r>
+              <a:rPr sz="1000">
+                <a:solidFill>
+                  <a:srgbClr val="CCCCCC"/>
+                </a:solidFill>
+                <a:latin typeface="Consolas"/>
+              </a:rPr>
+              <a:t># PART 5: the built-in overlay - nothing here is hand-drawn, every piece</a:t>
+            </a:r>
+          </a:p>
+          <a:p>
+            <a:r>
+              <a:rPr sz="1000">
+                <a:solidFill>
+                  <a:srgbClr val="CCCCCC"/>
+                </a:solidFill>
+                <a:latin typeface="Consolas"/>
+              </a:rPr>
+              <a:t># is a flag or a method on `vis` itself</a:t>
+            </a:r>
+          </a:p>
+          <a:p>
+            <a:r>
+              <a:rPr sz="1000">
+                <a:solidFill>
+                  <a:srgbClr val="CCCCCC"/>
+                </a:solidFill>
+                <a:latin typeface="Consolas"/>
+              </a:rPr>
+              <a:t>vis.EnableStats(SHOW_VEHICLE_HUD)        # speed/steering/throttle/brake panel</a:t>
+            </a:r>
+          </a:p>
+          <a:p>
+            <a:r>
+              <a:rPr sz="1000">
+                <a:solidFill>
+                  <a:srgbClr val="CCCCCC"/>
+                </a:solidFill>
+                <a:latin typeface="Consolas"/>
+              </a:rPr>
+              <a:t>vis.SetHUDLocation(*HUD_CORNER)          # where that panel sits</a:t>
+            </a:r>
+          </a:p>
+          <a:p>
+            <a:r>
+              <a:rPr sz="1000">
+                <a:solidFill>
+                  <a:srgbClr val="CCCCCC"/>
+                </a:solidFill>
+                <a:latin typeface="Consolas"/>
+              </a:rPr>
+              <a:t>vis.ShowInfoPanel(SHOW_SIM_INFO_PANEL)   # Chrono's own tabbed info panel</a:t>
+            </a:r>
+          </a:p>
+          <a:p>
+            <a:r>
+              <a:rPr sz="1000">
+                <a:solidFill>
+                  <a:srgbClr val="CCCCCC"/>
+                </a:solidFill>
+                <a:latin typeface="Consolas"/>
+              </a:rPr>
+              <a:t>                                          # (bodies, contacts, timers); also</a:t>
+            </a:r>
+          </a:p>
+          <a:p>
+            <a:r>
+              <a:rPr sz="1000">
+                <a:solidFill>
+                  <a:srgbClr val="CCCCCC"/>
+                </a:solidFill>
+                <a:latin typeface="Consolas"/>
+              </a:rPr>
+              <a:t>                                          # toggles live with the 'i' key</a:t>
+            </a:r>
+          </a:p>
+          <a:p>
+            <a:r>
+              <a:rPr sz="1000">
+                <a:solidFill>
+                  <a:srgbClr val="CCCCCC"/>
+                </a:solidFill>
+                <a:latin typeface="Consolas"/>
+              </a:rPr>
+              <a:t>vis.ShowProfiler(SHOW_PROFILER)          # per-module timing bars</a:t>
+            </a:r>
+          </a:p>
+        </p:txBody>
+      </p:sp>
+      <p:sp>
+        <p:nvSpPr>
+          <p:cNvPr id="4" name="TextBox 3"/>
+          <p:cNvSpPr txBox="1"/>
+          <p:nvPr/>
+        </p:nvSpPr>
+        <p:spPr>
+          <a:xfrm>
+            <a:off x="400000" y="6687200"/>
+            <a:ext cx="11392000" cy="-229200"/>
+          </a:xfrm>
+          <a:prstGeom prst="rect">
+            <a:avLst/>
+          </a:prstGeom>
+          <a:noFill/>
+        </p:spPr>
+        <p:txBody>
+          <a:bodyPr/>
+          <a:lstStyle/>
+          <a:p>
+            <a:r>
+              <a:rPr sz="1800"/>
+              <a:t>SHOW_VEHICLE_HUD, HUD_CORNER, SHOW_SIM_INFO_PANEL, SHOW_PROFILER all live in CONFIGURATION, right next to VEHICLE</a:t>
+            </a:r>
+          </a:p>
+        </p:txBody>
+      </p:sp>
+      <p:sp>
+        <p:nvSpPr>
+          <p:cNvPr id="5" name="TextBox 4"/>
+          <p:cNvSpPr txBox="1"/>
+          <p:nvPr/>
+        </p:nvSpPr>
+        <p:spPr>
+          <a:xfrm>
+            <a:off x="310974" y="6645811"/>
+            <a:ext cx="11644805" cy="188527"/>
+          </a:xfrm>
+          <a:prstGeom prst="rect">
+            <a:avLst/>
+          </a:prstGeom>
+          <a:noFill/>
+        </p:spPr>
+        <p:txBody>
+          <a:bodyPr wrap="none">
+            <a:spAutoFit/>
+          </a:bodyPr>
+          <a:lstStyle/>
+          <a:p>
+            <a:r>
+              <a:rPr sz="1000"/>
+              <a:t>University of Wisconsin - Madison</a:t>
+            </a:r>
+          </a:p>
+        </p:txBody>
+      </p:sp>
+      <p:sp>
+        <p:nvSpPr>
+          <p:cNvPr id="6" name="TextBox 5"/>
+          <p:cNvSpPr txBox="1"/>
+          <p:nvPr/>
+        </p:nvSpPr>
+        <p:spPr>
+          <a:xfrm>
+            <a:off x="10249563" y="6646310"/>
+            <a:ext cx="1706217" cy="188028"/>
+          </a:xfrm>
+          <a:prstGeom prst="rect">
+            <a:avLst/>
+          </a:prstGeom>
+          <a:noFill/>
+        </p:spPr>
+        <p:txBody>
+          <a:bodyPr wrap="none">
+            <a:spAutoFit/>
+          </a:bodyPr>
+          <a:lstStyle/>
+          <a:p>
+            <a:r>
+              <a:rPr sz="1000"/>
+              <a:t>39</a:t>
+            </a:r>
+          </a:p>
+        </p:txBody>
+      </p:sp>
+    </p:spTree>
+  </p:cSld>
+  <p:clrMapOvr>
+    <a:masterClrMapping/>
+  </p:clrMapOvr>
+</p:sld>
+</file>
+
+<file path=ppt/slides/slide43.xml><?xml version="1.0" encoding="utf-8"?>
+<p:sld xmlns:a="http://schemas.openxmlformats.org/drawingml/2006/main" xmlns:p="http://schemas.openxmlformats.org/presentationml/2006/main" xmlns:r="http://schemas.openxmlformats.org/officeDocument/2006/relationships">
+  <p:cSld>
+    <p:spTree>
+      <p:nvGrpSpPr>
+        <p:cNvPr id="1" name=""/>
+        <p:cNvGrpSpPr/>
+        <p:nvPr/>
+      </p:nvGrpSpPr>
+      <p:grpSpPr/>
+      <p:sp>
+        <p:nvSpPr>
+          <p:cNvPr id="2" name="Title 1"/>
+          <p:cNvSpPr>
+            <a:spLocks noGrp="1"/>
+          </p:cNvSpPr>
+          <p:nvPr>
+            <p:ph type="title"/>
+          </p:nvPr>
+        </p:nvSpPr>
+        <p:spPr/>
+        <p:txBody>
+          <a:bodyPr/>
+          <a:lstStyle/>
+          <a:p>
+            <a:pPr/>
+            <a:r>
+              <a:rPr sz="3302"/>
+              <a:t>Before running the code, please</a:t>
+            </a:r>
+          </a:p>
+        </p:txBody>
+      </p:sp>
+      <p:sp>
+        <p:nvSpPr>
+          <p:cNvPr id="3" name="Content Placeholder 2"/>
+          <p:cNvSpPr>
+            <a:spLocks noGrp="1"/>
+          </p:cNvSpPr>
+          <p:nvPr>
+            <p:ph idx="1"/>
+          </p:nvPr>
+        </p:nvSpPr>
+        <p:spPr/>
+        <p:txBody>
+          <a:bodyPr wrap="square"/>
+          <a:lstStyle/>
+          <a:p>
+            <a:pPr/>
+            <a:r>
+              <a:rPr sz="2000"/>
+              <a:t>Set VEHICLE = "citybus" (or "sedan", "gator") and re-run - same driver, same terrain, very different vehicle</a:t>
+            </a:r>
+          </a:p>
+          <a:p>
+            <a:pPr/>
+            <a:r>
+              <a:rPr sz="2000"/>
+              <a:t>Set SHOW_SIM_INFO_PANEL = True, then press the </a:t>
+            </a:r>
+            <a:r>
+              <a:rPr sz="1800">
+                <a:latin typeface="Consolas"/>
+              </a:rPr>
+              <a:t>i</a:t>
+            </a:r>
+            <a:r>
+              <a:rPr sz="2000"/>
+              <a:t> key while the sim is running - same panel, two ways to reach it</a:t>
+            </a:r>
+          </a:p>
+          <a:p>
+            <a:pPr/>
+            <a:r>
+              <a:rPr sz="2000"/>
+              <a:t>Try SHOW_VEHICLE_HUD = False - the 3D scene doesn't care, only the panel disappears</a:t>
+            </a:r>
+          </a:p>
+        </p:txBody>
+      </p:sp>
+      <p:sp>
+        <p:nvSpPr>
+          <p:cNvPr id="4" name="TextBox 3"/>
+          <p:cNvSpPr txBox="1"/>
+          <p:nvPr/>
+        </p:nvSpPr>
+        <p:spPr>
+          <a:xfrm>
+            <a:off x="310974" y="6645811"/>
+            <a:ext cx="11644805" cy="188527"/>
+          </a:xfrm>
+          <a:prstGeom prst="rect">
+            <a:avLst/>
+          </a:prstGeom>
+          <a:noFill/>
+        </p:spPr>
+        <p:txBody>
+          <a:bodyPr wrap="none">
+            <a:spAutoFit/>
+          </a:bodyPr>
+          <a:lstStyle/>
+          <a:p>
+            <a:r>
+              <a:rPr sz="1000"/>
+              <a:t>University of Wisconsin - Madison</a:t>
+            </a:r>
+          </a:p>
+        </p:txBody>
+      </p:sp>
+      <p:sp>
+        <p:nvSpPr>
+          <p:cNvPr id="5" name="TextBox 4"/>
+          <p:cNvSpPr txBox="1"/>
+          <p:nvPr/>
+        </p:nvSpPr>
+        <p:spPr>
+          <a:xfrm>
+            <a:off x="10249563" y="6646310"/>
+            <a:ext cx="1706217" cy="188028"/>
+          </a:xfrm>
+          <a:prstGeom prst="rect">
+            <a:avLst/>
+          </a:prstGeom>
+          <a:noFill/>
+        </p:spPr>
+        <p:txBody>
+          <a:bodyPr wrap="none">
+            <a:spAutoFit/>
+          </a:bodyPr>
+          <a:lstStyle/>
+          <a:p>
+            <a:r>
+              <a:rPr sz="1000"/>
+              <a:t>40</a:t>
+            </a:r>
+          </a:p>
+        </p:txBody>
+      </p:sp>
+    </p:spTree>
+  </p:cSld>
+  <p:clrMapOvr>
+    <a:masterClrMapping/>
+  </p:clrMapOvr>
+</p:sld>
+</file>
+
+<file path=ppt/slides/slide44.xml><?xml version="1.0" encoding="utf-8"?>
+<p:sld xmlns:a="http://schemas.openxmlformats.org/drawingml/2006/main" xmlns:p="http://schemas.openxmlformats.org/presentationml/2006/main" xmlns:r="http://schemas.openxmlformats.org/officeDocument/2006/relationships">
+  <p:cSld>
+    <p:spTree>
+      <p:nvGrpSpPr>
+        <p:cNvPr id="1" name=""/>
+        <p:cNvGrpSpPr/>
+        <p:nvPr/>
+      </p:nvGrpSpPr>
+      <p:grpSpPr/>
+      <p:sp>
+        <p:nvSpPr>
+          <p:cNvPr id="2" name="Title 1"/>
+          <p:cNvSpPr>
+            <a:spLocks noGrp="1"/>
+          </p:cNvSpPr>
+          <p:nvPr>
+            <p:ph type="title"/>
+          </p:nvPr>
+        </p:nvSpPr>
+        <p:spPr/>
+        <p:txBody>
+          <a:bodyPr/>
+          <a:lstStyle/>
+          <a:p>
+            <a:pPr/>
+            <a:r>
+              <a:rPr sz="3302"/>
+              <a:t>Show Time</a:t>
+            </a:r>
+          </a:p>
+        </p:txBody>
+      </p:sp>
+      <p:sp>
+        <p:nvSpPr>
+          <p:cNvPr id="3" name="Content Placeholder 2"/>
+          <p:cNvSpPr>
+            <a:spLocks noGrp="1"/>
+          </p:cNvSpPr>
+          <p:nvPr>
+            <p:ph idx="1"/>
+          </p:nvPr>
+        </p:nvSpPr>
+        <p:spPr/>
+        <p:txBody>
+          <a:bodyPr wrap="square"/>
+          <a:lstStyle/>
+          <a:p>
+            <a:pPr/>
+            <a:r>
+              <a:rPr sz="2000"/>
+              <a:t>Everyone picks a different VEHICLE and compares how the same scripted course drives an HMMWV vs. a bus vs. a Gator</a:t>
+            </a:r>
+          </a:p>
+          <a:p>
+            <a:pPr/>
+            <a:r>
+              <a:rPr sz="2000"/>
+              <a:t>Toggle SHOW_VEHICLE_HUD / SHOW_SIM_INFO_PANEL live and watch the overlay change - nothing was re-rendered by hand</a:t>
+            </a:r>
+          </a:p>
+        </p:txBody>
+      </p:sp>
+      <p:sp>
+        <p:nvSpPr>
+          <p:cNvPr id="4" name="TextBox 3"/>
+          <p:cNvSpPr txBox="1"/>
+          <p:nvPr/>
+        </p:nvSpPr>
+        <p:spPr>
+          <a:xfrm>
+            <a:off x="310974" y="6645811"/>
+            <a:ext cx="11644805" cy="188527"/>
+          </a:xfrm>
+          <a:prstGeom prst="rect">
+            <a:avLst/>
+          </a:prstGeom>
+          <a:noFill/>
+        </p:spPr>
+        <p:txBody>
+          <a:bodyPr wrap="none">
+            <a:spAutoFit/>
+          </a:bodyPr>
+          <a:lstStyle/>
+          <a:p>
+            <a:r>
+              <a:rPr sz="1000"/>
+              <a:t>University of Wisconsin - Madison</a:t>
+            </a:r>
+          </a:p>
+        </p:txBody>
+      </p:sp>
+      <p:sp>
+        <p:nvSpPr>
+          <p:cNvPr id="5" name="TextBox 4"/>
+          <p:cNvSpPr txBox="1"/>
+          <p:nvPr/>
+        </p:nvSpPr>
+        <p:spPr>
+          <a:xfrm>
+            <a:off x="10249563" y="6646310"/>
+            <a:ext cx="1706217" cy="188028"/>
+          </a:xfrm>
+          <a:prstGeom prst="rect">
+            <a:avLst/>
+          </a:prstGeom>
+          <a:noFill/>
+        </p:spPr>
+        <p:txBody>
+          <a:bodyPr wrap="none">
+            <a:spAutoFit/>
+          </a:bodyPr>
+          <a:lstStyle/>
+          <a:p>
+            <a:r>
+              <a:rPr sz="1000"/>
+              <a:t>41</a:t>
             </a:r>
           </a:p>
         </p:txBody>

--- a/tutorial_HIL_driver.pptx
+++ b/tutorial_HIL_driver.pptx
@@ -28,6 +28,12 @@
     <p:sldId id="273" r:id="rId25"/>
     <p:sldId id="274" r:id="rId26"/>
     <p:sldId id="275" r:id="rId27"/>
+    <p:sldId id="300" r:id="rId3"/>
+    <p:sldId id="301" r:id="rId2"/>
+    <p:sldId id="302" r:id="rId54"/>
+    <p:sldId id="303" r:id="rId55"/>
+    <p:sldId id="304" r:id="rId56"/>
+    <p:sldId id="305" r:id="rId57"/>
     <p:sldId id="276" r:id="rId28"/>
     <p:sldId id="277" r:id="rId29"/>
     <p:sldId id="278" r:id="rId30"/>
@@ -37,8 +43,6 @@
     <p:sldId id="282" r:id="rId34"/>
     <p:sldId id="283" r:id="rId35"/>
     <p:sldId id="284" r:id="rId36"/>
-    <p:sldId id="285" r:id="rId37"/>
-    <p:sldId id="286" r:id="rId38"/>
     <p:sldId id="287" r:id="rId39"/>
     <p:sldId id="288" r:id="rId40"/>
     <p:sldId id="289" r:id="rId41"/>
@@ -6911,14 +6915,14 @@
             <a:pPr lvl="1"/>
             <a:r>
               <a:rPr sz="1800"/>
-              <a:t>PART 3: Feed operator input from ANY device into the model (a UDP console, a gamepad, a wheel)</a:t>
+              <a:t>PART 3: Read a gamepad or wheel natively - no extra library needed</a:t>
             </a:r>
           </a:p>
           <a:p>
             <a:pPr lvl="1"/>
             <a:r>
               <a:rPr sz="1800"/>
-              <a:t>PART 4: Close the loop - send state back to the operator</a:t>
+              <a:t>PART 4: Bring a device Chrono doesn't know about, and close the loop back to it</a:t>
             </a:r>
           </a:p>
           <a:p>
@@ -7162,7 +7166,7 @@
           <a:lstStyle/>
           <a:p>
             <a:r>
-              <a:t>Part 3: Bring your own input device</a:t>
+              <a:t>Part 3: A gamepad or wheel, read natively</a:t>
             </a:r>
           </a:p>
         </p:txBody>
@@ -7181,11 +7185,7 @@
         <p:txBody>
           <a:bodyPr/>
           <a:lstStyle/>
-          <a:p>
-            <a:r>
-              <a:t>a UDP console, a gamepad, a steering wheel, a phone, another process...</a:t>
-            </a:r>
-          </a:p>
+          <a:p/>
         </p:txBody>
       </p:sp>
       <p:sp>
@@ -7274,116 +7274,110 @@
             <p:ph type="title"/>
           </p:nvPr>
         </p:nvSpPr>
-        <p:spPr>
-          <a:xfrm>
-            <a:off x="235228" y="150000"/>
-            <a:ext cx="9875520" cy="800000"/>
-          </a:xfrm>
-        </p:spPr>
+        <p:spPr/>
+        <p:txBody>
+          <a:bodyPr/>
+          <a:lstStyle/>
+          <a:p>
+            <a:pPr/>
+            <a:r>
+              <a:rPr sz="3302"/>
+              <a:t>No pygame, no custom class - Chrono reads the joystick</a:t>
+            </a:r>
+          </a:p>
+        </p:txBody>
+      </p:sp>
+      <p:sp>
+        <p:nvSpPr>
+          <p:cNvPr id="3" name="Content Placeholder 2"/>
+          <p:cNvSpPr>
+            <a:spLocks noGrp="1"/>
+          </p:cNvSpPr>
+          <p:nvPr>
+            <p:ph idx="1"/>
+          </p:nvPr>
+        </p:nvSpPr>
+        <p:spPr/>
         <p:txBody>
           <a:bodyPr wrap="square"/>
           <a:lstStyle/>
           <a:p>
-            <a:r>
-              <a:rPr sz="2600"/>
-              <a:t>The HIL contract</a:t>
-            </a:r>
-          </a:p>
-        </p:txBody>
-      </p:sp>
-      <p:sp>
-        <p:nvSpPr>
-          <p:cNvPr id="3" name="Content Placeholder 2"/>
-          <p:cNvSpPr>
-            <a:spLocks noGrp="1"/>
-          </p:cNvSpPr>
-          <p:nvPr>
-            <p:ph idx="1"/>
-          </p:nvPr>
-        </p:nvSpPr>
-        <p:spPr/>
-        <p:txBody>
-          <a:bodyPr wrap="square"/>
-          <a:lstStyle/>
-          <a:p>
             <a:pPr/>
             <a:r>
               <a:rPr sz="2000"/>
-              <a:t>A driver is just three floats per step: steering [-1, 1], throttle [0, 1], braking [0, 1]</a:t>
+              <a:t>ChInteractiveDriver already knows how to read a joystick: </a:t>
+            </a:r>
+            <a:r>
+              <a:rPr sz="1800">
+                <a:latin typeface="Consolas"/>
+              </a:rPr>
+              <a:t>SetInputMode(JOYSTICK)</a:t>
             </a:r>
           </a:p>
           <a:p>
             <a:pPr/>
             <a:r>
+              <a:rPr sz="2000"/>
+              <a:t>A JSON config file maps device axes/buttons to steering/throttle/braking/clutch/shifting - four presets ship with Chrono in </a:t>
+            </a:r>
+            <a:r>
               <a:rPr sz="1800">
                 <a:latin typeface="Consolas"/>
               </a:rPr>
-              <a:t>veh.ChDriver</a:t>
+              <a:t>data/vehicle/joystick/</a:t>
+            </a:r>
+          </a:p>
+          <a:p>
+            <a:pPr lvl="1"/>
+            <a:r>
+              <a:rPr sz="1800">
+                <a:latin typeface="Consolas"/>
+              </a:rPr>
+              <a:t>controller_XboxOneForWindows.json</a:t>
+            </a:r>
+          </a:p>
+          <a:p>
+            <a:pPr lvl="1"/>
+            <a:r>
+              <a:rPr sz="1800">
+                <a:latin typeface="Consolas"/>
+              </a:rPr>
+              <a:t>controller_LogitechRumblePad2.json</a:t>
+            </a:r>
+          </a:p>
+          <a:p>
+            <a:pPr lvl="1"/>
+            <a:r>
+              <a:rPr sz="1800">
+                <a:latin typeface="Consolas"/>
+              </a:rPr>
+              <a:t>controller_WheelPedalsAndShifters.json</a:t>
+            </a:r>
+          </a:p>
+          <a:p>
+            <a:pPr lvl="1"/>
+            <a:r>
+              <a:rPr sz="1800">
+                <a:latin typeface="Consolas"/>
+              </a:rPr>
+              <a:t>controller_Default.json</a:t>
             </a:r>
             <a:r>
               <a:rPr sz="2000"/>
-              <a:t> is the plain container: </a:t>
-            </a:r>
+              <a:t> - or write your own</a:t>
+            </a:r>
+          </a:p>
+          <a:p>
+            <a:pPr/>
             <a:r>
               <a:rPr sz="1800">
                 <a:latin typeface="Consolas"/>
               </a:rPr>
-              <a:t>SetSteering()</a:t>
+              <a:t>SetJoystickDebug(True)</a:t>
             </a:r>
             <a:r>
               <a:rPr sz="2000"/>
-              <a:t>, </a:t>
-            </a:r>
-            <a:r>
-              <a:rPr sz="1800">
-                <a:latin typeface="Consolas"/>
-              </a:rPr>
-              <a:t>SetThrottle()</a:t>
-            </a:r>
-            <a:r>
-              <a:rPr sz="2000"/>
-              <a:t>, </a:t>
-            </a:r>
-            <a:r>
-              <a:rPr sz="1800">
-                <a:latin typeface="Consolas"/>
-              </a:rPr>
-              <a:t>SetBraking()</a:t>
-            </a:r>
-          </a:p>
-          <a:p>
-            <a:pPr/>
-            <a:r>
-              <a:rPr sz="2000"/>
-              <a:t>So the recipe for ANY device is:</a:t>
-            </a:r>
-          </a:p>
-          <a:p>
-            <a:pPr lvl="1"/>
-            <a:r>
-              <a:rPr sz="1800"/>
-              <a:t>1. poll the device (never block the physics loop)</a:t>
-            </a:r>
-          </a:p>
-          <a:p>
-            <a:pPr lvl="1"/>
-            <a:r>
-              <a:rPr sz="1800"/>
-              <a:t>2. rate-limit / smooth (a human arm is not a step function)</a:t>
-            </a:r>
-          </a:p>
-          <a:p>
-            <a:pPr lvl="1"/>
-            <a:r>
-              <a:rPr sz="1800"/>
-              <a:t>3. write into the ChDriver once per step - zero-order hold until the next step</a:t>
-            </a:r>
-          </a:p>
-          <a:p>
-            <a:pPr/>
-            <a:r>
-              <a:rPr sz="2000"/>
-              <a:t>Today: a UDP operator console everybody can run (two terminals) and, optionally, a gamepad</a:t>
+              <a:t> prints live axis/button numbers twice a second - the same job probe_gamepad.py used to do, built in</a:t>
             </a:r>
           </a:p>
         </p:txBody>
@@ -7474,19 +7468,13 @@
             <p:ph type="title"/>
           </p:nvPr>
         </p:nvSpPr>
-        <p:spPr>
-          <a:xfrm>
-            <a:off x="235228" y="150000"/>
-            <a:ext cx="9875520" cy="800000"/>
-          </a:xfrm>
-        </p:spPr>
-        <p:txBody>
-          <a:bodyPr wrap="square"/>
-          <a:lstStyle/>
-          <a:p>
-            <a:r>
-              <a:rPr sz="2600"/>
-              <a:t>Step 1: Smooth - never teleport raw inputs into the model (Lines 84 to 118)</a:t>
+        <p:spPr/>
+        <p:txBody>
+          <a:bodyPr/>
+          <a:lstStyle/>
+          <a:p>
+            <a:r>
+              <a:t>The gamepad/wheel driver (Lines 309 to 316)</a:t>
             </a:r>
           </a:p>
         </p:txBody>
@@ -7522,7 +7510,7 @@
                 </a:solidFill>
                 <a:latin typeface="Consolas"/>
               </a:rPr>
-              <a:t>class SmoothedInputs:</a:t>
+              <a:t>elif INPUT_SOURCE == "gamepad":</a:t>
             </a:r>
           </a:p>
           <a:p>
@@ -7533,7 +7521,7 @@
                 </a:solidFill>
                 <a:latin typeface="Consolas"/>
               </a:rPr>
-              <a:t>    """First-order lag from a *target* input to the *applied* input.</a:t>
+              <a:t>    ### PART 3: a gamepad or wheel - same driver class as keyboard ###</a:t>
             </a:r>
           </a:p>
           <a:p>
@@ -7544,7 +7532,7 @@
                 </a:solidFill>
                 <a:latin typeface="Consolas"/>
               </a:rPr>
-              <a:t> </a:t>
+              <a:t>    # SetInputMode(JOYSTICK) switches ChInteractiveDriver from reading the</a:t>
             </a:r>
           </a:p>
           <a:p>
@@ -7555,7 +7543,7 @@
                 </a:solidFill>
                 <a:latin typeface="Consolas"/>
               </a:rPr>
-              <a:t>    Raw device values should not be teleported into the model: a keypress is a</a:t>
+              <a:t>    # Irrlicht window's keyboard to reading the joystick vis configures</a:t>
             </a:r>
           </a:p>
           <a:p>
@@ -7566,7 +7554,7 @@
                 </a:solidFill>
                 <a:latin typeface="Consolas"/>
               </a:rPr>
-              <a:t>    step function, and a step in steering excites the suspension and tires in a</a:t>
+              <a:t>    # below.  Smoothing (SetGains) applies the same way either mode.</a:t>
             </a:r>
           </a:p>
           <a:p>
@@ -7577,7 +7565,7 @@
                 </a:solidFill>
                 <a:latin typeface="Consolas"/>
               </a:rPr>
-              <a:t>    way no human arm ever would.  This mirrors the internal dynamics of</a:t>
+              <a:t>    driver = veh.ChInteractiveDriver(vehicle)</a:t>
             </a:r>
           </a:p>
           <a:p>
@@ -7588,7 +7576,7 @@
                 </a:solidFill>
                 <a:latin typeface="Consolas"/>
               </a:rPr>
-              <a:t>    ChInteractiveDriver (see SetGains) so the behavior is the same whether the</a:t>
+              <a:t>    driver.SetGains(4.0, 4.0, 4.0)</a:t>
             </a:r>
           </a:p>
           <a:p>
@@ -7599,304 +7587,7 @@
                 </a:solidFill>
                 <a:latin typeface="Consolas"/>
               </a:rPr>
-              <a:t>    inputs come from the Irrlicht keyboard handler or from our own device.</a:t>
-            </a:r>
-          </a:p>
-          <a:p>
-            <a:r>
-              <a:rPr sz="1000">
-                <a:solidFill>
-                  <a:srgbClr val="CCCCCC"/>
-                </a:solidFill>
-                <a:latin typeface="Consolas"/>
-              </a:rPr>
-              <a:t>    """</a:t>
-            </a:r>
-          </a:p>
-          <a:p>
-            <a:r>
-              <a:rPr sz="1000">
-                <a:solidFill>
-                  <a:srgbClr val="CCCCCC"/>
-                </a:solidFill>
-                <a:latin typeface="Consolas"/>
-              </a:rPr>
-              <a:t> </a:t>
-            </a:r>
-          </a:p>
-          <a:p>
-            <a:r>
-              <a:rPr sz="1000">
-                <a:solidFill>
-                  <a:srgbClr val="CCCCCC"/>
-                </a:solidFill>
-                <a:latin typeface="Consolas"/>
-              </a:rPr>
-              <a:t>    def __init__(self, gain=4.0):</a:t>
-            </a:r>
-          </a:p>
-          <a:p>
-            <a:r>
-              <a:rPr sz="1000">
-                <a:solidFill>
-                  <a:srgbClr val="CCCCCC"/>
-                </a:solidFill>
-                <a:latin typeface="Consolas"/>
-              </a:rPr>
-              <a:t>        self.gain = gain</a:t>
-            </a:r>
-          </a:p>
-          <a:p>
-            <a:r>
-              <a:rPr sz="1000">
-                <a:solidFill>
-                  <a:srgbClr val="CCCCCC"/>
-                </a:solidFill>
-                <a:latin typeface="Consolas"/>
-              </a:rPr>
-              <a:t>        self.steering = 0.0</a:t>
-            </a:r>
-          </a:p>
-          <a:p>
-            <a:r>
-              <a:rPr sz="1000">
-                <a:solidFill>
-                  <a:srgbClr val="CCCCCC"/>
-                </a:solidFill>
-                <a:latin typeface="Consolas"/>
-              </a:rPr>
-              <a:t>        self.throttle = 0.0</a:t>
-            </a:r>
-          </a:p>
-          <a:p>
-            <a:r>
-              <a:rPr sz="1000">
-                <a:solidFill>
-                  <a:srgbClr val="CCCCCC"/>
-                </a:solidFill>
-                <a:latin typeface="Consolas"/>
-              </a:rPr>
-              <a:t>        self.braking = 0.0</a:t>
-            </a:r>
-          </a:p>
-          <a:p>
-            <a:r>
-              <a:rPr sz="1000">
-                <a:solidFill>
-                  <a:srgbClr val="CCCCCC"/>
-                </a:solidFill>
-                <a:latin typeface="Consolas"/>
-              </a:rPr>
-              <a:t>        self.target = (0.0, 0.0, 0.0)</a:t>
-            </a:r>
-          </a:p>
-          <a:p>
-            <a:r>
-              <a:rPr sz="1000">
-                <a:solidFill>
-                  <a:srgbClr val="CCCCCC"/>
-                </a:solidFill>
-                <a:latin typeface="Consolas"/>
-              </a:rPr>
-              <a:t> </a:t>
-            </a:r>
-          </a:p>
-          <a:p>
-            <a:r>
-              <a:rPr sz="1000">
-                <a:solidFill>
-                  <a:srgbClr val="CCCCCC"/>
-                </a:solidFill>
-                <a:latin typeface="Consolas"/>
-              </a:rPr>
-              <a:t>    def set_target(self, steering, throttle, braking):</a:t>
-            </a:r>
-          </a:p>
-          <a:p>
-            <a:r>
-              <a:rPr sz="1000">
-                <a:solidFill>
-                  <a:srgbClr val="CCCCCC"/>
-                </a:solidFill>
-                <a:latin typeface="Consolas"/>
-              </a:rPr>
-              <a:t>        self.target = (</a:t>
-            </a:r>
-          </a:p>
-          <a:p>
-            <a:r>
-              <a:rPr sz="1000">
-                <a:solidFill>
-                  <a:srgbClr val="CCCCCC"/>
-                </a:solidFill>
-                <a:latin typeface="Consolas"/>
-              </a:rPr>
-              <a:t>            max(-1.0, min(1.0, steering)),</a:t>
-            </a:r>
-          </a:p>
-          <a:p>
-            <a:r>
-              <a:rPr sz="1000">
-                <a:solidFill>
-                  <a:srgbClr val="CCCCCC"/>
-                </a:solidFill>
-                <a:latin typeface="Consolas"/>
-              </a:rPr>
-              <a:t>            max(0.0, min(1.0, throttle)),</a:t>
-            </a:r>
-          </a:p>
-          <a:p>
-            <a:r>
-              <a:rPr sz="1000">
-                <a:solidFill>
-                  <a:srgbClr val="CCCCCC"/>
-                </a:solidFill>
-                <a:latin typeface="Consolas"/>
-              </a:rPr>
-              <a:t>            max(0.0, min(1.0, braking)),</a:t>
-            </a:r>
-          </a:p>
-          <a:p>
-            <a:r>
-              <a:rPr sz="1000">
-                <a:solidFill>
-                  <a:srgbClr val="CCCCCC"/>
-                </a:solidFill>
-                <a:latin typeface="Consolas"/>
-              </a:rPr>
-              <a:t>        )</a:t>
-            </a:r>
-          </a:p>
-          <a:p>
-            <a:r>
-              <a:rPr sz="1000">
-                <a:solidFill>
-                  <a:srgbClr val="CCCCCC"/>
-                </a:solidFill>
-                <a:latin typeface="Consolas"/>
-              </a:rPr>
-              <a:t> </a:t>
-            </a:r>
-          </a:p>
-          <a:p>
-            <a:r>
-              <a:rPr sz="1000">
-                <a:solidFill>
-                  <a:srgbClr val="CCCCCC"/>
-                </a:solidFill>
-                <a:latin typeface="Consolas"/>
-              </a:rPr>
-              <a:t>    def advance(self, step):</a:t>
-            </a:r>
-          </a:p>
-          <a:p>
-            <a:r>
-              <a:rPr sz="1000">
-                <a:solidFill>
-                  <a:srgbClr val="CCCCCC"/>
-                </a:solidFill>
-                <a:latin typeface="Consolas"/>
-              </a:rPr>
-              <a:t>        s, t, b = self.target</a:t>
-            </a:r>
-          </a:p>
-          <a:p>
-            <a:r>
-              <a:rPr sz="1000">
-                <a:solidFill>
-                  <a:srgbClr val="CCCCCC"/>
-                </a:solidFill>
-                <a:latin typeface="Consolas"/>
-              </a:rPr>
-              <a:t>        self.steering += min(1.0, self.gain * step) * (s - self.steering)</a:t>
-            </a:r>
-          </a:p>
-          <a:p>
-            <a:r>
-              <a:rPr sz="1000">
-                <a:solidFill>
-                  <a:srgbClr val="CCCCCC"/>
-                </a:solidFill>
-                <a:latin typeface="Consolas"/>
-              </a:rPr>
-              <a:t>        self.throttle += min(1.0, self.gain * step) * (t - self.throttle)</a:t>
-            </a:r>
-          </a:p>
-          <a:p>
-            <a:r>
-              <a:rPr sz="1000">
-                <a:solidFill>
-                  <a:srgbClr val="CCCCCC"/>
-                </a:solidFill>
-                <a:latin typeface="Consolas"/>
-              </a:rPr>
-              <a:t>        self.braking += min(1.0, self.gain * step) * (b - self.braking)</a:t>
-            </a:r>
-          </a:p>
-          <a:p>
-            <a:r>
-              <a:rPr sz="1000">
-                <a:solidFill>
-                  <a:srgbClr val="CCCCCC"/>
-                </a:solidFill>
-                <a:latin typeface="Consolas"/>
-              </a:rPr>
-              <a:t> </a:t>
-            </a:r>
-          </a:p>
-          <a:p>
-            <a:r>
-              <a:rPr sz="1000">
-                <a:solidFill>
-                  <a:srgbClr val="CCCCCC"/>
-                </a:solidFill>
-                <a:latin typeface="Consolas"/>
-              </a:rPr>
-              <a:t>    def apply_to(self, driver):</a:t>
-            </a:r>
-          </a:p>
-          <a:p>
-            <a:r>
-              <a:rPr sz="1000">
-                <a:solidFill>
-                  <a:srgbClr val="CCCCCC"/>
-                </a:solidFill>
-                <a:latin typeface="Consolas"/>
-              </a:rPr>
-              <a:t>        driver.SetSteering(self.steering)</a:t>
-            </a:r>
-          </a:p>
-          <a:p>
-            <a:r>
-              <a:rPr sz="1000">
-                <a:solidFill>
-                  <a:srgbClr val="CCCCCC"/>
-                </a:solidFill>
-                <a:latin typeface="Consolas"/>
-              </a:rPr>
-              <a:t>        driver.SetThrottle(self.throttle)</a:t>
-            </a:r>
-          </a:p>
-          <a:p>
-            <a:r>
-              <a:rPr sz="1000">
-                <a:solidFill>
-                  <a:srgbClr val="CCCCCC"/>
-                </a:solidFill>
-                <a:latin typeface="Consolas"/>
-              </a:rPr>
-              <a:t>        driver.SetBraking(self.braking)</a:t>
-            </a:r>
-          </a:p>
-          <a:p>
-            <a:r>
-              <a:rPr sz="1000">
-                <a:solidFill>
-                  <a:srgbClr val="CCCCCC"/>
-                </a:solidFill>
-                <a:latin typeface="Consolas"/>
-              </a:rPr>
-              <a:t> </a:t>
+              <a:t>    driver.SetInputMode(driver.InputMode_JOYSTICK)</a:t>
             </a:r>
           </a:p>
         </p:txBody>
@@ -7918,15 +7609,12 @@
           <a:noFill/>
         </p:spPr>
         <p:txBody>
-          <a:bodyPr wrap="square">
-            <a:spAutoFit/>
-          </a:bodyPr>
-          <a:lstStyle/>
-          <a:p>
-            <a:pPr/>
+          <a:bodyPr/>
+          <a:lstStyle/>
+          <a:p>
             <a:r>
               <a:rPr sz="1800"/>
-              <a:t>Same first-order lag as ChInteractiveDriver::SetGains, in Python, so all devices behave alike</a:t>
+              <a:t>Same ChInteractiveDriver class as keyboard - just a different input mode</a:t>
             </a:r>
           </a:p>
         </p:txBody>
@@ -8017,19 +7705,13 @@
             <p:ph type="title"/>
           </p:nvPr>
         </p:nvSpPr>
-        <p:spPr>
-          <a:xfrm>
-            <a:off x="235228" y="150000"/>
-            <a:ext cx="9875520" cy="800000"/>
-          </a:xfrm>
-        </p:spPr>
-        <p:txBody>
-          <a:bodyPr wrap="square"/>
-          <a:lstStyle/>
-          <a:p>
-            <a:r>
-              <a:rPr sz="2600"/>
-              <a:t>Step 2: A UDP input source (Lines 120 to 153)</a:t>
+        <p:spPr/>
+        <p:txBody>
+          <a:bodyPr/>
+          <a:lstStyle/>
+          <a:p>
+            <a:r>
+              <a:t>Wire up the joystick (Lines 341 to 345)</a:t>
             </a:r>
           </a:p>
         </p:txBody>
@@ -8043,7 +7725,7 @@
         <p:spPr>
           <a:xfrm>
             <a:off x="0" y="1050000"/>
-            <a:ext cx="12192000" cy="5384800"/>
+            <a:ext cx="12192000" cy="5537200"/>
           </a:xfrm>
           <a:prstGeom prst="rect">
             <a:avLst/>
@@ -8065,7 +7747,7 @@
                 </a:solidFill>
                 <a:latin typeface="Consolas"/>
               </a:rPr>
-              <a:t>class UdpInput:</a:t>
+              <a:t>if INPUT_SOURCE in ("keyboard", "gamepad"):</a:t>
             </a:r>
           </a:p>
           <a:p>
@@ -8076,7 +7758,7 @@
                 </a:solidFill>
                 <a:latin typeface="Consolas"/>
               </a:rPr>
-              <a:t>    """Receive 'steering,throttle,braking' text datagrams from an operator.</a:t>
+              <a:t>    vis.AttachDriver(driver)  # route Irrlicht key/joystick events to the driver</a:t>
             </a:r>
           </a:p>
           <a:p>
@@ -8087,7 +7769,7 @@
                 </a:solidFill>
                 <a:latin typeface="Consolas"/>
               </a:rPr>
-              <a:t> </a:t>
+              <a:t>if INPUT_SOURCE == "gamepad":</a:t>
             </a:r>
           </a:p>
           <a:p>
@@ -8098,7 +7780,7 @@
                 </a:solidFill>
                 <a:latin typeface="Consolas"/>
               </a:rPr>
-              <a:t>    Run operator_console.py in another terminal (or on another machine) and</a:t>
+              <a:t>    vis.SetJoystickConfigFile(JOYSTICK_CONFIG)</a:t>
             </a:r>
           </a:p>
           <a:p>
@@ -8109,326 +7791,7 @@
                 </a:solidFill>
                 <a:latin typeface="Consolas"/>
               </a:rPr>
-              <a:t>    drive with the arrow keys there.  The socket is non-blocking: the physics</a:t>
-            </a:r>
-          </a:p>
-          <a:p>
-            <a:r>
-              <a:rPr sz="1000">
-                <a:solidFill>
-                  <a:srgbClr val="CCCCCC"/>
-                </a:solidFill>
-                <a:latin typeface="Consolas"/>
-              </a:rPr>
-              <a:t>    loop never waits for the operator.  If no packet arrived since the last</a:t>
-            </a:r>
-          </a:p>
-          <a:p>
-            <a:r>
-              <a:rPr sz="1000">
-                <a:solidFill>
-                  <a:srgbClr val="CCCCCC"/>
-                </a:solidFill>
-                <a:latin typeface="Consolas"/>
-              </a:rPr>
-              <a:t>    step, the previous target is held (zero-order hold).</a:t>
-            </a:r>
-          </a:p>
-          <a:p>
-            <a:r>
-              <a:rPr sz="1000">
-                <a:solidFill>
-                  <a:srgbClr val="CCCCCC"/>
-                </a:solidFill>
-                <a:latin typeface="Consolas"/>
-              </a:rPr>
-              <a:t>    """</a:t>
-            </a:r>
-          </a:p>
-          <a:p>
-            <a:r>
-              <a:rPr sz="1000">
-                <a:solidFill>
-                  <a:srgbClr val="CCCCCC"/>
-                </a:solidFill>
-                <a:latin typeface="Consolas"/>
-              </a:rPr>
-              <a:t> </a:t>
-            </a:r>
-          </a:p>
-          <a:p>
-            <a:r>
-              <a:rPr sz="1000">
-                <a:solidFill>
-                  <a:srgbClr val="CCCCCC"/>
-                </a:solidFill>
-                <a:latin typeface="Consolas"/>
-              </a:rPr>
-              <a:t>    def __init__(self, port=9870):</a:t>
-            </a:r>
-          </a:p>
-          <a:p>
-            <a:r>
-              <a:rPr sz="1000">
-                <a:solidFill>
-                  <a:srgbClr val="CCCCCC"/>
-                </a:solidFill>
-                <a:latin typeface="Consolas"/>
-              </a:rPr>
-              <a:t>        self.sock = socket.socket(socket.AF_INET, socket.SOCK_DGRAM)</a:t>
-            </a:r>
-          </a:p>
-          <a:p>
-            <a:r>
-              <a:rPr sz="1000">
-                <a:solidFill>
-                  <a:srgbClr val="CCCCCC"/>
-                </a:solidFill>
-                <a:latin typeface="Consolas"/>
-              </a:rPr>
-              <a:t>        self.sock.bind(("0.0.0.0", port))</a:t>
-            </a:r>
-          </a:p>
-          <a:p>
-            <a:r>
-              <a:rPr sz="1000">
-                <a:solidFill>
-                  <a:srgbClr val="CCCCCC"/>
-                </a:solidFill>
-                <a:latin typeface="Consolas"/>
-              </a:rPr>
-              <a:t>        self.sock.setblocking(False)</a:t>
-            </a:r>
-          </a:p>
-          <a:p>
-            <a:r>
-              <a:rPr sz="1000">
-                <a:solidFill>
-                  <a:srgbClr val="CCCCCC"/>
-                </a:solidFill>
-                <a:latin typeface="Consolas"/>
-              </a:rPr>
-              <a:t>        self.operator_addr = None</a:t>
-            </a:r>
-          </a:p>
-          <a:p>
-            <a:r>
-              <a:rPr sz="1000">
-                <a:solidFill>
-                  <a:srgbClr val="CCCCCC"/>
-                </a:solidFill>
-                <a:latin typeface="Consolas"/>
-              </a:rPr>
-              <a:t>        self.last = (0.0, 0.0, 0.0)</a:t>
-            </a:r>
-          </a:p>
-          <a:p>
-            <a:r>
-              <a:rPr sz="1000">
-                <a:solidFill>
-                  <a:srgbClr val="CCCCCC"/>
-                </a:solidFill>
-                <a:latin typeface="Consolas"/>
-              </a:rPr>
-              <a:t>        self.packets = 0</a:t>
-            </a:r>
-          </a:p>
-          <a:p>
-            <a:r>
-              <a:rPr sz="1000">
-                <a:solidFill>
-                  <a:srgbClr val="CCCCCC"/>
-                </a:solidFill>
-                <a:latin typeface="Consolas"/>
-              </a:rPr>
-              <a:t>        print(f"[udp] listening on port {port} - start operator_console.py")</a:t>
-            </a:r>
-          </a:p>
-          <a:p>
-            <a:r>
-              <a:rPr sz="1000">
-                <a:solidFill>
-                  <a:srgbClr val="CCCCCC"/>
-                </a:solidFill>
-                <a:latin typeface="Consolas"/>
-              </a:rPr>
-              <a:t> </a:t>
-            </a:r>
-          </a:p>
-          <a:p>
-            <a:r>
-              <a:rPr sz="1000">
-                <a:solidFill>
-                  <a:srgbClr val="CCCCCC"/>
-                </a:solidFill>
-                <a:latin typeface="Consolas"/>
-              </a:rPr>
-              <a:t>    def poll(self):</a:t>
-            </a:r>
-          </a:p>
-          <a:p>
-            <a:r>
-              <a:rPr sz="1000">
-                <a:solidFill>
-                  <a:srgbClr val="CCCCCC"/>
-                </a:solidFill>
-                <a:latin typeface="Consolas"/>
-              </a:rPr>
-              <a:t>        # Drain everything that is queued and keep only the newest packet</a:t>
-            </a:r>
-          </a:p>
-          <a:p>
-            <a:r>
-              <a:rPr sz="1000">
-                <a:solidFill>
-                  <a:srgbClr val="CCCCCC"/>
-                </a:solidFill>
-                <a:latin typeface="Consolas"/>
-              </a:rPr>
-              <a:t>        while True:</a:t>
-            </a:r>
-          </a:p>
-          <a:p>
-            <a:r>
-              <a:rPr sz="1000">
-                <a:solidFill>
-                  <a:srgbClr val="CCCCCC"/>
-                </a:solidFill>
-                <a:latin typeface="Consolas"/>
-              </a:rPr>
-              <a:t>            try:</a:t>
-            </a:r>
-          </a:p>
-          <a:p>
-            <a:r>
-              <a:rPr sz="1000">
-                <a:solidFill>
-                  <a:srgbClr val="CCCCCC"/>
-                </a:solidFill>
-                <a:latin typeface="Consolas"/>
-              </a:rPr>
-              <a:t>                data, addr = self.sock.recvfrom(256)</a:t>
-            </a:r>
-          </a:p>
-          <a:p>
-            <a:r>
-              <a:rPr sz="1000">
-                <a:solidFill>
-                  <a:srgbClr val="CCCCCC"/>
-                </a:solidFill>
-                <a:latin typeface="Consolas"/>
-              </a:rPr>
-              <a:t>            except BlockingIOError:</a:t>
-            </a:r>
-          </a:p>
-          <a:p>
-            <a:r>
-              <a:rPr sz="1000">
-                <a:solidFill>
-                  <a:srgbClr val="CCCCCC"/>
-                </a:solidFill>
-                <a:latin typeface="Consolas"/>
-              </a:rPr>
-              <a:t>                break</a:t>
-            </a:r>
-          </a:p>
-          <a:p>
-            <a:r>
-              <a:rPr sz="1000">
-                <a:solidFill>
-                  <a:srgbClr val="CCCCCC"/>
-                </a:solidFill>
-                <a:latin typeface="Consolas"/>
-              </a:rPr>
-              <a:t>            try:</a:t>
-            </a:r>
-          </a:p>
-          <a:p>
-            <a:r>
-              <a:rPr sz="1000">
-                <a:solidFill>
-                  <a:srgbClr val="CCCCCC"/>
-                </a:solidFill>
-                <a:latin typeface="Consolas"/>
-              </a:rPr>
-              <a:t>                s, t, b = (float(x) for x in data.decode().split(","))</a:t>
-            </a:r>
-          </a:p>
-          <a:p>
-            <a:r>
-              <a:rPr sz="1000">
-                <a:solidFill>
-                  <a:srgbClr val="CCCCCC"/>
-                </a:solidFill>
-                <a:latin typeface="Consolas"/>
-              </a:rPr>
-              <a:t>                self.last = (s, t, b)</a:t>
-            </a:r>
-          </a:p>
-          <a:p>
-            <a:r>
-              <a:rPr sz="1000">
-                <a:solidFill>
-                  <a:srgbClr val="CCCCCC"/>
-                </a:solidFill>
-                <a:latin typeface="Consolas"/>
-              </a:rPr>
-              <a:t>                self.operator_addr = addr</a:t>
-            </a:r>
-          </a:p>
-          <a:p>
-            <a:r>
-              <a:rPr sz="1000">
-                <a:solidFill>
-                  <a:srgbClr val="CCCCCC"/>
-                </a:solidFill>
-                <a:latin typeface="Consolas"/>
-              </a:rPr>
-              <a:t>                self.packets += 1</a:t>
-            </a:r>
-          </a:p>
-          <a:p>
-            <a:r>
-              <a:rPr sz="1000">
-                <a:solidFill>
-                  <a:srgbClr val="CCCCCC"/>
-                </a:solidFill>
-                <a:latin typeface="Consolas"/>
-              </a:rPr>
-              <a:t>            except ValueError:</a:t>
-            </a:r>
-          </a:p>
-          <a:p>
-            <a:r>
-              <a:rPr sz="1000">
-                <a:solidFill>
-                  <a:srgbClr val="CCCCCC"/>
-                </a:solidFill>
-                <a:latin typeface="Consolas"/>
-              </a:rPr>
-              <a:t>                pass</a:t>
-            </a:r>
-          </a:p>
-          <a:p>
-            <a:r>
-              <a:rPr sz="1000">
-                <a:solidFill>
-                  <a:srgbClr val="CCCCCC"/>
-                </a:solidFill>
-                <a:latin typeface="Consolas"/>
-              </a:rPr>
-              <a:t>        return self.last</a:t>
-            </a:r>
-          </a:p>
-          <a:p>
-            <a:r>
-              <a:rPr sz="1000">
-                <a:solidFill>
-                  <a:srgbClr val="CCCCCC"/>
-                </a:solidFill>
-                <a:latin typeface="Consolas"/>
-              </a:rPr>
-              <a:t> </a:t>
+              <a:t>    vis.SetJoystickDebug(JOYSTICK_DEBUG)  # prints live axis/button numbers</a:t>
             </a:r>
           </a:p>
         </p:txBody>
@@ -8441,8 +7804,8 @@
         </p:nvSpPr>
         <p:spPr>
           <a:xfrm>
-            <a:off x="400000" y="6534800"/>
-            <a:ext cx="11392000" cy="-76800"/>
+            <a:off x="400000" y="6687200"/>
+            <a:ext cx="11392000" cy="-229200"/>
           </a:xfrm>
           <a:prstGeom prst="rect">
             <a:avLst/>
@@ -8450,22 +7813,12 @@
           <a:noFill/>
         </p:spPr>
         <p:txBody>
-          <a:bodyPr wrap="square">
-            <a:spAutoFit/>
-          </a:bodyPr>
-          <a:lstStyle/>
-          <a:p>
-            <a:pPr/>
+          <a:bodyPr/>
+          <a:lstStyle/>
+          <a:p>
             <a:r>
               <a:rPr sz="1800"/>
-              <a:t>Non-blocking socket, drained every step; the newest packet wins, an empty queue holds the last value</a:t>
-            </a:r>
-          </a:p>
-          <a:p>
-            <a:pPr/>
-            <a:r>
-              <a:rPr sz="1800"/>
-              <a:t>The operator can be anywhere on the network - and the console has no Chrono dependency at all</a:t>
+              <a:t>JOYSTICK_CONFIG and JOYSTICK_DEBUG live in CONFIGURATION, next to VEHICLE</a:t>
             </a:r>
           </a:p>
         </p:txBody>
@@ -8556,18 +7909,62 @@
             <p:ph type="title"/>
           </p:nvPr>
         </p:nvSpPr>
-        <p:spPr>
-          <a:xfrm>
-            <a:off x="235228" y="150000"/>
-            <a:ext cx="9875520" cy="800000"/>
-          </a:xfrm>
-        </p:spPr>
+        <p:spPr/>
+        <p:txBody>
+          <a:bodyPr/>
+          <a:lstStyle/>
+          <a:p>
+            <a:pPr/>
+            <a:r>
+              <a:rPr sz="3302"/>
+              <a:t>Before running the code, please</a:t>
+            </a:r>
+          </a:p>
+        </p:txBody>
+      </p:sp>
+      <p:sp>
+        <p:nvSpPr>
+          <p:cNvPr id="3" name="Content Placeholder 2"/>
+          <p:cNvSpPr>
+            <a:spLocks noGrp="1"/>
+          </p:cNvSpPr>
+          <p:nvPr>
+            <p:ph idx="1"/>
+          </p:nvPr>
+        </p:nvSpPr>
+        <p:spPr/>
         <p:txBody>
           <a:bodyPr wrap="square"/>
           <a:lstStyle/>
           <a:p>
-            <a:r>
-              <a:t>Step 3: The operator side - operator_console.py</a:t>
+            <a:pPr/>
+            <a:r>
+              <a:rPr sz="2000"/>
+              <a:t>Set INPUT_SOURCE = "gamepad" (Line 440), keep REALTIME = "vehicle"</a:t>
+            </a:r>
+          </a:p>
+          <a:p>
+            <a:pPr/>
+            <a:r>
+              <a:rPr sz="2000"/>
+              <a:t>Plug in a gamepad or wheel; set JOYSTICK_CONFIG to the preset that matches it</a:t>
+            </a:r>
+          </a:p>
+          <a:p>
+            <a:pPr/>
+            <a:r>
+              <a:rPr sz="2000"/>
+              <a:t>No matching preset? Set </a:t>
+            </a:r>
+            <a:r>
+              <a:rPr sz="1800">
+                <a:latin typeface="Consolas"/>
+              </a:rPr>
+              <a:t>JOYSTICK_DEBUG = True</a:t>
+            </a:r>
+            <a:r>
+              <a:rPr sz="2000"/>
+              <a:t> first and move one control at a time to read off the axis/button numbers</a:t>
             </a:r>
           </a:p>
         </p:txBody>
@@ -8626,320 +8023,6 @@
             <a:r>
               <a:rPr sz="1000"/>
               <a:t>25</a:t>
-            </a:r>
-          </a:p>
-        </p:txBody>
-      </p:sp>
-      <p:sp>
-        <p:nvSpPr>
-          <p:cNvPr id="6" name="TextBox 5"/>
-          <p:cNvSpPr txBox="1"/>
-          <p:nvPr/>
-        </p:nvSpPr>
-        <p:spPr>
-          <a:xfrm>
-            <a:off x="0" y="1000000"/>
-            <a:ext cx="12192000" cy="4226538"/>
-          </a:xfrm>
-          <a:prstGeom prst="rect">
-            <a:avLst/>
-          </a:prstGeom>
-          <a:solidFill>
-            <a:srgbClr val="000000"/>
-          </a:solidFill>
-        </p:spPr>
-        <p:txBody>
-          <a:bodyPr wrap="none" lIns="300000" rIns="300000">
-            <a:noAutofit/>
-          </a:bodyPr>
-          <a:lstStyle/>
-          <a:p>
-            <a:r>
-              <a:rPr sz="1200">
-                <a:solidFill>
-                  <a:srgbClr val="CCCCCC"/>
-                </a:solidFill>
-                <a:latin typeface="Consolas"/>
-              </a:rPr>
-              <a:t># --- keyboard -&gt; target inputs ------------------------------------------</a:t>
-            </a:r>
-          </a:p>
-          <a:p>
-            <a:r>
-              <a:rPr sz="1200">
-                <a:solidFill>
-                  <a:srgbClr val="CCCCCC"/>
-                </a:solidFill>
-                <a:latin typeface="Consolas"/>
-              </a:rPr>
-              <a:t>keys = pygame.key.get_pressed()</a:t>
-            </a:r>
-          </a:p>
-          <a:p>
-            <a:r>
-              <a:rPr sz="1200">
-                <a:solidFill>
-                  <a:srgbClr val="CCCCCC"/>
-                </a:solidFill>
-                <a:latin typeface="Consolas"/>
-              </a:rPr>
-              <a:t>if keys[pygame.K_LEFT]:</a:t>
-            </a:r>
-          </a:p>
-          <a:p>
-            <a:r>
-              <a:rPr sz="1200">
-                <a:solidFill>
-                  <a:srgbClr val="CCCCCC"/>
-                </a:solidFill>
-                <a:latin typeface="Consolas"/>
-              </a:rPr>
-              <a:t>    steering = min(1.0, steering + STEER_RATE * dt)     # +1 = left in Chrono</a:t>
-            </a:r>
-          </a:p>
-          <a:p>
-            <a:r>
-              <a:rPr sz="1200">
-                <a:solidFill>
-                  <a:srgbClr val="CCCCCC"/>
-                </a:solidFill>
-                <a:latin typeface="Consolas"/>
-              </a:rPr>
-              <a:t>elif keys[pygame.K_RIGHT]:</a:t>
-            </a:r>
-          </a:p>
-          <a:p>
-            <a:r>
-              <a:rPr sz="1200">
-                <a:solidFill>
-                  <a:srgbClr val="CCCCCC"/>
-                </a:solidFill>
-                <a:latin typeface="Consolas"/>
-              </a:rPr>
-              <a:t>    steering = max(-1.0, steering - STEER_RATE * dt)</a:t>
-            </a:r>
-          </a:p>
-          <a:p>
-            <a:r>
-              <a:rPr sz="1200">
-                <a:solidFill>
-                  <a:srgbClr val="CCCCCC"/>
-                </a:solidFill>
-                <a:latin typeface="Consolas"/>
-              </a:rPr>
-              <a:t>else:  # self-center</a:t>
-            </a:r>
-          </a:p>
-          <a:p>
-            <a:r>
-              <a:rPr sz="1200">
-                <a:solidFill>
-                  <a:srgbClr val="CCCCCC"/>
-                </a:solidFill>
-                <a:latin typeface="Consolas"/>
-              </a:rPr>
-              <a:t>    steering -= max(-STEER_RETURN * dt, min(STEER_RETURN * dt, steering))</a:t>
-            </a:r>
-          </a:p>
-          <a:p>
-            <a:r>
-              <a:rPr sz="1200">
-                <a:solidFill>
-                  <a:srgbClr val="CCCCCC"/>
-                </a:solidFill>
-                <a:latin typeface="Consolas"/>
-              </a:rPr>
-              <a:t>if keys[pygame.K_UP]:</a:t>
-            </a:r>
-          </a:p>
-          <a:p>
-            <a:r>
-              <a:rPr sz="1200">
-                <a:solidFill>
-                  <a:srgbClr val="CCCCCC"/>
-                </a:solidFill>
-                <a:latin typeface="Consolas"/>
-              </a:rPr>
-              <a:t>    throttle = min(1.0, throttle + PEDAL_RATE * dt)</a:t>
-            </a:r>
-          </a:p>
-          <a:p>
-            <a:r>
-              <a:rPr sz="1200">
-                <a:solidFill>
-                  <a:srgbClr val="CCCCCC"/>
-                </a:solidFill>
-                <a:latin typeface="Consolas"/>
-              </a:rPr>
-              <a:t>    braking = 0.0</a:t>
-            </a:r>
-          </a:p>
-          <a:p>
-            <a:r>
-              <a:rPr sz="1200">
-                <a:solidFill>
-                  <a:srgbClr val="CCCCCC"/>
-                </a:solidFill>
-                <a:latin typeface="Consolas"/>
-              </a:rPr>
-              <a:t>elif keys[pygame.K_DOWN]:</a:t>
-            </a:r>
-          </a:p>
-          <a:p>
-            <a:r>
-              <a:rPr sz="1200">
-                <a:solidFill>
-                  <a:srgbClr val="CCCCCC"/>
-                </a:solidFill>
-                <a:latin typeface="Consolas"/>
-              </a:rPr>
-              <a:t>    braking = min(1.0, braking + PEDAL_RATE * dt)</a:t>
-            </a:r>
-          </a:p>
-          <a:p>
-            <a:r>
-              <a:rPr sz="1200">
-                <a:solidFill>
-                  <a:srgbClr val="CCCCCC"/>
-                </a:solidFill>
-                <a:latin typeface="Consolas"/>
-              </a:rPr>
-              <a:t>    throttle = 0.0</a:t>
-            </a:r>
-          </a:p>
-          <a:p>
-            <a:r>
-              <a:rPr sz="1200">
-                <a:solidFill>
-                  <a:srgbClr val="CCCCCC"/>
-                </a:solidFill>
-                <a:latin typeface="Consolas"/>
-              </a:rPr>
-              <a:t>else:</a:t>
-            </a:r>
-          </a:p>
-          <a:p>
-            <a:r>
-              <a:rPr sz="1200">
-                <a:solidFill>
-                  <a:srgbClr val="CCCCCC"/>
-                </a:solidFill>
-                <a:latin typeface="Consolas"/>
-              </a:rPr>
-              <a:t>    throttle = max(0.0, throttle - PEDAL_RATE * dt)</a:t>
-            </a:r>
-          </a:p>
-          <a:p>
-            <a:r>
-              <a:rPr sz="1200">
-                <a:solidFill>
-                  <a:srgbClr val="CCCCCC"/>
-                </a:solidFill>
-                <a:latin typeface="Consolas"/>
-              </a:rPr>
-              <a:t>    braking = max(0.0, braking - PEDAL_RATE * dt)</a:t>
-            </a:r>
-          </a:p>
-          <a:p>
-            <a:r>
-              <a:rPr sz="1200">
-                <a:solidFill>
-                  <a:srgbClr val="CCCCCC"/>
-                </a:solidFill>
-                <a:latin typeface="Consolas"/>
-              </a:rPr>
-              <a:t>if keys[pygame.K_SPACE]:</a:t>
-            </a:r>
-          </a:p>
-          <a:p>
-            <a:r>
-              <a:rPr sz="1200">
-                <a:solidFill>
-                  <a:srgbClr val="CCCCCC"/>
-                </a:solidFill>
-                <a:latin typeface="Consolas"/>
-              </a:rPr>
-              <a:t>    steering, throttle, braking = 0.0, 0.0, 0.0</a:t>
-            </a:r>
-          </a:p>
-          <a:p>
-            <a:r>
-              <a:rPr sz="1200">
-                <a:solidFill>
-                  <a:srgbClr val="CCCCCC"/>
-                </a:solidFill>
-                <a:latin typeface="Consolas"/>
-              </a:rPr>
-              <a:t> </a:t>
-            </a:r>
-          </a:p>
-          <a:p>
-            <a:r>
-              <a:rPr sz="1200">
-                <a:solidFill>
-                  <a:srgbClr val="CCCCCC"/>
-                </a:solidFill>
-                <a:latin typeface="Consolas"/>
-              </a:rPr>
-              <a:t># --- send to the simulation ---------------------------------------------</a:t>
-            </a:r>
-          </a:p>
-          <a:p>
-            <a:r>
-              <a:rPr sz="1200">
-                <a:solidFill>
-                  <a:srgbClr val="CCCCCC"/>
-                </a:solidFill>
-                <a:latin typeface="Consolas"/>
-              </a:rPr>
-              <a:t>sock.sendto(f"{steering:.3f},{throttle:.3f},{braking:.3f}".encode(), (SIM_HOST, SIM_PORT))</a:t>
-            </a:r>
-          </a:p>
-        </p:txBody>
-      </p:sp>
-      <p:sp>
-        <p:nvSpPr>
-          <p:cNvPr id="7" name="TextBox 6"/>
-          <p:cNvSpPr txBox="1"/>
-          <p:nvPr/>
-        </p:nvSpPr>
-        <p:spPr>
-          <a:xfrm>
-            <a:off x="400000" y="5376538"/>
-            <a:ext cx="11392000" cy="900000"/>
-          </a:xfrm>
-          <a:prstGeom prst="rect">
-            <a:avLst/>
-          </a:prstGeom>
-          <a:noFill/>
-        </p:spPr>
-        <p:txBody>
-          <a:bodyPr wrap="square">
-            <a:spAutoFit/>
-          </a:bodyPr>
-          <a:lstStyle/>
-          <a:p>
-            <a:pPr/>
-            <a:r>
-              <a:rPr sz="1800"/>
-              <a:t>A pygame window: hold the arrow keys, send </a:t>
-            </a:r>
-            <a:r>
-              <a:rPr sz="1600">
-                <a:latin typeface="Consolas"/>
-              </a:rPr>
-              <a:t>steering,throttle,braking</a:t>
-            </a:r>
-            <a:r>
-              <a:rPr sz="1800"/>
-              <a:t> at 50 Hz</a:t>
-            </a:r>
-          </a:p>
-          <a:p>
-            <a:pPr/>
-            <a:r>
-              <a:rPr sz="1800"/>
-              <a:t>Swap this for a web page, a ROS node, or a driving-simulator cockpit - the sim does not care</a:t>
             </a:r>
           </a:p>
         </p:txBody>
@@ -8972,176 +8055,45 @@
             <p:ph type="title"/>
           </p:nvPr>
         </p:nvSpPr>
-        <p:spPr>
-          <a:xfrm>
-            <a:off x="235228" y="150000"/>
-            <a:ext cx="9875520" cy="800000"/>
-          </a:xfrm>
-        </p:spPr>
+        <p:spPr/>
+        <p:txBody>
+          <a:bodyPr/>
+          <a:lstStyle/>
+          <a:p>
+            <a:pPr/>
+            <a:r>
+              <a:rPr sz="3302"/>
+              <a:t>Show Time</a:t>
+            </a:r>
+          </a:p>
+        </p:txBody>
+      </p:sp>
+      <p:sp>
+        <p:nvSpPr>
+          <p:cNvPr id="3" name="Content Placeholder 2"/>
+          <p:cNvSpPr>
+            <a:spLocks noGrp="1"/>
+          </p:cNvSpPr>
+          <p:nvPr>
+            <p:ph idx="1"/>
+          </p:nvPr>
+        </p:nvSpPr>
+        <p:spPr/>
         <p:txBody>
           <a:bodyPr wrap="square"/>
           <a:lstStyle/>
           <a:p>
-            <a:r>
-              <a:rPr sz="2600"/>
-              <a:t>Step 4: Plug the device into a plain ChDriver (Lines 277 to 288)</a:t>
-            </a:r>
-          </a:p>
-        </p:txBody>
-      </p:sp>
-      <p:sp>
-        <p:nvSpPr>
-          <p:cNvPr id="3" name="TextBox 2"/>
-          <p:cNvSpPr txBox="1"/>
-          <p:nvPr/>
-        </p:nvSpPr>
-        <p:spPr>
-          <a:xfrm>
-            <a:off x="0" y="1050000"/>
-            <a:ext cx="12192000" cy="2763520"/>
-          </a:xfrm>
-          <a:prstGeom prst="rect">
-            <a:avLst/>
-          </a:prstGeom>
-          <a:solidFill>
-            <a:srgbClr val="000000"/>
-          </a:solidFill>
-        </p:spPr>
-        <p:txBody>
-          <a:bodyPr wrap="none" lIns="300000" rIns="300000">
-            <a:noAutofit/>
-          </a:bodyPr>
-          <a:lstStyle/>
-          <a:p>
-            <a:r>
-              <a:rPr sz="1400">
-                <a:solidFill>
-                  <a:srgbClr val="CCCCCC"/>
-                </a:solidFill>
-                <a:latin typeface="Consolas"/>
-              </a:rPr>
-              <a:t>else:</a:t>
-            </a:r>
-          </a:p>
-          <a:p>
-            <a:r>
-              <a:rPr sz="1400">
-                <a:solidFill>
-                  <a:srgbClr val="CCCCCC"/>
-                </a:solidFill>
-                <a:latin typeface="Consolas"/>
-              </a:rPr>
-              <a:t>    ### PART 3: our own device writes into a plain ChDriver ###</a:t>
-            </a:r>
-          </a:p>
-          <a:p>
-            <a:r>
-              <a:rPr sz="1400">
-                <a:solidFill>
-                  <a:srgbClr val="CCCCCC"/>
-                </a:solidFill>
-                <a:latin typeface="Consolas"/>
-              </a:rPr>
-              <a:t>    driver = veh.ChDriver(vehicle)</a:t>
-            </a:r>
-          </a:p>
-          <a:p>
-            <a:r>
-              <a:rPr sz="1400">
-                <a:solidFill>
-                  <a:srgbClr val="CCCCCC"/>
-                </a:solidFill>
-                <a:latin typeface="Consolas"/>
-              </a:rPr>
-              <a:t>    if INPUT_SOURCE == "udp":</a:t>
-            </a:r>
-          </a:p>
-          <a:p>
-            <a:r>
-              <a:rPr sz="1400">
-                <a:solidFill>
-                  <a:srgbClr val="CCCCCC"/>
-                </a:solidFill>
-                <a:latin typeface="Consolas"/>
-              </a:rPr>
-              <a:t>        device = UdpInput(port=UDP_PORT)</a:t>
-            </a:r>
-          </a:p>
-          <a:p>
-            <a:r>
-              <a:rPr sz="1400">
-                <a:solidFill>
-                  <a:srgbClr val="CCCCCC"/>
-                </a:solidFill>
-                <a:latin typeface="Consolas"/>
-              </a:rPr>
-              <a:t>    elif INPUT_SOURCE == "gamepad":</a:t>
-            </a:r>
-          </a:p>
-          <a:p>
-            <a:r>
-              <a:rPr sz="1400">
-                <a:solidFill>
-                  <a:srgbClr val="CCCCCC"/>
-                </a:solidFill>
-                <a:latin typeface="Consolas"/>
-              </a:rPr>
-              <a:t>        device = GamepadInput(mapping=GAMEPAD_MAPPING)</a:t>
-            </a:r>
-          </a:p>
-          <a:p>
-            <a:r>
-              <a:rPr sz="1400">
-                <a:solidFill>
-                  <a:srgbClr val="CCCCCC"/>
-                </a:solidFill>
-                <a:latin typeface="Consolas"/>
-              </a:rPr>
-              <a:t>    else:</a:t>
-            </a:r>
-          </a:p>
-          <a:p>
-            <a:r>
-              <a:rPr sz="1400">
-                <a:solidFill>
-                  <a:srgbClr val="CCCCCC"/>
-                </a:solidFill>
-                <a:latin typeface="Consolas"/>
-              </a:rPr>
-              <a:t>        raise ValueError(f"unknown INPUT_SOURCE {INPUT_SOURCE!r}")</a:t>
-            </a:r>
-          </a:p>
-          <a:p>
-            <a:r>
-              <a:rPr sz="1400">
-                <a:solidFill>
-                  <a:srgbClr val="CCCCCC"/>
-                </a:solidFill>
-                <a:latin typeface="Consolas"/>
-              </a:rPr>
-              <a:t>    smoother = SmoothedInputs(gain=4.0)</a:t>
-            </a:r>
-          </a:p>
-          <a:p>
-            <a:r>
-              <a:rPr sz="1400">
-                <a:solidFill>
-                  <a:srgbClr val="CCCCCC"/>
-                </a:solidFill>
-                <a:latin typeface="Consolas"/>
-              </a:rPr>
-              <a:t> </a:t>
-            </a:r>
-          </a:p>
-          <a:p>
-            <a:r>
-              <a:rPr sz="1400">
-                <a:solidFill>
-                  <a:srgbClr val="CCCCCC"/>
-                </a:solidFill>
-                <a:latin typeface="Consolas"/>
-              </a:rPr>
-              <a:t>driver.Initialize()</a:t>
+            <a:pPr/>
+            <a:r>
+              <a:rPr sz="2000"/>
+              <a:t>Volunteer: drive the HMMWV with a gamepad or wheel - no second terminal, no pygame window</a:t>
+            </a:r>
+          </a:p>
+          <a:p>
+            <a:pPr/>
+            <a:r>
+              <a:rPr sz="2000"/>
+              <a:t>Compare the feel against Part 2's keyboard: same SetGains() smoothing, continuous analog input instead of discrete keypresses</a:t>
             </a:r>
           </a:p>
         </p:txBody>
@@ -9154,8 +8106,8 @@
         </p:nvSpPr>
         <p:spPr>
           <a:xfrm>
-            <a:off x="400000" y="3913520"/>
-            <a:ext cx="11392000" cy="2544480"/>
+            <a:off x="310974" y="6645811"/>
+            <a:ext cx="11644805" cy="188527"/>
           </a:xfrm>
           <a:prstGeom prst="rect">
             <a:avLst/>
@@ -9163,36 +8115,6 @@
           <a:noFill/>
         </p:spPr>
         <p:txBody>
-          <a:bodyPr wrap="square">
-            <a:spAutoFit/>
-          </a:bodyPr>
-          <a:lstStyle/>
-          <a:p>
-            <a:pPr/>
-            <a:r>
-              <a:rPr sz="1800"/>
-              <a:t>No AttachDriver here - the Irrlicht window keeps the keyboard, our device owns the inputs</a:t>
-            </a:r>
-          </a:p>
-        </p:txBody>
-      </p:sp>
-      <p:sp>
-        <p:nvSpPr>
-          <p:cNvPr id="5" name="TextBox 4"/>
-          <p:cNvSpPr txBox="1"/>
-          <p:nvPr/>
-        </p:nvSpPr>
-        <p:spPr>
-          <a:xfrm>
-            <a:off x="310974" y="6645811"/>
-            <a:ext cx="11644805" cy="188527"/>
-          </a:xfrm>
-          <a:prstGeom prst="rect">
-            <a:avLst/>
-          </a:prstGeom>
-          <a:noFill/>
-        </p:spPr>
-        <p:txBody>
           <a:bodyPr wrap="none">
             <a:spAutoFit/>
           </a:bodyPr>
@@ -9207,7 +8129,7 @@
       </p:sp>
       <p:sp>
         <p:nvSpPr>
-          <p:cNvPr id="6" name="TextBox 5"/>
+          <p:cNvPr id="5" name="TextBox 4"/>
           <p:cNvSpPr txBox="1"/>
           <p:nvPr/>
         </p:nvSpPr>
@@ -9262,154 +8184,34 @@
             <p:ph type="title"/>
           </p:nvPr>
         </p:nvSpPr>
-        <p:spPr>
-          <a:xfrm>
-            <a:off x="235228" y="150000"/>
-            <a:ext cx="9875520" cy="800000"/>
-          </a:xfrm>
-        </p:spPr>
-        <p:txBody>
-          <a:bodyPr wrap="square"/>
-          <a:lstStyle/>
-          <a:p>
-            <a:r>
-              <a:rPr sz="2600"/>
-              <a:t>Step 5: Sample once per step, then hold (Lines 333 to 342)</a:t>
-            </a:r>
-          </a:p>
-        </p:txBody>
-      </p:sp>
-      <p:sp>
-        <p:nvSpPr>
-          <p:cNvPr id="3" name="TextBox 2"/>
-          <p:cNvSpPr txBox="1"/>
-          <p:nvPr/>
-        </p:nvSpPr>
-        <p:spPr>
-          <a:xfrm>
-            <a:off x="0" y="1050000"/>
-            <a:ext cx="12192000" cy="2336800"/>
-          </a:xfrm>
-          <a:prstGeom prst="rect">
-            <a:avLst/>
-          </a:prstGeom>
-          <a:solidFill>
-            <a:srgbClr val="000000"/>
-          </a:solidFill>
-        </p:spPr>
-        <p:txBody>
-          <a:bodyPr wrap="none" lIns="300000" rIns="300000">
-            <a:noAutofit/>
-          </a:bodyPr>
-          <a:lstStyle/>
-          <a:p>
-            <a:r>
-              <a:rPr sz="1400">
-                <a:solidFill>
-                  <a:srgbClr val="CCCCCC"/>
-                </a:solidFill>
-                <a:latin typeface="Consolas"/>
-              </a:rPr>
-              <a:t> </a:t>
-            </a:r>
-          </a:p>
-          <a:p>
-            <a:r>
-              <a:rPr sz="1400">
-                <a:solidFill>
-                  <a:srgbClr val="CCCCCC"/>
-                </a:solidFill>
-                <a:latin typeface="Consolas"/>
-              </a:rPr>
-              <a:t># PART 3: sample the device ONCE per step and hold it for the step</a:t>
-            </a:r>
-          </a:p>
-          <a:p>
-            <a:r>
-              <a:rPr sz="1400">
-                <a:solidFill>
-                  <a:srgbClr val="CCCCCC"/>
-                </a:solidFill>
-                <a:latin typeface="Consolas"/>
-              </a:rPr>
-              <a:t>if device is not None:</a:t>
-            </a:r>
-          </a:p>
-          <a:p>
-            <a:r>
-              <a:rPr sz="1400">
-                <a:solidFill>
-                  <a:srgbClr val="CCCCCC"/>
-                </a:solidFill>
-                <a:latin typeface="Consolas"/>
-              </a:rPr>
-              <a:t>    smoother.set_target(*device.poll())</a:t>
-            </a:r>
-          </a:p>
-          <a:p>
-            <a:r>
-              <a:rPr sz="1400">
-                <a:solidFill>
-                  <a:srgbClr val="CCCCCC"/>
-                </a:solidFill>
-                <a:latin typeface="Consolas"/>
-              </a:rPr>
-              <a:t>    smoother.advance(step_size)</a:t>
-            </a:r>
-          </a:p>
-          <a:p>
-            <a:r>
-              <a:rPr sz="1400">
-                <a:solidFill>
-                  <a:srgbClr val="CCCCCC"/>
-                </a:solidFill>
-                <a:latin typeface="Consolas"/>
-              </a:rPr>
-              <a:t>    smoother.apply_to(driver)</a:t>
-            </a:r>
-          </a:p>
-          <a:p>
-            <a:r>
-              <a:rPr sz="1400">
-                <a:solidFill>
-                  <a:srgbClr val="CCCCCC"/>
-                </a:solidFill>
-                <a:latin typeface="Consolas"/>
-              </a:rPr>
-              <a:t> </a:t>
-            </a:r>
-          </a:p>
-          <a:p>
-            <a:r>
-              <a:rPr sz="1400">
-                <a:solidFill>
-                  <a:srgbClr val="CCCCCC"/>
-                </a:solidFill>
-                <a:latin typeface="Consolas"/>
-              </a:rPr>
-              <a:t># Get driver inputs (three floats) - this is the whole HIL contract</a:t>
-            </a:r>
-          </a:p>
-          <a:p>
-            <a:r>
-              <a:rPr sz="1400">
-                <a:solidFill>
-                  <a:srgbClr val="CCCCCC"/>
-                </a:solidFill>
-                <a:latin typeface="Consolas"/>
-              </a:rPr>
-              <a:t>driver_inputs = driver.GetInputs()</a:t>
-            </a:r>
-          </a:p>
-          <a:p>
-            <a:r>
-              <a:rPr sz="1400">
-                <a:solidFill>
-                  <a:srgbClr val="CCCCCC"/>
-                </a:solidFill>
-                <a:latin typeface="Consolas"/>
-              </a:rPr>
-              <a:t> </a:t>
+        <p:spPr/>
+        <p:txBody>
+          <a:bodyPr/>
+          <a:lstStyle/>
+          <a:p>
+            <a:r>
+              <a:t>Part 4: A device Chrono doesn't know about, and closing the loop</a:t>
+            </a:r>
+          </a:p>
+        </p:txBody>
+      </p:sp>
+      <p:sp>
+        <p:nvSpPr>
+          <p:cNvPr id="3" name="Text Placeholder 2"/>
+          <p:cNvSpPr>
+            <a:spLocks noGrp="1"/>
+          </p:cNvSpPr>
+          <p:nvPr>
+            <p:ph type="body" idx="1"/>
+          </p:nvPr>
+        </p:nvSpPr>
+        <p:spPr/>
+        <p:txBody>
+          <a:bodyPr/>
+          <a:lstStyle/>
+          <a:p>
+            <a:r>
+              <a:t>a UDP console, a gamepad, a steering wheel, a phone, another process...</a:t>
             </a:r>
           </a:p>
         </p:txBody>
@@ -9422,8 +8224,8 @@
         </p:nvSpPr>
         <p:spPr>
           <a:xfrm>
-            <a:off x="400000" y="3486800"/>
-            <a:ext cx="11392000" cy="2971200"/>
+            <a:off x="310974" y="6645811"/>
+            <a:ext cx="11644805" cy="188527"/>
           </a:xfrm>
           <a:prstGeom prst="rect">
             <a:avLst/>
@@ -9431,36 +8233,6 @@
           <a:noFill/>
         </p:spPr>
         <p:txBody>
-          <a:bodyPr wrap="square">
-            <a:spAutoFit/>
-          </a:bodyPr>
-          <a:lstStyle/>
-          <a:p>
-            <a:pPr/>
-            <a:r>
-              <a:rPr sz="1800"/>
-              <a:t>poll -&gt; smooth -&gt; write, then GetInputs() as before; the physics loop never waits on the device</a:t>
-            </a:r>
-          </a:p>
-        </p:txBody>
-      </p:sp>
-      <p:sp>
-        <p:nvSpPr>
-          <p:cNvPr id="5" name="TextBox 4"/>
-          <p:cNvSpPr txBox="1"/>
-          <p:nvPr/>
-        </p:nvSpPr>
-        <p:spPr>
-          <a:xfrm>
-            <a:off x="310974" y="6645811"/>
-            <a:ext cx="11644805" cy="188527"/>
-          </a:xfrm>
-          <a:prstGeom prst="rect">
-            <a:avLst/>
-          </a:prstGeom>
-          <a:noFill/>
-        </p:spPr>
-        <p:txBody>
           <a:bodyPr wrap="none">
             <a:spAutoFit/>
           </a:bodyPr>
@@ -9475,7 +8247,7 @@
       </p:sp>
       <p:sp>
         <p:nvSpPr>
-          <p:cNvPr id="6" name="TextBox 5"/>
+          <p:cNvPr id="5" name="TextBox 4"/>
           <p:cNvSpPr txBox="1"/>
           <p:nvPr/>
         </p:nvSpPr>
@@ -9542,7 +8314,7 @@
           <a:p>
             <a:r>
               <a:rPr sz="2600"/>
-              <a:t>Before running the code, please</a:t>
+              <a:t>The HIL contract</a:t>
             </a:r>
           </a:p>
         </p:txBody>
@@ -9565,54 +8337,81 @@
             <a:pPr/>
             <a:r>
               <a:rPr sz="2000"/>
-              <a:t>Set INPUT_SOURCE = "udp" (Line 386), keep REALTIME = "vehicle"</a:t>
+              <a:t>A driver is just three floats per step: steering [-1, 1], throttle [0, 1], braking [0, 1]</a:t>
             </a:r>
           </a:p>
           <a:p>
             <a:pPr/>
             <a:r>
+              <a:rPr sz="1800">
+                <a:latin typeface="Consolas"/>
+              </a:rPr>
+              <a:t>veh.ChDriver</a:t>
+            </a:r>
+            <a:r>
               <a:rPr sz="2000"/>
-              <a:t>Terminal 1: </a:t>
+              <a:t> is the plain container: </a:t>
             </a:r>
             <a:r>
               <a:rPr sz="1800">
                 <a:latin typeface="Consolas"/>
               </a:rPr>
-              <a:t>python tutorial_HIL_driver.py</a:t>
+              <a:t>SetSteering()</a:t>
+            </a:r>
+            <a:r>
+              <a:rPr sz="2000"/>
+              <a:t>, </a:t>
+            </a:r>
+            <a:r>
+              <a:rPr sz="1800">
+                <a:latin typeface="Consolas"/>
+              </a:rPr>
+              <a:t>SetThrottle()</a:t>
+            </a:r>
+            <a:r>
+              <a:rPr sz="2000"/>
+              <a:t>, </a:t>
+            </a:r>
+            <a:r>
+              <a:rPr sz="1800">
+                <a:latin typeface="Consolas"/>
+              </a:rPr>
+              <a:t>SetBraking()</a:t>
             </a:r>
           </a:p>
           <a:p>
             <a:pPr/>
             <a:r>
               <a:rPr sz="2000"/>
-              <a:t>Terminal 2: </a:t>
-            </a:r>
-            <a:r>
-              <a:rPr sz="1800">
-                <a:latin typeface="Consolas"/>
-              </a:rPr>
-              <a:t>python operator_console.py</a:t>
-            </a:r>
+              <a:t>So the recipe for ANY device is:</a:t>
+            </a:r>
+          </a:p>
+          <a:p>
+            <a:pPr lvl="1"/>
+            <a:r>
+              <a:rPr sz="1800"/>
+              <a:t>1. poll the device (never block the physics loop)</a:t>
+            </a:r>
+          </a:p>
+          <a:p>
+            <a:pPr lvl="1"/>
+            <a:r>
+              <a:rPr sz="1800"/>
+              <a:t>2. rate-limit / smooth (a human arm is not a step function)</a:t>
+            </a:r>
+          </a:p>
+          <a:p>
+            <a:pPr lvl="1"/>
+            <a:r>
+              <a:rPr sz="1800"/>
+              <a:t>3. write into the ChDriver once per step - zero-order hold until the next step</a:t>
+            </a:r>
+          </a:p>
+          <a:p>
+            <a:pPr/>
             <a:r>
               <a:rPr sz="2000"/>
-              <a:t> (or </a:t>
-            </a:r>
-            <a:r>
-              <a:rPr sz="1800">
-                <a:latin typeface="Consolas"/>
-              </a:rPr>
-              <a:t>python operator_console.py &lt;ip of terminal 1&gt;</a:t>
-            </a:r>
-            <a:r>
-              <a:rPr sz="2000"/>
-              <a:t> from another laptop)</a:t>
-            </a:r>
-          </a:p>
-          <a:p>
-            <a:pPr/>
-            <a:r>
-              <a:rPr sz="2000"/>
-              <a:t>Click the operator console window and drive with the arrow keys</a:t>
+              <a:t>Today: a UDP operator console everybody can run (two terminals)</a:t>
             </a:r>
           </a:p>
         </p:txBody>
@@ -9715,37 +8514,417 @@
           <a:p>
             <a:r>
               <a:rPr sz="2600"/>
-              <a:t>Show Time</a:t>
-            </a:r>
-          </a:p>
-        </p:txBody>
-      </p:sp>
-      <p:sp>
-        <p:nvSpPr>
-          <p:cNvPr id="3" name="Content Placeholder 2"/>
-          <p:cNvSpPr>
-            <a:spLocks noGrp="1"/>
-          </p:cNvSpPr>
-          <p:nvPr>
-            <p:ph idx="1"/>
-          </p:nvPr>
-        </p:nvSpPr>
-        <p:spPr/>
-        <p:txBody>
-          <a:bodyPr wrap="square"/>
-          <a:lstStyle/>
-          <a:p>
-            <a:pPr/>
-            <a:r>
-              <a:rPr sz="2000"/>
-              <a:t>Pair up: one laptop runs the sim, the other runs the console and drives it over Wi-Fi</a:t>
-            </a:r>
-          </a:p>
-          <a:p>
-            <a:pPr/>
-            <a:r>
-              <a:rPr sz="2000"/>
-              <a:t>Stop the console mid-drive: the last input is held - what should a real simulator do here?</a:t>
+              <a:t>Step 1: Smooth - never teleport raw inputs into the model (Lines 100 to 133)</a:t>
+            </a:r>
+          </a:p>
+        </p:txBody>
+      </p:sp>
+      <p:sp>
+        <p:nvSpPr>
+          <p:cNvPr id="3" name="TextBox 2"/>
+          <p:cNvSpPr txBox="1"/>
+          <p:nvPr/>
+        </p:nvSpPr>
+        <p:spPr>
+          <a:xfrm>
+            <a:off x="0" y="1050000"/>
+            <a:ext cx="12192000" cy="5537200"/>
+          </a:xfrm>
+          <a:prstGeom prst="rect">
+            <a:avLst/>
+          </a:prstGeom>
+          <a:solidFill>
+            <a:srgbClr val="000000"/>
+          </a:solidFill>
+        </p:spPr>
+        <p:txBody>
+          <a:bodyPr wrap="none" lIns="300000" rIns="300000">
+            <a:noAutofit/>
+          </a:bodyPr>
+          <a:lstStyle/>
+          <a:p>
+            <a:r>
+              <a:rPr sz="1000">
+                <a:solidFill>
+                  <a:srgbClr val="CCCCCC"/>
+                </a:solidFill>
+                <a:latin typeface="Consolas"/>
+              </a:rPr>
+              <a:t>class SmoothedInputs:</a:t>
+            </a:r>
+          </a:p>
+          <a:p>
+            <a:r>
+              <a:rPr sz="1000">
+                <a:solidFill>
+                  <a:srgbClr val="CCCCCC"/>
+                </a:solidFill>
+                <a:latin typeface="Consolas"/>
+              </a:rPr>
+              <a:t>    """First-order lag from a *target* input to the *applied* input.</a:t>
+            </a:r>
+          </a:p>
+          <a:p>
+            <a:r>
+              <a:rPr sz="1000">
+                <a:solidFill>
+                  <a:srgbClr val="CCCCCC"/>
+                </a:solidFill>
+                <a:latin typeface="Consolas"/>
+              </a:rPr>
+              <a:t> </a:t>
+            </a:r>
+          </a:p>
+          <a:p>
+            <a:r>
+              <a:rPr sz="1000">
+                <a:solidFill>
+                  <a:srgbClr val="CCCCCC"/>
+                </a:solidFill>
+                <a:latin typeface="Consolas"/>
+              </a:rPr>
+              <a:t>    Raw device values should not be teleported into the model: a keypress is a</a:t>
+            </a:r>
+          </a:p>
+          <a:p>
+            <a:r>
+              <a:rPr sz="1000">
+                <a:solidFill>
+                  <a:srgbClr val="CCCCCC"/>
+                </a:solidFill>
+                <a:latin typeface="Consolas"/>
+              </a:rPr>
+              <a:t>    step function, and a step in steering excites the suspension and tires in a</a:t>
+            </a:r>
+          </a:p>
+          <a:p>
+            <a:r>
+              <a:rPr sz="1000">
+                <a:solidFill>
+                  <a:srgbClr val="CCCCCC"/>
+                </a:solidFill>
+                <a:latin typeface="Consolas"/>
+              </a:rPr>
+              <a:t>    way no human arm ever would.  This mirrors the internal dynamics of</a:t>
+            </a:r>
+          </a:p>
+          <a:p>
+            <a:r>
+              <a:rPr sz="1000">
+                <a:solidFill>
+                  <a:srgbClr val="CCCCCC"/>
+                </a:solidFill>
+                <a:latin typeface="Consolas"/>
+              </a:rPr>
+              <a:t>    ChInteractiveDriver (see SetGains) so the behavior is the same whether the</a:t>
+            </a:r>
+          </a:p>
+          <a:p>
+            <a:r>
+              <a:rPr sz="1000">
+                <a:solidFill>
+                  <a:srgbClr val="CCCCCC"/>
+                </a:solidFill>
+                <a:latin typeface="Consolas"/>
+              </a:rPr>
+              <a:t>    inputs come from the Irrlicht keyboard handler or from our own device.</a:t>
+            </a:r>
+          </a:p>
+          <a:p>
+            <a:r>
+              <a:rPr sz="1000">
+                <a:solidFill>
+                  <a:srgbClr val="CCCCCC"/>
+                </a:solidFill>
+                <a:latin typeface="Consolas"/>
+              </a:rPr>
+              <a:t>    """</a:t>
+            </a:r>
+          </a:p>
+          <a:p>
+            <a:r>
+              <a:rPr sz="1000">
+                <a:solidFill>
+                  <a:srgbClr val="CCCCCC"/>
+                </a:solidFill>
+                <a:latin typeface="Consolas"/>
+              </a:rPr>
+              <a:t> </a:t>
+            </a:r>
+          </a:p>
+          <a:p>
+            <a:r>
+              <a:rPr sz="1000">
+                <a:solidFill>
+                  <a:srgbClr val="CCCCCC"/>
+                </a:solidFill>
+                <a:latin typeface="Consolas"/>
+              </a:rPr>
+              <a:t>    def __init__(self, gain=4.0):</a:t>
+            </a:r>
+          </a:p>
+          <a:p>
+            <a:r>
+              <a:rPr sz="1000">
+                <a:solidFill>
+                  <a:srgbClr val="CCCCCC"/>
+                </a:solidFill>
+                <a:latin typeface="Consolas"/>
+              </a:rPr>
+              <a:t>        self.gain = gain</a:t>
+            </a:r>
+          </a:p>
+          <a:p>
+            <a:r>
+              <a:rPr sz="1000">
+                <a:solidFill>
+                  <a:srgbClr val="CCCCCC"/>
+                </a:solidFill>
+                <a:latin typeface="Consolas"/>
+              </a:rPr>
+              <a:t>        self.steering = 0.0</a:t>
+            </a:r>
+          </a:p>
+          <a:p>
+            <a:r>
+              <a:rPr sz="1000">
+                <a:solidFill>
+                  <a:srgbClr val="CCCCCC"/>
+                </a:solidFill>
+                <a:latin typeface="Consolas"/>
+              </a:rPr>
+              <a:t>        self.throttle = 0.0</a:t>
+            </a:r>
+          </a:p>
+          <a:p>
+            <a:r>
+              <a:rPr sz="1000">
+                <a:solidFill>
+                  <a:srgbClr val="CCCCCC"/>
+                </a:solidFill>
+                <a:latin typeface="Consolas"/>
+              </a:rPr>
+              <a:t>        self.braking = 0.0</a:t>
+            </a:r>
+          </a:p>
+          <a:p>
+            <a:r>
+              <a:rPr sz="1000">
+                <a:solidFill>
+                  <a:srgbClr val="CCCCCC"/>
+                </a:solidFill>
+                <a:latin typeface="Consolas"/>
+              </a:rPr>
+              <a:t>        self.target = (0.0, 0.0, 0.0)</a:t>
+            </a:r>
+          </a:p>
+          <a:p>
+            <a:r>
+              <a:rPr sz="1000">
+                <a:solidFill>
+                  <a:srgbClr val="CCCCCC"/>
+                </a:solidFill>
+                <a:latin typeface="Consolas"/>
+              </a:rPr>
+              <a:t> </a:t>
+            </a:r>
+          </a:p>
+          <a:p>
+            <a:r>
+              <a:rPr sz="1000">
+                <a:solidFill>
+                  <a:srgbClr val="CCCCCC"/>
+                </a:solidFill>
+                <a:latin typeface="Consolas"/>
+              </a:rPr>
+              <a:t>    def set_target(self, steering, throttle, braking):</a:t>
+            </a:r>
+          </a:p>
+          <a:p>
+            <a:r>
+              <a:rPr sz="1000">
+                <a:solidFill>
+                  <a:srgbClr val="CCCCCC"/>
+                </a:solidFill>
+                <a:latin typeface="Consolas"/>
+              </a:rPr>
+              <a:t>        self.target = (</a:t>
+            </a:r>
+          </a:p>
+          <a:p>
+            <a:r>
+              <a:rPr sz="1000">
+                <a:solidFill>
+                  <a:srgbClr val="CCCCCC"/>
+                </a:solidFill>
+                <a:latin typeface="Consolas"/>
+              </a:rPr>
+              <a:t>            max(-1.0, min(1.0, steering)),</a:t>
+            </a:r>
+          </a:p>
+          <a:p>
+            <a:r>
+              <a:rPr sz="1000">
+                <a:solidFill>
+                  <a:srgbClr val="CCCCCC"/>
+                </a:solidFill>
+                <a:latin typeface="Consolas"/>
+              </a:rPr>
+              <a:t>            max(0.0, min(1.0, throttle)),</a:t>
+            </a:r>
+          </a:p>
+          <a:p>
+            <a:r>
+              <a:rPr sz="1000">
+                <a:solidFill>
+                  <a:srgbClr val="CCCCCC"/>
+                </a:solidFill>
+                <a:latin typeface="Consolas"/>
+              </a:rPr>
+              <a:t>            max(0.0, min(1.0, braking)),</a:t>
+            </a:r>
+          </a:p>
+          <a:p>
+            <a:r>
+              <a:rPr sz="1000">
+                <a:solidFill>
+                  <a:srgbClr val="CCCCCC"/>
+                </a:solidFill>
+                <a:latin typeface="Consolas"/>
+              </a:rPr>
+              <a:t>        )</a:t>
+            </a:r>
+          </a:p>
+          <a:p>
+            <a:r>
+              <a:rPr sz="1000">
+                <a:solidFill>
+                  <a:srgbClr val="CCCCCC"/>
+                </a:solidFill>
+                <a:latin typeface="Consolas"/>
+              </a:rPr>
+              <a:t> </a:t>
+            </a:r>
+          </a:p>
+          <a:p>
+            <a:r>
+              <a:rPr sz="1000">
+                <a:solidFill>
+                  <a:srgbClr val="CCCCCC"/>
+                </a:solidFill>
+                <a:latin typeface="Consolas"/>
+              </a:rPr>
+              <a:t>    def advance(self, step):</a:t>
+            </a:r>
+          </a:p>
+          <a:p>
+            <a:r>
+              <a:rPr sz="1000">
+                <a:solidFill>
+                  <a:srgbClr val="CCCCCC"/>
+                </a:solidFill>
+                <a:latin typeface="Consolas"/>
+              </a:rPr>
+              <a:t>        s, t, b = self.target</a:t>
+            </a:r>
+          </a:p>
+          <a:p>
+            <a:r>
+              <a:rPr sz="1000">
+                <a:solidFill>
+                  <a:srgbClr val="CCCCCC"/>
+                </a:solidFill>
+                <a:latin typeface="Consolas"/>
+              </a:rPr>
+              <a:t>        self.steering += min(1.0, self.gain * step) * (s - self.steering)</a:t>
+            </a:r>
+          </a:p>
+          <a:p>
+            <a:r>
+              <a:rPr sz="1000">
+                <a:solidFill>
+                  <a:srgbClr val="CCCCCC"/>
+                </a:solidFill>
+                <a:latin typeface="Consolas"/>
+              </a:rPr>
+              <a:t>        self.throttle += min(1.0, self.gain * step) * (t - self.throttle)</a:t>
+            </a:r>
+          </a:p>
+          <a:p>
+            <a:r>
+              <a:rPr sz="1000">
+                <a:solidFill>
+                  <a:srgbClr val="CCCCCC"/>
+                </a:solidFill>
+                <a:latin typeface="Consolas"/>
+              </a:rPr>
+              <a:t>        self.braking += min(1.0, self.gain * step) * (b - self.braking)</a:t>
+            </a:r>
+          </a:p>
+          <a:p>
+            <a:r>
+              <a:rPr sz="1000">
+                <a:solidFill>
+                  <a:srgbClr val="CCCCCC"/>
+                </a:solidFill>
+                <a:latin typeface="Consolas"/>
+              </a:rPr>
+              <a:t> </a:t>
+            </a:r>
+          </a:p>
+          <a:p>
+            <a:r>
+              <a:rPr sz="1000">
+                <a:solidFill>
+                  <a:srgbClr val="CCCCCC"/>
+                </a:solidFill>
+                <a:latin typeface="Consolas"/>
+              </a:rPr>
+              <a:t>    def apply_to(self, driver):</a:t>
+            </a:r>
+          </a:p>
+          <a:p>
+            <a:r>
+              <a:rPr sz="1000">
+                <a:solidFill>
+                  <a:srgbClr val="CCCCCC"/>
+                </a:solidFill>
+                <a:latin typeface="Consolas"/>
+              </a:rPr>
+              <a:t>        driver.SetSteering(self.steering)</a:t>
+            </a:r>
+          </a:p>
+          <a:p>
+            <a:r>
+              <a:rPr sz="1000">
+                <a:solidFill>
+                  <a:srgbClr val="CCCCCC"/>
+                </a:solidFill>
+                <a:latin typeface="Consolas"/>
+              </a:rPr>
+              <a:t>        driver.SetThrottle(self.throttle)</a:t>
+            </a:r>
+          </a:p>
+          <a:p>
+            <a:r>
+              <a:rPr sz="1000">
+                <a:solidFill>
+                  <a:srgbClr val="CCCCCC"/>
+                </a:solidFill>
+                <a:latin typeface="Consolas"/>
+              </a:rPr>
+              <a:t>        driver.SetBraking(self.braking)</a:t>
+            </a:r>
+          </a:p>
+          <a:p>
+            <a:r>
+              <a:rPr sz="1000">
+                <a:solidFill>
+                  <a:srgbClr val="CCCCCC"/>
+                </a:solidFill>
+                <a:latin typeface="Consolas"/>
+              </a:rPr>
+              <a:t> </a:t>
             </a:r>
           </a:p>
         </p:txBody>
@@ -9758,8 +8937,8 @@
         </p:nvSpPr>
         <p:spPr>
           <a:xfrm>
-            <a:off x="310974" y="6645811"/>
-            <a:ext cx="11644805" cy="188527"/>
+            <a:off x="400000" y="6687200"/>
+            <a:ext cx="11392000" cy="-229200"/>
           </a:xfrm>
           <a:prstGeom prst="rect">
             <a:avLst/>
@@ -9767,6 +8946,36 @@
           <a:noFill/>
         </p:spPr>
         <p:txBody>
+          <a:bodyPr wrap="square">
+            <a:spAutoFit/>
+          </a:bodyPr>
+          <a:lstStyle/>
+          <a:p>
+            <a:pPr/>
+            <a:r>
+              <a:rPr sz="1800"/>
+              <a:t>Same first-order lag as ChInteractiveDriver::SetGains, in Python, so all devices behave alike</a:t>
+            </a:r>
+          </a:p>
+        </p:txBody>
+      </p:sp>
+      <p:sp>
+        <p:nvSpPr>
+          <p:cNvPr id="5" name="TextBox 4"/>
+          <p:cNvSpPr txBox="1"/>
+          <p:nvPr/>
+        </p:nvSpPr>
+        <p:spPr>
+          <a:xfrm>
+            <a:off x="310974" y="6645811"/>
+            <a:ext cx="11644805" cy="188527"/>
+          </a:xfrm>
+          <a:prstGeom prst="rect">
+            <a:avLst/>
+          </a:prstGeom>
+          <a:noFill/>
+        </p:spPr>
+        <p:txBody>
           <a:bodyPr wrap="none">
             <a:spAutoFit/>
           </a:bodyPr>
@@ -9781,7 +8990,7 @@
       </p:sp>
       <p:sp>
         <p:nvSpPr>
-          <p:cNvPr id="5" name="TextBox 4"/>
+          <p:cNvPr id="6" name="TextBox 5"/>
           <p:cNvSpPr txBox="1"/>
           <p:nvPr/>
         </p:nvSpPr>
@@ -10040,7 +9249,7 @@
           <a:p>
             <a:r>
               <a:rPr sz="2600"/>
-              <a:t>Optional: gamepad or wheel through pygame (Lines 160 to 199)</a:t>
+              <a:t>Step 2: A UDP input source (Lines 136 to 169)</a:t>
             </a:r>
           </a:p>
         </p:txBody>
@@ -10054,7 +9263,7 @@
         <p:spPr>
           <a:xfrm>
             <a:off x="0" y="1050000"/>
-            <a:ext cx="12192000" cy="5689600"/>
+            <a:ext cx="12192000" cy="5384800"/>
           </a:xfrm>
           <a:prstGeom prst="rect">
             <a:avLst/>
@@ -10070,29 +9279,29 @@
           <a:lstStyle/>
           <a:p>
             <a:r>
-              <a:rPr sz="900">
-                <a:solidFill>
-                  <a:srgbClr val="CCCCCC"/>
-                </a:solidFill>
-                <a:latin typeface="Consolas"/>
-              </a:rPr>
-              <a:t>class GamepadInput:</a:t>
-            </a:r>
-          </a:p>
-          <a:p>
-            <a:r>
-              <a:rPr sz="900">
-                <a:solidFill>
-                  <a:srgbClr val="CCCCCC"/>
-                </a:solidFill>
-                <a:latin typeface="Consolas"/>
-              </a:rPr>
-              <a:t>    """Read a gamepad or steering wheel through pygame (SDL).</a:t>
-            </a:r>
-          </a:p>
-          <a:p>
-            <a:r>
-              <a:rPr sz="900">
+              <a:rPr sz="1000">
+                <a:solidFill>
+                  <a:srgbClr val="CCCCCC"/>
+                </a:solidFill>
+                <a:latin typeface="Consolas"/>
+              </a:rPr>
+              <a:t>class UdpInput:</a:t>
+            </a:r>
+          </a:p>
+          <a:p>
+            <a:r>
+              <a:rPr sz="1000">
+                <a:solidFill>
+                  <a:srgbClr val="CCCCCC"/>
+                </a:solidFill>
+                <a:latin typeface="Consolas"/>
+              </a:rPr>
+              <a:t>    """Receive 'steering,throttle,braking' text datagrams from an operator.</a:t>
+            </a:r>
+          </a:p>
+          <a:p>
+            <a:r>
+              <a:rPr sz="1000">
                 <a:solidFill>
                   <a:srgbClr val="CCCCCC"/>
                 </a:solidFill>
@@ -10103,40 +9312,51 @@
           </a:p>
           <a:p>
             <a:r>
-              <a:rPr sz="900">
-                <a:solidFill>
-                  <a:srgbClr val="CCCCCC"/>
-                </a:solidFill>
-                <a:latin typeface="Consolas"/>
-              </a:rPr>
-              <a:t>    No pygame window is needed for joysticks, so the Irrlicht window keeps the</a:t>
-            </a:r>
-          </a:p>
-          <a:p>
-            <a:r>
-              <a:rPr sz="900">
-                <a:solidFill>
-                  <a:srgbClr val="CCCCCC"/>
-                </a:solidFill>
-                <a:latin typeface="Consolas"/>
-              </a:rPr>
-              <a:t>    keyboard focus.  Axis indices differ between devices - run probe_gamepad.py</a:t>
-            </a:r>
-          </a:p>
-          <a:p>
-            <a:r>
-              <a:rPr sz="900">
-                <a:solidFill>
-                  <a:srgbClr val="CCCCCC"/>
-                </a:solidFill>
-                <a:latin typeface="Consolas"/>
-              </a:rPr>
-              <a:t>    to find yours, then edit the mapping below.</a:t>
-            </a:r>
-          </a:p>
-          <a:p>
-            <a:r>
-              <a:rPr sz="900">
+              <a:rPr sz="1000">
+                <a:solidFill>
+                  <a:srgbClr val="CCCCCC"/>
+                </a:solidFill>
+                <a:latin typeface="Consolas"/>
+              </a:rPr>
+              <a:t>    Run operator_console.py in another terminal (or on another machine) and</a:t>
+            </a:r>
+          </a:p>
+          <a:p>
+            <a:r>
+              <a:rPr sz="1000">
+                <a:solidFill>
+                  <a:srgbClr val="CCCCCC"/>
+                </a:solidFill>
+                <a:latin typeface="Consolas"/>
+              </a:rPr>
+              <a:t>    drive with the arrow keys there.  The socket is non-blocking: the physics</a:t>
+            </a:r>
+          </a:p>
+          <a:p>
+            <a:r>
+              <a:rPr sz="1000">
+                <a:solidFill>
+                  <a:srgbClr val="CCCCCC"/>
+                </a:solidFill>
+                <a:latin typeface="Consolas"/>
+              </a:rPr>
+              <a:t>    loop never waits for the operator.  If no packet arrived since the last</a:t>
+            </a:r>
+          </a:p>
+          <a:p>
+            <a:r>
+              <a:rPr sz="1000">
+                <a:solidFill>
+                  <a:srgbClr val="CCCCCC"/>
+                </a:solidFill>
+                <a:latin typeface="Consolas"/>
+              </a:rPr>
+              <a:t>    step, the previous target is held (zero-order hold).</a:t>
+            </a:r>
+          </a:p>
+          <a:p>
+            <a:r>
+              <a:rPr sz="1000">
                 <a:solidFill>
                   <a:srgbClr val="CCCCCC"/>
                 </a:solidFill>
@@ -10147,7 +9367,7 @@
           </a:p>
           <a:p>
             <a:r>
-              <a:rPr sz="900">
+              <a:rPr sz="1000">
                 <a:solidFill>
                   <a:srgbClr val="CCCCCC"/>
                 </a:solidFill>
@@ -10158,62 +9378,95 @@
           </a:p>
           <a:p>
             <a:r>
-              <a:rPr sz="900">
-                <a:solidFill>
-                  <a:srgbClr val="CCCCCC"/>
-                </a:solidFill>
-                <a:latin typeface="Consolas"/>
-              </a:rPr>
-              <a:t>    MAPPINGS = {</a:t>
-            </a:r>
-          </a:p>
-          <a:p>
-            <a:r>
-              <a:rPr sz="900">
-                <a:solidFill>
-                  <a:srgbClr val="CCCCCC"/>
-                </a:solidFill>
-                <a:latin typeface="Consolas"/>
-              </a:rPr>
-              <a:t>        # name: (steer axis, throttle axis, brake axis, pedal_is_inverted)</a:t>
-            </a:r>
-          </a:p>
-          <a:p>
-            <a:r>
-              <a:rPr sz="900">
-                <a:solidFill>
-                  <a:srgbClr val="CCCCCC"/>
-                </a:solidFill>
-                <a:latin typeface="Consolas"/>
-              </a:rPr>
-              <a:t>        "xbox": (0, 5, 2, False),  # left stick X, right trigger, left trigger</a:t>
-            </a:r>
-          </a:p>
-          <a:p>
-            <a:r>
-              <a:rPr sz="900">
-                <a:solidFill>
-                  <a:srgbClr val="CCCCCC"/>
-                </a:solidFill>
-                <a:latin typeface="Consolas"/>
-              </a:rPr>
-              <a:t>        "g29": (0, 2, 3, True),    # wheel, gas pedal, brake pedal (rest at +1)</a:t>
-            </a:r>
-          </a:p>
-          <a:p>
-            <a:r>
-              <a:rPr sz="900">
-                <a:solidFill>
-                  <a:srgbClr val="CCCCCC"/>
-                </a:solidFill>
-                <a:latin typeface="Consolas"/>
-              </a:rPr>
-              <a:t>    }</a:t>
-            </a:r>
-          </a:p>
-          <a:p>
-            <a:r>
-              <a:rPr sz="900">
+              <a:rPr sz="1000">
+                <a:solidFill>
+                  <a:srgbClr val="CCCCCC"/>
+                </a:solidFill>
+                <a:latin typeface="Consolas"/>
+              </a:rPr>
+              <a:t>    def __init__(self, port=9870):</a:t>
+            </a:r>
+          </a:p>
+          <a:p>
+            <a:r>
+              <a:rPr sz="1000">
+                <a:solidFill>
+                  <a:srgbClr val="CCCCCC"/>
+                </a:solidFill>
+                <a:latin typeface="Consolas"/>
+              </a:rPr>
+              <a:t>        self.sock = socket.socket(socket.AF_INET, socket.SOCK_DGRAM)</a:t>
+            </a:r>
+          </a:p>
+          <a:p>
+            <a:r>
+              <a:rPr sz="1000">
+                <a:solidFill>
+                  <a:srgbClr val="CCCCCC"/>
+                </a:solidFill>
+                <a:latin typeface="Consolas"/>
+              </a:rPr>
+              <a:t>        self.sock.bind(("0.0.0.0", port))</a:t>
+            </a:r>
+          </a:p>
+          <a:p>
+            <a:r>
+              <a:rPr sz="1000">
+                <a:solidFill>
+                  <a:srgbClr val="CCCCCC"/>
+                </a:solidFill>
+                <a:latin typeface="Consolas"/>
+              </a:rPr>
+              <a:t>        self.sock.setblocking(False)</a:t>
+            </a:r>
+          </a:p>
+          <a:p>
+            <a:r>
+              <a:rPr sz="1000">
+                <a:solidFill>
+                  <a:srgbClr val="CCCCCC"/>
+                </a:solidFill>
+                <a:latin typeface="Consolas"/>
+              </a:rPr>
+              <a:t>        self.operator_addr = None</a:t>
+            </a:r>
+          </a:p>
+          <a:p>
+            <a:r>
+              <a:rPr sz="1000">
+                <a:solidFill>
+                  <a:srgbClr val="CCCCCC"/>
+                </a:solidFill>
+                <a:latin typeface="Consolas"/>
+              </a:rPr>
+              <a:t>        self.last = (0.0, 0.0, 0.0)</a:t>
+            </a:r>
+          </a:p>
+          <a:p>
+            <a:r>
+              <a:rPr sz="1000">
+                <a:solidFill>
+                  <a:srgbClr val="CCCCCC"/>
+                </a:solidFill>
+                <a:latin typeface="Consolas"/>
+              </a:rPr>
+              <a:t>        self.packets = 0</a:t>
+            </a:r>
+          </a:p>
+          <a:p>
+            <a:r>
+              <a:rPr sz="1000">
+                <a:solidFill>
+                  <a:srgbClr val="CCCCCC"/>
+                </a:solidFill>
+                <a:latin typeface="Consolas"/>
+              </a:rPr>
+              <a:t>        print(f"[udp] listening on port {port} - start operator_console.py")</a:t>
+            </a:r>
+          </a:p>
+          <a:p>
+            <a:r>
+              <a:rPr sz="1000">
                 <a:solidFill>
                   <a:srgbClr val="CCCCCC"/>
                 </a:solidFill>
@@ -10224,288 +9477,178 @@
           </a:p>
           <a:p>
             <a:r>
-              <a:rPr sz="900">
-                <a:solidFill>
-                  <a:srgbClr val="CCCCCC"/>
-                </a:solidFill>
-                <a:latin typeface="Consolas"/>
-              </a:rPr>
-              <a:t>    def __init__(self, mapping="xbox", index=0):</a:t>
-            </a:r>
-          </a:p>
-          <a:p>
-            <a:r>
-              <a:rPr sz="900">
-                <a:solidFill>
-                  <a:srgbClr val="CCCCCC"/>
-                </a:solidFill>
-                <a:latin typeface="Consolas"/>
-              </a:rPr>
-              <a:t>        import pygame  # imported here so PART 1/2 do not need pygame installed</a:t>
-            </a:r>
-          </a:p>
-          <a:p>
-            <a:r>
-              <a:rPr sz="900">
+              <a:rPr sz="1000">
+                <a:solidFill>
+                  <a:srgbClr val="CCCCCC"/>
+                </a:solidFill>
+                <a:latin typeface="Consolas"/>
+              </a:rPr>
+              <a:t>    def poll(self):</a:t>
+            </a:r>
+          </a:p>
+          <a:p>
+            <a:r>
+              <a:rPr sz="1000">
+                <a:solidFill>
+                  <a:srgbClr val="CCCCCC"/>
+                </a:solidFill>
+                <a:latin typeface="Consolas"/>
+              </a:rPr>
+              <a:t>        # Drain everything that is queued and keep only the newest packet</a:t>
+            </a:r>
+          </a:p>
+          <a:p>
+            <a:r>
+              <a:rPr sz="1000">
+                <a:solidFill>
+                  <a:srgbClr val="CCCCCC"/>
+                </a:solidFill>
+                <a:latin typeface="Consolas"/>
+              </a:rPr>
+              <a:t>        while True:</a:t>
+            </a:r>
+          </a:p>
+          <a:p>
+            <a:r>
+              <a:rPr sz="1000">
+                <a:solidFill>
+                  <a:srgbClr val="CCCCCC"/>
+                </a:solidFill>
+                <a:latin typeface="Consolas"/>
+              </a:rPr>
+              <a:t>            try:</a:t>
+            </a:r>
+          </a:p>
+          <a:p>
+            <a:r>
+              <a:rPr sz="1000">
+                <a:solidFill>
+                  <a:srgbClr val="CCCCCC"/>
+                </a:solidFill>
+                <a:latin typeface="Consolas"/>
+              </a:rPr>
+              <a:t>                data, addr = self.sock.recvfrom(256)</a:t>
+            </a:r>
+          </a:p>
+          <a:p>
+            <a:r>
+              <a:rPr sz="1000">
+                <a:solidFill>
+                  <a:srgbClr val="CCCCCC"/>
+                </a:solidFill>
+                <a:latin typeface="Consolas"/>
+              </a:rPr>
+              <a:t>            except BlockingIOError:</a:t>
+            </a:r>
+          </a:p>
+          <a:p>
+            <a:r>
+              <a:rPr sz="1000">
+                <a:solidFill>
+                  <a:srgbClr val="CCCCCC"/>
+                </a:solidFill>
+                <a:latin typeface="Consolas"/>
+              </a:rPr>
+              <a:t>                break</a:t>
+            </a:r>
+          </a:p>
+          <a:p>
+            <a:r>
+              <a:rPr sz="1000">
+                <a:solidFill>
+                  <a:srgbClr val="CCCCCC"/>
+                </a:solidFill>
+                <a:latin typeface="Consolas"/>
+              </a:rPr>
+              <a:t>            try:</a:t>
+            </a:r>
+          </a:p>
+          <a:p>
+            <a:r>
+              <a:rPr sz="1000">
+                <a:solidFill>
+                  <a:srgbClr val="CCCCCC"/>
+                </a:solidFill>
+                <a:latin typeface="Consolas"/>
+              </a:rPr>
+              <a:t>                s, t, b = (float(x) for x in data.decode().split(","))</a:t>
+            </a:r>
+          </a:p>
+          <a:p>
+            <a:r>
+              <a:rPr sz="1000">
+                <a:solidFill>
+                  <a:srgbClr val="CCCCCC"/>
+                </a:solidFill>
+                <a:latin typeface="Consolas"/>
+              </a:rPr>
+              <a:t>                self.last = (s, t, b)</a:t>
+            </a:r>
+          </a:p>
+          <a:p>
+            <a:r>
+              <a:rPr sz="1000">
+                <a:solidFill>
+                  <a:srgbClr val="CCCCCC"/>
+                </a:solidFill>
+                <a:latin typeface="Consolas"/>
+              </a:rPr>
+              <a:t>                self.operator_addr = addr</a:t>
+            </a:r>
+          </a:p>
+          <a:p>
+            <a:r>
+              <a:rPr sz="1000">
+                <a:solidFill>
+                  <a:srgbClr val="CCCCCC"/>
+                </a:solidFill>
+                <a:latin typeface="Consolas"/>
+              </a:rPr>
+              <a:t>                self.packets += 1</a:t>
+            </a:r>
+          </a:p>
+          <a:p>
+            <a:r>
+              <a:rPr sz="1000">
+                <a:solidFill>
+                  <a:srgbClr val="CCCCCC"/>
+                </a:solidFill>
+                <a:latin typeface="Consolas"/>
+              </a:rPr>
+              <a:t>            except ValueError:</a:t>
+            </a:r>
+          </a:p>
+          <a:p>
+            <a:r>
+              <a:rPr sz="1000">
+                <a:solidFill>
+                  <a:srgbClr val="CCCCCC"/>
+                </a:solidFill>
+                <a:latin typeface="Consolas"/>
+              </a:rPr>
+              <a:t>                pass</a:t>
+            </a:r>
+          </a:p>
+          <a:p>
+            <a:r>
+              <a:rPr sz="1000">
+                <a:solidFill>
+                  <a:srgbClr val="CCCCCC"/>
+                </a:solidFill>
+                <a:latin typeface="Consolas"/>
+              </a:rPr>
+              <a:t>        return self.last</a:t>
+            </a:r>
+          </a:p>
+          <a:p>
+            <a:r>
+              <a:rPr sz="1000">
                 <a:solidFill>
                   <a:srgbClr val="CCCCCC"/>
                 </a:solidFill>
                 <a:latin typeface="Consolas"/>
               </a:rPr>
               <a:t> </a:t>
-            </a:r>
-          </a:p>
-          <a:p>
-            <a:r>
-              <a:rPr sz="900">
-                <a:solidFill>
-                  <a:srgbClr val="CCCCCC"/>
-                </a:solidFill>
-                <a:latin typeface="Consolas"/>
-              </a:rPr>
-              <a:t>        self.pygame = pygame</a:t>
-            </a:r>
-          </a:p>
-          <a:p>
-            <a:r>
-              <a:rPr sz="900">
-                <a:solidFill>
-                  <a:srgbClr val="CCCCCC"/>
-                </a:solidFill>
-                <a:latin typeface="Consolas"/>
-              </a:rPr>
-              <a:t>        pygame.init()</a:t>
-            </a:r>
-          </a:p>
-          <a:p>
-            <a:r>
-              <a:rPr sz="900">
-                <a:solidFill>
-                  <a:srgbClr val="CCCCCC"/>
-                </a:solidFill>
-                <a:latin typeface="Consolas"/>
-              </a:rPr>
-              <a:t>        pygame.joystick.init()</a:t>
-            </a:r>
-          </a:p>
-          <a:p>
-            <a:r>
-              <a:rPr sz="900">
-                <a:solidFill>
-                  <a:srgbClr val="CCCCCC"/>
-                </a:solidFill>
-                <a:latin typeface="Consolas"/>
-              </a:rPr>
-              <a:t>        if pygame.joystick.get_count() == 0:</a:t>
-            </a:r>
-          </a:p>
-          <a:p>
-            <a:r>
-              <a:rPr sz="900">
-                <a:solidFill>
-                  <a:srgbClr val="CCCCCC"/>
-                </a:solidFill>
-                <a:latin typeface="Consolas"/>
-              </a:rPr>
-              <a:t>            raise RuntimeError("No gamepad/wheel found. Use INPUT_SOURCE = 'udp' instead.")</a:t>
-            </a:r>
-          </a:p>
-          <a:p>
-            <a:r>
-              <a:rPr sz="900">
-                <a:solidFill>
-                  <a:srgbClr val="CCCCCC"/>
-                </a:solidFill>
-                <a:latin typeface="Consolas"/>
-              </a:rPr>
-              <a:t>        self.js = pygame.joystick.Joystick(index)</a:t>
-            </a:r>
-          </a:p>
-          <a:p>
-            <a:r>
-              <a:rPr sz="900">
-                <a:solidFill>
-                  <a:srgbClr val="CCCCCC"/>
-                </a:solidFill>
-                <a:latin typeface="Consolas"/>
-              </a:rPr>
-              <a:t>        self.js.init()</a:t>
-            </a:r>
-          </a:p>
-          <a:p>
-            <a:r>
-              <a:rPr sz="900">
-                <a:solidFill>
-                  <a:srgbClr val="CCCCCC"/>
-                </a:solidFill>
-                <a:latin typeface="Consolas"/>
-              </a:rPr>
-              <a:t>        self.ax_steer, self.ax_thr, self.ax_brk, self.inverted = self.MAPPINGS[mapping]</a:t>
-            </a:r>
-          </a:p>
-          <a:p>
-            <a:r>
-              <a:rPr sz="900">
-                <a:solidFill>
-                  <a:srgbClr val="CCCCCC"/>
-                </a:solidFill>
-                <a:latin typeface="Consolas"/>
-              </a:rPr>
-              <a:t>        print(f"[gamepad] using '{self.js.get_name()}' with mapping '{mapping}'")</a:t>
-            </a:r>
-          </a:p>
-          <a:p>
-            <a:r>
-              <a:rPr sz="900">
-                <a:solidFill>
-                  <a:srgbClr val="CCCCCC"/>
-                </a:solidFill>
-                <a:latin typeface="Consolas"/>
-              </a:rPr>
-              <a:t> </a:t>
-            </a:r>
-          </a:p>
-          <a:p>
-            <a:r>
-              <a:rPr sz="900">
-                <a:solidFill>
-                  <a:srgbClr val="CCCCCC"/>
-                </a:solidFill>
-                <a:latin typeface="Consolas"/>
-              </a:rPr>
-              <a:t>    def _pedal(self, axis):</a:t>
-            </a:r>
-          </a:p>
-          <a:p>
-            <a:r>
-              <a:rPr sz="900">
-                <a:solidFill>
-                  <a:srgbClr val="CCCCCC"/>
-                </a:solidFill>
-                <a:latin typeface="Consolas"/>
-              </a:rPr>
-              <a:t>        v = self.js.get_axis(axis)  # -1..1</a:t>
-            </a:r>
-          </a:p>
-          <a:p>
-            <a:r>
-              <a:rPr sz="900">
-                <a:solidFill>
-                  <a:srgbClr val="CCCCCC"/>
-                </a:solidFill>
-                <a:latin typeface="Consolas"/>
-              </a:rPr>
-              <a:t>        return (1.0 - v) / 2.0 if self.inverted else (v + 1.0) / 2.0</a:t>
-            </a:r>
-          </a:p>
-          <a:p>
-            <a:r>
-              <a:rPr sz="900">
-                <a:solidFill>
-                  <a:srgbClr val="CCCCCC"/>
-                </a:solidFill>
-                <a:latin typeface="Consolas"/>
-              </a:rPr>
-              <a:t> </a:t>
-            </a:r>
-          </a:p>
-          <a:p>
-            <a:r>
-              <a:rPr sz="900">
-                <a:solidFill>
-                  <a:srgbClr val="CCCCCC"/>
-                </a:solidFill>
-                <a:latin typeface="Consolas"/>
-              </a:rPr>
-              <a:t>    def poll(self):</a:t>
-            </a:r>
-          </a:p>
-          <a:p>
-            <a:r>
-              <a:rPr sz="900">
-                <a:solidFill>
-                  <a:srgbClr val="CCCCCC"/>
-                </a:solidFill>
-                <a:latin typeface="Consolas"/>
-              </a:rPr>
-              <a:t>        self.pygame.event.pump()</a:t>
-            </a:r>
-          </a:p>
-          <a:p>
-            <a:r>
-              <a:rPr sz="900">
-                <a:solidFill>
-                  <a:srgbClr val="CCCCCC"/>
-                </a:solidFill>
-                <a:latin typeface="Consolas"/>
-              </a:rPr>
-              <a:t>        steer = -self.js.get_axis(self.ax_steer)  # Chrono: +1 is steer LEFT</a:t>
-            </a:r>
-          </a:p>
-          <a:p>
-            <a:r>
-              <a:rPr sz="900">
-                <a:solidFill>
-                  <a:srgbClr val="CCCCCC"/>
-                </a:solidFill>
-                <a:latin typeface="Consolas"/>
-              </a:rPr>
-              <a:t>        if abs(steer) &lt; 0.05:</a:t>
-            </a:r>
-          </a:p>
-          <a:p>
-            <a:r>
-              <a:rPr sz="900">
-                <a:solidFill>
-                  <a:srgbClr val="CCCCCC"/>
-                </a:solidFill>
-                <a:latin typeface="Consolas"/>
-              </a:rPr>
-              <a:t>            steer = 0.0  # dead zone</a:t>
-            </a:r>
-          </a:p>
-          <a:p>
-            <a:r>
-              <a:rPr sz="900">
-                <a:solidFill>
-                  <a:srgbClr val="CCCCCC"/>
-                </a:solidFill>
-                <a:latin typeface="Consolas"/>
-              </a:rPr>
-              <a:t>        return steer, self._pedal(self.ax_thr), self._pedal(self.ax_brk)</a:t>
-            </a:r>
-          </a:p>
-          <a:p>
-            <a:r>
-              <a:rPr sz="900">
-                <a:solidFill>
-                  <a:srgbClr val="CCCCCC"/>
-                </a:solidFill>
-                <a:latin typeface="Consolas"/>
-              </a:rPr>
-              <a:t> </a:t>
-            </a:r>
-          </a:p>
-          <a:p>
-            <a:r>
-              <a:rPr sz="900">
-                <a:solidFill>
-                  <a:srgbClr val="CCCCCC"/>
-                </a:solidFill>
-                <a:latin typeface="Consolas"/>
-              </a:rPr>
-              <a:t>    def send_feedback(self, text):</a:t>
-            </a:r>
-          </a:p>
-          <a:p>
-            <a:r>
-              <a:rPr sz="900">
-                <a:solidFill>
-                  <a:srgbClr val="CCCCCC"/>
-                </a:solidFill>
-                <a:latin typeface="Consolas"/>
-              </a:rPr>
-              <a:t>        pass  # (rumble / force feedback would go here)</a:t>
             </a:r>
           </a:p>
         </p:txBody>
@@ -10518,8 +9661,8 @@
         </p:nvSpPr>
         <p:spPr>
           <a:xfrm>
-            <a:off x="400000" y="6839600"/>
-            <a:ext cx="11392000" cy="-381600"/>
+            <a:off x="400000" y="6534800"/>
+            <a:ext cx="11392000" cy="-76800"/>
           </a:xfrm>
           <a:prstGeom prst="rect">
             <a:avLst/>
@@ -10535,14 +9678,14 @@
             <a:pPr/>
             <a:r>
               <a:rPr sz="1800"/>
-              <a:t>pygame joysticks need no window, so the Irrlicht window keeps focus; run probe_gamepad.py to find your axes</a:t>
+              <a:t>Non-blocking socket, drained every step; the newest packet wins, an empty queue holds the last value</a:t>
             </a:r>
           </a:p>
           <a:p>
             <a:pPr/>
             <a:r>
               <a:rPr sz="1800"/>
-              <a:t>Set INPUT_SOURCE = "gamepad" and GAMEPAD_MAPPING = "xbox" or "g29" (Lines 386 and 406)</a:t>
+              <a:t>The operator can be anywhere on the network - and the console has no Chrono dependency at all</a:t>
             </a:r>
           </a:p>
         </p:txBody>
@@ -10633,32 +9776,20 @@
             <p:ph type="title"/>
           </p:nvPr>
         </p:nvSpPr>
-        <p:spPr/>
-        <p:txBody>
-          <a:bodyPr/>
-          <a:lstStyle/>
-          <a:p>
-            <a:r>
-              <a:t>Part 4: Close the loop - feedback to the operator</a:t>
-            </a:r>
-          </a:p>
-        </p:txBody>
-      </p:sp>
-      <p:sp>
-        <p:nvSpPr>
-          <p:cNvPr id="3" name="Text Placeholder 2"/>
-          <p:cNvSpPr>
-            <a:spLocks noGrp="1"/>
-          </p:cNvSpPr>
-          <p:nvPr>
-            <p:ph type="body" idx="1"/>
-          </p:nvPr>
-        </p:nvSpPr>
-        <p:spPr/>
-        <p:txBody>
-          <a:bodyPr/>
-          <a:lstStyle/>
-          <a:p/>
+        <p:spPr>
+          <a:xfrm>
+            <a:off x="235228" y="150000"/>
+            <a:ext cx="9875520" cy="800000"/>
+          </a:xfrm>
+        </p:spPr>
+        <p:txBody>
+          <a:bodyPr wrap="square"/>
+          <a:lstStyle/>
+          <a:p>
+            <a:r>
+              <a:t>Step 3: The operator side - operator_console.py</a:t>
+            </a:r>
+          </a:p>
         </p:txBody>
       </p:sp>
       <p:sp>
@@ -10715,6 +9846,320 @@
             <a:r>
               <a:rPr sz="1000"/>
               <a:t>31</a:t>
+            </a:r>
+          </a:p>
+        </p:txBody>
+      </p:sp>
+      <p:sp>
+        <p:nvSpPr>
+          <p:cNvPr id="6" name="TextBox 5"/>
+          <p:cNvSpPr txBox="1"/>
+          <p:nvPr/>
+        </p:nvSpPr>
+        <p:spPr>
+          <a:xfrm>
+            <a:off x="0" y="1000000"/>
+            <a:ext cx="12192000" cy="4226538"/>
+          </a:xfrm>
+          <a:prstGeom prst="rect">
+            <a:avLst/>
+          </a:prstGeom>
+          <a:solidFill>
+            <a:srgbClr val="000000"/>
+          </a:solidFill>
+        </p:spPr>
+        <p:txBody>
+          <a:bodyPr wrap="none" lIns="300000" rIns="300000">
+            <a:noAutofit/>
+          </a:bodyPr>
+          <a:lstStyle/>
+          <a:p>
+            <a:r>
+              <a:rPr sz="1200">
+                <a:solidFill>
+                  <a:srgbClr val="CCCCCC"/>
+                </a:solidFill>
+                <a:latin typeface="Consolas"/>
+              </a:rPr>
+              <a:t># --- keyboard -&gt; target inputs ------------------------------------------</a:t>
+            </a:r>
+          </a:p>
+          <a:p>
+            <a:r>
+              <a:rPr sz="1200">
+                <a:solidFill>
+                  <a:srgbClr val="CCCCCC"/>
+                </a:solidFill>
+                <a:latin typeface="Consolas"/>
+              </a:rPr>
+              <a:t>keys = pygame.key.get_pressed()</a:t>
+            </a:r>
+          </a:p>
+          <a:p>
+            <a:r>
+              <a:rPr sz="1200">
+                <a:solidFill>
+                  <a:srgbClr val="CCCCCC"/>
+                </a:solidFill>
+                <a:latin typeface="Consolas"/>
+              </a:rPr>
+              <a:t>if keys[pygame.K_LEFT]:</a:t>
+            </a:r>
+          </a:p>
+          <a:p>
+            <a:r>
+              <a:rPr sz="1200">
+                <a:solidFill>
+                  <a:srgbClr val="CCCCCC"/>
+                </a:solidFill>
+                <a:latin typeface="Consolas"/>
+              </a:rPr>
+              <a:t>    steering = min(1.0, steering + STEER_RATE * dt)     # +1 = left in Chrono</a:t>
+            </a:r>
+          </a:p>
+          <a:p>
+            <a:r>
+              <a:rPr sz="1200">
+                <a:solidFill>
+                  <a:srgbClr val="CCCCCC"/>
+                </a:solidFill>
+                <a:latin typeface="Consolas"/>
+              </a:rPr>
+              <a:t>elif keys[pygame.K_RIGHT]:</a:t>
+            </a:r>
+          </a:p>
+          <a:p>
+            <a:r>
+              <a:rPr sz="1200">
+                <a:solidFill>
+                  <a:srgbClr val="CCCCCC"/>
+                </a:solidFill>
+                <a:latin typeface="Consolas"/>
+              </a:rPr>
+              <a:t>    steering = max(-1.0, steering - STEER_RATE * dt)</a:t>
+            </a:r>
+          </a:p>
+          <a:p>
+            <a:r>
+              <a:rPr sz="1200">
+                <a:solidFill>
+                  <a:srgbClr val="CCCCCC"/>
+                </a:solidFill>
+                <a:latin typeface="Consolas"/>
+              </a:rPr>
+              <a:t>else:  # self-center</a:t>
+            </a:r>
+          </a:p>
+          <a:p>
+            <a:r>
+              <a:rPr sz="1200">
+                <a:solidFill>
+                  <a:srgbClr val="CCCCCC"/>
+                </a:solidFill>
+                <a:latin typeface="Consolas"/>
+              </a:rPr>
+              <a:t>    steering -= max(-STEER_RETURN * dt, min(STEER_RETURN * dt, steering))</a:t>
+            </a:r>
+          </a:p>
+          <a:p>
+            <a:r>
+              <a:rPr sz="1200">
+                <a:solidFill>
+                  <a:srgbClr val="CCCCCC"/>
+                </a:solidFill>
+                <a:latin typeface="Consolas"/>
+              </a:rPr>
+              <a:t>if keys[pygame.K_UP]:</a:t>
+            </a:r>
+          </a:p>
+          <a:p>
+            <a:r>
+              <a:rPr sz="1200">
+                <a:solidFill>
+                  <a:srgbClr val="CCCCCC"/>
+                </a:solidFill>
+                <a:latin typeface="Consolas"/>
+              </a:rPr>
+              <a:t>    throttle = min(1.0, throttle + PEDAL_RATE * dt)</a:t>
+            </a:r>
+          </a:p>
+          <a:p>
+            <a:r>
+              <a:rPr sz="1200">
+                <a:solidFill>
+                  <a:srgbClr val="CCCCCC"/>
+                </a:solidFill>
+                <a:latin typeface="Consolas"/>
+              </a:rPr>
+              <a:t>    braking = 0.0</a:t>
+            </a:r>
+          </a:p>
+          <a:p>
+            <a:r>
+              <a:rPr sz="1200">
+                <a:solidFill>
+                  <a:srgbClr val="CCCCCC"/>
+                </a:solidFill>
+                <a:latin typeface="Consolas"/>
+              </a:rPr>
+              <a:t>elif keys[pygame.K_DOWN]:</a:t>
+            </a:r>
+          </a:p>
+          <a:p>
+            <a:r>
+              <a:rPr sz="1200">
+                <a:solidFill>
+                  <a:srgbClr val="CCCCCC"/>
+                </a:solidFill>
+                <a:latin typeface="Consolas"/>
+              </a:rPr>
+              <a:t>    braking = min(1.0, braking + PEDAL_RATE * dt)</a:t>
+            </a:r>
+          </a:p>
+          <a:p>
+            <a:r>
+              <a:rPr sz="1200">
+                <a:solidFill>
+                  <a:srgbClr val="CCCCCC"/>
+                </a:solidFill>
+                <a:latin typeface="Consolas"/>
+              </a:rPr>
+              <a:t>    throttle = 0.0</a:t>
+            </a:r>
+          </a:p>
+          <a:p>
+            <a:r>
+              <a:rPr sz="1200">
+                <a:solidFill>
+                  <a:srgbClr val="CCCCCC"/>
+                </a:solidFill>
+                <a:latin typeface="Consolas"/>
+              </a:rPr>
+              <a:t>else:</a:t>
+            </a:r>
+          </a:p>
+          <a:p>
+            <a:r>
+              <a:rPr sz="1200">
+                <a:solidFill>
+                  <a:srgbClr val="CCCCCC"/>
+                </a:solidFill>
+                <a:latin typeface="Consolas"/>
+              </a:rPr>
+              <a:t>    throttle = max(0.0, throttle - PEDAL_RATE * dt)</a:t>
+            </a:r>
+          </a:p>
+          <a:p>
+            <a:r>
+              <a:rPr sz="1200">
+                <a:solidFill>
+                  <a:srgbClr val="CCCCCC"/>
+                </a:solidFill>
+                <a:latin typeface="Consolas"/>
+              </a:rPr>
+              <a:t>    braking = max(0.0, braking - PEDAL_RATE * dt)</a:t>
+            </a:r>
+          </a:p>
+          <a:p>
+            <a:r>
+              <a:rPr sz="1200">
+                <a:solidFill>
+                  <a:srgbClr val="CCCCCC"/>
+                </a:solidFill>
+                <a:latin typeface="Consolas"/>
+              </a:rPr>
+              <a:t>if keys[pygame.K_SPACE]:</a:t>
+            </a:r>
+          </a:p>
+          <a:p>
+            <a:r>
+              <a:rPr sz="1200">
+                <a:solidFill>
+                  <a:srgbClr val="CCCCCC"/>
+                </a:solidFill>
+                <a:latin typeface="Consolas"/>
+              </a:rPr>
+              <a:t>    steering, throttle, braking = 0.0, 0.0, 0.0</a:t>
+            </a:r>
+          </a:p>
+          <a:p>
+            <a:r>
+              <a:rPr sz="1200">
+                <a:solidFill>
+                  <a:srgbClr val="CCCCCC"/>
+                </a:solidFill>
+                <a:latin typeface="Consolas"/>
+              </a:rPr>
+              <a:t> </a:t>
+            </a:r>
+          </a:p>
+          <a:p>
+            <a:r>
+              <a:rPr sz="1200">
+                <a:solidFill>
+                  <a:srgbClr val="CCCCCC"/>
+                </a:solidFill>
+                <a:latin typeface="Consolas"/>
+              </a:rPr>
+              <a:t># --- send to the simulation ---------------------------------------------</a:t>
+            </a:r>
+          </a:p>
+          <a:p>
+            <a:r>
+              <a:rPr sz="1200">
+                <a:solidFill>
+                  <a:srgbClr val="CCCCCC"/>
+                </a:solidFill>
+                <a:latin typeface="Consolas"/>
+              </a:rPr>
+              <a:t>sock.sendto(f"{steering:.3f},{throttle:.3f},{braking:.3f}".encode(), (SIM_HOST, SIM_PORT))</a:t>
+            </a:r>
+          </a:p>
+        </p:txBody>
+      </p:sp>
+      <p:sp>
+        <p:nvSpPr>
+          <p:cNvPr id="7" name="TextBox 6"/>
+          <p:cNvSpPr txBox="1"/>
+          <p:nvPr/>
+        </p:nvSpPr>
+        <p:spPr>
+          <a:xfrm>
+            <a:off x="400000" y="5376538"/>
+            <a:ext cx="11392000" cy="900000"/>
+          </a:xfrm>
+          <a:prstGeom prst="rect">
+            <a:avLst/>
+          </a:prstGeom>
+          <a:noFill/>
+        </p:spPr>
+        <p:txBody>
+          <a:bodyPr wrap="square">
+            <a:spAutoFit/>
+          </a:bodyPr>
+          <a:lstStyle/>
+          <a:p>
+            <a:pPr/>
+            <a:r>
+              <a:rPr sz="1800"/>
+              <a:t>A pygame window: hold the arrow keys, send </a:t>
+            </a:r>
+            <a:r>
+              <a:rPr sz="1600">
+                <a:latin typeface="Consolas"/>
+              </a:rPr>
+              <a:t>steering,throttle,braking</a:t>
+            </a:r>
+            <a:r>
+              <a:rPr sz="1800"/>
+              <a:t> at 50 Hz</a:t>
+            </a:r>
+          </a:p>
+          <a:p>
+            <a:pPr/>
+            <a:r>
+              <a:rPr sz="1800"/>
+              <a:t>Swap this for a web page, a ROS node, or a driving-simulator cockpit - the sim does not care</a:t>
             </a:r>
           </a:p>
         </p:txBody>
@@ -10759,7 +10204,7 @@
           <a:p>
             <a:r>
               <a:rPr sz="2600"/>
-              <a:t>Step 1: Send state back at render rate (Lines 362 to 367)</a:t>
+              <a:t>Step 4: Plug the device into a plain ChDriver (Lines 318 to 327)</a:t>
             </a:r>
           </a:p>
         </p:txBody>
@@ -10773,7 +10218,7 @@
         <p:spPr>
           <a:xfrm>
             <a:off x="0" y="1050000"/>
-            <a:ext cx="12192000" cy="1483360"/>
+            <a:ext cx="12192000" cy="2763520"/>
           </a:xfrm>
           <a:prstGeom prst="rect">
             <a:avLst/>
@@ -10789,68 +10234,112 @@
           <a:lstStyle/>
           <a:p>
             <a:r>
-              <a:rPr sz="1400">
-                <a:solidFill>
-                  <a:srgbClr val="CCCCCC"/>
-                </a:solidFill>
-                <a:latin typeface="Consolas"/>
-              </a:rPr>
-              <a:t># PART 4: feedback to the operator (speed, RTF, lateral acceleration, applied inputs)</a:t>
-            </a:r>
-          </a:p>
-          <a:p>
-            <a:r>
-              <a:rPr sz="1400">
-                <a:solidFill>
-                  <a:srgbClr val="CCCCCC"/>
-                </a:solidFill>
-                <a:latin typeface="Consolas"/>
-              </a:rPr>
-              <a:t>if SEND_FEEDBACK and device is not None and step_number % render_steps == 0:</a:t>
-            </a:r>
-          </a:p>
-          <a:p>
-            <a:r>
-              <a:rPr sz="1400">
-                <a:solidFill>
-                  <a:srgbClr val="CCCCCC"/>
-                </a:solidFill>
-                <a:latin typeface="Consolas"/>
-              </a:rPr>
-              <a:t>    acc = vehicle.GetPointAcceleration(chrono.ChVector3d(0, 0, 0))</a:t>
-            </a:r>
-          </a:p>
-          <a:p>
-            <a:r>
-              <a:rPr sz="1400">
-                <a:solidFill>
-                  <a:srgbClr val="CCCCCC"/>
-                </a:solidFill>
-                <a:latin typeface="Consolas"/>
-              </a:rPr>
-              <a:t>    device.send_feedback(f"{sim_time:.3f},{vehicle.GetSpeed():.3f},{vehicle.GetRTF():.3f},{acc.y:.3f},"</a:t>
-            </a:r>
-          </a:p>
-          <a:p>
-            <a:r>
-              <a:rPr sz="1400">
-                <a:solidFill>
-                  <a:srgbClr val="CCCCCC"/>
-                </a:solidFill>
-                <a:latin typeface="Consolas"/>
-              </a:rPr>
-              <a:t>                         f"{driver_inputs.m_steering:.3f},{driver_inputs.m_throttle:.3f},{driver_inputs.m_braking:.3f}")</a:t>
-            </a:r>
-          </a:p>
-          <a:p>
-            <a:r>
-              <a:rPr sz="1400">
+              <a:rPr sz="1000">
+                <a:solidFill>
+                  <a:srgbClr val="CCCCCC"/>
+                </a:solidFill>
+                <a:latin typeface="Consolas"/>
+              </a:rPr>
+              <a:t>else:</a:t>
+            </a:r>
+          </a:p>
+          <a:p>
+            <a:r>
+              <a:rPr sz="1000">
+                <a:solidFill>
+                  <a:srgbClr val="CCCCCC"/>
+                </a:solidFill>
+                <a:latin typeface="Consolas"/>
+              </a:rPr>
+              <a:t>    ### PART 4: a device Chrono doesn't know about writes into a plain ChDriver ###</a:t>
+            </a:r>
+          </a:p>
+          <a:p>
+            <a:r>
+              <a:rPr sz="1000">
+                <a:solidFill>
+                  <a:srgbClr val="CCCCCC"/>
+                </a:solidFill>
+                <a:latin typeface="Consolas"/>
+              </a:rPr>
+              <a:t>    driver = veh.ChDriver(vehicle)</a:t>
+            </a:r>
+          </a:p>
+          <a:p>
+            <a:r>
+              <a:rPr sz="1000">
+                <a:solidFill>
+                  <a:srgbClr val="CCCCCC"/>
+                </a:solidFill>
+                <a:latin typeface="Consolas"/>
+              </a:rPr>
+              <a:t>    if INPUT_SOURCE == "udp":</a:t>
+            </a:r>
+          </a:p>
+          <a:p>
+            <a:r>
+              <a:rPr sz="1000">
+                <a:solidFill>
+                  <a:srgbClr val="CCCCCC"/>
+                </a:solidFill>
+                <a:latin typeface="Consolas"/>
+              </a:rPr>
+              <a:t>        device = UdpInput(port=UDP_PORT)</a:t>
+            </a:r>
+          </a:p>
+          <a:p>
+            <a:r>
+              <a:rPr sz="1000">
+                <a:solidFill>
+                  <a:srgbClr val="CCCCCC"/>
+                </a:solidFill>
+                <a:latin typeface="Consolas"/>
+              </a:rPr>
+              <a:t>    else:</a:t>
+            </a:r>
+          </a:p>
+          <a:p>
+            <a:r>
+              <a:rPr sz="1000">
+                <a:solidFill>
+                  <a:srgbClr val="CCCCCC"/>
+                </a:solidFill>
+                <a:latin typeface="Consolas"/>
+              </a:rPr>
+              <a:t>        raise ValueError(f"unknown INPUT_SOURCE {INPUT_SOURCE!r}")</a:t>
+            </a:r>
+          </a:p>
+          <a:p>
+            <a:r>
+              <a:rPr sz="1000">
+                <a:solidFill>
+                  <a:srgbClr val="CCCCCC"/>
+                </a:solidFill>
+                <a:latin typeface="Consolas"/>
+              </a:rPr>
+              <a:t>    smoother = SmoothedInputs(gain=4.0)</a:t>
+            </a:r>
+          </a:p>
+          <a:p>
+            <a:r>
+              <a:rPr sz="1000">
                 <a:solidFill>
                   <a:srgbClr val="CCCCCC"/>
                 </a:solidFill>
                 <a:latin typeface="Consolas"/>
               </a:rPr>
               <a:t> </a:t>
+            </a:r>
+          </a:p>
+          <a:p>
+            <a:r>
+              <a:rPr sz="1000">
+                <a:solidFill>
+                  <a:srgbClr val="CCCCCC"/>
+                </a:solidFill>
+                <a:latin typeface="Consolas"/>
+              </a:rPr>
+              <a:t>driver.Initialize()</a:t>
             </a:r>
           </a:p>
         </p:txBody>
@@ -10863,8 +10352,8 @@
         </p:nvSpPr>
         <p:spPr>
           <a:xfrm>
-            <a:off x="400000" y="2633360"/>
-            <a:ext cx="11392000" cy="3824640"/>
+            <a:off x="400000" y="3913520"/>
+            <a:ext cx="11392000" cy="2544480"/>
           </a:xfrm>
           <a:prstGeom prst="rect">
             <a:avLst/>
@@ -10880,14 +10369,7 @@
             <a:pPr/>
             <a:r>
               <a:rPr sz="1800"/>
-              <a:t>Speed, RTF and lateral acceleration go back to whoever sent us inputs (UdpInput remembers the address)</a:t>
-            </a:r>
-          </a:p>
-          <a:p>
-            <a:pPr/>
-            <a:r>
-              <a:rPr sz="1800"/>
-              <a:t>Send at render rate (50 Hz), not at every physics step - the human cannot use 333 Hz</a:t>
+              <a:t>No AttachDriver here - the Irrlicht window keeps the keyboard, our device owns the inputs</a:t>
             </a:r>
           </a:p>
         </p:txBody>
@@ -10989,79 +10471,22 @@
           <a:lstStyle/>
           <a:p>
             <a:r>
-              <a:t>Step 2: Show it on the console - operator_console.py</a:t>
-            </a:r>
-          </a:p>
-        </p:txBody>
-      </p:sp>
-      <p:sp>
-        <p:nvSpPr>
-          <p:cNvPr id="4" name="TextBox 3"/>
+              <a:rPr sz="2600"/>
+              <a:t>Step 5: Sample once per step, then hold (Lines 384 to 393)</a:t>
+            </a:r>
+          </a:p>
+        </p:txBody>
+      </p:sp>
+      <p:sp>
+        <p:nvSpPr>
+          <p:cNvPr id="3" name="TextBox 2"/>
           <p:cNvSpPr txBox="1"/>
           <p:nvPr/>
         </p:nvSpPr>
         <p:spPr>
           <a:xfrm>
-            <a:off x="310974" y="6645811"/>
-            <a:ext cx="11644805" cy="188527"/>
-          </a:xfrm>
-          <a:prstGeom prst="rect">
-            <a:avLst/>
-          </a:prstGeom>
-          <a:noFill/>
-        </p:spPr>
-        <p:txBody>
-          <a:bodyPr wrap="none">
-            <a:spAutoFit/>
-          </a:bodyPr>
-          <a:lstStyle/>
-          <a:p>
-            <a:r>
-              <a:rPr sz="1000"/>
-              <a:t>University of Wisconsin - Madison</a:t>
-            </a:r>
-          </a:p>
-        </p:txBody>
-      </p:sp>
-      <p:sp>
-        <p:nvSpPr>
-          <p:cNvPr id="5" name="TextBox 4"/>
-          <p:cNvSpPr txBox="1"/>
-          <p:nvPr/>
-        </p:nvSpPr>
-        <p:spPr>
-          <a:xfrm>
-            <a:off x="10249563" y="6646310"/>
-            <a:ext cx="1706217" cy="188028"/>
-          </a:xfrm>
-          <a:prstGeom prst="rect">
-            <a:avLst/>
-          </a:prstGeom>
-          <a:noFill/>
-        </p:spPr>
-        <p:txBody>
-          <a:bodyPr wrap="none">
-            <a:spAutoFit/>
-          </a:bodyPr>
-          <a:lstStyle/>
-          <a:p>
-            <a:r>
-              <a:rPr sz="1000"/>
-              <a:t>33</a:t>
-            </a:r>
-          </a:p>
-        </p:txBody>
-      </p:sp>
-      <p:sp>
-        <p:nvSpPr>
-          <p:cNvPr id="6" name="TextBox 5"/>
-          <p:cNvSpPr txBox="1"/>
-          <p:nvPr/>
-        </p:nvSpPr>
-        <p:spPr>
-          <a:xfrm>
-            <a:off x="0" y="1000000"/>
-            <a:ext cx="12192000" cy="1696720"/>
+            <a:off x="0" y="1050000"/>
+            <a:ext cx="12192000" cy="2336800"/>
           </a:xfrm>
           <a:prstGeom prst="rect">
             <a:avLst/>
@@ -11077,107 +10502,204 @@
           <a:lstStyle/>
           <a:p>
             <a:r>
-              <a:rPr sz="1400">
-                <a:solidFill>
-                  <a:srgbClr val="CCCCCC"/>
-                </a:solidFill>
-                <a:latin typeface="Consolas"/>
-              </a:rPr>
-              <a:t># --- PART 4: receive telemetry ------------------------------------------</a:t>
-            </a:r>
-          </a:p>
-          <a:p>
-            <a:r>
-              <a:rPr sz="1400">
-                <a:solidFill>
-                  <a:srgbClr val="CCCCCC"/>
-                </a:solidFill>
-                <a:latin typeface="Consolas"/>
-              </a:rPr>
-              <a:t>while True:</a:t>
-            </a:r>
-          </a:p>
-          <a:p>
-            <a:r>
-              <a:rPr sz="1400">
-                <a:solidFill>
-                  <a:srgbClr val="CCCCCC"/>
-                </a:solidFill>
-                <a:latin typeface="Consolas"/>
-              </a:rPr>
-              <a:t>    try:</a:t>
-            </a:r>
-          </a:p>
-          <a:p>
-            <a:r>
-              <a:rPr sz="1400">
-                <a:solidFill>
-                  <a:srgbClr val="CCCCCC"/>
-                </a:solidFill>
-                <a:latin typeface="Consolas"/>
-              </a:rPr>
-              <a:t>        data, _ = sock.recvfrom(256)</a:t>
-            </a:r>
-          </a:p>
-          <a:p>
-            <a:r>
-              <a:rPr sz="1400">
-                <a:solidFill>
-                  <a:srgbClr val="CCCCCC"/>
-                </a:solidFill>
-                <a:latin typeface="Consolas"/>
-              </a:rPr>
-              <a:t>        telemetry = tuple(float(x) for x in data.decode().split(","))</a:t>
-            </a:r>
-          </a:p>
-          <a:p>
-            <a:r>
-              <a:rPr sz="1400">
-                <a:solidFill>
-                  <a:srgbClr val="CCCCCC"/>
-                </a:solidFill>
-                <a:latin typeface="Consolas"/>
-              </a:rPr>
-              <a:t>        # (sim time, speed, RTF, lateral acc, applied steering, throttle, braking)</a:t>
-            </a:r>
-          </a:p>
-          <a:p>
-            <a:r>
-              <a:rPr sz="1400">
-                <a:solidFill>
-                  <a:srgbClr val="CCCCCC"/>
-                </a:solidFill>
-                <a:latin typeface="Consolas"/>
-              </a:rPr>
-              <a:t>    except (BlockingIOError, ValueError):</a:t>
-            </a:r>
-          </a:p>
-        </p:txBody>
-      </p:sp>
-      <p:pic>
-        <p:nvPicPr>
-          <p:cNvPr id="7" name="Picture 6" descr="operator_console.png"/>
-          <p:cNvPicPr>
-            <a:picLocks noChangeAspect="1"/>
-          </p:cNvPicPr>
+              <a:rPr sz="1000">
+                <a:solidFill>
+                  <a:srgbClr val="CCCCCC"/>
+                </a:solidFill>
+                <a:latin typeface="Consolas"/>
+              </a:rPr>
+              <a:t> </a:t>
+            </a:r>
+          </a:p>
+          <a:p>
+            <a:r>
+              <a:rPr sz="1000">
+                <a:solidFill>
+                  <a:srgbClr val="CCCCCC"/>
+                </a:solidFill>
+                <a:latin typeface="Consolas"/>
+              </a:rPr>
+              <a:t># PART 4: sample the device ONCE per step and hold it for the step</a:t>
+            </a:r>
+          </a:p>
+          <a:p>
+            <a:r>
+              <a:rPr sz="1000">
+                <a:solidFill>
+                  <a:srgbClr val="CCCCCC"/>
+                </a:solidFill>
+                <a:latin typeface="Consolas"/>
+              </a:rPr>
+              <a:t>if device is not None:</a:t>
+            </a:r>
+          </a:p>
+          <a:p>
+            <a:r>
+              <a:rPr sz="1000">
+                <a:solidFill>
+                  <a:srgbClr val="CCCCCC"/>
+                </a:solidFill>
+                <a:latin typeface="Consolas"/>
+              </a:rPr>
+              <a:t>    smoother.set_target(*device.poll())</a:t>
+            </a:r>
+          </a:p>
+          <a:p>
+            <a:r>
+              <a:rPr sz="1000">
+                <a:solidFill>
+                  <a:srgbClr val="CCCCCC"/>
+                </a:solidFill>
+                <a:latin typeface="Consolas"/>
+              </a:rPr>
+              <a:t>    smoother.advance(step_size)</a:t>
+            </a:r>
+          </a:p>
+          <a:p>
+            <a:r>
+              <a:rPr sz="1000">
+                <a:solidFill>
+                  <a:srgbClr val="CCCCCC"/>
+                </a:solidFill>
+                <a:latin typeface="Consolas"/>
+              </a:rPr>
+              <a:t>    smoother.apply_to(driver)</a:t>
+            </a:r>
+          </a:p>
+          <a:p>
+            <a:r>
+              <a:rPr sz="1000">
+                <a:solidFill>
+                  <a:srgbClr val="CCCCCC"/>
+                </a:solidFill>
+                <a:latin typeface="Consolas"/>
+              </a:rPr>
+              <a:t> </a:t>
+            </a:r>
+          </a:p>
+          <a:p>
+            <a:r>
+              <a:rPr sz="1000">
+                <a:solidFill>
+                  <a:srgbClr val="CCCCCC"/>
+                </a:solidFill>
+                <a:latin typeface="Consolas"/>
+              </a:rPr>
+              <a:t># Get driver inputs (three floats) - this is the whole HIL contract</a:t>
+            </a:r>
+          </a:p>
+          <a:p>
+            <a:r>
+              <a:rPr sz="1000">
+                <a:solidFill>
+                  <a:srgbClr val="CCCCCC"/>
+                </a:solidFill>
+                <a:latin typeface="Consolas"/>
+              </a:rPr>
+              <a:t>driver_inputs = driver.GetInputs()</a:t>
+            </a:r>
+          </a:p>
+          <a:p>
+            <a:r>
+              <a:rPr sz="1000">
+                <a:solidFill>
+                  <a:srgbClr val="CCCCCC"/>
+                </a:solidFill>
+                <a:latin typeface="Consolas"/>
+              </a:rPr>
+              <a:t> </a:t>
+            </a:r>
+          </a:p>
+        </p:txBody>
+      </p:sp>
+      <p:sp>
+        <p:nvSpPr>
+          <p:cNvPr id="4" name="TextBox 3"/>
+          <p:cNvSpPr txBox="1"/>
           <p:nvPr/>
-        </p:nvPicPr>
-        <p:blipFill>
-          <a:blip r:embed="rId2"/>
-          <a:stretch>
-            <a:fillRect/>
-          </a:stretch>
-        </p:blipFill>
-        <p:spPr>
-          <a:xfrm>
-            <a:off x="3800000" y="3400000"/>
-            <a:ext cx="4580682" cy="2900000"/>
+        </p:nvSpPr>
+        <p:spPr>
+          <a:xfrm>
+            <a:off x="400000" y="3486800"/>
+            <a:ext cx="11392000" cy="2971200"/>
           </a:xfrm>
           <a:prstGeom prst="rect">
             <a:avLst/>
           </a:prstGeom>
-        </p:spPr>
-      </p:pic>
+          <a:noFill/>
+        </p:spPr>
+        <p:txBody>
+          <a:bodyPr wrap="square">
+            <a:spAutoFit/>
+          </a:bodyPr>
+          <a:lstStyle/>
+          <a:p>
+            <a:pPr/>
+            <a:r>
+              <a:rPr sz="1800"/>
+              <a:t>poll -&gt; smooth -&gt; write, then GetInputs() as before; the physics loop never waits on the device</a:t>
+            </a:r>
+          </a:p>
+        </p:txBody>
+      </p:sp>
+      <p:sp>
+        <p:nvSpPr>
+          <p:cNvPr id="5" name="TextBox 4"/>
+          <p:cNvSpPr txBox="1"/>
+          <p:nvPr/>
+        </p:nvSpPr>
+        <p:spPr>
+          <a:xfrm>
+            <a:off x="310974" y="6645811"/>
+            <a:ext cx="11644805" cy="188527"/>
+          </a:xfrm>
+          <a:prstGeom prst="rect">
+            <a:avLst/>
+          </a:prstGeom>
+          <a:noFill/>
+        </p:spPr>
+        <p:txBody>
+          <a:bodyPr wrap="none">
+            <a:spAutoFit/>
+          </a:bodyPr>
+          <a:lstStyle/>
+          <a:p>
+            <a:r>
+              <a:rPr sz="1000"/>
+              <a:t>University of Wisconsin - Madison</a:t>
+            </a:r>
+          </a:p>
+        </p:txBody>
+      </p:sp>
+      <p:sp>
+        <p:nvSpPr>
+          <p:cNvPr id="6" name="TextBox 5"/>
+          <p:cNvSpPr txBox="1"/>
+          <p:nvPr/>
+        </p:nvSpPr>
+        <p:spPr>
+          <a:xfrm>
+            <a:off x="10249563" y="6646310"/>
+            <a:ext cx="1706217" cy="188028"/>
+          </a:xfrm>
+          <a:prstGeom prst="rect">
+            <a:avLst/>
+          </a:prstGeom>
+          <a:noFill/>
+        </p:spPr>
+        <p:txBody>
+          <a:bodyPr wrap="none">
+            <a:spAutoFit/>
+          </a:bodyPr>
+          <a:lstStyle/>
+          <a:p>
+            <a:r>
+              <a:rPr sz="1000"/>
+              <a:t>33</a:t>
+            </a:r>
+          </a:p>
+        </p:txBody>
+      </p:sp>
     </p:spTree>
   </p:cSld>
   <p:clrMapOvr>
@@ -11241,21 +10763,54 @@
             <a:pPr/>
             <a:r>
               <a:rPr sz="2000"/>
-              <a:t>Set SEND_FEEDBACK = True (Line 392)</a:t>
+              <a:t>Set INPUT_SOURCE = "udp" (Line 386), keep REALTIME = "vehicle"</a:t>
             </a:r>
           </a:p>
           <a:p>
             <a:pPr/>
             <a:r>
               <a:rPr sz="2000"/>
-              <a:t>Restart both scripts; the console now shows speed, sim time, RTF and lateral acceleration</a:t>
+              <a:t>Terminal 1: </a:t>
+            </a:r>
+            <a:r>
+              <a:rPr sz="1800">
+                <a:latin typeface="Consolas"/>
+              </a:rPr>
+              <a:t>python tutorial_HIL_driver.py</a:t>
             </a:r>
           </a:p>
           <a:p>
             <a:pPr/>
             <a:r>
               <a:rPr sz="2000"/>
-              <a:t>With a wheel: this is where force feedback torque would be computed from the lateral acceleration</a:t>
+              <a:t>Terminal 2: </a:t>
+            </a:r>
+            <a:r>
+              <a:rPr sz="1800">
+                <a:latin typeface="Consolas"/>
+              </a:rPr>
+              <a:t>python operator_console.py</a:t>
+            </a:r>
+            <a:r>
+              <a:rPr sz="2000"/>
+              <a:t> (or </a:t>
+            </a:r>
+            <a:r>
+              <a:rPr sz="1800">
+                <a:latin typeface="Consolas"/>
+              </a:rPr>
+              <a:t>python operator_console.py &lt;ip of terminal 1&gt;</a:t>
+            </a:r>
+            <a:r>
+              <a:rPr sz="2000"/>
+              <a:t> from another laptop)</a:t>
+            </a:r>
+          </a:p>
+          <a:p>
+            <a:pPr/>
+            <a:r>
+              <a:rPr sz="2000"/>
+              <a:t>Click the operator console window and drive with the arrow keys</a:t>
             </a:r>
           </a:p>
         </p:txBody>
@@ -11377,7 +10932,20 @@
         <p:txBody>
           <a:bodyPr wrap="square"/>
           <a:lstStyle/>
-          <a:p/>
+          <a:p>
+            <a:pPr/>
+            <a:r>
+              <a:rPr sz="2000"/>
+              <a:t>Pair up: one laptop runs the sim, the other runs the console and drives it over Wi-Fi</a:t>
+            </a:r>
+          </a:p>
+          <a:p>
+            <a:pPr/>
+            <a:r>
+              <a:rPr sz="2000"/>
+              <a:t>Stop the console mid-drive: the last input is held - what should a real simulator do here?</a:t>
+            </a:r>
+          </a:p>
         </p:txBody>
       </p:sp>
       <p:sp>
@@ -11438,30 +11006,6 @@
           </a:p>
         </p:txBody>
       </p:sp>
-      <p:pic>
-        <p:nvPicPr>
-          <p:cNvPr id="6" name="Picture 5" descr="showtime_udp.png"/>
-          <p:cNvPicPr>
-            <a:picLocks noChangeAspect="1"/>
-          </p:cNvPicPr>
-          <p:nvPr/>
-        </p:nvPicPr>
-        <p:blipFill>
-          <a:blip r:embed="rId2"/>
-          <a:stretch>
-            <a:fillRect/>
-          </a:stretch>
-        </p:blipFill>
-        <p:spPr>
-          <a:xfrm>
-            <a:off x="2500000" y="2300000"/>
-            <a:ext cx="6119617" cy="4000000"/>
-          </a:xfrm>
-          <a:prstGeom prst="rect">
-            <a:avLst/>
-          </a:prstGeom>
-        </p:spPr>
-      </p:pic>
     </p:spTree>
   </p:cSld>
   <p:clrMapOvr>
@@ -11502,86 +11046,98 @@
           <a:p>
             <a:r>
               <a:rPr sz="2600"/>
-              <a:t>Where this goes next</a:t>
-            </a:r>
-          </a:p>
-        </p:txBody>
-      </p:sp>
-      <p:sp>
-        <p:nvSpPr>
-          <p:cNvPr id="3" name="Content Placeholder 2"/>
-          <p:cNvSpPr>
-            <a:spLocks noGrp="1"/>
-          </p:cNvSpPr>
-          <p:nvPr>
-            <p:ph idx="1"/>
-          </p:nvPr>
-        </p:nvSpPr>
-        <p:spPr/>
-        <p:txBody>
-          <a:bodyPr wrap="square"/>
-          <a:lstStyle/>
-          <a:p>
-            <a:pPr/>
-            <a:r>
-              <a:rPr sz="2000"/>
-              <a:t>Chrono::HIL (github.com/zzhou292/chrono-HIL): the same three-float interface, scaled up</a:t>
-            </a:r>
-          </a:p>
-          <a:p>
-            <a:pPr lvl="1"/>
-            <a:r>
-              <a:rPr sz="1800"/>
-              <a:t>SDL steering wheels with force feedback, cumulative real-time timer, multi-vehicle traffic</a:t>
-            </a:r>
-          </a:p>
-          <a:p>
-            <a:pPr lvl="1"/>
-            <a:r>
-              <a:rPr sz="1800"/>
-              <a:t>ROS 2 and Unity bridges, teleoperation over the network, deformable (SCM) terrain</a:t>
-            </a:r>
-          </a:p>
-          <a:p>
-            <a:pPr/>
-            <a:r>
-              <a:rPr sz="2000"/>
-              <a:t>Chrono::Sensor: cameras/lidar rendered from the vehicle for the operator's screen</a:t>
-            </a:r>
-          </a:p>
-          <a:p>
-            <a:pPr/>
-            <a:r>
-              <a:rPr sz="2000"/>
-              <a:t>Chrono::Synchrono: several humans in the same world, each on their own machine</a:t>
-            </a:r>
-          </a:p>
-          <a:p>
-            <a:pPr/>
-            <a:r>
-              <a:rPr sz="2000"/>
-              <a:t>Takeaways</a:t>
-            </a:r>
-          </a:p>
-          <a:p>
-            <a:pPr lvl="1"/>
-            <a:r>
-              <a:rPr sz="1800"/>
-              <a:t>Real time in Chrono is soft: spin once per step, and measure the drift</a:t>
-            </a:r>
-          </a:p>
-          <a:p>
-            <a:pPr lvl="1"/>
-            <a:r>
-              <a:rPr sz="1800"/>
-              <a:t>The human interface is three floats per step, sampled once and smoothed</a:t>
-            </a:r>
-          </a:p>
-          <a:p>
-            <a:pPr lvl="1"/>
-            <a:r>
-              <a:rPr sz="1800"/>
-              <a:t>Never let the input device block the physics loop</a:t>
+              <a:t>Step 1: Send state back at render rate (Lines 413 to 417)</a:t>
+            </a:r>
+          </a:p>
+        </p:txBody>
+      </p:sp>
+      <p:sp>
+        <p:nvSpPr>
+          <p:cNvPr id="3" name="TextBox 2"/>
+          <p:cNvSpPr txBox="1"/>
+          <p:nvPr/>
+        </p:nvSpPr>
+        <p:spPr>
+          <a:xfrm>
+            <a:off x="0" y="1050000"/>
+            <a:ext cx="12192000" cy="1483360"/>
+          </a:xfrm>
+          <a:prstGeom prst="rect">
+            <a:avLst/>
+          </a:prstGeom>
+          <a:solidFill>
+            <a:srgbClr val="000000"/>
+          </a:solidFill>
+        </p:spPr>
+        <p:txBody>
+          <a:bodyPr wrap="none" lIns="300000" rIns="300000">
+            <a:noAutofit/>
+          </a:bodyPr>
+          <a:lstStyle/>
+          <a:p>
+            <a:r>
+              <a:rPr sz="1400">
+                <a:solidFill>
+                  <a:srgbClr val="CCCCCC"/>
+                </a:solidFill>
+                <a:latin typeface="Consolas"/>
+              </a:rPr>
+              <a:t># PART 4: feedback to the operator (speed, RTF, lateral acceleration, applied inputs)</a:t>
+            </a:r>
+          </a:p>
+          <a:p>
+            <a:r>
+              <a:rPr sz="1400">
+                <a:solidFill>
+                  <a:srgbClr val="CCCCCC"/>
+                </a:solidFill>
+                <a:latin typeface="Consolas"/>
+              </a:rPr>
+              <a:t>if SEND_FEEDBACK and device is not None and step_number % render_steps == 0:</a:t>
+            </a:r>
+          </a:p>
+          <a:p>
+            <a:r>
+              <a:rPr sz="1400">
+                <a:solidFill>
+                  <a:srgbClr val="CCCCCC"/>
+                </a:solidFill>
+                <a:latin typeface="Consolas"/>
+              </a:rPr>
+              <a:t>    acc = vehicle.GetPointAcceleration(chrono.ChVector3d(0, 0, 0))</a:t>
+            </a:r>
+          </a:p>
+          <a:p>
+            <a:r>
+              <a:rPr sz="1400">
+                <a:solidFill>
+                  <a:srgbClr val="CCCCCC"/>
+                </a:solidFill>
+                <a:latin typeface="Consolas"/>
+              </a:rPr>
+              <a:t>    device.send_feedback(f"{sim_time:.3f},{vehicle.GetSpeed():.3f},{vehicle.GetRTF():.3f},{acc.y:.3f},"</a:t>
+            </a:r>
+          </a:p>
+          <a:p>
+            <a:r>
+              <a:rPr sz="1400">
+                <a:solidFill>
+                  <a:srgbClr val="CCCCCC"/>
+                </a:solidFill>
+                <a:latin typeface="Consolas"/>
+              </a:rPr>
+              <a:t>                         f"{driver_inputs.m_steering:.3f},{driver_inputs.m_throttle:.3f},{driver_inputs.m_braking:.3f}")</a:t>
+            </a:r>
+          </a:p>
+          <a:p>
+            <a:r>
+              <a:rPr sz="1400">
+                <a:solidFill>
+                  <a:srgbClr val="CCCCCC"/>
+                </a:solidFill>
+                <a:latin typeface="Consolas"/>
+              </a:rPr>
+              <a:t> </a:t>
             </a:r>
           </a:p>
         </p:txBody>
@@ -11594,8 +11150,8 @@
         </p:nvSpPr>
         <p:spPr>
           <a:xfrm>
-            <a:off x="310974" y="6645811"/>
-            <a:ext cx="11644805" cy="188527"/>
+            <a:off x="400000" y="2633360"/>
+            <a:ext cx="11392000" cy="3824640"/>
           </a:xfrm>
           <a:prstGeom prst="rect">
             <a:avLst/>
@@ -11603,14 +11159,22 @@
           <a:noFill/>
         </p:spPr>
         <p:txBody>
-          <a:bodyPr wrap="none">
+          <a:bodyPr wrap="square">
             <a:spAutoFit/>
           </a:bodyPr>
           <a:lstStyle/>
           <a:p>
-            <a:r>
-              <a:rPr sz="1000"/>
-              <a:t>University of Wisconsin - Madison</a:t>
+            <a:pPr/>
+            <a:r>
+              <a:rPr sz="1800"/>
+              <a:t>Speed, RTF and lateral acceleration go back to whoever sent us inputs (UdpInput remembers the address)</a:t>
+            </a:r>
+          </a:p>
+          <a:p>
+            <a:pPr/>
+            <a:r>
+              <a:rPr sz="1800"/>
+              <a:t>Send at render rate (50 Hz), not at every physics step - the human cannot use 333 Hz</a:t>
             </a:r>
           </a:p>
         </p:txBody>
@@ -11623,8 +11187,8 @@
         </p:nvSpPr>
         <p:spPr>
           <a:xfrm>
-            <a:off x="10249563" y="6646310"/>
-            <a:ext cx="1706217" cy="188028"/>
+            <a:off x="310974" y="6645811"/>
+            <a:ext cx="11644805" cy="188527"/>
           </a:xfrm>
           <a:prstGeom prst="rect">
             <a:avLst/>
@@ -11639,7 +11203,36 @@
           <a:p>
             <a:r>
               <a:rPr sz="1000"/>
-              <a:t>42</a:t>
+              <a:t>University of Wisconsin - Madison</a:t>
+            </a:r>
+          </a:p>
+        </p:txBody>
+      </p:sp>
+      <p:sp>
+        <p:nvSpPr>
+          <p:cNvPr id="6" name="TextBox 5"/>
+          <p:cNvSpPr txBox="1"/>
+          <p:nvPr/>
+        </p:nvSpPr>
+        <p:spPr>
+          <a:xfrm>
+            <a:off x="10249563" y="6646310"/>
+            <a:ext cx="1706217" cy="188028"/>
+          </a:xfrm>
+          <a:prstGeom prst="rect">
+            <a:avLst/>
+          </a:prstGeom>
+          <a:noFill/>
+        </p:spPr>
+        <p:txBody>
+          <a:bodyPr wrap="none">
+            <a:spAutoFit/>
+          </a:bodyPr>
+          <a:lstStyle/>
+          <a:p>
+            <a:r>
+              <a:rPr sz="1000"/>
+              <a:t>36</a:t>
             </a:r>
           </a:p>
         </p:txBody>
@@ -11672,32 +11265,20 @@
             <p:ph type="title"/>
           </p:nvPr>
         </p:nvSpPr>
-        <p:spPr/>
-        <p:txBody>
-          <a:bodyPr/>
-          <a:lstStyle/>
-          <a:p>
-            <a:r>
-              <a:t>Any questions?</a:t>
-            </a:r>
-          </a:p>
-        </p:txBody>
-      </p:sp>
-      <p:sp>
-        <p:nvSpPr>
-          <p:cNvPr id="3" name="Text Placeholder 2"/>
-          <p:cNvSpPr>
-            <a:spLocks noGrp="1"/>
-          </p:cNvSpPr>
-          <p:nvPr>
-            <p:ph type="body" idx="1"/>
-          </p:nvPr>
-        </p:nvSpPr>
-        <p:spPr/>
-        <p:txBody>
-          <a:bodyPr/>
-          <a:lstStyle/>
-          <a:p/>
+        <p:spPr>
+          <a:xfrm>
+            <a:off x="235228" y="150000"/>
+            <a:ext cx="9875520" cy="800000"/>
+          </a:xfrm>
+        </p:spPr>
+        <p:txBody>
+          <a:bodyPr wrap="square"/>
+          <a:lstStyle/>
+          <a:p>
+            <a:r>
+              <a:t>Step 2: Show it on the console - operator_console.py</a:t>
+            </a:r>
+          </a:p>
         </p:txBody>
       </p:sp>
       <p:sp>
@@ -11753,7 +11334,109 @@
           <a:p>
             <a:r>
               <a:rPr sz="1000"/>
-              <a:t>43</a:t>
+              <a:t>37</a:t>
+            </a:r>
+          </a:p>
+        </p:txBody>
+      </p:sp>
+      <p:sp>
+        <p:nvSpPr>
+          <p:cNvPr id="6" name="TextBox 5"/>
+          <p:cNvSpPr txBox="1"/>
+          <p:nvPr/>
+        </p:nvSpPr>
+        <p:spPr>
+          <a:xfrm>
+            <a:off x="0" y="1000000"/>
+            <a:ext cx="12192000" cy="1696720"/>
+          </a:xfrm>
+          <a:prstGeom prst="rect">
+            <a:avLst/>
+          </a:prstGeom>
+          <a:solidFill>
+            <a:srgbClr val="000000"/>
+          </a:solidFill>
+        </p:spPr>
+        <p:txBody>
+          <a:bodyPr wrap="none" lIns="300000" rIns="300000">
+            <a:noAutofit/>
+          </a:bodyPr>
+          <a:lstStyle/>
+          <a:p>
+            <a:r>
+              <a:rPr sz="1400">
+                <a:solidFill>
+                  <a:srgbClr val="CCCCCC"/>
+                </a:solidFill>
+                <a:latin typeface="Consolas"/>
+              </a:rPr>
+              <a:t># --- PART 4: receive telemetry ------------------------------------------</a:t>
+            </a:r>
+          </a:p>
+          <a:p>
+            <a:r>
+              <a:rPr sz="1400">
+                <a:solidFill>
+                  <a:srgbClr val="CCCCCC"/>
+                </a:solidFill>
+                <a:latin typeface="Consolas"/>
+              </a:rPr>
+              <a:t>while True:</a:t>
+            </a:r>
+          </a:p>
+          <a:p>
+            <a:r>
+              <a:rPr sz="1400">
+                <a:solidFill>
+                  <a:srgbClr val="CCCCCC"/>
+                </a:solidFill>
+                <a:latin typeface="Consolas"/>
+              </a:rPr>
+              <a:t>    try:</a:t>
+            </a:r>
+          </a:p>
+          <a:p>
+            <a:r>
+              <a:rPr sz="1400">
+                <a:solidFill>
+                  <a:srgbClr val="CCCCCC"/>
+                </a:solidFill>
+                <a:latin typeface="Consolas"/>
+              </a:rPr>
+              <a:t>        data, _ = sock.recvfrom(256)</a:t>
+            </a:r>
+          </a:p>
+          <a:p>
+            <a:r>
+              <a:rPr sz="1400">
+                <a:solidFill>
+                  <a:srgbClr val="CCCCCC"/>
+                </a:solidFill>
+                <a:latin typeface="Consolas"/>
+              </a:rPr>
+              <a:t>        telemetry = tuple(float(x) for x in data.decode().split(","))</a:t>
+            </a:r>
+          </a:p>
+          <a:p>
+            <a:r>
+              <a:rPr sz="1400">
+                <a:solidFill>
+                  <a:srgbClr val="CCCCCC"/>
+                </a:solidFill>
+                <a:latin typeface="Consolas"/>
+              </a:rPr>
+              <a:t>        # (sim time, speed, RTF, lateral acc, applied steering, throttle, braking)</a:t>
+            </a:r>
+          </a:p>
+          <a:p>
+            <a:r>
+              <a:rPr sz="1400">
+                <a:solidFill>
+                  <a:srgbClr val="CCCCCC"/>
+                </a:solidFill>
+                <a:latin typeface="Consolas"/>
+              </a:rPr>
+              <a:t>    except (BlockingIOError, ValueError):</a:t>
             </a:r>
           </a:p>
         </p:txBody>
@@ -11778,14 +11461,78 @@
       <p:grpSpPr/>
       <p:sp>
         <p:nvSpPr>
-          <p:cNvPr id="2" name="TextBox 1"/>
+          <p:cNvPr id="2" name="Title 1"/>
+          <p:cNvSpPr>
+            <a:spLocks noGrp="1"/>
+          </p:cNvSpPr>
+          <p:nvPr>
+            <p:ph type="title"/>
+          </p:nvPr>
+        </p:nvSpPr>
+        <p:spPr>
+          <a:xfrm>
+            <a:off x="235228" y="150000"/>
+            <a:ext cx="9875520" cy="800000"/>
+          </a:xfrm>
+        </p:spPr>
+        <p:txBody>
+          <a:bodyPr wrap="square"/>
+          <a:lstStyle/>
+          <a:p>
+            <a:r>
+              <a:rPr sz="2600"/>
+              <a:t>Before running the code, please</a:t>
+            </a:r>
+          </a:p>
+        </p:txBody>
+      </p:sp>
+      <p:sp>
+        <p:nvSpPr>
+          <p:cNvPr id="3" name="Content Placeholder 2"/>
+          <p:cNvSpPr>
+            <a:spLocks noGrp="1"/>
+          </p:cNvSpPr>
+          <p:nvPr>
+            <p:ph idx="1"/>
+          </p:nvPr>
+        </p:nvSpPr>
+        <p:spPr/>
+        <p:txBody>
+          <a:bodyPr wrap="square"/>
+          <a:lstStyle/>
+          <a:p>
+            <a:pPr/>
+            <a:r>
+              <a:rPr sz="2000"/>
+              <a:t>Set SEND_FEEDBACK = True (Line 392)</a:t>
+            </a:r>
+          </a:p>
+          <a:p>
+            <a:pPr/>
+            <a:r>
+              <a:rPr sz="2000"/>
+              <a:t>Restart both scripts; the console now shows speed, sim time, RTF and lateral acceleration</a:t>
+            </a:r>
+          </a:p>
+          <a:p>
+            <a:pPr/>
+            <a:r>
+              <a:rPr sz="2000"/>
+              <a:t>With a wheel: this is where force feedback torque would be computed from the lateral acceleration</a:t>
+            </a:r>
+          </a:p>
+        </p:txBody>
+      </p:sp>
+      <p:sp>
+        <p:nvSpPr>
+          <p:cNvPr id="4" name="TextBox 3"/>
           <p:cNvSpPr txBox="1"/>
           <p:nvPr/>
         </p:nvSpPr>
         <p:spPr>
           <a:xfrm>
-            <a:off x="914400" y="1371600"/>
-            <a:ext cx="10058400" cy="3657600"/>
+            <a:off x="310974" y="6645811"/>
+            <a:ext cx="11644805" cy="188527"/>
           </a:xfrm>
           <a:prstGeom prst="rect">
             <a:avLst/>
@@ -11793,74 +11540,28 @@
           <a:noFill/>
         </p:spPr>
         <p:txBody>
-          <a:bodyPr wrap="square">
+          <a:bodyPr wrap="none">
             <a:spAutoFit/>
           </a:bodyPr>
           <a:lstStyle/>
           <a:p>
-            <a:pPr/>
-            <a:r>
-              <a:rPr sz="2000"/>
-              <a:t>Thank you.</a:t>
-            </a:r>
-          </a:p>
-          <a:p>
-            <a:pPr/>
-            <a:r>
-              <a:rPr sz="2000"/>
-              <a:t>kasha2@wisc.edu</a:t>
-            </a:r>
-          </a:p>
-          <a:p>
-            <a:pPr/>
-            <a:r>
-              <a:rPr sz="2000"/>
-              <a:t>Simulation-Based Engineering Lab</a:t>
-            </a:r>
-          </a:p>
-          <a:p>
-            <a:pPr/>
-            <a:r>
-              <a:rPr sz="2000"/>
+            <a:r>
+              <a:rPr sz="1000"/>
               <a:t>University of Wisconsin - Madison</a:t>
             </a:r>
           </a:p>
-          <a:p>
-            <a:pPr/>
-          </a:p>
-          <a:p>
-            <a:pPr/>
-            <a:r>
-              <a:rPr sz="2000"/>
-              <a:t>Lab website: http://sbel.wisc.edu</a:t>
-            </a:r>
-          </a:p>
-          <a:p>
-            <a:pPr/>
-            <a:r>
-              <a:rPr sz="2000"/>
-              <a:t>Chrono website: http://www.projectchrono.org</a:t>
-            </a:r>
-          </a:p>
-          <a:p>
-            <a:pPr/>
-            <a:r>
-              <a:rPr sz="2000"/>
-              <a:t>Source code: https://github.com/projectchrono</a:t>
-            </a:r>
-          </a:p>
-        </p:txBody>
-      </p:sp>
-      <p:sp>
-        <p:nvSpPr>
-          <p:cNvPr id="3" name="TextBox 2"/>
+        </p:txBody>
+      </p:sp>
+      <p:sp>
+        <p:nvSpPr>
+          <p:cNvPr id="5" name="TextBox 4"/>
           <p:cNvSpPr txBox="1"/>
           <p:nvPr/>
         </p:nvSpPr>
         <p:spPr>
           <a:xfrm>
-            <a:off x="310974" y="6645811"/>
-            <a:ext cx="11644805" cy="188527"/>
+            <a:off x="10249563" y="6646310"/>
+            <a:ext cx="1706217" cy="188028"/>
           </a:xfrm>
           <a:prstGeom prst="rect">
             <a:avLst/>
@@ -11875,36 +11576,7 @@
           <a:p>
             <a:r>
               <a:rPr sz="1000"/>
-              <a:t>University of Wisconsin - Madison</a:t>
-            </a:r>
-          </a:p>
-        </p:txBody>
-      </p:sp>
-      <p:sp>
-        <p:nvSpPr>
-          <p:cNvPr id="4" name="TextBox 3"/>
-          <p:cNvSpPr txBox="1"/>
-          <p:nvPr/>
-        </p:nvSpPr>
-        <p:spPr>
-          <a:xfrm>
-            <a:off x="10249563" y="6646310"/>
-            <a:ext cx="1706217" cy="188028"/>
-          </a:xfrm>
-          <a:prstGeom prst="rect">
-            <a:avLst/>
-          </a:prstGeom>
-          <a:noFill/>
-        </p:spPr>
-        <p:txBody>
-          <a:bodyPr wrap="none">
-            <a:spAutoFit/>
-          </a:bodyPr>
-          <a:lstStyle/>
-          <a:p>
-            <a:r>
-              <a:rPr sz="1000"/>
-              <a:t>44</a:t>
+              <a:t>38</a:t>
             </a:r>
           </a:p>
         </p:txBody>
@@ -11937,30 +11609,36 @@
             <p:ph type="title"/>
           </p:nvPr>
         </p:nvSpPr>
+        <p:spPr>
+          <a:xfrm>
+            <a:off x="235228" y="150000"/>
+            <a:ext cx="9875520" cy="800000"/>
+          </a:xfrm>
+        </p:spPr>
+        <p:txBody>
+          <a:bodyPr wrap="square"/>
+          <a:lstStyle/>
+          <a:p>
+            <a:r>
+              <a:rPr sz="2600"/>
+              <a:t>Show Time</a:t>
+            </a:r>
+          </a:p>
+        </p:txBody>
+      </p:sp>
+      <p:sp>
+        <p:nvSpPr>
+          <p:cNvPr id="3" name="Content Placeholder 2"/>
+          <p:cNvSpPr>
+            <a:spLocks noGrp="1"/>
+          </p:cNvSpPr>
+          <p:nvPr>
+            <p:ph idx="1"/>
+          </p:nvPr>
+        </p:nvSpPr>
         <p:spPr/>
         <p:txBody>
-          <a:bodyPr/>
-          <a:lstStyle/>
-          <a:p>
-            <a:r>
-              <a:t>Part 5: Choose your car, customize the overlay</a:t>
-            </a:r>
-          </a:p>
-        </p:txBody>
-      </p:sp>
-      <p:sp>
-        <p:nvSpPr>
-          <p:cNvPr id="3" name="Text Placeholder 2"/>
-          <p:cNvSpPr>
-            <a:spLocks noGrp="1"/>
-          </p:cNvSpPr>
-          <p:nvPr>
-            <p:ph type="body" idx="1"/>
-          </p:nvPr>
-        </p:nvSpPr>
-        <p:spPr/>
-        <p:txBody>
-          <a:bodyPr/>
+          <a:bodyPr wrap="square"/>
           <a:lstStyle/>
           <a:p/>
         </p:txBody>
@@ -12018,7 +11696,7 @@
           <a:p>
             <a:r>
               <a:rPr sz="1000"/>
-              <a:t>36</a:t>
+              <a:t>39</a:t>
             </a:r>
           </a:p>
         </p:txBody>
@@ -12170,99 +11848,27 @@
           <a:bodyPr/>
           <a:lstStyle/>
           <a:p>
-            <a:pPr/>
-            <a:r>
-              <a:rPr sz="3302"/>
-              <a:t>One interface, many vehicles - and a HUD you don't have to build</a:t>
-            </a:r>
-          </a:p>
-        </p:txBody>
-      </p:sp>
-      <p:sp>
-        <p:nvSpPr>
-          <p:cNvPr id="3" name="Content Placeholder 2"/>
-          <p:cNvSpPr>
-            <a:spLocks noGrp="1"/>
-          </p:cNvSpPr>
-          <p:nvPr>
-            <p:ph idx="1"/>
+            <a:r>
+              <a:t>Part 5: Choose your car, customize the overlay</a:t>
+            </a:r>
+          </a:p>
+        </p:txBody>
+      </p:sp>
+      <p:sp>
+        <p:nvSpPr>
+          <p:cNvPr id="3" name="Text Placeholder 2"/>
+          <p:cNvSpPr>
+            <a:spLocks noGrp="1"/>
+          </p:cNvSpPr>
+          <p:nvPr>
+            <p:ph type="body" idx="1"/>
           </p:nvPr>
         </p:nvSpPr>
         <p:spPr/>
         <p:txBody>
-          <a:bodyPr wrap="square"/>
-          <a:lstStyle/>
-          <a:p>
-            <a:pPr/>
-            <a:r>
-              <a:rPr sz="2000"/>
-              <a:t>Every full-vehicle model in Chrono::Vehicle (HMMWV_Full, Sedan, CityBus, Gator, ...) shares the same interface</a:t>
-            </a:r>
-          </a:p>
-          <a:p>
-            <a:pPr/>
-            <a:r>
-              <a:rPr sz="1800">
-                <a:latin typeface="Consolas"/>
-              </a:rPr>
-              <a:t>GetVehicle()</a:t>
-            </a:r>
-            <a:r>
-              <a:rPr sz="2000"/>
-              <a:t> / </a:t>
-            </a:r>
-            <a:r>
-              <a:rPr sz="1800">
-                <a:latin typeface="Consolas"/>
-              </a:rPr>
-              <a:t>GetSystem()</a:t>
-            </a:r>
-            <a:r>
-              <a:rPr sz="2000"/>
-              <a:t> / </a:t>
-            </a:r>
-            <a:r>
-              <a:rPr sz="1800">
-                <a:latin typeface="Consolas"/>
-              </a:rPr>
-              <a:t>Synchronize()</a:t>
-            </a:r>
-            <a:r>
-              <a:rPr sz="2000"/>
-              <a:t> / </a:t>
-            </a:r>
-            <a:r>
-              <a:rPr sz="1800">
-                <a:latin typeface="Consolas"/>
-              </a:rPr>
-              <a:t>Advance()</a:t>
-            </a:r>
-            <a:r>
-              <a:rPr sz="2000"/>
-              <a:t> - the same four calls no matter which model you picked</a:t>
-            </a:r>
-          </a:p>
-          <a:p>
-            <a:pPr/>
-            <a:r>
-              <a:rPr sz="2000"/>
-              <a:t>VEHICLE picks the model; build_vehicle() is the only place that knows the differences (init height, extra setup calls)</a:t>
-            </a:r>
-          </a:p>
-          <a:p>
-            <a:pPr/>
-            <a:r>
-              <a:rPr sz="2000"/>
-              <a:t>The Irrlicht window already ships with an on-screen HUD, plus Chrono's own tabbed info panel and a profiler</a:t>
-            </a:r>
-          </a:p>
-          <a:p>
-            <a:pPr/>
-            <a:r>
-              <a:rPr sz="2000"/>
-              <a:t>None of it is hand-drawn - add or remove pieces with flags on vis, no custom overlay needed</a:t>
-            </a:r>
-          </a:p>
+          <a:bodyPr/>
+          <a:lstStyle/>
+          <a:p/>
         </p:txBody>
       </p:sp>
       <p:sp>
@@ -12318,7 +11924,7 @@
           <a:p>
             <a:r>
               <a:rPr sz="1000"/>
-              <a:t>37</a:t>
+              <a:t>40</a:t>
             </a:r>
           </a:p>
         </p:txBody>
@@ -12356,132 +11962,97 @@
           <a:bodyPr/>
           <a:lstStyle/>
           <a:p>
-            <a:r>
-              <a:t>Choose your car (Lines 284 to 292)</a:t>
-            </a:r>
-          </a:p>
-        </p:txBody>
-      </p:sp>
-      <p:sp>
-        <p:nvSpPr>
-          <p:cNvPr id="3" name="TextBox 2"/>
-          <p:cNvSpPr txBox="1"/>
-          <p:nvPr/>
-        </p:nvSpPr>
-        <p:spPr>
-          <a:xfrm>
-            <a:off x="0" y="1050000"/>
-            <a:ext cx="12192000" cy="5537200"/>
-          </a:xfrm>
-          <a:prstGeom prst="rect">
-            <a:avLst/>
-          </a:prstGeom>
-          <a:solidFill>
-            <a:srgbClr val="000000"/>
-          </a:solidFill>
-        </p:spPr>
-        <p:txBody>
-          <a:bodyPr wrap="none" lIns="300000" rIns="300000">
-            <a:noAutofit/>
-          </a:bodyPr>
-          <a:lstStyle/>
-          <a:p>
-            <a:r>
-              <a:rPr sz="1000">
-                <a:solidFill>
-                  <a:srgbClr val="CCCCCC"/>
-                </a:solidFill>
-                <a:latin typeface="Consolas"/>
-              </a:rPr>
-              <a:t>def main():</a:t>
-            </a:r>
-          </a:p>
-          <a:p>
-            <a:r>
-              <a:rPr sz="1000">
-                <a:solidFill>
-                  <a:srgbClr val="CCCCCC"/>
-                </a:solidFill>
-                <a:latin typeface="Consolas"/>
-              </a:rPr>
-              <a:t>    # -----------------------------------------------------------------------</a:t>
-            </a:r>
-          </a:p>
-          <a:p>
-            <a:r>
-              <a:rPr sz="1000">
-                <a:solidFill>
-                  <a:srgbClr val="CCCCCC"/>
-                </a:solidFill>
-                <a:latin typeface="Consolas"/>
-              </a:rPr>
-              <a:t>    # Create the vehicle (PART 5) and initialize</a:t>
-            </a:r>
-          </a:p>
-          <a:p>
-            <a:r>
-              <a:rPr sz="1000">
-                <a:solidFill>
-                  <a:srgbClr val="CCCCCC"/>
-                </a:solidFill>
-                <a:latin typeface="Consolas"/>
-              </a:rPr>
-              <a:t>    # -----------------------------------------------------------------------</a:t>
-            </a:r>
-          </a:p>
-          <a:p>
-            <a:r>
-              <a:rPr sz="1000">
-                <a:solidFill>
-                  <a:srgbClr val="CCCCCC"/>
-                </a:solidFill>
-                <a:latin typeface="Consolas"/>
-              </a:rPr>
-              <a:t>    vehicle_model, chase_dist = build_vehicle(VEHICLE)</a:t>
-            </a:r>
-          </a:p>
-          <a:p>
-            <a:r>
-              <a:rPr sz="1000">
-                <a:solidFill>
-                  <a:srgbClr val="CCCCCC"/>
-                </a:solidFill>
-                <a:latin typeface="Consolas"/>
-              </a:rPr>
-              <a:t> </a:t>
-            </a:r>
-          </a:p>
-          <a:p>
-            <a:r>
-              <a:rPr sz="1000">
-                <a:solidFill>
-                  <a:srgbClr val="CCCCCC"/>
-                </a:solidFill>
-                <a:latin typeface="Consolas"/>
-              </a:rPr>
-              <a:t>    vehicle = vehicle_model.GetVehicle()</a:t>
-            </a:r>
-          </a:p>
-          <a:p>
-            <a:r>
-              <a:rPr sz="1000">
-                <a:solidFill>
-                  <a:srgbClr val="CCCCCC"/>
-                </a:solidFill>
-                <a:latin typeface="Consolas"/>
-              </a:rPr>
-              <a:t>    system = vehicle_model.GetSystem()</a:t>
-            </a:r>
-          </a:p>
-          <a:p>
-            <a:r>
-              <a:rPr sz="1000">
-                <a:solidFill>
-                  <a:srgbClr val="CCCCCC"/>
-                </a:solidFill>
-                <a:latin typeface="Consolas"/>
-              </a:rPr>
-              <a:t>    system.SetCollisionSystemType(chrono.ChCollisionSystem.Type_BULLET)</a:t>
+            <a:pPr/>
+            <a:r>
+              <a:rPr sz="3302"/>
+              <a:t>One interface, many vehicles - and a HUD you don't have to build</a:t>
+            </a:r>
+          </a:p>
+        </p:txBody>
+      </p:sp>
+      <p:sp>
+        <p:nvSpPr>
+          <p:cNvPr id="3" name="Content Placeholder 2"/>
+          <p:cNvSpPr>
+            <a:spLocks noGrp="1"/>
+          </p:cNvSpPr>
+          <p:nvPr>
+            <p:ph idx="1"/>
+          </p:nvPr>
+        </p:nvSpPr>
+        <p:spPr/>
+        <p:txBody>
+          <a:bodyPr wrap="square"/>
+          <a:lstStyle/>
+          <a:p>
+            <a:pPr/>
+            <a:r>
+              <a:rPr sz="2000"/>
+              <a:t>Every full-vehicle model in Chrono::Vehicle (HMMWV_Full, Sedan, CityBus, Gator, ...) shares the same interface</a:t>
+            </a:r>
+          </a:p>
+          <a:p>
+            <a:pPr/>
+            <a:r>
+              <a:rPr sz="1800">
+                <a:latin typeface="Consolas"/>
+              </a:rPr>
+              <a:t>GetVehicle()</a:t>
+            </a:r>
+            <a:r>
+              <a:rPr sz="2000"/>
+              <a:t> / </a:t>
+            </a:r>
+            <a:r>
+              <a:rPr sz="1800">
+                <a:latin typeface="Consolas"/>
+              </a:rPr>
+              <a:t>GetSystem()</a:t>
+            </a:r>
+            <a:r>
+              <a:rPr sz="2000"/>
+              <a:t> / </a:t>
+            </a:r>
+            <a:r>
+              <a:rPr sz="1800">
+                <a:latin typeface="Consolas"/>
+              </a:rPr>
+              <a:t>Synchronize()</a:t>
+            </a:r>
+            <a:r>
+              <a:rPr sz="2000"/>
+              <a:t> / </a:t>
+            </a:r>
+            <a:r>
+              <a:rPr sz="1800">
+                <a:latin typeface="Consolas"/>
+              </a:rPr>
+              <a:t>Advance()</a:t>
+            </a:r>
+            <a:r>
+              <a:rPr sz="2000"/>
+              <a:t> - the same four calls no matter which model you picked</a:t>
+            </a:r>
+          </a:p>
+          <a:p>
+            <a:pPr/>
+            <a:r>
+              <a:rPr sz="2000"/>
+              <a:t>VEHICLE picks the model; build_vehicle() is the only place that knows the differences (init height, extra setup calls)</a:t>
+            </a:r>
+          </a:p>
+          <a:p>
+            <a:pPr/>
+            <a:r>
+              <a:rPr sz="2000"/>
+              <a:t>The Irrlicht window already ships with an on-screen HUD, plus Chrono's own tabbed info panel and a profiler</a:t>
+            </a:r>
+          </a:p>
+          <a:p>
+            <a:pPr/>
+            <a:r>
+              <a:rPr sz="2000"/>
+              <a:t>None of it is hand-drawn - add or remove pieces with flags on vis, no custom overlay needed</a:t>
             </a:r>
           </a:p>
         </p:txBody>
@@ -12494,8 +12065,8 @@
         </p:nvSpPr>
         <p:spPr>
           <a:xfrm>
-            <a:off x="400000" y="6687200"/>
-            <a:ext cx="11392000" cy="-229200"/>
+            <a:off x="310974" y="6645811"/>
+            <a:ext cx="11644805" cy="188527"/>
           </a:xfrm>
           <a:prstGeom prst="rect">
             <a:avLst/>
@@ -12503,12 +12074,14 @@
           <a:noFill/>
         </p:spPr>
         <p:txBody>
-          <a:bodyPr/>
-          <a:lstStyle/>
-          <a:p>
-            <a:r>
-              <a:rPr sz="1800"/>
-              <a:t>VEHICLE lives in CONFIGURATION - "hmmwv" | "sedan" | "citybus" | "gator"; everything below this line is unchanged</a:t>
+          <a:bodyPr wrap="none">
+            <a:spAutoFit/>
+          </a:bodyPr>
+          <a:lstStyle/>
+          <a:p>
+            <a:r>
+              <a:rPr sz="1000"/>
+              <a:t>University of Wisconsin - Madison</a:t>
             </a:r>
           </a:p>
         </p:txBody>
@@ -12521,8 +12094,8 @@
         </p:nvSpPr>
         <p:spPr>
           <a:xfrm>
-            <a:off x="310974" y="6645811"/>
-            <a:ext cx="11644805" cy="188527"/>
+            <a:off x="10249563" y="6646310"/>
+            <a:ext cx="1706217" cy="188028"/>
           </a:xfrm>
           <a:prstGeom prst="rect">
             <a:avLst/>
@@ -12537,36 +12110,7 @@
           <a:p>
             <a:r>
               <a:rPr sz="1000"/>
-              <a:t>University of Wisconsin - Madison</a:t>
-            </a:r>
-          </a:p>
-        </p:txBody>
-      </p:sp>
-      <p:sp>
-        <p:nvSpPr>
-          <p:cNvPr id="6" name="TextBox 5"/>
-          <p:cNvSpPr txBox="1"/>
-          <p:nvPr/>
-        </p:nvSpPr>
-        <p:spPr>
-          <a:xfrm>
-            <a:off x="10249563" y="6646310"/>
-            <a:ext cx="1706217" cy="188028"/>
-          </a:xfrm>
-          <a:prstGeom prst="rect">
-            <a:avLst/>
-          </a:prstGeom>
-          <a:noFill/>
-        </p:spPr>
-        <p:txBody>
-          <a:bodyPr wrap="none">
-            <a:spAutoFit/>
-          </a:bodyPr>
-          <a:lstStyle/>
-          <a:p>
-            <a:r>
-              <a:rPr sz="1000"/>
-              <a:t>38</a:t>
+              <a:t>41</a:t>
             </a:r>
           </a:p>
         </p:txBody>
@@ -12605,7 +12149,7 @@
           <a:lstStyle/>
           <a:p>
             <a:r>
-              <a:t>Add or remove overlay pieces (Lines 365 to 372)</a:t>
+              <a:t>Choose your car (Lines 284 to 292)</a:t>
             </a:r>
           </a:p>
         </p:txBody>
@@ -12641,7 +12185,7 @@
                 </a:solidFill>
                 <a:latin typeface="Consolas"/>
               </a:rPr>
-              <a:t># PART 5: the built-in overlay - nothing here is hand-drawn, every piece</a:t>
+              <a:t>def main():</a:t>
             </a:r>
           </a:p>
           <a:p>
@@ -12652,7 +12196,7 @@
                 </a:solidFill>
                 <a:latin typeface="Consolas"/>
               </a:rPr>
-              <a:t># is a flag or a method on `vis` itself</a:t>
+              <a:t>    # -----------------------------------------------------------------------</a:t>
             </a:r>
           </a:p>
           <a:p>
@@ -12663,7 +12207,7 @@
                 </a:solidFill>
                 <a:latin typeface="Consolas"/>
               </a:rPr>
-              <a:t>vis.EnableStats(SHOW_VEHICLE_HUD)        # speed/steering/throttle/brake panel</a:t>
+              <a:t>    # Create the vehicle (PART 5) and initialize</a:t>
             </a:r>
           </a:p>
           <a:p>
@@ -12674,7 +12218,7 @@
                 </a:solidFill>
                 <a:latin typeface="Consolas"/>
               </a:rPr>
-              <a:t>vis.SetHUDLocation(*HUD_CORNER)          # where that panel sits</a:t>
+              <a:t>    # -----------------------------------------------------------------------</a:t>
             </a:r>
           </a:p>
           <a:p>
@@ -12685,7 +12229,7 @@
                 </a:solidFill>
                 <a:latin typeface="Consolas"/>
               </a:rPr>
-              <a:t>vis.ShowInfoPanel(SHOW_SIM_INFO_PANEL)   # Chrono's own tabbed info panel</a:t>
+              <a:t>    vehicle_model, chase_dist = build_vehicle(VEHICLE)</a:t>
             </a:r>
           </a:p>
           <a:p>
@@ -12696,7 +12240,7 @@
                 </a:solidFill>
                 <a:latin typeface="Consolas"/>
               </a:rPr>
-              <a:t>                                          # (bodies, contacts, timers); also</a:t>
+              <a:t> </a:t>
             </a:r>
           </a:p>
           <a:p>
@@ -12707,7 +12251,7 @@
                 </a:solidFill>
                 <a:latin typeface="Consolas"/>
               </a:rPr>
-              <a:t>                                          # toggles live with the 'i' key</a:t>
+              <a:t>    vehicle = vehicle_model.GetVehicle()</a:t>
             </a:r>
           </a:p>
           <a:p>
@@ -12718,7 +12262,18 @@
                 </a:solidFill>
                 <a:latin typeface="Consolas"/>
               </a:rPr>
-              <a:t>vis.ShowProfiler(SHOW_PROFILER)          # per-module timing bars</a:t>
+              <a:t>    system = vehicle_model.GetSystem()</a:t>
+            </a:r>
+          </a:p>
+          <a:p>
+            <a:r>
+              <a:rPr sz="1000">
+                <a:solidFill>
+                  <a:srgbClr val="CCCCCC"/>
+                </a:solidFill>
+                <a:latin typeface="Consolas"/>
+              </a:rPr>
+              <a:t>    system.SetCollisionSystemType(chrono.ChCollisionSystem.Type_BULLET)</a:t>
             </a:r>
           </a:p>
         </p:txBody>
@@ -12745,7 +12300,7 @@
           <a:p>
             <a:r>
               <a:rPr sz="1800"/>
-              <a:t>SHOW_VEHICLE_HUD, HUD_CORNER, SHOW_SIM_INFO_PANEL, SHOW_PROFILER all live in CONFIGURATION, right next to VEHICLE</a:t>
+              <a:t>VEHICLE lives in CONFIGURATION - "hmmwv" | "sedan" | "citybus" | "gator"; everything below this line is unchanged</a:t>
             </a:r>
           </a:p>
         </p:txBody>
@@ -12803,7 +12358,7 @@
           <a:p>
             <a:r>
               <a:rPr sz="1000"/>
-              <a:t>39</a:t>
+              <a:t>42</a:t>
             </a:r>
           </a:p>
         </p:txBody>
@@ -12841,57 +12396,121 @@
           <a:bodyPr/>
           <a:lstStyle/>
           <a:p>
-            <a:pPr/>
-            <a:r>
-              <a:rPr sz="3302"/>
-              <a:t>Before running the code, please</a:t>
-            </a:r>
-          </a:p>
-        </p:txBody>
-      </p:sp>
-      <p:sp>
-        <p:nvSpPr>
-          <p:cNvPr id="3" name="Content Placeholder 2"/>
-          <p:cNvSpPr>
-            <a:spLocks noGrp="1"/>
-          </p:cNvSpPr>
-          <p:nvPr>
-            <p:ph idx="1"/>
-          </p:nvPr>
-        </p:nvSpPr>
-        <p:spPr/>
-        <p:txBody>
-          <a:bodyPr wrap="square"/>
-          <a:lstStyle/>
-          <a:p>
-            <a:pPr/>
-            <a:r>
-              <a:rPr sz="2000"/>
-              <a:t>Set VEHICLE = "citybus" (or "sedan", "gator") and re-run - same driver, same terrain, very different vehicle</a:t>
-            </a:r>
-          </a:p>
-          <a:p>
-            <a:pPr/>
-            <a:r>
-              <a:rPr sz="2000"/>
-              <a:t>Set SHOW_SIM_INFO_PANEL = True, then press the </a:t>
-            </a:r>
-            <a:r>
-              <a:rPr sz="1800">
-                <a:latin typeface="Consolas"/>
-              </a:rPr>
-              <a:t>i</a:t>
-            </a:r>
-            <a:r>
-              <a:rPr sz="2000"/>
-              <a:t> key while the sim is running - same panel, two ways to reach it</a:t>
-            </a:r>
-          </a:p>
-          <a:p>
-            <a:pPr/>
-            <a:r>
-              <a:rPr sz="2000"/>
-              <a:t>Try SHOW_VEHICLE_HUD = False - the 3D scene doesn't care, only the panel disappears</a:t>
+            <a:r>
+              <a:t>Add or remove overlay pieces (Lines 365 to 372)</a:t>
+            </a:r>
+          </a:p>
+        </p:txBody>
+      </p:sp>
+      <p:sp>
+        <p:nvSpPr>
+          <p:cNvPr id="3" name="TextBox 2"/>
+          <p:cNvSpPr txBox="1"/>
+          <p:nvPr/>
+        </p:nvSpPr>
+        <p:spPr>
+          <a:xfrm>
+            <a:off x="0" y="1050000"/>
+            <a:ext cx="12192000" cy="5537200"/>
+          </a:xfrm>
+          <a:prstGeom prst="rect">
+            <a:avLst/>
+          </a:prstGeom>
+          <a:solidFill>
+            <a:srgbClr val="000000"/>
+          </a:solidFill>
+        </p:spPr>
+        <p:txBody>
+          <a:bodyPr wrap="none" lIns="300000" rIns="300000">
+            <a:noAutofit/>
+          </a:bodyPr>
+          <a:lstStyle/>
+          <a:p>
+            <a:r>
+              <a:rPr sz="1000">
+                <a:solidFill>
+                  <a:srgbClr val="CCCCCC"/>
+                </a:solidFill>
+                <a:latin typeface="Consolas"/>
+              </a:rPr>
+              <a:t># PART 5: the built-in overlay - nothing here is hand-drawn, every piece</a:t>
+            </a:r>
+          </a:p>
+          <a:p>
+            <a:r>
+              <a:rPr sz="1000">
+                <a:solidFill>
+                  <a:srgbClr val="CCCCCC"/>
+                </a:solidFill>
+                <a:latin typeface="Consolas"/>
+              </a:rPr>
+              <a:t># is a flag or a method on `vis` itself</a:t>
+            </a:r>
+          </a:p>
+          <a:p>
+            <a:r>
+              <a:rPr sz="1000">
+                <a:solidFill>
+                  <a:srgbClr val="CCCCCC"/>
+                </a:solidFill>
+                <a:latin typeface="Consolas"/>
+              </a:rPr>
+              <a:t>vis.EnableStats(SHOW_VEHICLE_HUD)        # speed/steering/throttle/brake panel</a:t>
+            </a:r>
+          </a:p>
+          <a:p>
+            <a:r>
+              <a:rPr sz="1000">
+                <a:solidFill>
+                  <a:srgbClr val="CCCCCC"/>
+                </a:solidFill>
+                <a:latin typeface="Consolas"/>
+              </a:rPr>
+              <a:t>vis.SetHUDLocation(*HUD_CORNER)          # where that panel sits</a:t>
+            </a:r>
+          </a:p>
+          <a:p>
+            <a:r>
+              <a:rPr sz="1000">
+                <a:solidFill>
+                  <a:srgbClr val="CCCCCC"/>
+                </a:solidFill>
+                <a:latin typeface="Consolas"/>
+              </a:rPr>
+              <a:t>vis.ShowInfoPanel(SHOW_SIM_INFO_PANEL)   # Chrono's own tabbed info panel</a:t>
+            </a:r>
+          </a:p>
+          <a:p>
+            <a:r>
+              <a:rPr sz="1000">
+                <a:solidFill>
+                  <a:srgbClr val="CCCCCC"/>
+                </a:solidFill>
+                <a:latin typeface="Consolas"/>
+              </a:rPr>
+              <a:t>                                          # (bodies, contacts, timers); also</a:t>
+            </a:r>
+          </a:p>
+          <a:p>
+            <a:r>
+              <a:rPr sz="1000">
+                <a:solidFill>
+                  <a:srgbClr val="CCCCCC"/>
+                </a:solidFill>
+                <a:latin typeface="Consolas"/>
+              </a:rPr>
+              <a:t>                                          # toggles live with the 'i' key</a:t>
+            </a:r>
+          </a:p>
+          <a:p>
+            <a:r>
+              <a:rPr sz="1000">
+                <a:solidFill>
+                  <a:srgbClr val="CCCCCC"/>
+                </a:solidFill>
+                <a:latin typeface="Consolas"/>
+              </a:rPr>
+              <a:t>vis.ShowProfiler(SHOW_PROFILER)          # per-module timing bars</a:t>
             </a:r>
           </a:p>
         </p:txBody>
@@ -12904,8 +12523,8 @@
         </p:nvSpPr>
         <p:spPr>
           <a:xfrm>
-            <a:off x="310974" y="6645811"/>
-            <a:ext cx="11644805" cy="188527"/>
+            <a:off x="400000" y="6687200"/>
+            <a:ext cx="11392000" cy="-229200"/>
           </a:xfrm>
           <a:prstGeom prst="rect">
             <a:avLst/>
@@ -12913,14 +12532,12 @@
           <a:noFill/>
         </p:spPr>
         <p:txBody>
-          <a:bodyPr wrap="none">
-            <a:spAutoFit/>
-          </a:bodyPr>
-          <a:lstStyle/>
-          <a:p>
-            <a:r>
-              <a:rPr sz="1000"/>
-              <a:t>University of Wisconsin - Madison</a:t>
+          <a:bodyPr/>
+          <a:lstStyle/>
+          <a:p>
+            <a:r>
+              <a:rPr sz="1800"/>
+              <a:t>SHOW_VEHICLE_HUD, HUD_CORNER, SHOW_SIM_INFO_PANEL, SHOW_PROFILER all live in CONFIGURATION, right next to VEHICLE</a:t>
             </a:r>
           </a:p>
         </p:txBody>
@@ -12933,8 +12550,8 @@
         </p:nvSpPr>
         <p:spPr>
           <a:xfrm>
-            <a:off x="10249563" y="6646310"/>
-            <a:ext cx="1706217" cy="188028"/>
+            <a:off x="310974" y="6645811"/>
+            <a:ext cx="11644805" cy="188527"/>
           </a:xfrm>
           <a:prstGeom prst="rect">
             <a:avLst/>
@@ -12949,7 +12566,36 @@
           <a:p>
             <a:r>
               <a:rPr sz="1000"/>
-              <a:t>40</a:t>
+              <a:t>University of Wisconsin - Madison</a:t>
+            </a:r>
+          </a:p>
+        </p:txBody>
+      </p:sp>
+      <p:sp>
+        <p:nvSpPr>
+          <p:cNvPr id="6" name="TextBox 5"/>
+          <p:cNvSpPr txBox="1"/>
+          <p:nvPr/>
+        </p:nvSpPr>
+        <p:spPr>
+          <a:xfrm>
+            <a:off x="10249563" y="6646310"/>
+            <a:ext cx="1706217" cy="188028"/>
+          </a:xfrm>
+          <a:prstGeom prst="rect">
+            <a:avLst/>
+          </a:prstGeom>
+          <a:noFill/>
+        </p:spPr>
+        <p:txBody>
+          <a:bodyPr wrap="none">
+            <a:spAutoFit/>
+          </a:bodyPr>
+          <a:lstStyle/>
+          <a:p>
+            <a:r>
+              <a:rPr sz="1000"/>
+              <a:t>43</a:t>
             </a:r>
           </a:p>
         </p:txBody>
@@ -12990,7 +12636,7 @@
             <a:pPr/>
             <a:r>
               <a:rPr sz="3302"/>
-              <a:t>Show Time</a:t>
+              <a:t>Before running the code, please</a:t>
             </a:r>
           </a:p>
         </p:txBody>
@@ -13013,14 +12659,31 @@
             <a:pPr/>
             <a:r>
               <a:rPr sz="2000"/>
-              <a:t>Everyone picks a different VEHICLE and compares how the same scripted course drives an HMMWV vs. a bus vs. a Gator</a:t>
+              <a:t>Set VEHICLE = "citybus" (or "sedan", "gator") and re-run - same driver, same terrain, very different vehicle</a:t>
             </a:r>
           </a:p>
           <a:p>
             <a:pPr/>
             <a:r>
               <a:rPr sz="2000"/>
-              <a:t>Toggle SHOW_VEHICLE_HUD / SHOW_SIM_INFO_PANEL live and watch the overlay change - nothing was re-rendered by hand</a:t>
+              <a:t>Set SHOW_SIM_INFO_PANEL = True, then press the </a:t>
+            </a:r>
+            <a:r>
+              <a:rPr sz="1800">
+                <a:latin typeface="Consolas"/>
+              </a:rPr>
+              <a:t>i</a:t>
+            </a:r>
+            <a:r>
+              <a:rPr sz="2000"/>
+              <a:t> key while the sim is running - same panel, two ways to reach it</a:t>
+            </a:r>
+          </a:p>
+          <a:p>
+            <a:pPr/>
+            <a:r>
+              <a:rPr sz="2000"/>
+              <a:t>Try SHOW_VEHICLE_HUD = False - the 3D scene doesn't care, only the panel disappears</a:t>
             </a:r>
           </a:p>
         </p:txBody>
@@ -13078,7 +12741,607 @@
           <a:p>
             <a:r>
               <a:rPr sz="1000"/>
-              <a:t>41</a:t>
+              <a:t>44</a:t>
+            </a:r>
+          </a:p>
+        </p:txBody>
+      </p:sp>
+    </p:spTree>
+  </p:cSld>
+  <p:clrMapOvr>
+    <a:masterClrMapping/>
+  </p:clrMapOvr>
+</p:sld>
+</file>
+
+<file path=ppt/slides/slide45.xml><?xml version="1.0" encoding="utf-8"?>
+<p:sld xmlns:a="http://schemas.openxmlformats.org/drawingml/2006/main" xmlns:p="http://schemas.openxmlformats.org/presentationml/2006/main" xmlns:r="http://schemas.openxmlformats.org/officeDocument/2006/relationships">
+  <p:cSld>
+    <p:spTree>
+      <p:nvGrpSpPr>
+        <p:cNvPr id="1" name=""/>
+        <p:cNvGrpSpPr/>
+        <p:nvPr/>
+      </p:nvGrpSpPr>
+      <p:grpSpPr/>
+      <p:sp>
+        <p:nvSpPr>
+          <p:cNvPr id="2" name="Title 1"/>
+          <p:cNvSpPr>
+            <a:spLocks noGrp="1"/>
+          </p:cNvSpPr>
+          <p:nvPr>
+            <p:ph type="title"/>
+          </p:nvPr>
+        </p:nvSpPr>
+        <p:spPr/>
+        <p:txBody>
+          <a:bodyPr/>
+          <a:lstStyle/>
+          <a:p>
+            <a:pPr/>
+            <a:r>
+              <a:rPr sz="3302"/>
+              <a:t>Show Time</a:t>
+            </a:r>
+          </a:p>
+        </p:txBody>
+      </p:sp>
+      <p:sp>
+        <p:nvSpPr>
+          <p:cNvPr id="3" name="Content Placeholder 2"/>
+          <p:cNvSpPr>
+            <a:spLocks noGrp="1"/>
+          </p:cNvSpPr>
+          <p:nvPr>
+            <p:ph idx="1"/>
+          </p:nvPr>
+        </p:nvSpPr>
+        <p:spPr/>
+        <p:txBody>
+          <a:bodyPr wrap="square"/>
+          <a:lstStyle/>
+          <a:p>
+            <a:pPr/>
+            <a:r>
+              <a:rPr sz="2000"/>
+              <a:t>Everyone picks a different VEHICLE and compares how the same scripted course drives an HMMWV vs. a bus vs. a Gator</a:t>
+            </a:r>
+          </a:p>
+          <a:p>
+            <a:pPr/>
+            <a:r>
+              <a:rPr sz="2000"/>
+              <a:t>Toggle SHOW_VEHICLE_HUD / SHOW_SIM_INFO_PANEL live and watch the overlay change - nothing was re-rendered by hand</a:t>
+            </a:r>
+          </a:p>
+        </p:txBody>
+      </p:sp>
+      <p:sp>
+        <p:nvSpPr>
+          <p:cNvPr id="4" name="TextBox 3"/>
+          <p:cNvSpPr txBox="1"/>
+          <p:nvPr/>
+        </p:nvSpPr>
+        <p:spPr>
+          <a:xfrm>
+            <a:off x="310974" y="6645811"/>
+            <a:ext cx="11644805" cy="188527"/>
+          </a:xfrm>
+          <a:prstGeom prst="rect">
+            <a:avLst/>
+          </a:prstGeom>
+          <a:noFill/>
+        </p:spPr>
+        <p:txBody>
+          <a:bodyPr wrap="none">
+            <a:spAutoFit/>
+          </a:bodyPr>
+          <a:lstStyle/>
+          <a:p>
+            <a:r>
+              <a:rPr sz="1000"/>
+              <a:t>University of Wisconsin - Madison</a:t>
+            </a:r>
+          </a:p>
+        </p:txBody>
+      </p:sp>
+      <p:sp>
+        <p:nvSpPr>
+          <p:cNvPr id="5" name="TextBox 4"/>
+          <p:cNvSpPr txBox="1"/>
+          <p:nvPr/>
+        </p:nvSpPr>
+        <p:spPr>
+          <a:xfrm>
+            <a:off x="10249563" y="6646310"/>
+            <a:ext cx="1706217" cy="188028"/>
+          </a:xfrm>
+          <a:prstGeom prst="rect">
+            <a:avLst/>
+          </a:prstGeom>
+          <a:noFill/>
+        </p:spPr>
+        <p:txBody>
+          <a:bodyPr wrap="none">
+            <a:spAutoFit/>
+          </a:bodyPr>
+          <a:lstStyle/>
+          <a:p>
+            <a:r>
+              <a:rPr sz="1000"/>
+              <a:t>45</a:t>
+            </a:r>
+          </a:p>
+        </p:txBody>
+      </p:sp>
+      <p:pic>
+        <p:nvPicPr>
+          <p:cNvPr id="6" name="Picture 5" descr="hud_crop.png"/>
+          <p:cNvPicPr>
+            <a:picLocks noChangeAspect="1"/>
+          </p:cNvPicPr>
+          <p:nvPr/>
+        </p:nvPicPr>
+        <p:blipFill>
+          <a:blip r:embed="rId2"/>
+          <a:stretch>
+            <a:fillRect/>
+          </a:stretch>
+        </p:blipFill>
+        <p:spPr>
+          <a:xfrm>
+            <a:off x="4837089" y="3350000"/>
+            <a:ext cx="2517822" cy="3100000"/>
+          </a:xfrm>
+          <a:prstGeom prst="rect">
+            <a:avLst/>
+          </a:prstGeom>
+        </p:spPr>
+      </p:pic>
+    </p:spTree>
+  </p:cSld>
+  <p:clrMapOvr>
+    <a:masterClrMapping/>
+  </p:clrMapOvr>
+</p:sld>
+</file>
+
+<file path=ppt/slides/slide46.xml><?xml version="1.0" encoding="utf-8"?>
+<p:sld xmlns:a="http://schemas.openxmlformats.org/drawingml/2006/main" xmlns:p="http://schemas.openxmlformats.org/presentationml/2006/main" xmlns:r="http://schemas.openxmlformats.org/officeDocument/2006/relationships">
+  <p:cSld>
+    <p:spTree>
+      <p:nvGrpSpPr>
+        <p:cNvPr id="1" name=""/>
+        <p:cNvGrpSpPr/>
+        <p:nvPr/>
+      </p:nvGrpSpPr>
+      <p:grpSpPr/>
+      <p:sp>
+        <p:nvSpPr>
+          <p:cNvPr id="2" name="Title 1"/>
+          <p:cNvSpPr>
+            <a:spLocks noGrp="1"/>
+          </p:cNvSpPr>
+          <p:nvPr>
+            <p:ph type="title"/>
+          </p:nvPr>
+        </p:nvSpPr>
+        <p:spPr>
+          <a:xfrm>
+            <a:off x="235228" y="150000"/>
+            <a:ext cx="9875520" cy="800000"/>
+          </a:xfrm>
+        </p:spPr>
+        <p:txBody>
+          <a:bodyPr wrap="square"/>
+          <a:lstStyle/>
+          <a:p>
+            <a:r>
+              <a:rPr sz="2600"/>
+              <a:t>Where this goes next</a:t>
+            </a:r>
+          </a:p>
+        </p:txBody>
+      </p:sp>
+      <p:sp>
+        <p:nvSpPr>
+          <p:cNvPr id="3" name="Content Placeholder 2"/>
+          <p:cNvSpPr>
+            <a:spLocks noGrp="1"/>
+          </p:cNvSpPr>
+          <p:nvPr>
+            <p:ph idx="1"/>
+          </p:nvPr>
+        </p:nvSpPr>
+        <p:spPr/>
+        <p:txBody>
+          <a:bodyPr wrap="square"/>
+          <a:lstStyle/>
+          <a:p>
+            <a:pPr/>
+            <a:r>
+              <a:rPr sz="2000"/>
+              <a:t>Chrono::HIL (github.com/zzhou292/chrono-HIL): the same three-float interface, scaled up</a:t>
+            </a:r>
+          </a:p>
+          <a:p>
+            <a:pPr lvl="1"/>
+            <a:r>
+              <a:rPr sz="1800"/>
+              <a:t>SDL steering wheels with force feedback, cumulative real-time timer, multi-vehicle traffic</a:t>
+            </a:r>
+          </a:p>
+          <a:p>
+            <a:pPr lvl="1"/>
+            <a:r>
+              <a:rPr sz="1800"/>
+              <a:t>ROS 2 and Unity bridges, teleoperation over the network, deformable (SCM) terrain</a:t>
+            </a:r>
+          </a:p>
+          <a:p>
+            <a:pPr/>
+            <a:r>
+              <a:rPr sz="2000"/>
+              <a:t>Chrono::Sensor: cameras/lidar rendered from the vehicle for the operator's screen</a:t>
+            </a:r>
+          </a:p>
+          <a:p>
+            <a:pPr/>
+            <a:r>
+              <a:rPr sz="2000"/>
+              <a:t>Chrono::Synchrono: several humans in the same world, each on their own machine</a:t>
+            </a:r>
+          </a:p>
+          <a:p>
+            <a:pPr/>
+            <a:r>
+              <a:rPr sz="2000"/>
+              <a:t>Takeaways</a:t>
+            </a:r>
+          </a:p>
+          <a:p>
+            <a:pPr lvl="1"/>
+            <a:r>
+              <a:rPr sz="1800"/>
+              <a:t>Real time in Chrono is soft: spin once per step, and measure the drift</a:t>
+            </a:r>
+          </a:p>
+          <a:p>
+            <a:pPr lvl="1"/>
+            <a:r>
+              <a:rPr sz="1800"/>
+              <a:t>The human interface is three floats per step, sampled once and smoothed</a:t>
+            </a:r>
+          </a:p>
+          <a:p>
+            <a:pPr lvl="1"/>
+            <a:r>
+              <a:rPr sz="1800"/>
+              <a:t>Never let the input device block the physics loop</a:t>
+            </a:r>
+          </a:p>
+        </p:txBody>
+      </p:sp>
+      <p:sp>
+        <p:nvSpPr>
+          <p:cNvPr id="4" name="TextBox 3"/>
+          <p:cNvSpPr txBox="1"/>
+          <p:nvPr/>
+        </p:nvSpPr>
+        <p:spPr>
+          <a:xfrm>
+            <a:off x="310974" y="6645811"/>
+            <a:ext cx="11644805" cy="188527"/>
+          </a:xfrm>
+          <a:prstGeom prst="rect">
+            <a:avLst/>
+          </a:prstGeom>
+          <a:noFill/>
+        </p:spPr>
+        <p:txBody>
+          <a:bodyPr wrap="none">
+            <a:spAutoFit/>
+          </a:bodyPr>
+          <a:lstStyle/>
+          <a:p>
+            <a:r>
+              <a:rPr sz="1000"/>
+              <a:t>University of Wisconsin - Madison</a:t>
+            </a:r>
+          </a:p>
+        </p:txBody>
+      </p:sp>
+      <p:sp>
+        <p:nvSpPr>
+          <p:cNvPr id="5" name="TextBox 4"/>
+          <p:cNvSpPr txBox="1"/>
+          <p:nvPr/>
+        </p:nvSpPr>
+        <p:spPr>
+          <a:xfrm>
+            <a:off x="10249563" y="6646310"/>
+            <a:ext cx="1706217" cy="188028"/>
+          </a:xfrm>
+          <a:prstGeom prst="rect">
+            <a:avLst/>
+          </a:prstGeom>
+          <a:noFill/>
+        </p:spPr>
+        <p:txBody>
+          <a:bodyPr wrap="none">
+            <a:spAutoFit/>
+          </a:bodyPr>
+          <a:lstStyle/>
+          <a:p>
+            <a:r>
+              <a:rPr sz="1000"/>
+              <a:t>46</a:t>
+            </a:r>
+          </a:p>
+        </p:txBody>
+      </p:sp>
+    </p:spTree>
+  </p:cSld>
+  <p:clrMapOvr>
+    <a:masterClrMapping/>
+  </p:clrMapOvr>
+</p:sld>
+</file>
+
+<file path=ppt/slides/slide47.xml><?xml version="1.0" encoding="utf-8"?>
+<p:sld xmlns:a="http://schemas.openxmlformats.org/drawingml/2006/main" xmlns:p="http://schemas.openxmlformats.org/presentationml/2006/main" xmlns:r="http://schemas.openxmlformats.org/officeDocument/2006/relationships">
+  <p:cSld>
+    <p:spTree>
+      <p:nvGrpSpPr>
+        <p:cNvPr id="1" name=""/>
+        <p:cNvGrpSpPr/>
+        <p:nvPr/>
+      </p:nvGrpSpPr>
+      <p:grpSpPr/>
+      <p:sp>
+        <p:nvSpPr>
+          <p:cNvPr id="2" name="Title 1"/>
+          <p:cNvSpPr>
+            <a:spLocks noGrp="1"/>
+          </p:cNvSpPr>
+          <p:nvPr>
+            <p:ph type="title"/>
+          </p:nvPr>
+        </p:nvSpPr>
+        <p:spPr/>
+        <p:txBody>
+          <a:bodyPr/>
+          <a:lstStyle/>
+          <a:p>
+            <a:r>
+              <a:t>Any questions?</a:t>
+            </a:r>
+          </a:p>
+        </p:txBody>
+      </p:sp>
+      <p:sp>
+        <p:nvSpPr>
+          <p:cNvPr id="3" name="Text Placeholder 2"/>
+          <p:cNvSpPr>
+            <a:spLocks noGrp="1"/>
+          </p:cNvSpPr>
+          <p:nvPr>
+            <p:ph type="body" idx="1"/>
+          </p:nvPr>
+        </p:nvSpPr>
+        <p:spPr/>
+        <p:txBody>
+          <a:bodyPr/>
+          <a:lstStyle/>
+          <a:p/>
+        </p:txBody>
+      </p:sp>
+      <p:sp>
+        <p:nvSpPr>
+          <p:cNvPr id="4" name="TextBox 3"/>
+          <p:cNvSpPr txBox="1"/>
+          <p:nvPr/>
+        </p:nvSpPr>
+        <p:spPr>
+          <a:xfrm>
+            <a:off x="310974" y="6645811"/>
+            <a:ext cx="11644805" cy="188527"/>
+          </a:xfrm>
+          <a:prstGeom prst="rect">
+            <a:avLst/>
+          </a:prstGeom>
+          <a:noFill/>
+        </p:spPr>
+        <p:txBody>
+          <a:bodyPr wrap="none">
+            <a:spAutoFit/>
+          </a:bodyPr>
+          <a:lstStyle/>
+          <a:p>
+            <a:r>
+              <a:rPr sz="1000"/>
+              <a:t>University of Wisconsin - Madison</a:t>
+            </a:r>
+          </a:p>
+        </p:txBody>
+      </p:sp>
+      <p:sp>
+        <p:nvSpPr>
+          <p:cNvPr id="5" name="TextBox 4"/>
+          <p:cNvSpPr txBox="1"/>
+          <p:nvPr/>
+        </p:nvSpPr>
+        <p:spPr>
+          <a:xfrm>
+            <a:off x="10249563" y="6646310"/>
+            <a:ext cx="1706217" cy="188028"/>
+          </a:xfrm>
+          <a:prstGeom prst="rect">
+            <a:avLst/>
+          </a:prstGeom>
+          <a:noFill/>
+        </p:spPr>
+        <p:txBody>
+          <a:bodyPr wrap="none">
+            <a:spAutoFit/>
+          </a:bodyPr>
+          <a:lstStyle/>
+          <a:p>
+            <a:r>
+              <a:rPr sz="1000"/>
+              <a:t>47</a:t>
+            </a:r>
+          </a:p>
+        </p:txBody>
+      </p:sp>
+    </p:spTree>
+  </p:cSld>
+  <p:clrMapOvr>
+    <a:masterClrMapping/>
+  </p:clrMapOvr>
+</p:sld>
+</file>
+
+<file path=ppt/slides/slide48.xml><?xml version="1.0" encoding="utf-8"?>
+<p:sld xmlns:a="http://schemas.openxmlformats.org/drawingml/2006/main" xmlns:p="http://schemas.openxmlformats.org/presentationml/2006/main" xmlns:r="http://schemas.openxmlformats.org/officeDocument/2006/relationships">
+  <p:cSld>
+    <p:spTree>
+      <p:nvGrpSpPr>
+        <p:cNvPr id="1" name=""/>
+        <p:cNvGrpSpPr/>
+        <p:nvPr/>
+      </p:nvGrpSpPr>
+      <p:grpSpPr/>
+      <p:sp>
+        <p:nvSpPr>
+          <p:cNvPr id="2" name="TextBox 1"/>
+          <p:cNvSpPr txBox="1"/>
+          <p:nvPr/>
+        </p:nvSpPr>
+        <p:spPr>
+          <a:xfrm>
+            <a:off x="914400" y="1371600"/>
+            <a:ext cx="10058400" cy="3657600"/>
+          </a:xfrm>
+          <a:prstGeom prst="rect">
+            <a:avLst/>
+          </a:prstGeom>
+          <a:noFill/>
+        </p:spPr>
+        <p:txBody>
+          <a:bodyPr wrap="square">
+            <a:spAutoFit/>
+          </a:bodyPr>
+          <a:lstStyle/>
+          <a:p>
+            <a:pPr/>
+            <a:r>
+              <a:rPr sz="2000"/>
+              <a:t>Thank you.</a:t>
+            </a:r>
+          </a:p>
+          <a:p>
+            <a:pPr/>
+            <a:r>
+              <a:rPr sz="2000"/>
+              <a:t>kasha2@wisc.edu</a:t>
+            </a:r>
+          </a:p>
+          <a:p>
+            <a:pPr/>
+            <a:r>
+              <a:rPr sz="2000"/>
+              <a:t>Simulation-Based Engineering Lab</a:t>
+            </a:r>
+          </a:p>
+          <a:p>
+            <a:pPr/>
+            <a:r>
+              <a:rPr sz="2000"/>
+              <a:t>University of Wisconsin - Madison</a:t>
+            </a:r>
+          </a:p>
+          <a:p>
+            <a:pPr/>
+          </a:p>
+          <a:p>
+            <a:pPr/>
+            <a:r>
+              <a:rPr sz="2000"/>
+              <a:t>Lab website: http://sbel.wisc.edu</a:t>
+            </a:r>
+          </a:p>
+          <a:p>
+            <a:pPr/>
+            <a:r>
+              <a:rPr sz="2000"/>
+              <a:t>Chrono website: http://www.projectchrono.org</a:t>
+            </a:r>
+          </a:p>
+          <a:p>
+            <a:pPr/>
+            <a:r>
+              <a:rPr sz="2000"/>
+              <a:t>Source code: https://github.com/projectchrono</a:t>
+            </a:r>
+          </a:p>
+        </p:txBody>
+      </p:sp>
+      <p:sp>
+        <p:nvSpPr>
+          <p:cNvPr id="3" name="TextBox 2"/>
+          <p:cNvSpPr txBox="1"/>
+          <p:nvPr/>
+        </p:nvSpPr>
+        <p:spPr>
+          <a:xfrm>
+            <a:off x="310974" y="6645811"/>
+            <a:ext cx="11644805" cy="188527"/>
+          </a:xfrm>
+          <a:prstGeom prst="rect">
+            <a:avLst/>
+          </a:prstGeom>
+          <a:noFill/>
+        </p:spPr>
+        <p:txBody>
+          <a:bodyPr wrap="none">
+            <a:spAutoFit/>
+          </a:bodyPr>
+          <a:lstStyle/>
+          <a:p>
+            <a:r>
+              <a:rPr sz="1000"/>
+              <a:t>University of Wisconsin - Madison</a:t>
+            </a:r>
+          </a:p>
+        </p:txBody>
+      </p:sp>
+      <p:sp>
+        <p:nvSpPr>
+          <p:cNvPr id="4" name="TextBox 3"/>
+          <p:cNvSpPr txBox="1"/>
+          <p:nvPr/>
+        </p:nvSpPr>
+        <p:spPr>
+          <a:xfrm>
+            <a:off x="10249563" y="6646310"/>
+            <a:ext cx="1706217" cy="188028"/>
+          </a:xfrm>
+          <a:prstGeom prst="rect">
+            <a:avLst/>
+          </a:prstGeom>
+          <a:noFill/>
+        </p:spPr>
+        <p:txBody>
+          <a:bodyPr wrap="none">
+            <a:spAutoFit/>
+          </a:bodyPr>
+          <a:lstStyle/>
+          <a:p>
+            <a:r>
+              <a:rPr sz="1000"/>
+              <a:t>48</a:t>
             </a:r>
           </a:p>
         </p:txBody>

--- a/tutorial_HIL_driver.pptx
+++ b/tutorial_HIL_driver.pptx
@@ -9122,7 +9122,7 @@
             <a:pPr/>
             <a:r>
               <a:rPr sz="2000"/>
-              <a:t>Get the tutorial files: tutorial_HIL_driver.py, operator_console.py, probe_gamepad.py</a:t>
+              <a:t>Get the tutorial files: tutorial_HIL_driver.py, operator_console.py</a:t>
             </a:r>
           </a:p>
           <a:p>

--- a/tutorial_HIL_driver.pptx
+++ b/tutorial_HIL_driver.pptx
@@ -6200,7 +6200,7 @@
           <a:p>
             <a:r>
               <a:rPr sz="2600"/>
-              <a:t>Step 1: ChInteractiveDriver (Lines 264 to 275)</a:t>
+              <a:t>Step 1: ChInteractiveDriver (Lines 296 to 307)</a:t>
             </a:r>
           </a:p>
         </p:txBody>
@@ -6504,7 +6504,7 @@
           <a:p>
             <a:r>
               <a:rPr sz="2600"/>
-              <a:t>Step 2: Route the window events to the driver (Lines 300 to 304)</a:t>
+              <a:t>Step 2: Route the window events to the driver (Lines 339 to 342)</a:t>
             </a:r>
           </a:p>
         </p:txBody>
@@ -6534,7 +6534,7 @@
           <a:lstStyle/>
           <a:p>
             <a:r>
-              <a:rPr sz="1400">
+              <a:rPr sz="1000">
                 <a:solidFill>
                   <a:srgbClr val="CCCCCC"/>
                 </a:solidFill>
@@ -6545,7 +6545,7 @@
           </a:p>
           <a:p>
             <a:r>
-              <a:rPr sz="1400">
+              <a:rPr sz="1000">
                 <a:solidFill>
                   <a:srgbClr val="CCCCCC"/>
                 </a:solidFill>
@@ -6556,35 +6556,24 @@
           </a:p>
           <a:p>
             <a:r>
-              <a:rPr sz="1400">
-                <a:solidFill>
-                  <a:srgbClr val="CCCCCC"/>
-                </a:solidFill>
-                <a:latin typeface="Consolas"/>
-              </a:rPr>
-              <a:t>if INPUT_SOURCE == "keyboard":</a:t>
-            </a:r>
-          </a:p>
-          <a:p>
-            <a:r>
-              <a:rPr sz="1400">
-                <a:solidFill>
-                  <a:srgbClr val="CCCCCC"/>
-                </a:solidFill>
-                <a:latin typeface="Consolas"/>
-              </a:rPr>
-              <a:t>    vis.AttachDriver(driver)  # route Irrlicht key events to the driver</a:t>
-            </a:r>
-          </a:p>
-          <a:p>
-            <a:r>
-              <a:rPr sz="1400">
-                <a:solidFill>
-                  <a:srgbClr val="CCCCCC"/>
-                </a:solidFill>
-                <a:latin typeface="Consolas"/>
-              </a:rPr>
-              <a:t> </a:t>
+              <a:rPr sz="1000">
+                <a:solidFill>
+                  <a:srgbClr val="CCCCCC"/>
+                </a:solidFill>
+                <a:latin typeface="Consolas"/>
+              </a:rPr>
+              <a:t>if INPUT_SOURCE in ("keyboard", "gamepad"):</a:t>
+            </a:r>
+          </a:p>
+          <a:p>
+            <a:r>
+              <a:rPr sz="1000">
+                <a:solidFill>
+                  <a:srgbClr val="CCCCCC"/>
+                </a:solidFill>
+                <a:latin typeface="Consolas"/>
+              </a:rPr>
+              <a:t>    vis.AttachDriver(driver)  # route Irrlicht key/joystick events to the driver</a:t>
             </a:r>
           </a:p>
         </p:txBody>

--- a/tutorial_HIL_driver.pptx
+++ b/tutorial_HIL_driver.pptx
@@ -4943,7 +4943,7 @@
           <a:p>
             <a:r>
               <a:rPr sz="2600"/>
-              <a:t>Step 4: Enforce real time, three ways (Lines 306 to 311)</a:t>
+              <a:t>Step 4: Enforce real time, three ways (Lines 357 to 362)</a:t>
             </a:r>
           </a:p>
         </p:txBody>
@@ -5181,7 +5181,7 @@
           <a:p>
             <a:r>
               <a:rPr sz="2600"/>
-              <a:t>Step 4: Spin at the end of the loop (Lines 370 to 374)</a:t>
+              <a:t>Step 4: Spin at the end of the loop (Lines 421 to 425)</a:t>
             </a:r>
           </a:p>
         </p:txBody>
@@ -5411,7 +5411,7 @@
           <a:p>
             <a:r>
               <a:rPr sz="2600"/>
-              <a:t>Step 4: A drift-free timer in 10 lines (Lines 53 to 71)</a:t>
+              <a:t>Step 4: A drift-free timer in 10 lines (Lines 56 to 74)</a:t>
             </a:r>
           </a:p>
         </p:txBody>
@@ -12138,7 +12138,7 @@
           <a:lstStyle/>
           <a:p>
             <a:r>
-              <a:t>Choose your car (Lines 284 to 292)</a:t>
+              <a:t>Choose your car (Lines 256 to 264)</a:t>
             </a:r>
           </a:p>
         </p:txBody>
@@ -12386,7 +12386,7 @@
           <a:lstStyle/>
           <a:p>
             <a:r>
-              <a:t>Add or remove overlay pieces (Lines 365 to 372)</a:t>
+              <a:t>Add or remove overlay pieces (Lines 347 to 354)</a:t>
             </a:r>
           </a:p>
         </p:txBody>
@@ -13563,7 +13563,7 @@
           <a:p>
             <a:r>
               <a:rPr sz="2600"/>
-              <a:t>Configuration: scripted driver, as fast as possible (Lines 381 to 399)</a:t>
+              <a:t>Configuration: scripted driver, as fast as possible (Lines 435 to 453)</a:t>
             </a:r>
           </a:p>
         </p:txBody>
@@ -13593,7 +13593,7 @@
           <a:lstStyle/>
           <a:p>
             <a:r>
-              <a:rPr sz="1400">
+              <a:rPr sz="1000">
                 <a:solidFill>
                   <a:srgbClr val="CCCCCC"/>
                 </a:solidFill>
@@ -13604,7 +13604,7 @@
           </a:p>
           <a:p>
             <a:r>
-              <a:rPr sz="1400">
+              <a:rPr sz="1000">
                 <a:solidFill>
                   <a:srgbClr val="CCCCCC"/>
                 </a:solidFill>
@@ -13615,7 +13615,7 @@
           </a:p>
           <a:p>
             <a:r>
-              <a:rPr sz="1400">
+              <a:rPr sz="1000">
                 <a:solidFill>
                   <a:srgbClr val="CCCCCC"/>
                 </a:solidFill>
@@ -13626,29 +13626,29 @@
           </a:p>
           <a:p>
             <a:r>
-              <a:rPr sz="1400">
-                <a:solidFill>
-                  <a:srgbClr val="CCCCCC"/>
-                </a:solidFill>
-                <a:latin typeface="Consolas"/>
-              </a:rPr>
-              <a:t>#   "udp"       PART 3 - operator_console.py sends packets over the network</a:t>
-            </a:r>
-          </a:p>
-          <a:p>
-            <a:r>
-              <a:rPr sz="1400">
-                <a:solidFill>
-                  <a:srgbClr val="CCCCCC"/>
-                </a:solidFill>
-                <a:latin typeface="Consolas"/>
-              </a:rPr>
-              <a:t>#   "gamepad"   PART 3 - gamepad / steering wheel through pygame</a:t>
-            </a:r>
-          </a:p>
-          <a:p>
-            <a:r>
-              <a:rPr sz="1400">
+              <a:rPr sz="1000">
+                <a:solidFill>
+                  <a:srgbClr val="CCCCCC"/>
+                </a:solidFill>
+                <a:latin typeface="Consolas"/>
+              </a:rPr>
+              <a:t>#   "gamepad"   PART 3 - a joystick/wheel, read natively (JOYSTICK_CONFIG below)</a:t>
+            </a:r>
+          </a:p>
+          <a:p>
+            <a:r>
+              <a:rPr sz="1000">
+                <a:solidFill>
+                  <a:srgbClr val="CCCCCC"/>
+                </a:solidFill>
+                <a:latin typeface="Consolas"/>
+              </a:rPr>
+              <a:t>#   "udp"       PART 4 - operator_console.py sends packets over the network</a:t>
+            </a:r>
+          </a:p>
+          <a:p>
+            <a:r>
+              <a:rPr sz="1000">
                 <a:solidFill>
                   <a:srgbClr val="CCCCCC"/>
                 </a:solidFill>
@@ -13659,7 +13659,7 @@
           </a:p>
           <a:p>
             <a:r>
-              <a:rPr sz="1400">
+              <a:rPr sz="1000">
                 <a:solidFill>
                   <a:srgbClr val="CCCCCC"/>
                 </a:solidFill>
@@ -13670,7 +13670,7 @@
           </a:p>
           <a:p>
             <a:r>
-              <a:rPr sz="1400">
+              <a:rPr sz="1000">
                 <a:solidFill>
                   <a:srgbClr val="CCCCCC"/>
                 </a:solidFill>
@@ -13681,7 +13681,7 @@
           </a:p>
           <a:p>
             <a:r>
-              <a:rPr sz="1400">
+              <a:rPr sz="1000">
                 <a:solidFill>
                   <a:srgbClr val="CCCCCC"/>
                 </a:solidFill>
@@ -13692,7 +13692,7 @@
           </a:p>
           <a:p>
             <a:r>
-              <a:rPr sz="1400">
+              <a:rPr sz="1000">
                 <a:solidFill>
                   <a:srgbClr val="CCCCCC"/>
                 </a:solidFill>
@@ -13703,18 +13703,18 @@
           </a:p>
           <a:p>
             <a:r>
-              <a:rPr sz="1400">
-                <a:solidFill>
-                  <a:srgbClr val="CCCCCC"/>
-                </a:solidFill>
-                <a:latin typeface="Consolas"/>
-              </a:rPr>
-              <a:t># PART 4: send telemetry back to the operator (udp/gamepad sources only)</a:t>
-            </a:r>
-          </a:p>
-          <a:p>
-            <a:r>
-              <a:rPr sz="1400">
+              <a:rPr sz="1000">
+                <a:solidFill>
+                  <a:srgbClr val="CCCCCC"/>
+                </a:solidFill>
+                <a:latin typeface="Consolas"/>
+              </a:rPr>
+              <a:t># PART 4: send telemetry back to the operator (udp source only)</a:t>
+            </a:r>
+          </a:p>
+          <a:p>
+            <a:r>
+              <a:rPr sz="1000">
                 <a:solidFill>
                   <a:srgbClr val="CCCCCC"/>
                 </a:solidFill>
@@ -13725,7 +13725,7 @@
           </a:p>
           <a:p>
             <a:r>
-              <a:rPr sz="1400">
+              <a:rPr sz="1000">
                 <a:solidFill>
                   <a:srgbClr val="CCCCCC"/>
                 </a:solidFill>
@@ -13736,7 +13736,7 @@
           </a:p>
           <a:p>
             <a:r>
-              <a:rPr sz="1400">
+              <a:rPr sz="1000">
                 <a:solidFill>
                   <a:srgbClr val="CCCCCC"/>
                 </a:solidFill>
@@ -13747,7 +13747,7 @@
           </a:p>
           <a:p>
             <a:r>
-              <a:rPr sz="1400">
+              <a:rPr sz="1000">
                 <a:solidFill>
                   <a:srgbClr val="CCCCCC"/>
                 </a:solidFill>
@@ -13758,7 +13758,7 @@
           </a:p>
           <a:p>
             <a:r>
-              <a:rPr sz="1400">
+              <a:rPr sz="1000">
                 <a:solidFill>
                   <a:srgbClr val="CCCCCC"/>
                 </a:solidFill>
@@ -13769,7 +13769,7 @@
           </a:p>
           <a:p>
             <a:r>
-              <a:rPr sz="1400">
+              <a:rPr sz="1000">
                 <a:solidFill>
                   <a:srgbClr val="CCCCCC"/>
                 </a:solidFill>
@@ -13780,7 +13780,7 @@
           </a:p>
           <a:p>
             <a:r>
-              <a:rPr sz="1400">
+              <a:rPr sz="1000">
                 <a:solidFill>
                   <a:srgbClr val="CCCCCC"/>
                 </a:solidFill>
@@ -13791,7 +13791,7 @@
           </a:p>
           <a:p>
             <a:r>
-              <a:rPr sz="1400">
+              <a:rPr sz="1000">
                 <a:solidFill>
                   <a:srgbClr val="CCCCCC"/>
                 </a:solidFill>
@@ -13937,7 +13937,7 @@
           <a:p>
             <a:r>
               <a:rPr sz="2600"/>
-              <a:t>Step 1: A scripted ChDataDriver (Lines 252 to 262)</a:t>
+              <a:t>Step 1: A scripted ChDataDriver (Lines 284 to 294)</a:t>
             </a:r>
           </a:p>
         </p:txBody>
@@ -14223,7 +14223,7 @@
           <a:p>
             <a:r>
               <a:rPr sz="2600"/>
-              <a:t>Step 2: The simulation loop (Lines 325 to 353)</a:t>
+              <a:t>Step 2: The simulation loop (Lines 376 to 404)</a:t>
             </a:r>
           </a:p>
         </p:txBody>
@@ -14358,7 +14358,7 @@
                 </a:solidFill>
                 <a:latin typeface="Consolas"/>
               </a:rPr>
-              <a:t>    # PART 3: sample the device ONCE per step and hold it for the step</a:t>
+              <a:t>    # PART 4: sample the device ONCE per step and hold it for the step</a:t>
             </a:r>
           </a:p>
           <a:p>
@@ -14490,7 +14490,7 @@
                 </a:solidFill>
                 <a:latin typeface="Consolas"/>
               </a:rPr>
-              <a:t>    hmmwv.Synchronize(sim_time, driver_inputs, terrain)</a:t>
+              <a:t>    vehicle_model.Synchronize(sim_time, driver_inputs, terrain)</a:t>
             </a:r>
           </a:p>
           <a:p>
@@ -14556,7 +14556,7 @@
                 </a:solidFill>
                 <a:latin typeface="Consolas"/>
               </a:rPr>
-              <a:t>    hmmwv.Advance(step_size)  # spins here if REALTIME == "vehicle"</a:t>
+              <a:t>    vehicle_model.Advance(step_size)  # spins here if REALTIME == "vehicle"</a:t>
             </a:r>
           </a:p>
           <a:p>
@@ -14714,7 +14714,7 @@
           <a:p>
             <a:r>
               <a:rPr sz="2600"/>
-              <a:t>Step 3: Measure it - sim time vs wall time (Lines 355 to 361)</a:t>
+              <a:t>Step 3: Measure it - sim time vs wall time (Lines 406 to 412)</a:t>
             </a:r>
           </a:p>
         </p:txBody>

--- a/tutorial_HIL_driver.pptx
+++ b/tutorial_HIL_driver.pptx
@@ -7477,7 +7477,7 @@
         <p:spPr>
           <a:xfrm>
             <a:off x="0" y="1050000"/>
-            <a:ext cx="12192000" cy="5537200"/>
+            <a:ext cx="12192000" cy="2130000"/>
           </a:xfrm>
           <a:prstGeom prst="rect">
             <a:avLst/>
@@ -7589,7 +7589,7 @@
         </p:nvSpPr>
         <p:spPr>
           <a:xfrm>
-            <a:off x="400000" y="6687200"/>
+            <a:off x="400000" y="3280000"/>
             <a:ext cx="11392000" cy="-229200"/>
           </a:xfrm>
           <a:prstGeom prst="rect">
@@ -7714,7 +7714,7 @@
         <p:spPr>
           <a:xfrm>
             <a:off x="0" y="1050000"/>
-            <a:ext cx="12192000" cy="5537200"/>
+            <a:ext cx="12192000" cy="1425000"/>
           </a:xfrm>
           <a:prstGeom prst="rect">
             <a:avLst/>
@@ -7793,7 +7793,7 @@
         </p:nvSpPr>
         <p:spPr>
           <a:xfrm>
-            <a:off x="400000" y="6687200"/>
+            <a:off x="400000" y="2575000"/>
             <a:ext cx="11392000" cy="-229200"/>
           </a:xfrm>
           <a:prstGeom prst="rect">
@@ -12152,7 +12152,7 @@
         <p:spPr>
           <a:xfrm>
             <a:off x="0" y="1050000"/>
-            <a:ext cx="12192000" cy="5537200"/>
+            <a:ext cx="12192000" cy="2365000"/>
           </a:xfrm>
           <a:prstGeom prst="rect">
             <a:avLst/>
@@ -12275,7 +12275,7 @@
         </p:nvSpPr>
         <p:spPr>
           <a:xfrm>
-            <a:off x="400000" y="6687200"/>
+            <a:off x="400000" y="3515000"/>
             <a:ext cx="11392000" cy="-229200"/>
           </a:xfrm>
           <a:prstGeom prst="rect">
@@ -12400,7 +12400,7 @@
         <p:spPr>
           <a:xfrm>
             <a:off x="0" y="1050000"/>
-            <a:ext cx="12192000" cy="5537200"/>
+            <a:ext cx="12192000" cy="2130000"/>
           </a:xfrm>
           <a:prstGeom prst="rect">
             <a:avLst/>
@@ -12512,7 +12512,7 @@
         </p:nvSpPr>
         <p:spPr>
           <a:xfrm>
-            <a:off x="400000" y="6687200"/>
+            <a:off x="400000" y="3280000"/>
             <a:ext cx="11392000" cy="-229200"/>
           </a:xfrm>
           <a:prstGeom prst="rect">
@@ -12866,22 +12866,22 @@
       </p:sp>
       <p:pic>
         <p:nvPicPr>
-          <p:cNvPr id="6" name="Picture 5" descr="hud_crop.png"/>
+          <p:cNvPr id="6" name="Picture 5" descr="overlay_hud.png"/>
           <p:cNvPicPr>
             <a:picLocks noChangeAspect="1"/>
           </p:cNvPicPr>
           <p:nvPr/>
         </p:nvPicPr>
         <p:blipFill>
-          <a:blip r:embed="rId2"/>
+          <a:blip r:embed="rId3"/>
           <a:stretch>
             <a:fillRect/>
           </a:stretch>
         </p:blipFill>
         <p:spPr>
           <a:xfrm>
-            <a:off x="4837089" y="3350000"/>
-            <a:ext cx="2517822" cy="3100000"/>
+            <a:off x="4196000" y="3450000"/>
+            <a:ext cx="3800000" cy="2571428"/>
           </a:xfrm>
           <a:prstGeom prst="rect">
             <a:avLst/>

--- a/tutorial_HIL_driver.pptx
+++ b/tutorial_HIL_driver.pptx
@@ -7590,7 +7590,7 @@
         <p:spPr>
           <a:xfrm>
             <a:off x="400000" y="3280000"/>
-            <a:ext cx="11392000" cy="-229200"/>
+            <a:ext cx="11392000" cy="400000"/>
           </a:xfrm>
           <a:prstGeom prst="rect">
             <a:avLst/>
@@ -7794,7 +7794,7 @@
         <p:spPr>
           <a:xfrm>
             <a:off x="400000" y="2575000"/>
-            <a:ext cx="11392000" cy="-229200"/>
+            <a:ext cx="11392000" cy="400000"/>
           </a:xfrm>
           <a:prstGeom prst="rect">
             <a:avLst/>
@@ -8927,7 +8927,7 @@
         <p:spPr>
           <a:xfrm>
             <a:off x="400000" y="6687200"/>
-            <a:ext cx="11392000" cy="-229200"/>
+            <a:ext cx="11392000" cy="400000"/>
           </a:xfrm>
           <a:prstGeom prst="rect">
             <a:avLst/>
@@ -9651,7 +9651,7 @@
         <p:spPr>
           <a:xfrm>
             <a:off x="400000" y="6534800"/>
-            <a:ext cx="11392000" cy="-76800"/>
+            <a:ext cx="11392000" cy="400000"/>
           </a:xfrm>
           <a:prstGeom prst="rect">
             <a:avLst/>
@@ -12276,7 +12276,7 @@
         <p:spPr>
           <a:xfrm>
             <a:off x="400000" y="3515000"/>
-            <a:ext cx="11392000" cy="-229200"/>
+            <a:ext cx="11392000" cy="400000"/>
           </a:xfrm>
           <a:prstGeom prst="rect">
             <a:avLst/>
@@ -12513,7 +12513,7 @@
         <p:spPr>
           <a:xfrm>
             <a:off x="400000" y="3280000"/>
-            <a:ext cx="11392000" cy="-229200"/>
+            <a:ext cx="11392000" cy="400000"/>
           </a:xfrm>
           <a:prstGeom prst="rect">
             <a:avLst/>

--- a/tutorial_HIL_driver.pptx
+++ b/tutorial_HIL_driver.pptx
@@ -8516,8 +8516,8 @@
         </p:nvSpPr>
         <p:spPr>
           <a:xfrm>
-            <a:off x="0" y="1050000"/>
-            <a:ext cx="12192000" cy="5537200"/>
+            <a:off x="0" y="980000"/>
+            <a:ext cx="12192000" cy="4983475"/>
           </a:xfrm>
           <a:prstGeom prst="rect">
             <a:avLst/>
@@ -8533,7 +8533,7 @@
           <a:lstStyle/>
           <a:p>
             <a:r>
-              <a:rPr sz="1000">
+              <a:rPr sz="900">
                 <a:solidFill>
                   <a:srgbClr val="CCCCCC"/>
                 </a:solidFill>
@@ -8544,7 +8544,7 @@
           </a:p>
           <a:p>
             <a:r>
-              <a:rPr sz="1000">
+              <a:rPr sz="900">
                 <a:solidFill>
                   <a:srgbClr val="CCCCCC"/>
                 </a:solidFill>
@@ -8555,7 +8555,7 @@
           </a:p>
           <a:p>
             <a:r>
-              <a:rPr sz="1000">
+              <a:rPr sz="900">
                 <a:solidFill>
                   <a:srgbClr val="CCCCCC"/>
                 </a:solidFill>
@@ -8566,7 +8566,7 @@
           </a:p>
           <a:p>
             <a:r>
-              <a:rPr sz="1000">
+              <a:rPr sz="900">
                 <a:solidFill>
                   <a:srgbClr val="CCCCCC"/>
                 </a:solidFill>
@@ -8577,7 +8577,7 @@
           </a:p>
           <a:p>
             <a:r>
-              <a:rPr sz="1000">
+              <a:rPr sz="900">
                 <a:solidFill>
                   <a:srgbClr val="CCCCCC"/>
                 </a:solidFill>
@@ -8588,7 +8588,7 @@
           </a:p>
           <a:p>
             <a:r>
-              <a:rPr sz="1000">
+              <a:rPr sz="900">
                 <a:solidFill>
                   <a:srgbClr val="CCCCCC"/>
                 </a:solidFill>
@@ -8599,7 +8599,7 @@
           </a:p>
           <a:p>
             <a:r>
-              <a:rPr sz="1000">
+              <a:rPr sz="900">
                 <a:solidFill>
                   <a:srgbClr val="CCCCCC"/>
                 </a:solidFill>
@@ -8610,7 +8610,7 @@
           </a:p>
           <a:p>
             <a:r>
-              <a:rPr sz="1000">
+              <a:rPr sz="900">
                 <a:solidFill>
                   <a:srgbClr val="CCCCCC"/>
                 </a:solidFill>
@@ -8621,7 +8621,7 @@
           </a:p>
           <a:p>
             <a:r>
-              <a:rPr sz="1000">
+              <a:rPr sz="900">
                 <a:solidFill>
                   <a:srgbClr val="CCCCCC"/>
                 </a:solidFill>
@@ -8632,7 +8632,7 @@
           </a:p>
           <a:p>
             <a:r>
-              <a:rPr sz="1000">
+              <a:rPr sz="900">
                 <a:solidFill>
                   <a:srgbClr val="CCCCCC"/>
                 </a:solidFill>
@@ -8643,7 +8643,7 @@
           </a:p>
           <a:p>
             <a:r>
-              <a:rPr sz="1000">
+              <a:rPr sz="900">
                 <a:solidFill>
                   <a:srgbClr val="CCCCCC"/>
                 </a:solidFill>
@@ -8654,7 +8654,7 @@
           </a:p>
           <a:p>
             <a:r>
-              <a:rPr sz="1000">
+              <a:rPr sz="900">
                 <a:solidFill>
                   <a:srgbClr val="CCCCCC"/>
                 </a:solidFill>
@@ -8665,7 +8665,7 @@
           </a:p>
           <a:p>
             <a:r>
-              <a:rPr sz="1000">
+              <a:rPr sz="900">
                 <a:solidFill>
                   <a:srgbClr val="CCCCCC"/>
                 </a:solidFill>
@@ -8676,7 +8676,7 @@
           </a:p>
           <a:p>
             <a:r>
-              <a:rPr sz="1000">
+              <a:rPr sz="900">
                 <a:solidFill>
                   <a:srgbClr val="CCCCCC"/>
                 </a:solidFill>
@@ -8687,7 +8687,7 @@
           </a:p>
           <a:p>
             <a:r>
-              <a:rPr sz="1000">
+              <a:rPr sz="900">
                 <a:solidFill>
                   <a:srgbClr val="CCCCCC"/>
                 </a:solidFill>
@@ -8698,7 +8698,7 @@
           </a:p>
           <a:p>
             <a:r>
-              <a:rPr sz="1000">
+              <a:rPr sz="900">
                 <a:solidFill>
                   <a:srgbClr val="CCCCCC"/>
                 </a:solidFill>
@@ -8709,7 +8709,7 @@
           </a:p>
           <a:p>
             <a:r>
-              <a:rPr sz="1000">
+              <a:rPr sz="900">
                 <a:solidFill>
                   <a:srgbClr val="CCCCCC"/>
                 </a:solidFill>
@@ -8720,7 +8720,7 @@
           </a:p>
           <a:p>
             <a:r>
-              <a:rPr sz="1000">
+              <a:rPr sz="900">
                 <a:solidFill>
                   <a:srgbClr val="CCCCCC"/>
                 </a:solidFill>
@@ -8731,7 +8731,7 @@
           </a:p>
           <a:p>
             <a:r>
-              <a:rPr sz="1000">
+              <a:rPr sz="900">
                 <a:solidFill>
                   <a:srgbClr val="CCCCCC"/>
                 </a:solidFill>
@@ -8742,7 +8742,7 @@
           </a:p>
           <a:p>
             <a:r>
-              <a:rPr sz="1000">
+              <a:rPr sz="900">
                 <a:solidFill>
                   <a:srgbClr val="CCCCCC"/>
                 </a:solidFill>
@@ -8753,7 +8753,7 @@
           </a:p>
           <a:p>
             <a:r>
-              <a:rPr sz="1000">
+              <a:rPr sz="900">
                 <a:solidFill>
                   <a:srgbClr val="CCCCCC"/>
                 </a:solidFill>
@@ -8764,7 +8764,7 @@
           </a:p>
           <a:p>
             <a:r>
-              <a:rPr sz="1000">
+              <a:rPr sz="900">
                 <a:solidFill>
                   <a:srgbClr val="CCCCCC"/>
                 </a:solidFill>
@@ -8775,7 +8775,7 @@
           </a:p>
           <a:p>
             <a:r>
-              <a:rPr sz="1000">
+              <a:rPr sz="900">
                 <a:solidFill>
                   <a:srgbClr val="CCCCCC"/>
                 </a:solidFill>
@@ -8786,7 +8786,7 @@
           </a:p>
           <a:p>
             <a:r>
-              <a:rPr sz="1000">
+              <a:rPr sz="900">
                 <a:solidFill>
                   <a:srgbClr val="CCCCCC"/>
                 </a:solidFill>
@@ -8797,7 +8797,7 @@
           </a:p>
           <a:p>
             <a:r>
-              <a:rPr sz="1000">
+              <a:rPr sz="900">
                 <a:solidFill>
                   <a:srgbClr val="CCCCCC"/>
                 </a:solidFill>
@@ -8808,7 +8808,7 @@
           </a:p>
           <a:p>
             <a:r>
-              <a:rPr sz="1000">
+              <a:rPr sz="900">
                 <a:solidFill>
                   <a:srgbClr val="CCCCCC"/>
                 </a:solidFill>
@@ -8819,7 +8819,7 @@
           </a:p>
           <a:p>
             <a:r>
-              <a:rPr sz="1000">
+              <a:rPr sz="900">
                 <a:solidFill>
                   <a:srgbClr val="CCCCCC"/>
                 </a:solidFill>
@@ -8830,7 +8830,7 @@
           </a:p>
           <a:p>
             <a:r>
-              <a:rPr sz="1000">
+              <a:rPr sz="900">
                 <a:solidFill>
                   <a:srgbClr val="CCCCCC"/>
                 </a:solidFill>
@@ -8841,7 +8841,7 @@
           </a:p>
           <a:p>
             <a:r>
-              <a:rPr sz="1000">
+              <a:rPr sz="900">
                 <a:solidFill>
                   <a:srgbClr val="CCCCCC"/>
                 </a:solidFill>
@@ -8852,7 +8852,7 @@
           </a:p>
           <a:p>
             <a:r>
-              <a:rPr sz="1000">
+              <a:rPr sz="900">
                 <a:solidFill>
                   <a:srgbClr val="CCCCCC"/>
                 </a:solidFill>
@@ -8863,7 +8863,7 @@
           </a:p>
           <a:p>
             <a:r>
-              <a:rPr sz="1000">
+              <a:rPr sz="900">
                 <a:solidFill>
                   <a:srgbClr val="CCCCCC"/>
                 </a:solidFill>
@@ -8874,7 +8874,7 @@
           </a:p>
           <a:p>
             <a:r>
-              <a:rPr sz="1000">
+              <a:rPr sz="900">
                 <a:solidFill>
                   <a:srgbClr val="CCCCCC"/>
                 </a:solidFill>
@@ -8885,7 +8885,7 @@
           </a:p>
           <a:p>
             <a:r>
-              <a:rPr sz="1000">
+              <a:rPr sz="900">
                 <a:solidFill>
                   <a:srgbClr val="CCCCCC"/>
                 </a:solidFill>
@@ -8896,7 +8896,7 @@
           </a:p>
           <a:p>
             <a:r>
-              <a:rPr sz="1000">
+              <a:rPr sz="900">
                 <a:solidFill>
                   <a:srgbClr val="CCCCCC"/>
                 </a:solidFill>
@@ -8907,7 +8907,7 @@
           </a:p>
           <a:p>
             <a:r>
-              <a:rPr sz="1000">
+              <a:rPr sz="900">
                 <a:solidFill>
                   <a:srgbClr val="CCCCCC"/>
                 </a:solidFill>
@@ -8926,8 +8926,8 @@
         </p:nvSpPr>
         <p:spPr>
           <a:xfrm>
-            <a:off x="400000" y="6687200"/>
-            <a:ext cx="11392000" cy="400000"/>
+            <a:off x="400000" y="6003475"/>
+            <a:ext cx="11392000" cy="260000"/>
           </a:xfrm>
           <a:prstGeom prst="rect">
             <a:avLst/>
@@ -8942,7 +8942,7 @@
           <a:p>
             <a:pPr/>
             <a:r>
-              <a:rPr sz="1800"/>
+              <a:rPr sz="1600"/>
               <a:t>Same first-order lag as ChInteractiveDriver::SetGains, in Python, so all devices behave alike</a:t>
             </a:r>
           </a:p>
@@ -9251,8 +9251,8 @@
         </p:nvSpPr>
         <p:spPr>
           <a:xfrm>
-            <a:off x="0" y="1050000"/>
-            <a:ext cx="12192000" cy="5384800"/>
+            <a:off x="0" y="980000"/>
+            <a:ext cx="12192000" cy="4841090"/>
           </a:xfrm>
           <a:prstGeom prst="rect">
             <a:avLst/>
@@ -9268,7 +9268,7 @@
           <a:lstStyle/>
           <a:p>
             <a:r>
-              <a:rPr sz="1000">
+              <a:rPr sz="900">
                 <a:solidFill>
                   <a:srgbClr val="CCCCCC"/>
                 </a:solidFill>
@@ -9279,7 +9279,7 @@
           </a:p>
           <a:p>
             <a:r>
-              <a:rPr sz="1000">
+              <a:rPr sz="900">
                 <a:solidFill>
                   <a:srgbClr val="CCCCCC"/>
                 </a:solidFill>
@@ -9290,7 +9290,7 @@
           </a:p>
           <a:p>
             <a:r>
-              <a:rPr sz="1000">
+              <a:rPr sz="900">
                 <a:solidFill>
                   <a:srgbClr val="CCCCCC"/>
                 </a:solidFill>
@@ -9301,7 +9301,7 @@
           </a:p>
           <a:p>
             <a:r>
-              <a:rPr sz="1000">
+              <a:rPr sz="900">
                 <a:solidFill>
                   <a:srgbClr val="CCCCCC"/>
                 </a:solidFill>
@@ -9312,7 +9312,7 @@
           </a:p>
           <a:p>
             <a:r>
-              <a:rPr sz="1000">
+              <a:rPr sz="900">
                 <a:solidFill>
                   <a:srgbClr val="CCCCCC"/>
                 </a:solidFill>
@@ -9323,7 +9323,7 @@
           </a:p>
           <a:p>
             <a:r>
-              <a:rPr sz="1000">
+              <a:rPr sz="900">
                 <a:solidFill>
                   <a:srgbClr val="CCCCCC"/>
                 </a:solidFill>
@@ -9334,7 +9334,7 @@
           </a:p>
           <a:p>
             <a:r>
-              <a:rPr sz="1000">
+              <a:rPr sz="900">
                 <a:solidFill>
                   <a:srgbClr val="CCCCCC"/>
                 </a:solidFill>
@@ -9345,7 +9345,7 @@
           </a:p>
           <a:p>
             <a:r>
-              <a:rPr sz="1000">
+              <a:rPr sz="900">
                 <a:solidFill>
                   <a:srgbClr val="CCCCCC"/>
                 </a:solidFill>
@@ -9356,7 +9356,7 @@
           </a:p>
           <a:p>
             <a:r>
-              <a:rPr sz="1000">
+              <a:rPr sz="900">
                 <a:solidFill>
                   <a:srgbClr val="CCCCCC"/>
                 </a:solidFill>
@@ -9367,7 +9367,7 @@
           </a:p>
           <a:p>
             <a:r>
-              <a:rPr sz="1000">
+              <a:rPr sz="900">
                 <a:solidFill>
                   <a:srgbClr val="CCCCCC"/>
                 </a:solidFill>
@@ -9378,7 +9378,7 @@
           </a:p>
           <a:p>
             <a:r>
-              <a:rPr sz="1000">
+              <a:rPr sz="900">
                 <a:solidFill>
                   <a:srgbClr val="CCCCCC"/>
                 </a:solidFill>
@@ -9389,7 +9389,7 @@
           </a:p>
           <a:p>
             <a:r>
-              <a:rPr sz="1000">
+              <a:rPr sz="900">
                 <a:solidFill>
                   <a:srgbClr val="CCCCCC"/>
                 </a:solidFill>
@@ -9400,7 +9400,7 @@
           </a:p>
           <a:p>
             <a:r>
-              <a:rPr sz="1000">
+              <a:rPr sz="900">
                 <a:solidFill>
                   <a:srgbClr val="CCCCCC"/>
                 </a:solidFill>
@@ -9411,7 +9411,7 @@
           </a:p>
           <a:p>
             <a:r>
-              <a:rPr sz="1000">
+              <a:rPr sz="900">
                 <a:solidFill>
                   <a:srgbClr val="CCCCCC"/>
                 </a:solidFill>
@@ -9422,7 +9422,7 @@
           </a:p>
           <a:p>
             <a:r>
-              <a:rPr sz="1000">
+              <a:rPr sz="900">
                 <a:solidFill>
                   <a:srgbClr val="CCCCCC"/>
                 </a:solidFill>
@@ -9433,7 +9433,7 @@
           </a:p>
           <a:p>
             <a:r>
-              <a:rPr sz="1000">
+              <a:rPr sz="900">
                 <a:solidFill>
                   <a:srgbClr val="CCCCCC"/>
                 </a:solidFill>
@@ -9444,7 +9444,7 @@
           </a:p>
           <a:p>
             <a:r>
-              <a:rPr sz="1000">
+              <a:rPr sz="900">
                 <a:solidFill>
                   <a:srgbClr val="CCCCCC"/>
                 </a:solidFill>
@@ -9455,7 +9455,7 @@
           </a:p>
           <a:p>
             <a:r>
-              <a:rPr sz="1000">
+              <a:rPr sz="900">
                 <a:solidFill>
                   <a:srgbClr val="CCCCCC"/>
                 </a:solidFill>
@@ -9466,7 +9466,7 @@
           </a:p>
           <a:p>
             <a:r>
-              <a:rPr sz="1000">
+              <a:rPr sz="900">
                 <a:solidFill>
                   <a:srgbClr val="CCCCCC"/>
                 </a:solidFill>
@@ -9477,7 +9477,7 @@
           </a:p>
           <a:p>
             <a:r>
-              <a:rPr sz="1000">
+              <a:rPr sz="900">
                 <a:solidFill>
                   <a:srgbClr val="CCCCCC"/>
                 </a:solidFill>
@@ -9488,7 +9488,7 @@
           </a:p>
           <a:p>
             <a:r>
-              <a:rPr sz="1000">
+              <a:rPr sz="900">
                 <a:solidFill>
                   <a:srgbClr val="CCCCCC"/>
                 </a:solidFill>
@@ -9499,7 +9499,7 @@
           </a:p>
           <a:p>
             <a:r>
-              <a:rPr sz="1000">
+              <a:rPr sz="900">
                 <a:solidFill>
                   <a:srgbClr val="CCCCCC"/>
                 </a:solidFill>
@@ -9510,7 +9510,7 @@
           </a:p>
           <a:p>
             <a:r>
-              <a:rPr sz="1000">
+              <a:rPr sz="900">
                 <a:solidFill>
                   <a:srgbClr val="CCCCCC"/>
                 </a:solidFill>
@@ -9521,7 +9521,7 @@
           </a:p>
           <a:p>
             <a:r>
-              <a:rPr sz="1000">
+              <a:rPr sz="900">
                 <a:solidFill>
                   <a:srgbClr val="CCCCCC"/>
                 </a:solidFill>
@@ -9532,7 +9532,7 @@
           </a:p>
           <a:p>
             <a:r>
-              <a:rPr sz="1000">
+              <a:rPr sz="900">
                 <a:solidFill>
                   <a:srgbClr val="CCCCCC"/>
                 </a:solidFill>
@@ -9543,7 +9543,7 @@
           </a:p>
           <a:p>
             <a:r>
-              <a:rPr sz="1000">
+              <a:rPr sz="900">
                 <a:solidFill>
                   <a:srgbClr val="CCCCCC"/>
                 </a:solidFill>
@@ -9554,7 +9554,7 @@
           </a:p>
           <a:p>
             <a:r>
-              <a:rPr sz="1000">
+              <a:rPr sz="900">
                 <a:solidFill>
                   <a:srgbClr val="CCCCCC"/>
                 </a:solidFill>
@@ -9565,7 +9565,7 @@
           </a:p>
           <a:p>
             <a:r>
-              <a:rPr sz="1000">
+              <a:rPr sz="900">
                 <a:solidFill>
                   <a:srgbClr val="CCCCCC"/>
                 </a:solidFill>
@@ -9576,7 +9576,7 @@
           </a:p>
           <a:p>
             <a:r>
-              <a:rPr sz="1000">
+              <a:rPr sz="900">
                 <a:solidFill>
                   <a:srgbClr val="CCCCCC"/>
                 </a:solidFill>
@@ -9587,7 +9587,7 @@
           </a:p>
           <a:p>
             <a:r>
-              <a:rPr sz="1000">
+              <a:rPr sz="900">
                 <a:solidFill>
                   <a:srgbClr val="CCCCCC"/>
                 </a:solidFill>
@@ -9598,7 +9598,7 @@
           </a:p>
           <a:p>
             <a:r>
-              <a:rPr sz="1000">
+              <a:rPr sz="900">
                 <a:solidFill>
                   <a:srgbClr val="CCCCCC"/>
                 </a:solidFill>
@@ -9609,7 +9609,7 @@
           </a:p>
           <a:p>
             <a:r>
-              <a:rPr sz="1000">
+              <a:rPr sz="900">
                 <a:solidFill>
                   <a:srgbClr val="CCCCCC"/>
                 </a:solidFill>
@@ -9620,7 +9620,7 @@
           </a:p>
           <a:p>
             <a:r>
-              <a:rPr sz="1000">
+              <a:rPr sz="900">
                 <a:solidFill>
                   <a:srgbClr val="CCCCCC"/>
                 </a:solidFill>
@@ -9631,7 +9631,7 @@
           </a:p>
           <a:p>
             <a:r>
-              <a:rPr sz="1000">
+              <a:rPr sz="900">
                 <a:solidFill>
                   <a:srgbClr val="CCCCCC"/>
                 </a:solidFill>
@@ -9650,8 +9650,8 @@
         </p:nvSpPr>
         <p:spPr>
           <a:xfrm>
-            <a:off x="400000" y="6534800"/>
-            <a:ext cx="11392000" cy="400000"/>
+            <a:off x="400000" y="5861090"/>
+            <a:ext cx="11392000" cy="260000"/>
           </a:xfrm>
           <a:prstGeom prst="rect">
             <a:avLst/>
@@ -9666,14 +9666,14 @@
           <a:p>
             <a:pPr/>
             <a:r>
-              <a:rPr sz="1800"/>
+              <a:rPr sz="1600"/>
               <a:t>Non-blocking socket, drained every step; the newest packet wins, an empty queue holds the last value</a:t>
             </a:r>
           </a:p>
           <a:p>
             <a:pPr/>
             <a:r>
-              <a:rPr sz="1800"/>
+              <a:rPr sz="1600"/>
               <a:t>The operator can be anywhere on the network - and the console has no Chrono dependency at all</a:t>
             </a:r>
           </a:p>

--- a/tutorial_HIL_driver.pptx
+++ b/tutorial_HIL_driver.pptx
@@ -35,6 +35,7 @@
     <p:sldId id="304" r:id="rId56"/>
     <p:sldId id="305" r:id="rId57"/>
     <p:sldId id="276" r:id="rId28"/>
+    <p:sldId id="306" r:id="rId38"/>
     <p:sldId id="277" r:id="rId29"/>
     <p:sldId id="278" r:id="rId30"/>
     <p:sldId id="279" r:id="rId31"/>
@@ -49,6 +50,7 @@
     <p:sldId id="290" r:id="rId42"/>
     <p:sldId id="294" r:id="rId46"/>
     <p:sldId id="295" r:id="rId47"/>
+    <p:sldId id="307" r:id="rId37"/>
     <p:sldId id="296" r:id="rId7"/>
     <p:sldId id="297" r:id="rId6"/>
     <p:sldId id="298" r:id="rId5"/>
@@ -4702,7 +4704,7 @@
           <a:lstStyle/>
           <a:p>
             <a:r>
-              <a:t>Speaker: &lt;your name&gt;</a:t>
+              <a:t>Speaker: Kyle Sha</a:t>
             </a:r>
           </a:p>
           <a:p>
@@ -6853,7 +6855,7 @@
           <a:p>
             <a:r>
               <a:rPr sz="2600"/>
-              <a:t>Overview of the HIL tutorial</a:t>
+              <a:t>Overview of the human-in-the-loop tutorial</a:t>
             </a:r>
           </a:p>
         </p:txBody>
@@ -6932,7 +6934,7 @@
             <a:pPr/>
             <a:r>
               <a:rPr sz="2000"/>
-              <a:t>The whole HIL contract is: spin once per step, three floats in, state out</a:t>
+              <a:t>The whole human-in-the-loop contract is: spin once per step, three floats in, state out</a:t>
             </a:r>
           </a:p>
         </p:txBody>
@@ -8291,123 +8293,211 @@
             <p:ph type="title"/>
           </p:nvPr>
         </p:nvSpPr>
-        <p:spPr>
-          <a:xfrm>
-            <a:off x="235228" y="150000"/>
-            <a:ext cx="9875520" cy="800000"/>
-          </a:xfrm>
+        <p:spPr/>
+        <p:txBody>
+          <a:bodyPr/>
+          <a:lstStyle/>
+          <a:p>
+            <a:r>
+              <a:t>Part 4's architecture: two processes, one UDP contract</a:t>
+            </a:r>
+          </a:p>
+        </p:txBody>
+      </p:sp>
+      <p:sp>
+        <p:nvSpPr>
+          <p:cNvPr id="3" name="Box 3"/>
+          <p:cNvSpPr/>
+          <p:nvPr/>
+        </p:nvSpPr>
+        <p:spPr>
+          <a:xfrm>
+            <a:off x="700000" y="2600000"/>
+            <a:ext cx="4300000" cy="1450000"/>
+          </a:xfrm>
+          <a:prstGeom prst="roundRect">
+            <a:avLst/>
+          </a:prstGeom>
+          <a:solidFill>
+            <a:srgbClr val="1F3864"/>
+          </a:solidFill>
+          <a:ln w="12700">
+            <a:solidFill>
+              <a:srgbClr val="0B1E3F"/>
+            </a:solidFill>
+          </a:ln>
+        </p:spPr>
+        <p:txBody>
+          <a:bodyPr anchor="ctr" wrap="square"/>
+          <a:lstStyle/>
+          <a:p>
+            <a:pPr algn="ctr"/>
+            <a:r>
+              <a:rPr sz="1800" b="1"/>
+              <a:t>Operator machine</a:t>
+            </a:r>
+          </a:p>
+          <a:p>
+            <a:pPr algn="ctr"/>
+            <a:r>
+              <a:rPr sz="1800"/>
+              <a:t>operator_console.py</a:t>
+            </a:r>
+          </a:p>
+        </p:txBody>
+      </p:sp>
+      <p:sp>
+        <p:nvSpPr>
+          <p:cNvPr id="4" name="Box 4"/>
+          <p:cNvSpPr/>
+          <p:nvPr/>
+        </p:nvSpPr>
+        <p:spPr>
+          <a:xfrm>
+            <a:off x="7192000" y="2600000"/>
+            <a:ext cx="4300000" cy="1450000"/>
+          </a:xfrm>
+          <a:prstGeom prst="roundRect">
+            <a:avLst/>
+          </a:prstGeom>
+          <a:solidFill>
+            <a:srgbClr val="1F3864"/>
+          </a:solidFill>
+          <a:ln w="12700">
+            <a:solidFill>
+              <a:srgbClr val="0B1E3F"/>
+            </a:solidFill>
+          </a:ln>
+        </p:spPr>
+        <p:txBody>
+          <a:bodyPr anchor="ctr" wrap="square"/>
+          <a:lstStyle/>
+          <a:p>
+            <a:pPr algn="ctr"/>
+            <a:r>
+              <a:rPr sz="1800" b="1"/>
+              <a:t>Simulation machine</a:t>
+            </a:r>
+          </a:p>
+          <a:p>
+            <a:pPr algn="ctr"/>
+            <a:r>
+              <a:rPr sz="1800"/>
+              <a:t>tutorial_HIL_driver.py</a:t>
+            </a:r>
+          </a:p>
+        </p:txBody>
+      </p:sp>
+      <p:sp>
+        <p:nvSpPr>
+          <p:cNvPr id="5" name="Label 5"/>
+          <p:cNvSpPr txBox="1"/>
+          <p:nvPr/>
+        </p:nvSpPr>
+        <p:spPr>
+          <a:xfrm>
+            <a:off x="5000000" y="1950000"/>
+            <a:ext cx="2192000" cy="500000"/>
+          </a:xfrm>
+          <a:prstGeom prst="rect">
+            <a:avLst/>
+          </a:prstGeom>
+          <a:noFill/>
+        </p:spPr>
+        <p:txBody>
+          <a:bodyPr anchor="ctr" wrap="square"/>
+          <a:lstStyle/>
+          <a:p>
+            <a:pPr algn="ctr"/>
+            <a:r>
+              <a:rPr sz="1600" b="1">
+                <a:solidFill>
+                  <a:srgbClr val="1F3864"/>
+                </a:solidFill>
+              </a:rPr>
+              <a:t>→ </a:t>
+            </a:r>
+            <a:r>
+              <a:rPr sz="1600">
+                <a:solidFill>
+                  <a:srgbClr val="1F3864"/>
+                </a:solidFill>
+              </a:rPr>
+              <a:t>steering, throttle, braking</a:t>
+            </a:r>
+          </a:p>
+        </p:txBody>
+      </p:sp>
+      <p:sp>
+        <p:nvSpPr>
+          <p:cNvPr id="6" name="Label 6"/>
+          <p:cNvSpPr txBox="1"/>
+          <p:nvPr/>
+        </p:nvSpPr>
+        <p:spPr>
+          <a:xfrm>
+            <a:off x="5000000" y="4150000"/>
+            <a:ext cx="2192000" cy="700000"/>
+          </a:xfrm>
+          <a:prstGeom prst="rect">
+            <a:avLst/>
+          </a:prstGeom>
+          <a:noFill/>
+        </p:spPr>
+        <p:txBody>
+          <a:bodyPr anchor="ctr" wrap="square"/>
+          <a:lstStyle/>
+          <a:p>
+            <a:pPr algn="ctr"/>
+            <a:r>
+              <a:rPr sz="1600">
+                <a:solidFill>
+                  <a:srgbClr val="808080"/>
+                </a:solidFill>
+              </a:rPr>
+              <a:t>speed, RTF, lateral accel</a:t>
+            </a:r>
+            <a:r>
+              <a:rPr sz="1600" b="1">
+                <a:solidFill>
+                  <a:srgbClr val="808080"/>
+                </a:solidFill>
+              </a:rPr>
+              <a:t> ←</a:t>
+            </a:r>
+          </a:p>
+        </p:txBody>
+      </p:sp>
+      <p:sp>
+        <p:nvSpPr>
+          <p:cNvPr id="7" name="TextBox note"/>
+          <p:cNvSpPr txBox="1"/>
+          <p:nvPr/>
+        </p:nvSpPr>
+        <p:spPr>
+          <a:xfrm>
+            <a:off x="700000" y="5250000"/>
+            <a:ext cx="10792000" cy="700000"/>
+          </a:xfrm>
+          <a:prstGeom prst="rect">
+            <a:avLst/>
+          </a:prstGeom>
+          <a:noFill/>
         </p:spPr>
         <p:txBody>
           <a:bodyPr wrap="square"/>
           <a:lstStyle/>
           <a:p>
             <a:r>
-              <a:rPr sz="2600"/>
-              <a:t>The HIL contract</a:t>
-            </a:r>
-          </a:p>
-        </p:txBody>
-      </p:sp>
-      <p:sp>
-        <p:nvSpPr>
-          <p:cNvPr id="3" name="Content Placeholder 2"/>
-          <p:cNvSpPr>
-            <a:spLocks noGrp="1"/>
-          </p:cNvSpPr>
-          <p:nvPr>
-            <p:ph idx="1"/>
-          </p:nvPr>
-        </p:nvSpPr>
-        <p:spPr/>
-        <p:txBody>
-          <a:bodyPr wrap="square"/>
-          <a:lstStyle/>
-          <a:p>
-            <a:pPr/>
-            <a:r>
-              <a:rPr sz="2000"/>
-              <a:t>A driver is just three floats per step: steering [-1, 1], throttle [0, 1], braking [0, 1]</a:t>
-            </a:r>
-          </a:p>
-          <a:p>
-            <a:pPr/>
-            <a:r>
-              <a:rPr sz="1800">
-                <a:latin typeface="Consolas"/>
-              </a:rPr>
-              <a:t>veh.ChDriver</a:t>
-            </a:r>
-            <a:r>
-              <a:rPr sz="2000"/>
-              <a:t> is the plain container: </a:t>
-            </a:r>
-            <a:r>
-              <a:rPr sz="1800">
-                <a:latin typeface="Consolas"/>
-              </a:rPr>
-              <a:t>SetSteering()</a:t>
-            </a:r>
-            <a:r>
-              <a:rPr sz="2000"/>
-              <a:t>, </a:t>
-            </a:r>
-            <a:r>
-              <a:rPr sz="1800">
-                <a:latin typeface="Consolas"/>
-              </a:rPr>
-              <a:t>SetThrottle()</a:t>
-            </a:r>
-            <a:r>
-              <a:rPr sz="2000"/>
-              <a:t>, </a:t>
-            </a:r>
-            <a:r>
-              <a:rPr sz="1800">
-                <a:latin typeface="Consolas"/>
-              </a:rPr>
-              <a:t>SetBraking()</a:t>
-            </a:r>
-          </a:p>
-          <a:p>
-            <a:pPr/>
-            <a:r>
-              <a:rPr sz="2000"/>
-              <a:t>So the recipe for ANY device is:</a:t>
-            </a:r>
-          </a:p>
-          <a:p>
-            <a:pPr lvl="1"/>
-            <a:r>
-              <a:rPr sz="1800"/>
-              <a:t>1. poll the device (never block the physics loop)</a:t>
-            </a:r>
-          </a:p>
-          <a:p>
-            <a:pPr lvl="1"/>
-            <a:r>
-              <a:rPr sz="1800"/>
-              <a:t>2. rate-limit / smooth (a human arm is not a step function)</a:t>
-            </a:r>
-          </a:p>
-          <a:p>
-            <a:pPr lvl="1"/>
-            <a:r>
-              <a:rPr sz="1800"/>
-              <a:t>3. write into the ChDriver once per step - zero-order hold until the next step</a:t>
-            </a:r>
-          </a:p>
-          <a:p>
-            <a:pPr/>
-            <a:r>
-              <a:rPr sz="2000"/>
-              <a:t>Today: a UDP operator console everybody can run (two terminals)</a:t>
-            </a:r>
-          </a:p>
-        </p:txBody>
-      </p:sp>
-      <p:sp>
-        <p:nvSpPr>
-          <p:cNvPr id="4" name="TextBox 3"/>
+              <a:rPr sz="1600"/>
+              <a:t>Both directions are plain UDP datagrams - two processes, possibly two machines, no shared memory. The grey arrow only fires when SEND_FEEDBACK = True.</a:t>
+            </a:r>
+          </a:p>
+        </p:txBody>
+      </p:sp>
+      <p:sp>
+        <p:nvSpPr>
+          <p:cNvPr id="8" name="TextBox 7"/>
           <p:cNvSpPr txBox="1"/>
           <p:nvPr/>
         </p:nvSpPr>
@@ -8436,7 +8526,7 @@
       </p:sp>
       <p:sp>
         <p:nvSpPr>
-          <p:cNvPr id="5" name="TextBox 4"/>
+          <p:cNvPr id="9" name="TextBox 8"/>
           <p:cNvSpPr txBox="1"/>
           <p:nvPr/>
         </p:nvSpPr>
@@ -8503,417 +8593,104 @@
           <a:p>
             <a:r>
               <a:rPr sz="2600"/>
-              <a:t>Step 1: Smooth - never teleport raw inputs into the model (Lines 100 to 133)</a:t>
-            </a:r>
-          </a:p>
-        </p:txBody>
-      </p:sp>
-      <p:sp>
-        <p:nvSpPr>
-          <p:cNvPr id="3" name="TextBox 2"/>
-          <p:cNvSpPr txBox="1"/>
-          <p:nvPr/>
-        </p:nvSpPr>
-        <p:spPr>
-          <a:xfrm>
-            <a:off x="0" y="980000"/>
-            <a:ext cx="12192000" cy="4983475"/>
-          </a:xfrm>
-          <a:prstGeom prst="rect">
-            <a:avLst/>
-          </a:prstGeom>
-          <a:solidFill>
-            <a:srgbClr val="000000"/>
-          </a:solidFill>
-        </p:spPr>
-        <p:txBody>
-          <a:bodyPr wrap="none" lIns="300000" rIns="300000">
-            <a:noAutofit/>
-          </a:bodyPr>
-          <a:lstStyle/>
-          <a:p>
-            <a:r>
-              <a:rPr sz="900">
-                <a:solidFill>
-                  <a:srgbClr val="CCCCCC"/>
-                </a:solidFill>
-                <a:latin typeface="Consolas"/>
-              </a:rPr>
-              <a:t>class SmoothedInputs:</a:t>
-            </a:r>
-          </a:p>
-          <a:p>
-            <a:r>
-              <a:rPr sz="900">
-                <a:solidFill>
-                  <a:srgbClr val="CCCCCC"/>
-                </a:solidFill>
-                <a:latin typeface="Consolas"/>
-              </a:rPr>
-              <a:t>    """First-order lag from a *target* input to the *applied* input.</a:t>
-            </a:r>
-          </a:p>
-          <a:p>
-            <a:r>
-              <a:rPr sz="900">
-                <a:solidFill>
-                  <a:srgbClr val="CCCCCC"/>
-                </a:solidFill>
-                <a:latin typeface="Consolas"/>
-              </a:rPr>
-              <a:t> </a:t>
-            </a:r>
-          </a:p>
-          <a:p>
-            <a:r>
-              <a:rPr sz="900">
-                <a:solidFill>
-                  <a:srgbClr val="CCCCCC"/>
-                </a:solidFill>
-                <a:latin typeface="Consolas"/>
-              </a:rPr>
-              <a:t>    Raw device values should not be teleported into the model: a keypress is a</a:t>
-            </a:r>
-          </a:p>
-          <a:p>
-            <a:r>
-              <a:rPr sz="900">
-                <a:solidFill>
-                  <a:srgbClr val="CCCCCC"/>
-                </a:solidFill>
-                <a:latin typeface="Consolas"/>
-              </a:rPr>
-              <a:t>    step function, and a step in steering excites the suspension and tires in a</a:t>
-            </a:r>
-          </a:p>
-          <a:p>
-            <a:r>
-              <a:rPr sz="900">
-                <a:solidFill>
-                  <a:srgbClr val="CCCCCC"/>
-                </a:solidFill>
-                <a:latin typeface="Consolas"/>
-              </a:rPr>
-              <a:t>    way no human arm ever would.  This mirrors the internal dynamics of</a:t>
-            </a:r>
-          </a:p>
-          <a:p>
-            <a:r>
-              <a:rPr sz="900">
-                <a:solidFill>
-                  <a:srgbClr val="CCCCCC"/>
-                </a:solidFill>
-                <a:latin typeface="Consolas"/>
-              </a:rPr>
-              <a:t>    ChInteractiveDriver (see SetGains) so the behavior is the same whether the</a:t>
-            </a:r>
-          </a:p>
-          <a:p>
-            <a:r>
-              <a:rPr sz="900">
-                <a:solidFill>
-                  <a:srgbClr val="CCCCCC"/>
-                </a:solidFill>
-                <a:latin typeface="Consolas"/>
-              </a:rPr>
-              <a:t>    inputs come from the Irrlicht keyboard handler or from our own device.</a:t>
-            </a:r>
-          </a:p>
-          <a:p>
-            <a:r>
-              <a:rPr sz="900">
-                <a:solidFill>
-                  <a:srgbClr val="CCCCCC"/>
-                </a:solidFill>
-                <a:latin typeface="Consolas"/>
-              </a:rPr>
-              <a:t>    """</a:t>
-            </a:r>
-          </a:p>
-          <a:p>
-            <a:r>
-              <a:rPr sz="900">
-                <a:solidFill>
-                  <a:srgbClr val="CCCCCC"/>
-                </a:solidFill>
-                <a:latin typeface="Consolas"/>
-              </a:rPr>
-              <a:t> </a:t>
-            </a:r>
-          </a:p>
-          <a:p>
-            <a:r>
-              <a:rPr sz="900">
-                <a:solidFill>
-                  <a:srgbClr val="CCCCCC"/>
-                </a:solidFill>
-                <a:latin typeface="Consolas"/>
-              </a:rPr>
-              <a:t>    def __init__(self, gain=4.0):</a:t>
-            </a:r>
-          </a:p>
-          <a:p>
-            <a:r>
-              <a:rPr sz="900">
-                <a:solidFill>
-                  <a:srgbClr val="CCCCCC"/>
-                </a:solidFill>
-                <a:latin typeface="Consolas"/>
-              </a:rPr>
-              <a:t>        self.gain = gain</a:t>
-            </a:r>
-          </a:p>
-          <a:p>
-            <a:r>
-              <a:rPr sz="900">
-                <a:solidFill>
-                  <a:srgbClr val="CCCCCC"/>
-                </a:solidFill>
-                <a:latin typeface="Consolas"/>
-              </a:rPr>
-              <a:t>        self.steering = 0.0</a:t>
-            </a:r>
-          </a:p>
-          <a:p>
-            <a:r>
-              <a:rPr sz="900">
-                <a:solidFill>
-                  <a:srgbClr val="CCCCCC"/>
-                </a:solidFill>
-                <a:latin typeface="Consolas"/>
-              </a:rPr>
-              <a:t>        self.throttle = 0.0</a:t>
-            </a:r>
-          </a:p>
-          <a:p>
-            <a:r>
-              <a:rPr sz="900">
-                <a:solidFill>
-                  <a:srgbClr val="CCCCCC"/>
-                </a:solidFill>
-                <a:latin typeface="Consolas"/>
-              </a:rPr>
-              <a:t>        self.braking = 0.0</a:t>
-            </a:r>
-          </a:p>
-          <a:p>
-            <a:r>
-              <a:rPr sz="900">
-                <a:solidFill>
-                  <a:srgbClr val="CCCCCC"/>
-                </a:solidFill>
-                <a:latin typeface="Consolas"/>
-              </a:rPr>
-              <a:t>        self.target = (0.0, 0.0, 0.0)</a:t>
-            </a:r>
-          </a:p>
-          <a:p>
-            <a:r>
-              <a:rPr sz="900">
-                <a:solidFill>
-                  <a:srgbClr val="CCCCCC"/>
-                </a:solidFill>
-                <a:latin typeface="Consolas"/>
-              </a:rPr>
-              <a:t> </a:t>
-            </a:r>
-          </a:p>
-          <a:p>
-            <a:r>
-              <a:rPr sz="900">
-                <a:solidFill>
-                  <a:srgbClr val="CCCCCC"/>
-                </a:solidFill>
-                <a:latin typeface="Consolas"/>
-              </a:rPr>
-              <a:t>    def set_target(self, steering, throttle, braking):</a:t>
-            </a:r>
-          </a:p>
-          <a:p>
-            <a:r>
-              <a:rPr sz="900">
-                <a:solidFill>
-                  <a:srgbClr val="CCCCCC"/>
-                </a:solidFill>
-                <a:latin typeface="Consolas"/>
-              </a:rPr>
-              <a:t>        self.target = (</a:t>
-            </a:r>
-          </a:p>
-          <a:p>
-            <a:r>
-              <a:rPr sz="900">
-                <a:solidFill>
-                  <a:srgbClr val="CCCCCC"/>
-                </a:solidFill>
-                <a:latin typeface="Consolas"/>
-              </a:rPr>
-              <a:t>            max(-1.0, min(1.0, steering)),</a:t>
-            </a:r>
-          </a:p>
-          <a:p>
-            <a:r>
-              <a:rPr sz="900">
-                <a:solidFill>
-                  <a:srgbClr val="CCCCCC"/>
-                </a:solidFill>
-                <a:latin typeface="Consolas"/>
-              </a:rPr>
-              <a:t>            max(0.0, min(1.0, throttle)),</a:t>
-            </a:r>
-          </a:p>
-          <a:p>
-            <a:r>
-              <a:rPr sz="900">
-                <a:solidFill>
-                  <a:srgbClr val="CCCCCC"/>
-                </a:solidFill>
-                <a:latin typeface="Consolas"/>
-              </a:rPr>
-              <a:t>            max(0.0, min(1.0, braking)),</a:t>
-            </a:r>
-          </a:p>
-          <a:p>
-            <a:r>
-              <a:rPr sz="900">
-                <a:solidFill>
-                  <a:srgbClr val="CCCCCC"/>
-                </a:solidFill>
-                <a:latin typeface="Consolas"/>
-              </a:rPr>
-              <a:t>        )</a:t>
-            </a:r>
-          </a:p>
-          <a:p>
-            <a:r>
-              <a:rPr sz="900">
-                <a:solidFill>
-                  <a:srgbClr val="CCCCCC"/>
-                </a:solidFill>
-                <a:latin typeface="Consolas"/>
-              </a:rPr>
-              <a:t> </a:t>
-            </a:r>
-          </a:p>
-          <a:p>
-            <a:r>
-              <a:rPr sz="900">
-                <a:solidFill>
-                  <a:srgbClr val="CCCCCC"/>
-                </a:solidFill>
-                <a:latin typeface="Consolas"/>
-              </a:rPr>
-              <a:t>    def advance(self, step):</a:t>
-            </a:r>
-          </a:p>
-          <a:p>
-            <a:r>
-              <a:rPr sz="900">
-                <a:solidFill>
-                  <a:srgbClr val="CCCCCC"/>
-                </a:solidFill>
-                <a:latin typeface="Consolas"/>
-              </a:rPr>
-              <a:t>        s, t, b = self.target</a:t>
-            </a:r>
-          </a:p>
-          <a:p>
-            <a:r>
-              <a:rPr sz="900">
-                <a:solidFill>
-                  <a:srgbClr val="CCCCCC"/>
-                </a:solidFill>
-                <a:latin typeface="Consolas"/>
-              </a:rPr>
-              <a:t>        self.steering += min(1.0, self.gain * step) * (s - self.steering)</a:t>
-            </a:r>
-          </a:p>
-          <a:p>
-            <a:r>
-              <a:rPr sz="900">
-                <a:solidFill>
-                  <a:srgbClr val="CCCCCC"/>
-                </a:solidFill>
-                <a:latin typeface="Consolas"/>
-              </a:rPr>
-              <a:t>        self.throttle += min(1.0, self.gain * step) * (t - self.throttle)</a:t>
-            </a:r>
-          </a:p>
-          <a:p>
-            <a:r>
-              <a:rPr sz="900">
-                <a:solidFill>
-                  <a:srgbClr val="CCCCCC"/>
-                </a:solidFill>
-                <a:latin typeface="Consolas"/>
-              </a:rPr>
-              <a:t>        self.braking += min(1.0, self.gain * step) * (b - self.braking)</a:t>
-            </a:r>
-          </a:p>
-          <a:p>
-            <a:r>
-              <a:rPr sz="900">
-                <a:solidFill>
-                  <a:srgbClr val="CCCCCC"/>
-                </a:solidFill>
-                <a:latin typeface="Consolas"/>
-              </a:rPr>
-              <a:t> </a:t>
-            </a:r>
-          </a:p>
-          <a:p>
-            <a:r>
-              <a:rPr sz="900">
-                <a:solidFill>
-                  <a:srgbClr val="CCCCCC"/>
-                </a:solidFill>
-                <a:latin typeface="Consolas"/>
-              </a:rPr>
-              <a:t>    def apply_to(self, driver):</a:t>
-            </a:r>
-          </a:p>
-          <a:p>
-            <a:r>
-              <a:rPr sz="900">
-                <a:solidFill>
-                  <a:srgbClr val="CCCCCC"/>
-                </a:solidFill>
-                <a:latin typeface="Consolas"/>
-              </a:rPr>
-              <a:t>        driver.SetSteering(self.steering)</a:t>
-            </a:r>
-          </a:p>
-          <a:p>
-            <a:r>
-              <a:rPr sz="900">
-                <a:solidFill>
-                  <a:srgbClr val="CCCCCC"/>
-                </a:solidFill>
-                <a:latin typeface="Consolas"/>
-              </a:rPr>
-              <a:t>        driver.SetThrottle(self.throttle)</a:t>
-            </a:r>
-          </a:p>
-          <a:p>
-            <a:r>
-              <a:rPr sz="900">
-                <a:solidFill>
-                  <a:srgbClr val="CCCCCC"/>
-                </a:solidFill>
-                <a:latin typeface="Consolas"/>
-              </a:rPr>
-              <a:t>        driver.SetBraking(self.braking)</a:t>
-            </a:r>
-          </a:p>
-          <a:p>
-            <a:r>
-              <a:rPr sz="900">
-                <a:solidFill>
-                  <a:srgbClr val="CCCCCC"/>
-                </a:solidFill>
-                <a:latin typeface="Consolas"/>
-              </a:rPr>
-              <a:t> </a:t>
+              <a:t>The human-in-the-loop contract</a:t>
+            </a:r>
+          </a:p>
+        </p:txBody>
+      </p:sp>
+      <p:sp>
+        <p:nvSpPr>
+          <p:cNvPr id="3" name="Content Placeholder 2"/>
+          <p:cNvSpPr>
+            <a:spLocks noGrp="1"/>
+          </p:cNvSpPr>
+          <p:nvPr>
+            <p:ph idx="1"/>
+          </p:nvPr>
+        </p:nvSpPr>
+        <p:spPr/>
+        <p:txBody>
+          <a:bodyPr wrap="square"/>
+          <a:lstStyle/>
+          <a:p>
+            <a:pPr/>
+            <a:r>
+              <a:rPr sz="2000"/>
+              <a:t>A driver is just three floats per step: steering [-1, 1], throttle [0, 1], braking [0, 1]</a:t>
+            </a:r>
+          </a:p>
+          <a:p>
+            <a:pPr/>
+            <a:r>
+              <a:rPr sz="1800">
+                <a:latin typeface="Consolas"/>
+              </a:rPr>
+              <a:t>veh.ChDriver</a:t>
+            </a:r>
+            <a:r>
+              <a:rPr sz="2000"/>
+              <a:t> is the plain container: </a:t>
+            </a:r>
+            <a:r>
+              <a:rPr sz="1800">
+                <a:latin typeface="Consolas"/>
+              </a:rPr>
+              <a:t>SetSteering()</a:t>
+            </a:r>
+            <a:r>
+              <a:rPr sz="2000"/>
+              <a:t>, </a:t>
+            </a:r>
+            <a:r>
+              <a:rPr sz="1800">
+                <a:latin typeface="Consolas"/>
+              </a:rPr>
+              <a:t>SetThrottle()</a:t>
+            </a:r>
+            <a:r>
+              <a:rPr sz="2000"/>
+              <a:t>, </a:t>
+            </a:r>
+            <a:r>
+              <a:rPr sz="1800">
+                <a:latin typeface="Consolas"/>
+              </a:rPr>
+              <a:t>SetBraking()</a:t>
+            </a:r>
+          </a:p>
+          <a:p>
+            <a:pPr/>
+            <a:r>
+              <a:rPr sz="2000"/>
+              <a:t>So the recipe for ANY device is:</a:t>
+            </a:r>
+          </a:p>
+          <a:p>
+            <a:pPr lvl="1"/>
+            <a:r>
+              <a:rPr sz="1800"/>
+              <a:t>1. poll the device (never block the physics loop)</a:t>
+            </a:r>
+          </a:p>
+          <a:p>
+            <a:pPr lvl="1"/>
+            <a:r>
+              <a:rPr sz="1800"/>
+              <a:t>2. rate-limit / smooth (a human arm is not a step function)</a:t>
+            </a:r>
+          </a:p>
+          <a:p>
+            <a:pPr lvl="1"/>
+            <a:r>
+              <a:rPr sz="1800"/>
+              <a:t>3. write into the ChDriver once per step - zero-order hold until the next step</a:t>
+            </a:r>
+          </a:p>
+          <a:p>
+            <a:pPr/>
+            <a:r>
+              <a:rPr sz="2000"/>
+              <a:t>Today: a UDP operator console everybody can run (two terminals)</a:t>
             </a:r>
           </a:p>
         </p:txBody>
@@ -8926,36 +8703,6 @@
         </p:nvSpPr>
         <p:spPr>
           <a:xfrm>
-            <a:off x="400000" y="6003475"/>
-            <a:ext cx="11392000" cy="260000"/>
-          </a:xfrm>
-          <a:prstGeom prst="rect">
-            <a:avLst/>
-          </a:prstGeom>
-          <a:noFill/>
-        </p:spPr>
-        <p:txBody>
-          <a:bodyPr wrap="square">
-            <a:spAutoFit/>
-          </a:bodyPr>
-          <a:lstStyle/>
-          <a:p>
-            <a:pPr/>
-            <a:r>
-              <a:rPr sz="1600"/>
-              <a:t>Same first-order lag as ChInteractiveDriver::SetGains, in Python, so all devices behave alike</a:t>
-            </a:r>
-          </a:p>
-        </p:txBody>
-      </p:sp>
-      <p:sp>
-        <p:nvSpPr>
-          <p:cNvPr id="5" name="TextBox 4"/>
-          <p:cNvSpPr txBox="1"/>
-          <p:nvPr/>
-        </p:nvSpPr>
-        <p:spPr>
-          <a:xfrm>
             <a:off x="310974" y="6645811"/>
             <a:ext cx="11644805" cy="188527"/>
           </a:xfrm>
@@ -8979,7 +8726,7 @@
       </p:sp>
       <p:sp>
         <p:nvSpPr>
-          <p:cNvPr id="6" name="TextBox 5"/>
+          <p:cNvPr id="5" name="TextBox 4"/>
           <p:cNvSpPr txBox="1"/>
           <p:nvPr/>
         </p:nvSpPr>
@@ -9238,7 +8985,7 @@
           <a:p>
             <a:r>
               <a:rPr sz="2600"/>
-              <a:t>Step 2: A UDP input source (Lines 136 to 169)</a:t>
+              <a:t>Step 1: Smooth - never teleport raw inputs into the model (Lines 100 to 133)</a:t>
             </a:r>
           </a:p>
         </p:txBody>
@@ -9252,7 +8999,7 @@
         <p:spPr>
           <a:xfrm>
             <a:off x="0" y="980000"/>
-            <a:ext cx="12192000" cy="4841090"/>
+            <a:ext cx="12192000" cy="4983475"/>
           </a:xfrm>
           <a:prstGeom prst="rect">
             <a:avLst/>
@@ -9274,7 +9021,7 @@
                 </a:solidFill>
                 <a:latin typeface="Consolas"/>
               </a:rPr>
-              <a:t>class UdpInput:</a:t>
+              <a:t>class SmoothedInputs:</a:t>
             </a:r>
           </a:p>
           <a:p>
@@ -9285,7 +9032,7 @@
                 </a:solidFill>
                 <a:latin typeface="Consolas"/>
               </a:rPr>
-              <a:t>    """Receive 'steering,throttle,braking' text datagrams from an operator.</a:t>
+              <a:t>    """First-order lag from a *target* input to the *applied* input.</a:t>
             </a:r>
           </a:p>
           <a:p>
@@ -9307,7 +9054,7 @@
                 </a:solidFill>
                 <a:latin typeface="Consolas"/>
               </a:rPr>
-              <a:t>    Run operator_console.py in another terminal (or on another machine) and</a:t>
+              <a:t>    Raw device values should not be teleported into the model: a keypress is a</a:t>
             </a:r>
           </a:p>
           <a:p>
@@ -9318,7 +9065,7 @@
                 </a:solidFill>
                 <a:latin typeface="Consolas"/>
               </a:rPr>
-              <a:t>    drive with the arrow keys there.  The socket is non-blocking: the physics</a:t>
+              <a:t>    step function, and a step in steering excites the suspension and tires in a</a:t>
             </a:r>
           </a:p>
           <a:p>
@@ -9329,7 +9076,7 @@
                 </a:solidFill>
                 <a:latin typeface="Consolas"/>
               </a:rPr>
-              <a:t>    loop never waits for the operator.  If no packet arrived since the last</a:t>
+              <a:t>    way no human arm ever would.  This mirrors the internal dynamics of</a:t>
             </a:r>
           </a:p>
           <a:p>
@@ -9340,7 +9087,7 @@
                 </a:solidFill>
                 <a:latin typeface="Consolas"/>
               </a:rPr>
-              <a:t>    step, the previous target is held (zero-order hold).</a:t>
+              <a:t>    ChInteractiveDriver (see SetGains) so the behavior is the same whether the</a:t>
             </a:r>
           </a:p>
           <a:p>
@@ -9351,6 +9098,17 @@
                 </a:solidFill>
                 <a:latin typeface="Consolas"/>
               </a:rPr>
+              <a:t>    inputs come from the Irrlicht keyboard handler or from our own device.</a:t>
+            </a:r>
+          </a:p>
+          <a:p>
+            <a:r>
+              <a:rPr sz="900">
+                <a:solidFill>
+                  <a:srgbClr val="CCCCCC"/>
+                </a:solidFill>
+                <a:latin typeface="Consolas"/>
+              </a:rPr>
               <a:t>    """</a:t>
             </a:r>
           </a:p>
@@ -9373,7 +9131,7 @@
                 </a:solidFill>
                 <a:latin typeface="Consolas"/>
               </a:rPr>
-              <a:t>    def __init__(self, port=9870):</a:t>
+              <a:t>    def __init__(self, gain=4.0):</a:t>
             </a:r>
           </a:p>
           <a:p>
@@ -9384,7 +9142,7 @@
                 </a:solidFill>
                 <a:latin typeface="Consolas"/>
               </a:rPr>
-              <a:t>        self.sock = socket.socket(socket.AF_INET, socket.SOCK_DGRAM)</a:t>
+              <a:t>        self.gain = gain</a:t>
             </a:r>
           </a:p>
           <a:p>
@@ -9395,7 +9153,7 @@
                 </a:solidFill>
                 <a:latin typeface="Consolas"/>
               </a:rPr>
-              <a:t>        self.sock.bind(("0.0.0.0", port))</a:t>
+              <a:t>        self.steering = 0.0</a:t>
             </a:r>
           </a:p>
           <a:p>
@@ -9406,7 +9164,7 @@
                 </a:solidFill>
                 <a:latin typeface="Consolas"/>
               </a:rPr>
-              <a:t>        self.sock.setblocking(False)</a:t>
+              <a:t>        self.throttle = 0.0</a:t>
             </a:r>
           </a:p>
           <a:p>
@@ -9417,7 +9175,7 @@
                 </a:solidFill>
                 <a:latin typeface="Consolas"/>
               </a:rPr>
-              <a:t>        self.operator_addr = None</a:t>
+              <a:t>        self.braking = 0.0</a:t>
             </a:r>
           </a:p>
           <a:p>
@@ -9428,7 +9186,7 @@
                 </a:solidFill>
                 <a:latin typeface="Consolas"/>
               </a:rPr>
-              <a:t>        self.last = (0.0, 0.0, 0.0)</a:t>
+              <a:t>        self.target = (0.0, 0.0, 0.0)</a:t>
             </a:r>
           </a:p>
           <a:p>
@@ -9439,7 +9197,7 @@
                 </a:solidFill>
                 <a:latin typeface="Consolas"/>
               </a:rPr>
-              <a:t>        self.packets = 0</a:t>
+              <a:t> </a:t>
             </a:r>
           </a:p>
           <a:p>
@@ -9450,7 +9208,7 @@
                 </a:solidFill>
                 <a:latin typeface="Consolas"/>
               </a:rPr>
-              <a:t>        print(f"[udp] listening on port {port} - start operator_console.py")</a:t>
+              <a:t>    def set_target(self, steering, throttle, braking):</a:t>
             </a:r>
           </a:p>
           <a:p>
@@ -9461,6 +9219,61 @@
                 </a:solidFill>
                 <a:latin typeface="Consolas"/>
               </a:rPr>
+              <a:t>        self.target = (</a:t>
+            </a:r>
+          </a:p>
+          <a:p>
+            <a:r>
+              <a:rPr sz="900">
+                <a:solidFill>
+                  <a:srgbClr val="CCCCCC"/>
+                </a:solidFill>
+                <a:latin typeface="Consolas"/>
+              </a:rPr>
+              <a:t>            max(-1.0, min(1.0, steering)),</a:t>
+            </a:r>
+          </a:p>
+          <a:p>
+            <a:r>
+              <a:rPr sz="900">
+                <a:solidFill>
+                  <a:srgbClr val="CCCCCC"/>
+                </a:solidFill>
+                <a:latin typeface="Consolas"/>
+              </a:rPr>
+              <a:t>            max(0.0, min(1.0, throttle)),</a:t>
+            </a:r>
+          </a:p>
+          <a:p>
+            <a:r>
+              <a:rPr sz="900">
+                <a:solidFill>
+                  <a:srgbClr val="CCCCCC"/>
+                </a:solidFill>
+                <a:latin typeface="Consolas"/>
+              </a:rPr>
+              <a:t>            max(0.0, min(1.0, braking)),</a:t>
+            </a:r>
+          </a:p>
+          <a:p>
+            <a:r>
+              <a:rPr sz="900">
+                <a:solidFill>
+                  <a:srgbClr val="CCCCCC"/>
+                </a:solidFill>
+                <a:latin typeface="Consolas"/>
+              </a:rPr>
+              <a:t>        )</a:t>
+            </a:r>
+          </a:p>
+          <a:p>
+            <a:r>
+              <a:rPr sz="900">
+                <a:solidFill>
+                  <a:srgbClr val="CCCCCC"/>
+                </a:solidFill>
+                <a:latin typeface="Consolas"/>
+              </a:rPr>
               <a:t> </a:t>
             </a:r>
           </a:p>
@@ -9472,7 +9285,7 @@
                 </a:solidFill>
                 <a:latin typeface="Consolas"/>
               </a:rPr>
-              <a:t>    def poll(self):</a:t>
+              <a:t>    def advance(self, step):</a:t>
             </a:r>
           </a:p>
           <a:p>
@@ -9483,7 +9296,7 @@
                 </a:solidFill>
                 <a:latin typeface="Consolas"/>
               </a:rPr>
-              <a:t>        # Drain everything that is queued and keep only the newest packet</a:t>
+              <a:t>        s, t, b = self.target</a:t>
             </a:r>
           </a:p>
           <a:p>
@@ -9494,7 +9307,7 @@
                 </a:solidFill>
                 <a:latin typeface="Consolas"/>
               </a:rPr>
-              <a:t>        while True:</a:t>
+              <a:t>        self.steering += min(1.0, self.gain * step) * (s - self.steering)</a:t>
             </a:r>
           </a:p>
           <a:p>
@@ -9505,7 +9318,7 @@
                 </a:solidFill>
                 <a:latin typeface="Consolas"/>
               </a:rPr>
-              <a:t>            try:</a:t>
+              <a:t>        self.throttle += min(1.0, self.gain * step) * (t - self.throttle)</a:t>
             </a:r>
           </a:p>
           <a:p>
@@ -9516,7 +9329,7 @@
                 </a:solidFill>
                 <a:latin typeface="Consolas"/>
               </a:rPr>
-              <a:t>                data, addr = self.sock.recvfrom(256)</a:t>
+              <a:t>        self.braking += min(1.0, self.gain * step) * (b - self.braking)</a:t>
             </a:r>
           </a:p>
           <a:p>
@@ -9527,7 +9340,7 @@
                 </a:solidFill>
                 <a:latin typeface="Consolas"/>
               </a:rPr>
-              <a:t>            except BlockingIOError:</a:t>
+              <a:t> </a:t>
             </a:r>
           </a:p>
           <a:p>
@@ -9538,7 +9351,7 @@
                 </a:solidFill>
                 <a:latin typeface="Consolas"/>
               </a:rPr>
-              <a:t>                break</a:t>
+              <a:t>    def apply_to(self, driver):</a:t>
             </a:r>
           </a:p>
           <a:p>
@@ -9549,7 +9362,7 @@
                 </a:solidFill>
                 <a:latin typeface="Consolas"/>
               </a:rPr>
-              <a:t>            try:</a:t>
+              <a:t>        driver.SetSteering(self.steering)</a:t>
             </a:r>
           </a:p>
           <a:p>
@@ -9560,7 +9373,7 @@
                 </a:solidFill>
                 <a:latin typeface="Consolas"/>
               </a:rPr>
-              <a:t>                s, t, b = (float(x) for x in data.decode().split(","))</a:t>
+              <a:t>        driver.SetThrottle(self.throttle)</a:t>
             </a:r>
           </a:p>
           <a:p>
@@ -9571,62 +9384,7 @@
                 </a:solidFill>
                 <a:latin typeface="Consolas"/>
               </a:rPr>
-              <a:t>                self.last = (s, t, b)</a:t>
-            </a:r>
-          </a:p>
-          <a:p>
-            <a:r>
-              <a:rPr sz="900">
-                <a:solidFill>
-                  <a:srgbClr val="CCCCCC"/>
-                </a:solidFill>
-                <a:latin typeface="Consolas"/>
-              </a:rPr>
-              <a:t>                self.operator_addr = addr</a:t>
-            </a:r>
-          </a:p>
-          <a:p>
-            <a:r>
-              <a:rPr sz="900">
-                <a:solidFill>
-                  <a:srgbClr val="CCCCCC"/>
-                </a:solidFill>
-                <a:latin typeface="Consolas"/>
-              </a:rPr>
-              <a:t>                self.packets += 1</a:t>
-            </a:r>
-          </a:p>
-          <a:p>
-            <a:r>
-              <a:rPr sz="900">
-                <a:solidFill>
-                  <a:srgbClr val="CCCCCC"/>
-                </a:solidFill>
-                <a:latin typeface="Consolas"/>
-              </a:rPr>
-              <a:t>            except ValueError:</a:t>
-            </a:r>
-          </a:p>
-          <a:p>
-            <a:r>
-              <a:rPr sz="900">
-                <a:solidFill>
-                  <a:srgbClr val="CCCCCC"/>
-                </a:solidFill>
-                <a:latin typeface="Consolas"/>
-              </a:rPr>
-              <a:t>                pass</a:t>
-            </a:r>
-          </a:p>
-          <a:p>
-            <a:r>
-              <a:rPr sz="900">
-                <a:solidFill>
-                  <a:srgbClr val="CCCCCC"/>
-                </a:solidFill>
-                <a:latin typeface="Consolas"/>
-              </a:rPr>
-              <a:t>        return self.last</a:t>
+              <a:t>        driver.SetBraking(self.braking)</a:t>
             </a:r>
           </a:p>
           <a:p>
@@ -9650,7 +9408,7 @@
         </p:nvSpPr>
         <p:spPr>
           <a:xfrm>
-            <a:off x="400000" y="5861090"/>
+            <a:off x="400000" y="6003475"/>
             <a:ext cx="11392000" cy="260000"/>
           </a:xfrm>
           <a:prstGeom prst="rect">
@@ -9667,14 +9425,7 @@
             <a:pPr/>
             <a:r>
               <a:rPr sz="1600"/>
-              <a:t>Non-blocking socket, drained every step; the newest packet wins, an empty queue holds the last value</a:t>
-            </a:r>
-          </a:p>
-          <a:p>
-            <a:pPr/>
-            <a:r>
-              <a:rPr sz="1600"/>
-              <a:t>The operator can be anywhere on the network - and the console has no Chrono dependency at all</a:t>
+              <a:t>Same first-order lag as ChInteractiveDriver::SetGains, in Python, so all devices behave alike</a:t>
             </a:r>
           </a:p>
         </p:txBody>
@@ -9776,7 +9527,407 @@
           <a:lstStyle/>
           <a:p>
             <a:r>
-              <a:t>Step 3: The operator side - operator_console.py</a:t>
+              <a:rPr sz="2600"/>
+              <a:t>Step 2: A UDP input source (Lines 136 to 169)</a:t>
+            </a:r>
+          </a:p>
+        </p:txBody>
+      </p:sp>
+      <p:sp>
+        <p:nvSpPr>
+          <p:cNvPr id="3" name="TextBox 2"/>
+          <p:cNvSpPr txBox="1"/>
+          <p:nvPr/>
+        </p:nvSpPr>
+        <p:spPr>
+          <a:xfrm>
+            <a:off x="0" y="980000"/>
+            <a:ext cx="12192000" cy="4841090"/>
+          </a:xfrm>
+          <a:prstGeom prst="rect">
+            <a:avLst/>
+          </a:prstGeom>
+          <a:solidFill>
+            <a:srgbClr val="000000"/>
+          </a:solidFill>
+        </p:spPr>
+        <p:txBody>
+          <a:bodyPr wrap="none" lIns="300000" rIns="300000">
+            <a:noAutofit/>
+          </a:bodyPr>
+          <a:lstStyle/>
+          <a:p>
+            <a:r>
+              <a:rPr sz="900">
+                <a:solidFill>
+                  <a:srgbClr val="CCCCCC"/>
+                </a:solidFill>
+                <a:latin typeface="Consolas"/>
+              </a:rPr>
+              <a:t>class UdpInput:</a:t>
+            </a:r>
+          </a:p>
+          <a:p>
+            <a:r>
+              <a:rPr sz="900">
+                <a:solidFill>
+                  <a:srgbClr val="CCCCCC"/>
+                </a:solidFill>
+                <a:latin typeface="Consolas"/>
+              </a:rPr>
+              <a:t>    """Receive 'steering,throttle,braking' text datagrams from an operator.</a:t>
+            </a:r>
+          </a:p>
+          <a:p>
+            <a:r>
+              <a:rPr sz="900">
+                <a:solidFill>
+                  <a:srgbClr val="CCCCCC"/>
+                </a:solidFill>
+                <a:latin typeface="Consolas"/>
+              </a:rPr>
+              <a:t> </a:t>
+            </a:r>
+          </a:p>
+          <a:p>
+            <a:r>
+              <a:rPr sz="900">
+                <a:solidFill>
+                  <a:srgbClr val="CCCCCC"/>
+                </a:solidFill>
+                <a:latin typeface="Consolas"/>
+              </a:rPr>
+              <a:t>    Run operator_console.py in another terminal (or on another machine) and</a:t>
+            </a:r>
+          </a:p>
+          <a:p>
+            <a:r>
+              <a:rPr sz="900">
+                <a:solidFill>
+                  <a:srgbClr val="CCCCCC"/>
+                </a:solidFill>
+                <a:latin typeface="Consolas"/>
+              </a:rPr>
+              <a:t>    drive with the arrow keys there.  The socket is non-blocking: the physics</a:t>
+            </a:r>
+          </a:p>
+          <a:p>
+            <a:r>
+              <a:rPr sz="900">
+                <a:solidFill>
+                  <a:srgbClr val="CCCCCC"/>
+                </a:solidFill>
+                <a:latin typeface="Consolas"/>
+              </a:rPr>
+              <a:t>    loop never waits for the operator.  If no packet arrived since the last</a:t>
+            </a:r>
+          </a:p>
+          <a:p>
+            <a:r>
+              <a:rPr sz="900">
+                <a:solidFill>
+                  <a:srgbClr val="CCCCCC"/>
+                </a:solidFill>
+                <a:latin typeface="Consolas"/>
+              </a:rPr>
+              <a:t>    step, the previous target is held (zero-order hold).</a:t>
+            </a:r>
+          </a:p>
+          <a:p>
+            <a:r>
+              <a:rPr sz="900">
+                <a:solidFill>
+                  <a:srgbClr val="CCCCCC"/>
+                </a:solidFill>
+                <a:latin typeface="Consolas"/>
+              </a:rPr>
+              <a:t>    """</a:t>
+            </a:r>
+          </a:p>
+          <a:p>
+            <a:r>
+              <a:rPr sz="900">
+                <a:solidFill>
+                  <a:srgbClr val="CCCCCC"/>
+                </a:solidFill>
+                <a:latin typeface="Consolas"/>
+              </a:rPr>
+              <a:t> </a:t>
+            </a:r>
+          </a:p>
+          <a:p>
+            <a:r>
+              <a:rPr sz="900">
+                <a:solidFill>
+                  <a:srgbClr val="CCCCCC"/>
+                </a:solidFill>
+                <a:latin typeface="Consolas"/>
+              </a:rPr>
+              <a:t>    def __init__(self, port=9870):</a:t>
+            </a:r>
+          </a:p>
+          <a:p>
+            <a:r>
+              <a:rPr sz="900">
+                <a:solidFill>
+                  <a:srgbClr val="CCCCCC"/>
+                </a:solidFill>
+                <a:latin typeface="Consolas"/>
+              </a:rPr>
+              <a:t>        self.sock = socket.socket(socket.AF_INET, socket.SOCK_DGRAM)</a:t>
+            </a:r>
+          </a:p>
+          <a:p>
+            <a:r>
+              <a:rPr sz="900">
+                <a:solidFill>
+                  <a:srgbClr val="CCCCCC"/>
+                </a:solidFill>
+                <a:latin typeface="Consolas"/>
+              </a:rPr>
+              <a:t>        self.sock.bind(("0.0.0.0", port))</a:t>
+            </a:r>
+          </a:p>
+          <a:p>
+            <a:r>
+              <a:rPr sz="900">
+                <a:solidFill>
+                  <a:srgbClr val="CCCCCC"/>
+                </a:solidFill>
+                <a:latin typeface="Consolas"/>
+              </a:rPr>
+              <a:t>        self.sock.setblocking(False)</a:t>
+            </a:r>
+          </a:p>
+          <a:p>
+            <a:r>
+              <a:rPr sz="900">
+                <a:solidFill>
+                  <a:srgbClr val="CCCCCC"/>
+                </a:solidFill>
+                <a:latin typeface="Consolas"/>
+              </a:rPr>
+              <a:t>        self.operator_addr = None</a:t>
+            </a:r>
+          </a:p>
+          <a:p>
+            <a:r>
+              <a:rPr sz="900">
+                <a:solidFill>
+                  <a:srgbClr val="CCCCCC"/>
+                </a:solidFill>
+                <a:latin typeface="Consolas"/>
+              </a:rPr>
+              <a:t>        self.last = (0.0, 0.0, 0.0)</a:t>
+            </a:r>
+          </a:p>
+          <a:p>
+            <a:r>
+              <a:rPr sz="900">
+                <a:solidFill>
+                  <a:srgbClr val="CCCCCC"/>
+                </a:solidFill>
+                <a:latin typeface="Consolas"/>
+              </a:rPr>
+              <a:t>        self.packets = 0</a:t>
+            </a:r>
+          </a:p>
+          <a:p>
+            <a:r>
+              <a:rPr sz="900">
+                <a:solidFill>
+                  <a:srgbClr val="CCCCCC"/>
+                </a:solidFill>
+                <a:latin typeface="Consolas"/>
+              </a:rPr>
+              <a:t>        print(f"[udp] listening on port {port} - start operator_console.py")</a:t>
+            </a:r>
+          </a:p>
+          <a:p>
+            <a:r>
+              <a:rPr sz="900">
+                <a:solidFill>
+                  <a:srgbClr val="CCCCCC"/>
+                </a:solidFill>
+                <a:latin typeface="Consolas"/>
+              </a:rPr>
+              <a:t> </a:t>
+            </a:r>
+          </a:p>
+          <a:p>
+            <a:r>
+              <a:rPr sz="900">
+                <a:solidFill>
+                  <a:srgbClr val="CCCCCC"/>
+                </a:solidFill>
+                <a:latin typeface="Consolas"/>
+              </a:rPr>
+              <a:t>    def poll(self):</a:t>
+            </a:r>
+          </a:p>
+          <a:p>
+            <a:r>
+              <a:rPr sz="900">
+                <a:solidFill>
+                  <a:srgbClr val="CCCCCC"/>
+                </a:solidFill>
+                <a:latin typeface="Consolas"/>
+              </a:rPr>
+              <a:t>        # Drain everything that is queued and keep only the newest packet</a:t>
+            </a:r>
+          </a:p>
+          <a:p>
+            <a:r>
+              <a:rPr sz="900">
+                <a:solidFill>
+                  <a:srgbClr val="CCCCCC"/>
+                </a:solidFill>
+                <a:latin typeface="Consolas"/>
+              </a:rPr>
+              <a:t>        while True:</a:t>
+            </a:r>
+          </a:p>
+          <a:p>
+            <a:r>
+              <a:rPr sz="900">
+                <a:solidFill>
+                  <a:srgbClr val="CCCCCC"/>
+                </a:solidFill>
+                <a:latin typeface="Consolas"/>
+              </a:rPr>
+              <a:t>            try:</a:t>
+            </a:r>
+          </a:p>
+          <a:p>
+            <a:r>
+              <a:rPr sz="900">
+                <a:solidFill>
+                  <a:srgbClr val="CCCCCC"/>
+                </a:solidFill>
+                <a:latin typeface="Consolas"/>
+              </a:rPr>
+              <a:t>                data, addr = self.sock.recvfrom(256)</a:t>
+            </a:r>
+          </a:p>
+          <a:p>
+            <a:r>
+              <a:rPr sz="900">
+                <a:solidFill>
+                  <a:srgbClr val="CCCCCC"/>
+                </a:solidFill>
+                <a:latin typeface="Consolas"/>
+              </a:rPr>
+              <a:t>            except BlockingIOError:</a:t>
+            </a:r>
+          </a:p>
+          <a:p>
+            <a:r>
+              <a:rPr sz="900">
+                <a:solidFill>
+                  <a:srgbClr val="CCCCCC"/>
+                </a:solidFill>
+                <a:latin typeface="Consolas"/>
+              </a:rPr>
+              <a:t>                break</a:t>
+            </a:r>
+          </a:p>
+          <a:p>
+            <a:r>
+              <a:rPr sz="900">
+                <a:solidFill>
+                  <a:srgbClr val="CCCCCC"/>
+                </a:solidFill>
+                <a:latin typeface="Consolas"/>
+              </a:rPr>
+              <a:t>            try:</a:t>
+            </a:r>
+          </a:p>
+          <a:p>
+            <a:r>
+              <a:rPr sz="900">
+                <a:solidFill>
+                  <a:srgbClr val="CCCCCC"/>
+                </a:solidFill>
+                <a:latin typeface="Consolas"/>
+              </a:rPr>
+              <a:t>                s, t, b = (float(x) for x in data.decode().split(","))</a:t>
+            </a:r>
+          </a:p>
+          <a:p>
+            <a:r>
+              <a:rPr sz="900">
+                <a:solidFill>
+                  <a:srgbClr val="CCCCCC"/>
+                </a:solidFill>
+                <a:latin typeface="Consolas"/>
+              </a:rPr>
+              <a:t>                self.last = (s, t, b)</a:t>
+            </a:r>
+          </a:p>
+          <a:p>
+            <a:r>
+              <a:rPr sz="900">
+                <a:solidFill>
+                  <a:srgbClr val="CCCCCC"/>
+                </a:solidFill>
+                <a:latin typeface="Consolas"/>
+              </a:rPr>
+              <a:t>                self.operator_addr = addr</a:t>
+            </a:r>
+          </a:p>
+          <a:p>
+            <a:r>
+              <a:rPr sz="900">
+                <a:solidFill>
+                  <a:srgbClr val="CCCCCC"/>
+                </a:solidFill>
+                <a:latin typeface="Consolas"/>
+              </a:rPr>
+              <a:t>                self.packets += 1</a:t>
+            </a:r>
+          </a:p>
+          <a:p>
+            <a:r>
+              <a:rPr sz="900">
+                <a:solidFill>
+                  <a:srgbClr val="CCCCCC"/>
+                </a:solidFill>
+                <a:latin typeface="Consolas"/>
+              </a:rPr>
+              <a:t>            except ValueError:</a:t>
+            </a:r>
+          </a:p>
+          <a:p>
+            <a:r>
+              <a:rPr sz="900">
+                <a:solidFill>
+                  <a:srgbClr val="CCCCCC"/>
+                </a:solidFill>
+                <a:latin typeface="Consolas"/>
+              </a:rPr>
+              <a:t>                pass</a:t>
+            </a:r>
+          </a:p>
+          <a:p>
+            <a:r>
+              <a:rPr sz="900">
+                <a:solidFill>
+                  <a:srgbClr val="CCCCCC"/>
+                </a:solidFill>
+                <a:latin typeface="Consolas"/>
+              </a:rPr>
+              <a:t>        return self.last</a:t>
+            </a:r>
+          </a:p>
+          <a:p>
+            <a:r>
+              <a:rPr sz="900">
+                <a:solidFill>
+                  <a:srgbClr val="CCCCCC"/>
+                </a:solidFill>
+                <a:latin typeface="Consolas"/>
+              </a:rPr>
+              <a:t> </a:t>
             </a:r>
           </a:p>
         </p:txBody>
@@ -9789,6 +9940,43 @@
         </p:nvSpPr>
         <p:spPr>
           <a:xfrm>
+            <a:off x="400000" y="5861090"/>
+            <a:ext cx="11392000" cy="260000"/>
+          </a:xfrm>
+          <a:prstGeom prst="rect">
+            <a:avLst/>
+          </a:prstGeom>
+          <a:noFill/>
+        </p:spPr>
+        <p:txBody>
+          <a:bodyPr wrap="square">
+            <a:spAutoFit/>
+          </a:bodyPr>
+          <a:lstStyle/>
+          <a:p>
+            <a:pPr/>
+            <a:r>
+              <a:rPr sz="1600"/>
+              <a:t>Non-blocking socket, drained every step; the newest packet wins, an empty queue holds the last value</a:t>
+            </a:r>
+          </a:p>
+          <a:p>
+            <a:pPr/>
+            <a:r>
+              <a:rPr sz="1600"/>
+              <a:t>The operator can be anywhere on the network - and the console has no Chrono dependency at all</a:t>
+            </a:r>
+          </a:p>
+        </p:txBody>
+      </p:sp>
+      <p:sp>
+        <p:nvSpPr>
+          <p:cNvPr id="5" name="TextBox 4"/>
+          <p:cNvSpPr txBox="1"/>
+          <p:nvPr/>
+        </p:nvSpPr>
+        <p:spPr>
+          <a:xfrm>
             <a:off x="310974" y="6645811"/>
             <a:ext cx="11644805" cy="188527"/>
           </a:xfrm>
@@ -9812,7 +10000,7 @@
       </p:sp>
       <p:sp>
         <p:nvSpPr>
-          <p:cNvPr id="5" name="TextBox 4"/>
+          <p:cNvPr id="6" name="TextBox 5"/>
           <p:cNvSpPr txBox="1"/>
           <p:nvPr/>
         </p:nvSpPr>
@@ -9835,320 +10023,6 @@
             <a:r>
               <a:rPr sz="1000"/>
               <a:t>31</a:t>
-            </a:r>
-          </a:p>
-        </p:txBody>
-      </p:sp>
-      <p:sp>
-        <p:nvSpPr>
-          <p:cNvPr id="6" name="TextBox 5"/>
-          <p:cNvSpPr txBox="1"/>
-          <p:nvPr/>
-        </p:nvSpPr>
-        <p:spPr>
-          <a:xfrm>
-            <a:off x="0" y="1000000"/>
-            <a:ext cx="12192000" cy="4226538"/>
-          </a:xfrm>
-          <a:prstGeom prst="rect">
-            <a:avLst/>
-          </a:prstGeom>
-          <a:solidFill>
-            <a:srgbClr val="000000"/>
-          </a:solidFill>
-        </p:spPr>
-        <p:txBody>
-          <a:bodyPr wrap="none" lIns="300000" rIns="300000">
-            <a:noAutofit/>
-          </a:bodyPr>
-          <a:lstStyle/>
-          <a:p>
-            <a:r>
-              <a:rPr sz="1200">
-                <a:solidFill>
-                  <a:srgbClr val="CCCCCC"/>
-                </a:solidFill>
-                <a:latin typeface="Consolas"/>
-              </a:rPr>
-              <a:t># --- keyboard -&gt; target inputs ------------------------------------------</a:t>
-            </a:r>
-          </a:p>
-          <a:p>
-            <a:r>
-              <a:rPr sz="1200">
-                <a:solidFill>
-                  <a:srgbClr val="CCCCCC"/>
-                </a:solidFill>
-                <a:latin typeface="Consolas"/>
-              </a:rPr>
-              <a:t>keys = pygame.key.get_pressed()</a:t>
-            </a:r>
-          </a:p>
-          <a:p>
-            <a:r>
-              <a:rPr sz="1200">
-                <a:solidFill>
-                  <a:srgbClr val="CCCCCC"/>
-                </a:solidFill>
-                <a:latin typeface="Consolas"/>
-              </a:rPr>
-              <a:t>if keys[pygame.K_LEFT]:</a:t>
-            </a:r>
-          </a:p>
-          <a:p>
-            <a:r>
-              <a:rPr sz="1200">
-                <a:solidFill>
-                  <a:srgbClr val="CCCCCC"/>
-                </a:solidFill>
-                <a:latin typeface="Consolas"/>
-              </a:rPr>
-              <a:t>    steering = min(1.0, steering + STEER_RATE * dt)     # +1 = left in Chrono</a:t>
-            </a:r>
-          </a:p>
-          <a:p>
-            <a:r>
-              <a:rPr sz="1200">
-                <a:solidFill>
-                  <a:srgbClr val="CCCCCC"/>
-                </a:solidFill>
-                <a:latin typeface="Consolas"/>
-              </a:rPr>
-              <a:t>elif keys[pygame.K_RIGHT]:</a:t>
-            </a:r>
-          </a:p>
-          <a:p>
-            <a:r>
-              <a:rPr sz="1200">
-                <a:solidFill>
-                  <a:srgbClr val="CCCCCC"/>
-                </a:solidFill>
-                <a:latin typeface="Consolas"/>
-              </a:rPr>
-              <a:t>    steering = max(-1.0, steering - STEER_RATE * dt)</a:t>
-            </a:r>
-          </a:p>
-          <a:p>
-            <a:r>
-              <a:rPr sz="1200">
-                <a:solidFill>
-                  <a:srgbClr val="CCCCCC"/>
-                </a:solidFill>
-                <a:latin typeface="Consolas"/>
-              </a:rPr>
-              <a:t>else:  # self-center</a:t>
-            </a:r>
-          </a:p>
-          <a:p>
-            <a:r>
-              <a:rPr sz="1200">
-                <a:solidFill>
-                  <a:srgbClr val="CCCCCC"/>
-                </a:solidFill>
-                <a:latin typeface="Consolas"/>
-              </a:rPr>
-              <a:t>    steering -= max(-STEER_RETURN * dt, min(STEER_RETURN * dt, steering))</a:t>
-            </a:r>
-          </a:p>
-          <a:p>
-            <a:r>
-              <a:rPr sz="1200">
-                <a:solidFill>
-                  <a:srgbClr val="CCCCCC"/>
-                </a:solidFill>
-                <a:latin typeface="Consolas"/>
-              </a:rPr>
-              <a:t>if keys[pygame.K_UP]:</a:t>
-            </a:r>
-          </a:p>
-          <a:p>
-            <a:r>
-              <a:rPr sz="1200">
-                <a:solidFill>
-                  <a:srgbClr val="CCCCCC"/>
-                </a:solidFill>
-                <a:latin typeface="Consolas"/>
-              </a:rPr>
-              <a:t>    throttle = min(1.0, throttle + PEDAL_RATE * dt)</a:t>
-            </a:r>
-          </a:p>
-          <a:p>
-            <a:r>
-              <a:rPr sz="1200">
-                <a:solidFill>
-                  <a:srgbClr val="CCCCCC"/>
-                </a:solidFill>
-                <a:latin typeface="Consolas"/>
-              </a:rPr>
-              <a:t>    braking = 0.0</a:t>
-            </a:r>
-          </a:p>
-          <a:p>
-            <a:r>
-              <a:rPr sz="1200">
-                <a:solidFill>
-                  <a:srgbClr val="CCCCCC"/>
-                </a:solidFill>
-                <a:latin typeface="Consolas"/>
-              </a:rPr>
-              <a:t>elif keys[pygame.K_DOWN]:</a:t>
-            </a:r>
-          </a:p>
-          <a:p>
-            <a:r>
-              <a:rPr sz="1200">
-                <a:solidFill>
-                  <a:srgbClr val="CCCCCC"/>
-                </a:solidFill>
-                <a:latin typeface="Consolas"/>
-              </a:rPr>
-              <a:t>    braking = min(1.0, braking + PEDAL_RATE * dt)</a:t>
-            </a:r>
-          </a:p>
-          <a:p>
-            <a:r>
-              <a:rPr sz="1200">
-                <a:solidFill>
-                  <a:srgbClr val="CCCCCC"/>
-                </a:solidFill>
-                <a:latin typeface="Consolas"/>
-              </a:rPr>
-              <a:t>    throttle = 0.0</a:t>
-            </a:r>
-          </a:p>
-          <a:p>
-            <a:r>
-              <a:rPr sz="1200">
-                <a:solidFill>
-                  <a:srgbClr val="CCCCCC"/>
-                </a:solidFill>
-                <a:latin typeface="Consolas"/>
-              </a:rPr>
-              <a:t>else:</a:t>
-            </a:r>
-          </a:p>
-          <a:p>
-            <a:r>
-              <a:rPr sz="1200">
-                <a:solidFill>
-                  <a:srgbClr val="CCCCCC"/>
-                </a:solidFill>
-                <a:latin typeface="Consolas"/>
-              </a:rPr>
-              <a:t>    throttle = max(0.0, throttle - PEDAL_RATE * dt)</a:t>
-            </a:r>
-          </a:p>
-          <a:p>
-            <a:r>
-              <a:rPr sz="1200">
-                <a:solidFill>
-                  <a:srgbClr val="CCCCCC"/>
-                </a:solidFill>
-                <a:latin typeface="Consolas"/>
-              </a:rPr>
-              <a:t>    braking = max(0.0, braking - PEDAL_RATE * dt)</a:t>
-            </a:r>
-          </a:p>
-          <a:p>
-            <a:r>
-              <a:rPr sz="1200">
-                <a:solidFill>
-                  <a:srgbClr val="CCCCCC"/>
-                </a:solidFill>
-                <a:latin typeface="Consolas"/>
-              </a:rPr>
-              <a:t>if keys[pygame.K_SPACE]:</a:t>
-            </a:r>
-          </a:p>
-          <a:p>
-            <a:r>
-              <a:rPr sz="1200">
-                <a:solidFill>
-                  <a:srgbClr val="CCCCCC"/>
-                </a:solidFill>
-                <a:latin typeface="Consolas"/>
-              </a:rPr>
-              <a:t>    steering, throttle, braking = 0.0, 0.0, 0.0</a:t>
-            </a:r>
-          </a:p>
-          <a:p>
-            <a:r>
-              <a:rPr sz="1200">
-                <a:solidFill>
-                  <a:srgbClr val="CCCCCC"/>
-                </a:solidFill>
-                <a:latin typeface="Consolas"/>
-              </a:rPr>
-              <a:t> </a:t>
-            </a:r>
-          </a:p>
-          <a:p>
-            <a:r>
-              <a:rPr sz="1200">
-                <a:solidFill>
-                  <a:srgbClr val="CCCCCC"/>
-                </a:solidFill>
-                <a:latin typeface="Consolas"/>
-              </a:rPr>
-              <a:t># --- send to the simulation ---------------------------------------------</a:t>
-            </a:r>
-          </a:p>
-          <a:p>
-            <a:r>
-              <a:rPr sz="1200">
-                <a:solidFill>
-                  <a:srgbClr val="CCCCCC"/>
-                </a:solidFill>
-                <a:latin typeface="Consolas"/>
-              </a:rPr>
-              <a:t>sock.sendto(f"{steering:.3f},{throttle:.3f},{braking:.3f}".encode(), (SIM_HOST, SIM_PORT))</a:t>
-            </a:r>
-          </a:p>
-        </p:txBody>
-      </p:sp>
-      <p:sp>
-        <p:nvSpPr>
-          <p:cNvPr id="7" name="TextBox 6"/>
-          <p:cNvSpPr txBox="1"/>
-          <p:nvPr/>
-        </p:nvSpPr>
-        <p:spPr>
-          <a:xfrm>
-            <a:off x="400000" y="5376538"/>
-            <a:ext cx="11392000" cy="900000"/>
-          </a:xfrm>
-          <a:prstGeom prst="rect">
-            <a:avLst/>
-          </a:prstGeom>
-          <a:noFill/>
-        </p:spPr>
-        <p:txBody>
-          <a:bodyPr wrap="square">
-            <a:spAutoFit/>
-          </a:bodyPr>
-          <a:lstStyle/>
-          <a:p>
-            <a:pPr/>
-            <a:r>
-              <a:rPr sz="1800"/>
-              <a:t>A pygame window: hold the arrow keys, send </a:t>
-            </a:r>
-            <a:r>
-              <a:rPr sz="1600">
-                <a:latin typeface="Consolas"/>
-              </a:rPr>
-              <a:t>steering,throttle,braking</a:t>
-            </a:r>
-            <a:r>
-              <a:rPr sz="1800"/>
-              <a:t> at 50 Hz</a:t>
-            </a:r>
-          </a:p>
-          <a:p>
-            <a:pPr/>
-            <a:r>
-              <a:rPr sz="1800"/>
-              <a:t>Swap this for a web page, a ROS node, or a driving-simulator cockpit - the sim does not care</a:t>
             </a:r>
           </a:p>
         </p:txBody>
@@ -10192,22 +10066,79 @@
           <a:lstStyle/>
           <a:p>
             <a:r>
-              <a:rPr sz="2600"/>
-              <a:t>Step 4: Plug the device into a plain ChDriver (Lines 318 to 327)</a:t>
-            </a:r>
-          </a:p>
-        </p:txBody>
-      </p:sp>
-      <p:sp>
-        <p:nvSpPr>
-          <p:cNvPr id="3" name="TextBox 2"/>
+              <a:t>Step 3: The operator side - operator_console.py</a:t>
+            </a:r>
+          </a:p>
+        </p:txBody>
+      </p:sp>
+      <p:sp>
+        <p:nvSpPr>
+          <p:cNvPr id="4" name="TextBox 3"/>
           <p:cNvSpPr txBox="1"/>
           <p:nvPr/>
         </p:nvSpPr>
         <p:spPr>
           <a:xfrm>
-            <a:off x="0" y="1050000"/>
-            <a:ext cx="12192000" cy="2763520"/>
+            <a:off x="310974" y="6645811"/>
+            <a:ext cx="11644805" cy="188527"/>
+          </a:xfrm>
+          <a:prstGeom prst="rect">
+            <a:avLst/>
+          </a:prstGeom>
+          <a:noFill/>
+        </p:spPr>
+        <p:txBody>
+          <a:bodyPr wrap="none">
+            <a:spAutoFit/>
+          </a:bodyPr>
+          <a:lstStyle/>
+          <a:p>
+            <a:r>
+              <a:rPr sz="1000"/>
+              <a:t>University of Wisconsin - Madison</a:t>
+            </a:r>
+          </a:p>
+        </p:txBody>
+      </p:sp>
+      <p:sp>
+        <p:nvSpPr>
+          <p:cNvPr id="5" name="TextBox 4"/>
+          <p:cNvSpPr txBox="1"/>
+          <p:nvPr/>
+        </p:nvSpPr>
+        <p:spPr>
+          <a:xfrm>
+            <a:off x="10249563" y="6646310"/>
+            <a:ext cx="1706217" cy="188028"/>
+          </a:xfrm>
+          <a:prstGeom prst="rect">
+            <a:avLst/>
+          </a:prstGeom>
+          <a:noFill/>
+        </p:spPr>
+        <p:txBody>
+          <a:bodyPr wrap="none">
+            <a:spAutoFit/>
+          </a:bodyPr>
+          <a:lstStyle/>
+          <a:p>
+            <a:r>
+              <a:rPr sz="1000"/>
+              <a:t>32</a:t>
+            </a:r>
+          </a:p>
+        </p:txBody>
+      </p:sp>
+      <p:sp>
+        <p:nvSpPr>
+          <p:cNvPr id="6" name="TextBox 5"/>
+          <p:cNvSpPr txBox="1"/>
+          <p:nvPr/>
+        </p:nvSpPr>
+        <p:spPr>
+          <a:xfrm>
+            <a:off x="0" y="1000000"/>
+            <a:ext cx="12192000" cy="4226538"/>
           </a:xfrm>
           <a:prstGeom prst="rect">
             <a:avLst/>
@@ -10223,7 +10154,161 @@
           <a:lstStyle/>
           <a:p>
             <a:r>
-              <a:rPr sz="1000">
+              <a:rPr sz="1200">
+                <a:solidFill>
+                  <a:srgbClr val="CCCCCC"/>
+                </a:solidFill>
+                <a:latin typeface="Consolas"/>
+              </a:rPr>
+              <a:t># --- keyboard -&gt; target inputs ------------------------------------------</a:t>
+            </a:r>
+          </a:p>
+          <a:p>
+            <a:r>
+              <a:rPr sz="1200">
+                <a:solidFill>
+                  <a:srgbClr val="CCCCCC"/>
+                </a:solidFill>
+                <a:latin typeface="Consolas"/>
+              </a:rPr>
+              <a:t>keys = pygame.key.get_pressed()</a:t>
+            </a:r>
+          </a:p>
+          <a:p>
+            <a:r>
+              <a:rPr sz="1200">
+                <a:solidFill>
+                  <a:srgbClr val="CCCCCC"/>
+                </a:solidFill>
+                <a:latin typeface="Consolas"/>
+              </a:rPr>
+              <a:t>if keys[pygame.K_LEFT]:</a:t>
+            </a:r>
+          </a:p>
+          <a:p>
+            <a:r>
+              <a:rPr sz="1200">
+                <a:solidFill>
+                  <a:srgbClr val="CCCCCC"/>
+                </a:solidFill>
+                <a:latin typeface="Consolas"/>
+              </a:rPr>
+              <a:t>    steering = min(1.0, steering + STEER_RATE * dt)     # +1 = left in Chrono</a:t>
+            </a:r>
+          </a:p>
+          <a:p>
+            <a:r>
+              <a:rPr sz="1200">
+                <a:solidFill>
+                  <a:srgbClr val="CCCCCC"/>
+                </a:solidFill>
+                <a:latin typeface="Consolas"/>
+              </a:rPr>
+              <a:t>elif keys[pygame.K_RIGHT]:</a:t>
+            </a:r>
+          </a:p>
+          <a:p>
+            <a:r>
+              <a:rPr sz="1200">
+                <a:solidFill>
+                  <a:srgbClr val="CCCCCC"/>
+                </a:solidFill>
+                <a:latin typeface="Consolas"/>
+              </a:rPr>
+              <a:t>    steering = max(-1.0, steering - STEER_RATE * dt)</a:t>
+            </a:r>
+          </a:p>
+          <a:p>
+            <a:r>
+              <a:rPr sz="1200">
+                <a:solidFill>
+                  <a:srgbClr val="CCCCCC"/>
+                </a:solidFill>
+                <a:latin typeface="Consolas"/>
+              </a:rPr>
+              <a:t>else:  # self-center</a:t>
+            </a:r>
+          </a:p>
+          <a:p>
+            <a:r>
+              <a:rPr sz="1200">
+                <a:solidFill>
+                  <a:srgbClr val="CCCCCC"/>
+                </a:solidFill>
+                <a:latin typeface="Consolas"/>
+              </a:rPr>
+              <a:t>    steering -= max(-STEER_RETURN * dt, min(STEER_RETURN * dt, steering))</a:t>
+            </a:r>
+          </a:p>
+          <a:p>
+            <a:r>
+              <a:rPr sz="1200">
+                <a:solidFill>
+                  <a:srgbClr val="CCCCCC"/>
+                </a:solidFill>
+                <a:latin typeface="Consolas"/>
+              </a:rPr>
+              <a:t>if keys[pygame.K_UP]:</a:t>
+            </a:r>
+          </a:p>
+          <a:p>
+            <a:r>
+              <a:rPr sz="1200">
+                <a:solidFill>
+                  <a:srgbClr val="CCCCCC"/>
+                </a:solidFill>
+                <a:latin typeface="Consolas"/>
+              </a:rPr>
+              <a:t>    throttle = min(1.0, throttle + PEDAL_RATE * dt)</a:t>
+            </a:r>
+          </a:p>
+          <a:p>
+            <a:r>
+              <a:rPr sz="1200">
+                <a:solidFill>
+                  <a:srgbClr val="CCCCCC"/>
+                </a:solidFill>
+                <a:latin typeface="Consolas"/>
+              </a:rPr>
+              <a:t>    braking = 0.0</a:t>
+            </a:r>
+          </a:p>
+          <a:p>
+            <a:r>
+              <a:rPr sz="1200">
+                <a:solidFill>
+                  <a:srgbClr val="CCCCCC"/>
+                </a:solidFill>
+                <a:latin typeface="Consolas"/>
+              </a:rPr>
+              <a:t>elif keys[pygame.K_DOWN]:</a:t>
+            </a:r>
+          </a:p>
+          <a:p>
+            <a:r>
+              <a:rPr sz="1200">
+                <a:solidFill>
+                  <a:srgbClr val="CCCCCC"/>
+                </a:solidFill>
+                <a:latin typeface="Consolas"/>
+              </a:rPr>
+              <a:t>    braking = min(1.0, braking + PEDAL_RATE * dt)</a:t>
+            </a:r>
+          </a:p>
+          <a:p>
+            <a:r>
+              <a:rPr sz="1200">
+                <a:solidFill>
+                  <a:srgbClr val="CCCCCC"/>
+                </a:solidFill>
+                <a:latin typeface="Consolas"/>
+              </a:rPr>
+              <a:t>    throttle = 0.0</a:t>
+            </a:r>
+          </a:p>
+          <a:p>
+            <a:r>
+              <a:rPr sz="1200">
                 <a:solidFill>
                   <a:srgbClr val="CCCCCC"/>
                 </a:solidFill>
@@ -10234,84 +10319,51 @@
           </a:p>
           <a:p>
             <a:r>
-              <a:rPr sz="1000">
-                <a:solidFill>
-                  <a:srgbClr val="CCCCCC"/>
-                </a:solidFill>
-                <a:latin typeface="Consolas"/>
-              </a:rPr>
-              <a:t>    ### PART 4: a device Chrono doesn't know about writes into a plain ChDriver ###</a:t>
-            </a:r>
-          </a:p>
-          <a:p>
-            <a:r>
-              <a:rPr sz="1000">
-                <a:solidFill>
-                  <a:srgbClr val="CCCCCC"/>
-                </a:solidFill>
-                <a:latin typeface="Consolas"/>
-              </a:rPr>
-              <a:t>    driver = veh.ChDriver(vehicle)</a:t>
-            </a:r>
-          </a:p>
-          <a:p>
-            <a:r>
-              <a:rPr sz="1000">
-                <a:solidFill>
-                  <a:srgbClr val="CCCCCC"/>
-                </a:solidFill>
-                <a:latin typeface="Consolas"/>
-              </a:rPr>
-              <a:t>    if INPUT_SOURCE == "udp":</a:t>
-            </a:r>
-          </a:p>
-          <a:p>
-            <a:r>
-              <a:rPr sz="1000">
-                <a:solidFill>
-                  <a:srgbClr val="CCCCCC"/>
-                </a:solidFill>
-                <a:latin typeface="Consolas"/>
-              </a:rPr>
-              <a:t>        device = UdpInput(port=UDP_PORT)</a:t>
-            </a:r>
-          </a:p>
-          <a:p>
-            <a:r>
-              <a:rPr sz="1000">
-                <a:solidFill>
-                  <a:srgbClr val="CCCCCC"/>
-                </a:solidFill>
-                <a:latin typeface="Consolas"/>
-              </a:rPr>
-              <a:t>    else:</a:t>
-            </a:r>
-          </a:p>
-          <a:p>
-            <a:r>
-              <a:rPr sz="1000">
-                <a:solidFill>
-                  <a:srgbClr val="CCCCCC"/>
-                </a:solidFill>
-                <a:latin typeface="Consolas"/>
-              </a:rPr>
-              <a:t>        raise ValueError(f"unknown INPUT_SOURCE {INPUT_SOURCE!r}")</a:t>
-            </a:r>
-          </a:p>
-          <a:p>
-            <a:r>
-              <a:rPr sz="1000">
-                <a:solidFill>
-                  <a:srgbClr val="CCCCCC"/>
-                </a:solidFill>
-                <a:latin typeface="Consolas"/>
-              </a:rPr>
-              <a:t>    smoother = SmoothedInputs(gain=4.0)</a:t>
-            </a:r>
-          </a:p>
-          <a:p>
-            <a:r>
-              <a:rPr sz="1000">
+              <a:rPr sz="1200">
+                <a:solidFill>
+                  <a:srgbClr val="CCCCCC"/>
+                </a:solidFill>
+                <a:latin typeface="Consolas"/>
+              </a:rPr>
+              <a:t>    throttle = max(0.0, throttle - PEDAL_RATE * dt)</a:t>
+            </a:r>
+          </a:p>
+          <a:p>
+            <a:r>
+              <a:rPr sz="1200">
+                <a:solidFill>
+                  <a:srgbClr val="CCCCCC"/>
+                </a:solidFill>
+                <a:latin typeface="Consolas"/>
+              </a:rPr>
+              <a:t>    braking = max(0.0, braking - PEDAL_RATE * dt)</a:t>
+            </a:r>
+          </a:p>
+          <a:p>
+            <a:r>
+              <a:rPr sz="1200">
+                <a:solidFill>
+                  <a:srgbClr val="CCCCCC"/>
+                </a:solidFill>
+                <a:latin typeface="Consolas"/>
+              </a:rPr>
+              <a:t>if keys[pygame.K_SPACE]:</a:t>
+            </a:r>
+          </a:p>
+          <a:p>
+            <a:r>
+              <a:rPr sz="1200">
+                <a:solidFill>
+                  <a:srgbClr val="CCCCCC"/>
+                </a:solidFill>
+                <a:latin typeface="Consolas"/>
+              </a:rPr>
+              <a:t>    steering, throttle, braking = 0.0, 0.0, 0.0</a:t>
+            </a:r>
+          </a:p>
+          <a:p>
+            <a:r>
+              <a:rPr sz="1200">
                 <a:solidFill>
                   <a:srgbClr val="CCCCCC"/>
                 </a:solidFill>
@@ -10322,27 +10374,38 @@
           </a:p>
           <a:p>
             <a:r>
-              <a:rPr sz="1000">
-                <a:solidFill>
-                  <a:srgbClr val="CCCCCC"/>
-                </a:solidFill>
-                <a:latin typeface="Consolas"/>
-              </a:rPr>
-              <a:t>driver.Initialize()</a:t>
-            </a:r>
-          </a:p>
-        </p:txBody>
-      </p:sp>
-      <p:sp>
-        <p:nvSpPr>
-          <p:cNvPr id="4" name="TextBox 3"/>
+              <a:rPr sz="1200">
+                <a:solidFill>
+                  <a:srgbClr val="CCCCCC"/>
+                </a:solidFill>
+                <a:latin typeface="Consolas"/>
+              </a:rPr>
+              <a:t># --- send to the simulation ---------------------------------------------</a:t>
+            </a:r>
+          </a:p>
+          <a:p>
+            <a:r>
+              <a:rPr sz="1200">
+                <a:solidFill>
+                  <a:srgbClr val="CCCCCC"/>
+                </a:solidFill>
+                <a:latin typeface="Consolas"/>
+              </a:rPr>
+              <a:t>sock.sendto(f"{steering:.3f},{throttle:.3f},{braking:.3f}".encode(), (SIM_HOST, SIM_PORT))</a:t>
+            </a:r>
+          </a:p>
+        </p:txBody>
+      </p:sp>
+      <p:sp>
+        <p:nvSpPr>
+          <p:cNvPr id="7" name="TextBox 6"/>
           <p:cNvSpPr txBox="1"/>
           <p:nvPr/>
         </p:nvSpPr>
         <p:spPr>
           <a:xfrm>
-            <a:off x="400000" y="3913520"/>
-            <a:ext cx="11392000" cy="2544480"/>
+            <a:off x="400000" y="5376538"/>
+            <a:ext cx="11392000" cy="900000"/>
           </a:xfrm>
           <a:prstGeom prst="rect">
             <a:avLst/>
@@ -10358,65 +10421,24 @@
             <a:pPr/>
             <a:r>
               <a:rPr sz="1800"/>
-              <a:t>No AttachDriver here - the Irrlicht window keeps the keyboard, our device owns the inputs</a:t>
-            </a:r>
-          </a:p>
-        </p:txBody>
-      </p:sp>
-      <p:sp>
-        <p:nvSpPr>
-          <p:cNvPr id="5" name="TextBox 4"/>
-          <p:cNvSpPr txBox="1"/>
-          <p:nvPr/>
-        </p:nvSpPr>
-        <p:spPr>
-          <a:xfrm>
-            <a:off x="310974" y="6645811"/>
-            <a:ext cx="11644805" cy="188527"/>
-          </a:xfrm>
-          <a:prstGeom prst="rect">
-            <a:avLst/>
-          </a:prstGeom>
-          <a:noFill/>
-        </p:spPr>
-        <p:txBody>
-          <a:bodyPr wrap="none">
-            <a:spAutoFit/>
-          </a:bodyPr>
-          <a:lstStyle/>
-          <a:p>
-            <a:r>
-              <a:rPr sz="1000"/>
-              <a:t>University of Wisconsin - Madison</a:t>
-            </a:r>
-          </a:p>
-        </p:txBody>
-      </p:sp>
-      <p:sp>
-        <p:nvSpPr>
-          <p:cNvPr id="6" name="TextBox 5"/>
-          <p:cNvSpPr txBox="1"/>
-          <p:nvPr/>
-        </p:nvSpPr>
-        <p:spPr>
-          <a:xfrm>
-            <a:off x="10249563" y="6646310"/>
-            <a:ext cx="1706217" cy="188028"/>
-          </a:xfrm>
-          <a:prstGeom prst="rect">
-            <a:avLst/>
-          </a:prstGeom>
-          <a:noFill/>
-        </p:spPr>
-        <p:txBody>
-          <a:bodyPr wrap="none">
-            <a:spAutoFit/>
-          </a:bodyPr>
-          <a:lstStyle/>
-          <a:p>
-            <a:r>
-              <a:rPr sz="1000"/>
-              <a:t>32</a:t>
+              <a:t>A pygame window: hold the arrow keys, send </a:t>
+            </a:r>
+            <a:r>
+              <a:rPr sz="1600">
+                <a:latin typeface="Consolas"/>
+              </a:rPr>
+              <a:t>steering,throttle,braking</a:t>
+            </a:r>
+            <a:r>
+              <a:rPr sz="1800"/>
+              <a:t> at 50 Hz</a:t>
+            </a:r>
+          </a:p>
+          <a:p>
+            <a:pPr/>
+            <a:r>
+              <a:rPr sz="1800"/>
+              <a:t>Swap this for a web page, a ROS node, or a driving-simulator cockpit - the sim does not care</a:t>
             </a:r>
           </a:p>
         </p:txBody>
@@ -10461,7 +10483,7 @@
           <a:p>
             <a:r>
               <a:rPr sz="2600"/>
-              <a:t>Step 5: Sample once per step, then hold (Lines 384 to 393)</a:t>
+              <a:t>Step 4: Plug the device into a plain ChDriver (Lines 318 to 327)</a:t>
             </a:r>
           </a:p>
         </p:txBody>
@@ -10475,7 +10497,7 @@
         <p:spPr>
           <a:xfrm>
             <a:off x="0" y="1050000"/>
-            <a:ext cx="12192000" cy="2336800"/>
+            <a:ext cx="12192000" cy="2763520"/>
           </a:xfrm>
           <a:prstGeom prst="rect">
             <a:avLst/>
@@ -10497,6 +10519,94 @@
                 </a:solidFill>
                 <a:latin typeface="Consolas"/>
               </a:rPr>
+              <a:t>else:</a:t>
+            </a:r>
+          </a:p>
+          <a:p>
+            <a:r>
+              <a:rPr sz="1000">
+                <a:solidFill>
+                  <a:srgbClr val="CCCCCC"/>
+                </a:solidFill>
+                <a:latin typeface="Consolas"/>
+              </a:rPr>
+              <a:t>    ### PART 4: a device Chrono doesn't know about writes into a plain ChDriver ###</a:t>
+            </a:r>
+          </a:p>
+          <a:p>
+            <a:r>
+              <a:rPr sz="1000">
+                <a:solidFill>
+                  <a:srgbClr val="CCCCCC"/>
+                </a:solidFill>
+                <a:latin typeface="Consolas"/>
+              </a:rPr>
+              <a:t>    driver = veh.ChDriver(vehicle)</a:t>
+            </a:r>
+          </a:p>
+          <a:p>
+            <a:r>
+              <a:rPr sz="1000">
+                <a:solidFill>
+                  <a:srgbClr val="CCCCCC"/>
+                </a:solidFill>
+                <a:latin typeface="Consolas"/>
+              </a:rPr>
+              <a:t>    if INPUT_SOURCE == "udp":</a:t>
+            </a:r>
+          </a:p>
+          <a:p>
+            <a:r>
+              <a:rPr sz="1000">
+                <a:solidFill>
+                  <a:srgbClr val="CCCCCC"/>
+                </a:solidFill>
+                <a:latin typeface="Consolas"/>
+              </a:rPr>
+              <a:t>        device = UdpInput(port=UDP_PORT)</a:t>
+            </a:r>
+          </a:p>
+          <a:p>
+            <a:r>
+              <a:rPr sz="1000">
+                <a:solidFill>
+                  <a:srgbClr val="CCCCCC"/>
+                </a:solidFill>
+                <a:latin typeface="Consolas"/>
+              </a:rPr>
+              <a:t>    else:</a:t>
+            </a:r>
+          </a:p>
+          <a:p>
+            <a:r>
+              <a:rPr sz="1000">
+                <a:solidFill>
+                  <a:srgbClr val="CCCCCC"/>
+                </a:solidFill>
+                <a:latin typeface="Consolas"/>
+              </a:rPr>
+              <a:t>        raise ValueError(f"unknown INPUT_SOURCE {INPUT_SOURCE!r}")</a:t>
+            </a:r>
+          </a:p>
+          <a:p>
+            <a:r>
+              <a:rPr sz="1000">
+                <a:solidFill>
+                  <a:srgbClr val="CCCCCC"/>
+                </a:solidFill>
+                <a:latin typeface="Consolas"/>
+              </a:rPr>
+              <a:t>    smoother = SmoothedInputs(gain=4.0)</a:t>
+            </a:r>
+          </a:p>
+          <a:p>
+            <a:r>
+              <a:rPr sz="1000">
+                <a:solidFill>
+                  <a:srgbClr val="CCCCCC"/>
+                </a:solidFill>
+                <a:latin typeface="Consolas"/>
+              </a:rPr>
               <a:t> </a:t>
             </a:r>
           </a:p>
@@ -10508,95 +10618,7 @@
                 </a:solidFill>
                 <a:latin typeface="Consolas"/>
               </a:rPr>
-              <a:t># PART 4: sample the device ONCE per step and hold it for the step</a:t>
-            </a:r>
-          </a:p>
-          <a:p>
-            <a:r>
-              <a:rPr sz="1000">
-                <a:solidFill>
-                  <a:srgbClr val="CCCCCC"/>
-                </a:solidFill>
-                <a:latin typeface="Consolas"/>
-              </a:rPr>
-              <a:t>if device is not None:</a:t>
-            </a:r>
-          </a:p>
-          <a:p>
-            <a:r>
-              <a:rPr sz="1000">
-                <a:solidFill>
-                  <a:srgbClr val="CCCCCC"/>
-                </a:solidFill>
-                <a:latin typeface="Consolas"/>
-              </a:rPr>
-              <a:t>    smoother.set_target(*device.poll())</a:t>
-            </a:r>
-          </a:p>
-          <a:p>
-            <a:r>
-              <a:rPr sz="1000">
-                <a:solidFill>
-                  <a:srgbClr val="CCCCCC"/>
-                </a:solidFill>
-                <a:latin typeface="Consolas"/>
-              </a:rPr>
-              <a:t>    smoother.advance(step_size)</a:t>
-            </a:r>
-          </a:p>
-          <a:p>
-            <a:r>
-              <a:rPr sz="1000">
-                <a:solidFill>
-                  <a:srgbClr val="CCCCCC"/>
-                </a:solidFill>
-                <a:latin typeface="Consolas"/>
-              </a:rPr>
-              <a:t>    smoother.apply_to(driver)</a:t>
-            </a:r>
-          </a:p>
-          <a:p>
-            <a:r>
-              <a:rPr sz="1000">
-                <a:solidFill>
-                  <a:srgbClr val="CCCCCC"/>
-                </a:solidFill>
-                <a:latin typeface="Consolas"/>
-              </a:rPr>
-              <a:t> </a:t>
-            </a:r>
-          </a:p>
-          <a:p>
-            <a:r>
-              <a:rPr sz="1000">
-                <a:solidFill>
-                  <a:srgbClr val="CCCCCC"/>
-                </a:solidFill>
-                <a:latin typeface="Consolas"/>
-              </a:rPr>
-              <a:t># Get driver inputs (three floats) - this is the whole HIL contract</a:t>
-            </a:r>
-          </a:p>
-          <a:p>
-            <a:r>
-              <a:rPr sz="1000">
-                <a:solidFill>
-                  <a:srgbClr val="CCCCCC"/>
-                </a:solidFill>
-                <a:latin typeface="Consolas"/>
-              </a:rPr>
-              <a:t>driver_inputs = driver.GetInputs()</a:t>
-            </a:r>
-          </a:p>
-          <a:p>
-            <a:r>
-              <a:rPr sz="1000">
-                <a:solidFill>
-                  <a:srgbClr val="CCCCCC"/>
-                </a:solidFill>
-                <a:latin typeface="Consolas"/>
-              </a:rPr>
-              <a:t> </a:t>
+              <a:t>driver.Initialize()</a:t>
             </a:r>
           </a:p>
         </p:txBody>
@@ -10609,8 +10631,8 @@
         </p:nvSpPr>
         <p:spPr>
           <a:xfrm>
-            <a:off x="400000" y="3486800"/>
-            <a:ext cx="11392000" cy="2971200"/>
+            <a:off x="400000" y="3913520"/>
+            <a:ext cx="11392000" cy="2544480"/>
           </a:xfrm>
           <a:prstGeom prst="rect">
             <a:avLst/>
@@ -10626,7 +10648,7 @@
             <a:pPr/>
             <a:r>
               <a:rPr sz="1800"/>
-              <a:t>poll -&gt; smooth -&gt; write, then GetInputs() as before; the physics loop never waits on the device</a:t>
+              <a:t>No AttachDriver here - the Irrlicht window keeps the keyboard, our device owns the inputs</a:t>
             </a:r>
           </a:p>
         </p:txBody>
@@ -10729,77 +10751,142 @@
           <a:p>
             <a:r>
               <a:rPr sz="2600"/>
-              <a:t>Before running the code, please</a:t>
-            </a:r>
-          </a:p>
-        </p:txBody>
-      </p:sp>
-      <p:sp>
-        <p:nvSpPr>
-          <p:cNvPr id="3" name="Content Placeholder 2"/>
-          <p:cNvSpPr>
-            <a:spLocks noGrp="1"/>
-          </p:cNvSpPr>
-          <p:nvPr>
-            <p:ph idx="1"/>
-          </p:nvPr>
-        </p:nvSpPr>
-        <p:spPr/>
-        <p:txBody>
-          <a:bodyPr wrap="square"/>
-          <a:lstStyle/>
-          <a:p>
-            <a:pPr/>
-            <a:r>
-              <a:rPr sz="2000"/>
-              <a:t>Set INPUT_SOURCE = "udp" (Line 386), keep REALTIME = "vehicle"</a:t>
-            </a:r>
-          </a:p>
-          <a:p>
-            <a:pPr/>
-            <a:r>
-              <a:rPr sz="2000"/>
-              <a:t>Terminal 1: </a:t>
-            </a:r>
-            <a:r>
-              <a:rPr sz="1800">
-                <a:latin typeface="Consolas"/>
-              </a:rPr>
-              <a:t>python tutorial_HIL_driver.py</a:t>
-            </a:r>
-          </a:p>
-          <a:p>
-            <a:pPr/>
-            <a:r>
-              <a:rPr sz="2000"/>
-              <a:t>Terminal 2: </a:t>
-            </a:r>
-            <a:r>
-              <a:rPr sz="1800">
-                <a:latin typeface="Consolas"/>
-              </a:rPr>
-              <a:t>python operator_console.py</a:t>
-            </a:r>
-            <a:r>
-              <a:rPr sz="2000"/>
-              <a:t> (or </a:t>
-            </a:r>
-            <a:r>
-              <a:rPr sz="1800">
-                <a:latin typeface="Consolas"/>
-              </a:rPr>
-              <a:t>python operator_console.py &lt;ip of terminal 1&gt;</a:t>
-            </a:r>
-            <a:r>
-              <a:rPr sz="2000"/>
-              <a:t> from another laptop)</a:t>
-            </a:r>
-          </a:p>
-          <a:p>
-            <a:pPr/>
-            <a:r>
-              <a:rPr sz="2000"/>
-              <a:t>Click the operator console window and drive with the arrow keys</a:t>
+              <a:t>Step 5: Sample once per step, then hold (Lines 384 to 393)</a:t>
+            </a:r>
+          </a:p>
+        </p:txBody>
+      </p:sp>
+      <p:sp>
+        <p:nvSpPr>
+          <p:cNvPr id="3" name="TextBox 2"/>
+          <p:cNvSpPr txBox="1"/>
+          <p:nvPr/>
+        </p:nvSpPr>
+        <p:spPr>
+          <a:xfrm>
+            <a:off x="0" y="1050000"/>
+            <a:ext cx="12192000" cy="2336800"/>
+          </a:xfrm>
+          <a:prstGeom prst="rect">
+            <a:avLst/>
+          </a:prstGeom>
+          <a:solidFill>
+            <a:srgbClr val="000000"/>
+          </a:solidFill>
+        </p:spPr>
+        <p:txBody>
+          <a:bodyPr wrap="none" lIns="300000" rIns="300000">
+            <a:noAutofit/>
+          </a:bodyPr>
+          <a:lstStyle/>
+          <a:p>
+            <a:r>
+              <a:rPr sz="1000">
+                <a:solidFill>
+                  <a:srgbClr val="CCCCCC"/>
+                </a:solidFill>
+                <a:latin typeface="Consolas"/>
+              </a:rPr>
+              <a:t> </a:t>
+            </a:r>
+          </a:p>
+          <a:p>
+            <a:r>
+              <a:rPr sz="1000">
+                <a:solidFill>
+                  <a:srgbClr val="CCCCCC"/>
+                </a:solidFill>
+                <a:latin typeface="Consolas"/>
+              </a:rPr>
+              <a:t># PART 4: sample the device ONCE per step and hold it for the step</a:t>
+            </a:r>
+          </a:p>
+          <a:p>
+            <a:r>
+              <a:rPr sz="1000">
+                <a:solidFill>
+                  <a:srgbClr val="CCCCCC"/>
+                </a:solidFill>
+                <a:latin typeface="Consolas"/>
+              </a:rPr>
+              <a:t>if device is not None:</a:t>
+            </a:r>
+          </a:p>
+          <a:p>
+            <a:r>
+              <a:rPr sz="1000">
+                <a:solidFill>
+                  <a:srgbClr val="CCCCCC"/>
+                </a:solidFill>
+                <a:latin typeface="Consolas"/>
+              </a:rPr>
+              <a:t>    smoother.set_target(*device.poll())</a:t>
+            </a:r>
+          </a:p>
+          <a:p>
+            <a:r>
+              <a:rPr sz="1000">
+                <a:solidFill>
+                  <a:srgbClr val="CCCCCC"/>
+                </a:solidFill>
+                <a:latin typeface="Consolas"/>
+              </a:rPr>
+              <a:t>    smoother.advance(step_size)</a:t>
+            </a:r>
+          </a:p>
+          <a:p>
+            <a:r>
+              <a:rPr sz="1000">
+                <a:solidFill>
+                  <a:srgbClr val="CCCCCC"/>
+                </a:solidFill>
+                <a:latin typeface="Consolas"/>
+              </a:rPr>
+              <a:t>    smoother.apply_to(driver)</a:t>
+            </a:r>
+          </a:p>
+          <a:p>
+            <a:r>
+              <a:rPr sz="1000">
+                <a:solidFill>
+                  <a:srgbClr val="CCCCCC"/>
+                </a:solidFill>
+                <a:latin typeface="Consolas"/>
+              </a:rPr>
+              <a:t> </a:t>
+            </a:r>
+          </a:p>
+          <a:p>
+            <a:r>
+              <a:rPr sz="1000">
+                <a:solidFill>
+                  <a:srgbClr val="CCCCCC"/>
+                </a:solidFill>
+                <a:latin typeface="Consolas"/>
+              </a:rPr>
+              <a:t># Get driver inputs (three floats) - this is the whole human-in-the-loop contract</a:t>
+            </a:r>
+          </a:p>
+          <a:p>
+            <a:r>
+              <a:rPr sz="1000">
+                <a:solidFill>
+                  <a:srgbClr val="CCCCCC"/>
+                </a:solidFill>
+                <a:latin typeface="Consolas"/>
+              </a:rPr>
+              <a:t>driver_inputs = driver.GetInputs()</a:t>
+            </a:r>
+          </a:p>
+          <a:p>
+            <a:r>
+              <a:rPr sz="1000">
+                <a:solidFill>
+                  <a:srgbClr val="CCCCCC"/>
+                </a:solidFill>
+                <a:latin typeface="Consolas"/>
+              </a:rPr>
+              <a:t> </a:t>
             </a:r>
           </a:p>
         </p:txBody>
@@ -10812,6 +10899,36 @@
         </p:nvSpPr>
         <p:spPr>
           <a:xfrm>
+            <a:off x="400000" y="3486800"/>
+            <a:ext cx="11392000" cy="2971200"/>
+          </a:xfrm>
+          <a:prstGeom prst="rect">
+            <a:avLst/>
+          </a:prstGeom>
+          <a:noFill/>
+        </p:spPr>
+        <p:txBody>
+          <a:bodyPr wrap="square">
+            <a:spAutoFit/>
+          </a:bodyPr>
+          <a:lstStyle/>
+          <a:p>
+            <a:pPr/>
+            <a:r>
+              <a:rPr sz="1800"/>
+              <a:t>poll -&gt; smooth -&gt; write, then GetInputs() as before; the physics loop never waits on the device</a:t>
+            </a:r>
+          </a:p>
+        </p:txBody>
+      </p:sp>
+      <p:sp>
+        <p:nvSpPr>
+          <p:cNvPr id="5" name="TextBox 4"/>
+          <p:cNvSpPr txBox="1"/>
+          <p:nvPr/>
+        </p:nvSpPr>
+        <p:spPr>
+          <a:xfrm>
             <a:off x="310974" y="6645811"/>
             <a:ext cx="11644805" cy="188527"/>
           </a:xfrm>
@@ -10835,7 +10952,7 @@
       </p:sp>
       <p:sp>
         <p:nvSpPr>
-          <p:cNvPr id="5" name="TextBox 4"/>
+          <p:cNvPr id="6" name="TextBox 5"/>
           <p:cNvSpPr txBox="1"/>
           <p:nvPr/>
         </p:nvSpPr>
@@ -10902,7 +11019,7 @@
           <a:p>
             <a:r>
               <a:rPr sz="2600"/>
-              <a:t>Show Time</a:t>
+              <a:t>Before running the code, please</a:t>
             </a:r>
           </a:p>
         </p:txBody>
@@ -10925,14 +11042,54 @@
             <a:pPr/>
             <a:r>
               <a:rPr sz="2000"/>
-              <a:t>Pair up: one laptop runs the sim, the other runs the console and drives it over Wi-Fi</a:t>
+              <a:t>Set INPUT_SOURCE = "udp" (Line 386), keep REALTIME = "vehicle"</a:t>
             </a:r>
           </a:p>
           <a:p>
             <a:pPr/>
             <a:r>
               <a:rPr sz="2000"/>
-              <a:t>Stop the console mid-drive: the last input is held - what should a real simulator do here?</a:t>
+              <a:t>Terminal 1: </a:t>
+            </a:r>
+            <a:r>
+              <a:rPr sz="1800">
+                <a:latin typeface="Consolas"/>
+              </a:rPr>
+              <a:t>python tutorial_HIL_driver.py</a:t>
+            </a:r>
+          </a:p>
+          <a:p>
+            <a:pPr/>
+            <a:r>
+              <a:rPr sz="2000"/>
+              <a:t>Terminal 2: </a:t>
+            </a:r>
+            <a:r>
+              <a:rPr sz="1800">
+                <a:latin typeface="Consolas"/>
+              </a:rPr>
+              <a:t>python operator_console.py</a:t>
+            </a:r>
+            <a:r>
+              <a:rPr sz="2000"/>
+              <a:t> (or </a:t>
+            </a:r>
+            <a:r>
+              <a:rPr sz="1800">
+                <a:latin typeface="Consolas"/>
+              </a:rPr>
+              <a:t>python operator_console.py &lt;ip of terminal 1&gt;</a:t>
+            </a:r>
+            <a:r>
+              <a:rPr sz="2000"/>
+              <a:t> from another laptop)</a:t>
+            </a:r>
+          </a:p>
+          <a:p>
+            <a:pPr/>
+            <a:r>
+              <a:rPr sz="2000"/>
+              <a:t>Click the operator console window and drive with the arrow keys</a:t>
             </a:r>
           </a:p>
         </p:txBody>
@@ -11035,98 +11192,37 @@
           <a:p>
             <a:r>
               <a:rPr sz="2600"/>
-              <a:t>Step 1: Send state back at render rate (Lines 413 to 417)</a:t>
-            </a:r>
-          </a:p>
-        </p:txBody>
-      </p:sp>
-      <p:sp>
-        <p:nvSpPr>
-          <p:cNvPr id="3" name="TextBox 2"/>
-          <p:cNvSpPr txBox="1"/>
-          <p:nvPr/>
-        </p:nvSpPr>
-        <p:spPr>
-          <a:xfrm>
-            <a:off x="0" y="1050000"/>
-            <a:ext cx="12192000" cy="1483360"/>
-          </a:xfrm>
-          <a:prstGeom prst="rect">
-            <a:avLst/>
-          </a:prstGeom>
-          <a:solidFill>
-            <a:srgbClr val="000000"/>
-          </a:solidFill>
-        </p:spPr>
-        <p:txBody>
-          <a:bodyPr wrap="none" lIns="300000" rIns="300000">
-            <a:noAutofit/>
-          </a:bodyPr>
-          <a:lstStyle/>
-          <a:p>
-            <a:r>
-              <a:rPr sz="1400">
-                <a:solidFill>
-                  <a:srgbClr val="CCCCCC"/>
-                </a:solidFill>
-                <a:latin typeface="Consolas"/>
-              </a:rPr>
-              <a:t># PART 4: feedback to the operator (speed, RTF, lateral acceleration, applied inputs)</a:t>
-            </a:r>
-          </a:p>
-          <a:p>
-            <a:r>
-              <a:rPr sz="1400">
-                <a:solidFill>
-                  <a:srgbClr val="CCCCCC"/>
-                </a:solidFill>
-                <a:latin typeface="Consolas"/>
-              </a:rPr>
-              <a:t>if SEND_FEEDBACK and device is not None and step_number % render_steps == 0:</a:t>
-            </a:r>
-          </a:p>
-          <a:p>
-            <a:r>
-              <a:rPr sz="1400">
-                <a:solidFill>
-                  <a:srgbClr val="CCCCCC"/>
-                </a:solidFill>
-                <a:latin typeface="Consolas"/>
-              </a:rPr>
-              <a:t>    acc = vehicle.GetPointAcceleration(chrono.ChVector3d(0, 0, 0))</a:t>
-            </a:r>
-          </a:p>
-          <a:p>
-            <a:r>
-              <a:rPr sz="1400">
-                <a:solidFill>
-                  <a:srgbClr val="CCCCCC"/>
-                </a:solidFill>
-                <a:latin typeface="Consolas"/>
-              </a:rPr>
-              <a:t>    device.send_feedback(f"{sim_time:.3f},{vehicle.GetSpeed():.3f},{vehicle.GetRTF():.3f},{acc.y:.3f},"</a:t>
-            </a:r>
-          </a:p>
-          <a:p>
-            <a:r>
-              <a:rPr sz="1400">
-                <a:solidFill>
-                  <a:srgbClr val="CCCCCC"/>
-                </a:solidFill>
-                <a:latin typeface="Consolas"/>
-              </a:rPr>
-              <a:t>                         f"{driver_inputs.m_steering:.3f},{driver_inputs.m_throttle:.3f},{driver_inputs.m_braking:.3f}")</a:t>
-            </a:r>
-          </a:p>
-          <a:p>
-            <a:r>
-              <a:rPr sz="1400">
-                <a:solidFill>
-                  <a:srgbClr val="CCCCCC"/>
-                </a:solidFill>
-                <a:latin typeface="Consolas"/>
-              </a:rPr>
-              <a:t> </a:t>
+              <a:t>Show Time</a:t>
+            </a:r>
+          </a:p>
+        </p:txBody>
+      </p:sp>
+      <p:sp>
+        <p:nvSpPr>
+          <p:cNvPr id="3" name="Content Placeholder 2"/>
+          <p:cNvSpPr>
+            <a:spLocks noGrp="1"/>
+          </p:cNvSpPr>
+          <p:nvPr>
+            <p:ph idx="1"/>
+          </p:nvPr>
+        </p:nvSpPr>
+        <p:spPr/>
+        <p:txBody>
+          <a:bodyPr wrap="square"/>
+          <a:lstStyle/>
+          <a:p>
+            <a:pPr/>
+            <a:r>
+              <a:rPr sz="2000"/>
+              <a:t>Pair up: one laptop runs the sim, the other runs the console and drives it over Wi-Fi</a:t>
+            </a:r>
+          </a:p>
+          <a:p>
+            <a:pPr/>
+            <a:r>
+              <a:rPr sz="2000"/>
+              <a:t>Stop the console mid-drive: the last input is held - what should a real simulator do here?</a:t>
             </a:r>
           </a:p>
         </p:txBody>
@@ -11139,43 +11235,6 @@
         </p:nvSpPr>
         <p:spPr>
           <a:xfrm>
-            <a:off x="400000" y="2633360"/>
-            <a:ext cx="11392000" cy="3824640"/>
-          </a:xfrm>
-          <a:prstGeom prst="rect">
-            <a:avLst/>
-          </a:prstGeom>
-          <a:noFill/>
-        </p:spPr>
-        <p:txBody>
-          <a:bodyPr wrap="square">
-            <a:spAutoFit/>
-          </a:bodyPr>
-          <a:lstStyle/>
-          <a:p>
-            <a:pPr/>
-            <a:r>
-              <a:rPr sz="1800"/>
-              <a:t>Speed, RTF and lateral acceleration go back to whoever sent us inputs (UdpInput remembers the address)</a:t>
-            </a:r>
-          </a:p>
-          <a:p>
-            <a:pPr/>
-            <a:r>
-              <a:rPr sz="1800"/>
-              <a:t>Send at render rate (50 Hz), not at every physics step - the human cannot use 333 Hz</a:t>
-            </a:r>
-          </a:p>
-        </p:txBody>
-      </p:sp>
-      <p:sp>
-        <p:nvSpPr>
-          <p:cNvPr id="5" name="TextBox 4"/>
-          <p:cNvSpPr txBox="1"/>
-          <p:nvPr/>
-        </p:nvSpPr>
-        <p:spPr>
-          <a:xfrm>
             <a:off x="310974" y="6645811"/>
             <a:ext cx="11644805" cy="188527"/>
           </a:xfrm>
@@ -11199,7 +11258,7 @@
       </p:sp>
       <p:sp>
         <p:nvSpPr>
-          <p:cNvPr id="6" name="TextBox 5"/>
+          <p:cNvPr id="5" name="TextBox 4"/>
           <p:cNvSpPr txBox="1"/>
           <p:nvPr/>
         </p:nvSpPr>
@@ -11265,7 +11324,99 @@
           <a:lstStyle/>
           <a:p>
             <a:r>
-              <a:t>Step 2: Show it on the console - operator_console.py</a:t>
+              <a:rPr sz="2600"/>
+              <a:t>Step 1: Send state back at render rate (Lines 413 to 417)</a:t>
+            </a:r>
+          </a:p>
+        </p:txBody>
+      </p:sp>
+      <p:sp>
+        <p:nvSpPr>
+          <p:cNvPr id="3" name="TextBox 2"/>
+          <p:cNvSpPr txBox="1"/>
+          <p:nvPr/>
+        </p:nvSpPr>
+        <p:spPr>
+          <a:xfrm>
+            <a:off x="0" y="1050000"/>
+            <a:ext cx="12192000" cy="1483360"/>
+          </a:xfrm>
+          <a:prstGeom prst="rect">
+            <a:avLst/>
+          </a:prstGeom>
+          <a:solidFill>
+            <a:srgbClr val="000000"/>
+          </a:solidFill>
+        </p:spPr>
+        <p:txBody>
+          <a:bodyPr wrap="none" lIns="300000" rIns="300000">
+            <a:noAutofit/>
+          </a:bodyPr>
+          <a:lstStyle/>
+          <a:p>
+            <a:r>
+              <a:rPr sz="1400">
+                <a:solidFill>
+                  <a:srgbClr val="CCCCCC"/>
+                </a:solidFill>
+                <a:latin typeface="Consolas"/>
+              </a:rPr>
+              <a:t># PART 4: feedback to the operator (speed, RTF, lateral acceleration, applied inputs)</a:t>
+            </a:r>
+          </a:p>
+          <a:p>
+            <a:r>
+              <a:rPr sz="1400">
+                <a:solidFill>
+                  <a:srgbClr val="CCCCCC"/>
+                </a:solidFill>
+                <a:latin typeface="Consolas"/>
+              </a:rPr>
+              <a:t>if SEND_FEEDBACK and device is not None and step_number % render_steps == 0:</a:t>
+            </a:r>
+          </a:p>
+          <a:p>
+            <a:r>
+              <a:rPr sz="1400">
+                <a:solidFill>
+                  <a:srgbClr val="CCCCCC"/>
+                </a:solidFill>
+                <a:latin typeface="Consolas"/>
+              </a:rPr>
+              <a:t>    acc = vehicle.GetPointAcceleration(chrono.ChVector3d(0, 0, 0))</a:t>
+            </a:r>
+          </a:p>
+          <a:p>
+            <a:r>
+              <a:rPr sz="1400">
+                <a:solidFill>
+                  <a:srgbClr val="CCCCCC"/>
+                </a:solidFill>
+                <a:latin typeface="Consolas"/>
+              </a:rPr>
+              <a:t>    device.send_feedback(f"{sim_time:.3f},{vehicle.GetSpeed():.3f},{vehicle.GetRTF():.3f},{acc.y:.3f},"</a:t>
+            </a:r>
+          </a:p>
+          <a:p>
+            <a:r>
+              <a:rPr sz="1400">
+                <a:solidFill>
+                  <a:srgbClr val="CCCCCC"/>
+                </a:solidFill>
+                <a:latin typeface="Consolas"/>
+              </a:rPr>
+              <a:t>                         f"{driver_inputs.m_steering:.3f},{driver_inputs.m_throttle:.3f},{driver_inputs.m_braking:.3f}")</a:t>
+            </a:r>
+          </a:p>
+          <a:p>
+            <a:r>
+              <a:rPr sz="1400">
+                <a:solidFill>
+                  <a:srgbClr val="CCCCCC"/>
+                </a:solidFill>
+                <a:latin typeface="Consolas"/>
+              </a:rPr>
+              <a:t> </a:t>
             </a:r>
           </a:p>
         </p:txBody>
@@ -11278,6 +11429,43 @@
         </p:nvSpPr>
         <p:spPr>
           <a:xfrm>
+            <a:off x="400000" y="2633360"/>
+            <a:ext cx="11392000" cy="3824640"/>
+          </a:xfrm>
+          <a:prstGeom prst="rect">
+            <a:avLst/>
+          </a:prstGeom>
+          <a:noFill/>
+        </p:spPr>
+        <p:txBody>
+          <a:bodyPr wrap="square">
+            <a:spAutoFit/>
+          </a:bodyPr>
+          <a:lstStyle/>
+          <a:p>
+            <a:pPr/>
+            <a:r>
+              <a:rPr sz="1800"/>
+              <a:t>Speed, RTF and lateral acceleration go back to whoever sent us inputs (UdpInput remembers the address)</a:t>
+            </a:r>
+          </a:p>
+          <a:p>
+            <a:pPr/>
+            <a:r>
+              <a:rPr sz="1800"/>
+              <a:t>Send at render rate (50 Hz), not at every physics step - the human cannot use 333 Hz</a:t>
+            </a:r>
+          </a:p>
+        </p:txBody>
+      </p:sp>
+      <p:sp>
+        <p:nvSpPr>
+          <p:cNvPr id="5" name="TextBox 4"/>
+          <p:cNvSpPr txBox="1"/>
+          <p:nvPr/>
+        </p:nvSpPr>
+        <p:spPr>
+          <a:xfrm>
             <a:off x="310974" y="6645811"/>
             <a:ext cx="11644805" cy="188527"/>
           </a:xfrm>
@@ -11301,7 +11489,7 @@
       </p:sp>
       <p:sp>
         <p:nvSpPr>
-          <p:cNvPr id="5" name="TextBox 4"/>
+          <p:cNvPr id="6" name="TextBox 5"/>
           <p:cNvSpPr txBox="1"/>
           <p:nvPr/>
         </p:nvSpPr>
@@ -11324,108 +11512,6 @@
             <a:r>
               <a:rPr sz="1000"/>
               <a:t>37</a:t>
-            </a:r>
-          </a:p>
-        </p:txBody>
-      </p:sp>
-      <p:sp>
-        <p:nvSpPr>
-          <p:cNvPr id="6" name="TextBox 5"/>
-          <p:cNvSpPr txBox="1"/>
-          <p:nvPr/>
-        </p:nvSpPr>
-        <p:spPr>
-          <a:xfrm>
-            <a:off x="0" y="1000000"/>
-            <a:ext cx="12192000" cy="1696720"/>
-          </a:xfrm>
-          <a:prstGeom prst="rect">
-            <a:avLst/>
-          </a:prstGeom>
-          <a:solidFill>
-            <a:srgbClr val="000000"/>
-          </a:solidFill>
-        </p:spPr>
-        <p:txBody>
-          <a:bodyPr wrap="none" lIns="300000" rIns="300000">
-            <a:noAutofit/>
-          </a:bodyPr>
-          <a:lstStyle/>
-          <a:p>
-            <a:r>
-              <a:rPr sz="1400">
-                <a:solidFill>
-                  <a:srgbClr val="CCCCCC"/>
-                </a:solidFill>
-                <a:latin typeface="Consolas"/>
-              </a:rPr>
-              <a:t># --- PART 4: receive telemetry ------------------------------------------</a:t>
-            </a:r>
-          </a:p>
-          <a:p>
-            <a:r>
-              <a:rPr sz="1400">
-                <a:solidFill>
-                  <a:srgbClr val="CCCCCC"/>
-                </a:solidFill>
-                <a:latin typeface="Consolas"/>
-              </a:rPr>
-              <a:t>while True:</a:t>
-            </a:r>
-          </a:p>
-          <a:p>
-            <a:r>
-              <a:rPr sz="1400">
-                <a:solidFill>
-                  <a:srgbClr val="CCCCCC"/>
-                </a:solidFill>
-                <a:latin typeface="Consolas"/>
-              </a:rPr>
-              <a:t>    try:</a:t>
-            </a:r>
-          </a:p>
-          <a:p>
-            <a:r>
-              <a:rPr sz="1400">
-                <a:solidFill>
-                  <a:srgbClr val="CCCCCC"/>
-                </a:solidFill>
-                <a:latin typeface="Consolas"/>
-              </a:rPr>
-              <a:t>        data, _ = sock.recvfrom(256)</a:t>
-            </a:r>
-          </a:p>
-          <a:p>
-            <a:r>
-              <a:rPr sz="1400">
-                <a:solidFill>
-                  <a:srgbClr val="CCCCCC"/>
-                </a:solidFill>
-                <a:latin typeface="Consolas"/>
-              </a:rPr>
-              <a:t>        telemetry = tuple(float(x) for x in data.decode().split(","))</a:t>
-            </a:r>
-          </a:p>
-          <a:p>
-            <a:r>
-              <a:rPr sz="1400">
-                <a:solidFill>
-                  <a:srgbClr val="CCCCCC"/>
-                </a:solidFill>
-                <a:latin typeface="Consolas"/>
-              </a:rPr>
-              <a:t>        # (sim time, speed, RTF, lateral acc, applied steering, throttle, braking)</a:t>
-            </a:r>
-          </a:p>
-          <a:p>
-            <a:r>
-              <a:rPr sz="1400">
-                <a:solidFill>
-                  <a:srgbClr val="CCCCCC"/>
-                </a:solidFill>
-                <a:latin typeface="Consolas"/>
-              </a:rPr>
-              <a:t>    except (BlockingIOError, ValueError):</a:t>
             </a:r>
           </a:p>
         </p:txBody>
@@ -11469,45 +11555,7 @@
           <a:lstStyle/>
           <a:p>
             <a:r>
-              <a:rPr sz="2600"/>
-              <a:t>Before running the code, please</a:t>
-            </a:r>
-          </a:p>
-        </p:txBody>
-      </p:sp>
-      <p:sp>
-        <p:nvSpPr>
-          <p:cNvPr id="3" name="Content Placeholder 2"/>
-          <p:cNvSpPr>
-            <a:spLocks noGrp="1"/>
-          </p:cNvSpPr>
-          <p:nvPr>
-            <p:ph idx="1"/>
-          </p:nvPr>
-        </p:nvSpPr>
-        <p:spPr/>
-        <p:txBody>
-          <a:bodyPr wrap="square"/>
-          <a:lstStyle/>
-          <a:p>
-            <a:pPr/>
-            <a:r>
-              <a:rPr sz="2000"/>
-              <a:t>Set SEND_FEEDBACK = True (Line 392)</a:t>
-            </a:r>
-          </a:p>
-          <a:p>
-            <a:pPr/>
-            <a:r>
-              <a:rPr sz="2000"/>
-              <a:t>Restart both scripts; the console now shows speed, sim time, RTF and lateral acceleration</a:t>
-            </a:r>
-          </a:p>
-          <a:p>
-            <a:pPr/>
-            <a:r>
-              <a:rPr sz="2000"/>
-              <a:t>With a wheel: this is where force feedback torque would be computed from the lateral acceleration</a:t>
+              <a:t>Step 2: Show it on the console - operator_console.py</a:t>
             </a:r>
           </a:p>
         </p:txBody>
@@ -11566,6 +11614,108 @@
             <a:r>
               <a:rPr sz="1000"/>
               <a:t>38</a:t>
+            </a:r>
+          </a:p>
+        </p:txBody>
+      </p:sp>
+      <p:sp>
+        <p:nvSpPr>
+          <p:cNvPr id="6" name="TextBox 5"/>
+          <p:cNvSpPr txBox="1"/>
+          <p:nvPr/>
+        </p:nvSpPr>
+        <p:spPr>
+          <a:xfrm>
+            <a:off x="0" y="1000000"/>
+            <a:ext cx="12192000" cy="1696720"/>
+          </a:xfrm>
+          <a:prstGeom prst="rect">
+            <a:avLst/>
+          </a:prstGeom>
+          <a:solidFill>
+            <a:srgbClr val="000000"/>
+          </a:solidFill>
+        </p:spPr>
+        <p:txBody>
+          <a:bodyPr wrap="none" lIns="300000" rIns="300000">
+            <a:noAutofit/>
+          </a:bodyPr>
+          <a:lstStyle/>
+          <a:p>
+            <a:r>
+              <a:rPr sz="1400">
+                <a:solidFill>
+                  <a:srgbClr val="CCCCCC"/>
+                </a:solidFill>
+                <a:latin typeface="Consolas"/>
+              </a:rPr>
+              <a:t># --- PART 4: receive telemetry ------------------------------------------</a:t>
+            </a:r>
+          </a:p>
+          <a:p>
+            <a:r>
+              <a:rPr sz="1400">
+                <a:solidFill>
+                  <a:srgbClr val="CCCCCC"/>
+                </a:solidFill>
+                <a:latin typeface="Consolas"/>
+              </a:rPr>
+              <a:t>while True:</a:t>
+            </a:r>
+          </a:p>
+          <a:p>
+            <a:r>
+              <a:rPr sz="1400">
+                <a:solidFill>
+                  <a:srgbClr val="CCCCCC"/>
+                </a:solidFill>
+                <a:latin typeface="Consolas"/>
+              </a:rPr>
+              <a:t>    try:</a:t>
+            </a:r>
+          </a:p>
+          <a:p>
+            <a:r>
+              <a:rPr sz="1400">
+                <a:solidFill>
+                  <a:srgbClr val="CCCCCC"/>
+                </a:solidFill>
+                <a:latin typeface="Consolas"/>
+              </a:rPr>
+              <a:t>        data, _ = sock.recvfrom(256)</a:t>
+            </a:r>
+          </a:p>
+          <a:p>
+            <a:r>
+              <a:rPr sz="1400">
+                <a:solidFill>
+                  <a:srgbClr val="CCCCCC"/>
+                </a:solidFill>
+                <a:latin typeface="Consolas"/>
+              </a:rPr>
+              <a:t>        telemetry = tuple(float(x) for x in data.decode().split(","))</a:t>
+            </a:r>
+          </a:p>
+          <a:p>
+            <a:r>
+              <a:rPr sz="1400">
+                <a:solidFill>
+                  <a:srgbClr val="CCCCCC"/>
+                </a:solidFill>
+                <a:latin typeface="Consolas"/>
+              </a:rPr>
+              <a:t>        # (sim time, speed, RTF, lateral acc, applied steering, throttle, braking)</a:t>
+            </a:r>
+          </a:p>
+          <a:p>
+            <a:r>
+              <a:rPr sz="1400">
+                <a:solidFill>
+                  <a:srgbClr val="CCCCCC"/>
+                </a:solidFill>
+                <a:latin typeface="Consolas"/>
+              </a:rPr>
+              <a:t>    except (BlockingIOError, ValueError):</a:t>
             </a:r>
           </a:p>
         </p:txBody>
@@ -11610,7 +11760,7 @@
           <a:p>
             <a:r>
               <a:rPr sz="2600"/>
-              <a:t>Show Time</a:t>
+              <a:t>Before running the code, please</a:t>
             </a:r>
           </a:p>
         </p:txBody>
@@ -11629,7 +11779,27 @@
         <p:txBody>
           <a:bodyPr wrap="square"/>
           <a:lstStyle/>
-          <a:p/>
+          <a:p>
+            <a:pPr/>
+            <a:r>
+              <a:rPr sz="2000"/>
+              <a:t>Set SEND_FEEDBACK = True (Line 392)</a:t>
+            </a:r>
+          </a:p>
+          <a:p>
+            <a:pPr/>
+            <a:r>
+              <a:rPr sz="2000"/>
+              <a:t>Restart both scripts; the console now shows speed, sim time, RTF and lateral acceleration</a:t>
+            </a:r>
+          </a:p>
+          <a:p>
+            <a:pPr/>
+            <a:r>
+              <a:rPr sz="2000"/>
+              <a:t>With a wheel: this is where force feedback torque would be computed from the lateral acceleration</a:t>
+            </a:r>
+          </a:p>
         </p:txBody>
       </p:sp>
       <p:sp>
@@ -11832,30 +12002,36 @@
             <p:ph type="title"/>
           </p:nvPr>
         </p:nvSpPr>
+        <p:spPr>
+          <a:xfrm>
+            <a:off x="235228" y="150000"/>
+            <a:ext cx="9875520" cy="800000"/>
+          </a:xfrm>
+        </p:spPr>
+        <p:txBody>
+          <a:bodyPr wrap="square"/>
+          <a:lstStyle/>
+          <a:p>
+            <a:r>
+              <a:rPr sz="2600"/>
+              <a:t>Show Time</a:t>
+            </a:r>
+          </a:p>
+        </p:txBody>
+      </p:sp>
+      <p:sp>
+        <p:nvSpPr>
+          <p:cNvPr id="3" name="Content Placeholder 2"/>
+          <p:cNvSpPr>
+            <a:spLocks noGrp="1"/>
+          </p:cNvSpPr>
+          <p:nvPr>
+            <p:ph idx="1"/>
+          </p:nvPr>
+        </p:nvSpPr>
         <p:spPr/>
         <p:txBody>
-          <a:bodyPr/>
-          <a:lstStyle/>
-          <a:p>
-            <a:r>
-              <a:t>Part 5: Choose your car, customize the overlay</a:t>
-            </a:r>
-          </a:p>
-        </p:txBody>
-      </p:sp>
-      <p:sp>
-        <p:nvSpPr>
-          <p:cNvPr id="3" name="Text Placeholder 2"/>
-          <p:cNvSpPr>
-            <a:spLocks noGrp="1"/>
-          </p:cNvSpPr>
-          <p:nvPr>
-            <p:ph type="body" idx="1"/>
-          </p:nvPr>
-        </p:nvSpPr>
-        <p:spPr/>
-        <p:txBody>
-          <a:bodyPr/>
+          <a:bodyPr wrap="square"/>
           <a:lstStyle/>
           <a:p/>
         </p:txBody>
@@ -11951,99 +12127,27 @@
           <a:bodyPr/>
           <a:lstStyle/>
           <a:p>
-            <a:pPr/>
-            <a:r>
-              <a:rPr sz="3302"/>
-              <a:t>One interface, many vehicles - and a HUD you don't have to build</a:t>
-            </a:r>
-          </a:p>
-        </p:txBody>
-      </p:sp>
-      <p:sp>
-        <p:nvSpPr>
-          <p:cNvPr id="3" name="Content Placeholder 2"/>
-          <p:cNvSpPr>
-            <a:spLocks noGrp="1"/>
-          </p:cNvSpPr>
-          <p:nvPr>
-            <p:ph idx="1"/>
+            <a:r>
+              <a:t>Part 5: Choose your car, customize the overlay</a:t>
+            </a:r>
+          </a:p>
+        </p:txBody>
+      </p:sp>
+      <p:sp>
+        <p:nvSpPr>
+          <p:cNvPr id="3" name="Text Placeholder 2"/>
+          <p:cNvSpPr>
+            <a:spLocks noGrp="1"/>
+          </p:cNvSpPr>
+          <p:nvPr>
+            <p:ph type="body" idx="1"/>
           </p:nvPr>
         </p:nvSpPr>
         <p:spPr/>
         <p:txBody>
-          <a:bodyPr wrap="square"/>
-          <a:lstStyle/>
-          <a:p>
-            <a:pPr/>
-            <a:r>
-              <a:rPr sz="2000"/>
-              <a:t>Every full-vehicle model in Chrono::Vehicle (HMMWV_Full, Sedan, CityBus, Gator, ...) shares the same interface</a:t>
-            </a:r>
-          </a:p>
-          <a:p>
-            <a:pPr/>
-            <a:r>
-              <a:rPr sz="1800">
-                <a:latin typeface="Consolas"/>
-              </a:rPr>
-              <a:t>GetVehicle()</a:t>
-            </a:r>
-            <a:r>
-              <a:rPr sz="2000"/>
-              <a:t> / </a:t>
-            </a:r>
-            <a:r>
-              <a:rPr sz="1800">
-                <a:latin typeface="Consolas"/>
-              </a:rPr>
-              <a:t>GetSystem()</a:t>
-            </a:r>
-            <a:r>
-              <a:rPr sz="2000"/>
-              <a:t> / </a:t>
-            </a:r>
-            <a:r>
-              <a:rPr sz="1800">
-                <a:latin typeface="Consolas"/>
-              </a:rPr>
-              <a:t>Synchronize()</a:t>
-            </a:r>
-            <a:r>
-              <a:rPr sz="2000"/>
-              <a:t> / </a:t>
-            </a:r>
-            <a:r>
-              <a:rPr sz="1800">
-                <a:latin typeface="Consolas"/>
-              </a:rPr>
-              <a:t>Advance()</a:t>
-            </a:r>
-            <a:r>
-              <a:rPr sz="2000"/>
-              <a:t> - the same four calls no matter which model you picked</a:t>
-            </a:r>
-          </a:p>
-          <a:p>
-            <a:pPr/>
-            <a:r>
-              <a:rPr sz="2000"/>
-              <a:t>VEHICLE picks the model; build_vehicle() is the only place that knows the differences (init height, extra setup calls)</a:t>
-            </a:r>
-          </a:p>
-          <a:p>
-            <a:pPr/>
-            <a:r>
-              <a:rPr sz="2000"/>
-              <a:t>The Irrlicht window already ships with an on-screen HUD, plus Chrono's own tabbed info panel and a profiler</a:t>
-            </a:r>
-          </a:p>
-          <a:p>
-            <a:pPr/>
-            <a:r>
-              <a:rPr sz="2000"/>
-              <a:t>None of it is hand-drawn - add or remove pieces with flags on vis, no custom overlay needed</a:t>
-            </a:r>
-          </a:p>
+          <a:bodyPr/>
+          <a:lstStyle/>
+          <a:p/>
         </p:txBody>
       </p:sp>
       <p:sp>
@@ -12137,132 +12241,97 @@
           <a:bodyPr/>
           <a:lstStyle/>
           <a:p>
-            <a:r>
-              <a:t>Choose your car (Lines 256 to 264)</a:t>
-            </a:r>
-          </a:p>
-        </p:txBody>
-      </p:sp>
-      <p:sp>
-        <p:nvSpPr>
-          <p:cNvPr id="3" name="TextBox 2"/>
-          <p:cNvSpPr txBox="1"/>
-          <p:nvPr/>
-        </p:nvSpPr>
-        <p:spPr>
-          <a:xfrm>
-            <a:off x="0" y="1050000"/>
-            <a:ext cx="12192000" cy="2365000"/>
-          </a:xfrm>
-          <a:prstGeom prst="rect">
-            <a:avLst/>
-          </a:prstGeom>
-          <a:solidFill>
-            <a:srgbClr val="000000"/>
-          </a:solidFill>
-        </p:spPr>
-        <p:txBody>
-          <a:bodyPr wrap="none" lIns="300000" rIns="300000">
-            <a:noAutofit/>
-          </a:bodyPr>
-          <a:lstStyle/>
-          <a:p>
-            <a:r>
-              <a:rPr sz="1000">
-                <a:solidFill>
-                  <a:srgbClr val="CCCCCC"/>
-                </a:solidFill>
-                <a:latin typeface="Consolas"/>
-              </a:rPr>
-              <a:t>def main():</a:t>
-            </a:r>
-          </a:p>
-          <a:p>
-            <a:r>
-              <a:rPr sz="1000">
-                <a:solidFill>
-                  <a:srgbClr val="CCCCCC"/>
-                </a:solidFill>
-                <a:latin typeface="Consolas"/>
-              </a:rPr>
-              <a:t>    # -----------------------------------------------------------------------</a:t>
-            </a:r>
-          </a:p>
-          <a:p>
-            <a:r>
-              <a:rPr sz="1000">
-                <a:solidFill>
-                  <a:srgbClr val="CCCCCC"/>
-                </a:solidFill>
-                <a:latin typeface="Consolas"/>
-              </a:rPr>
-              <a:t>    # Create the vehicle (PART 5) and initialize</a:t>
-            </a:r>
-          </a:p>
-          <a:p>
-            <a:r>
-              <a:rPr sz="1000">
-                <a:solidFill>
-                  <a:srgbClr val="CCCCCC"/>
-                </a:solidFill>
-                <a:latin typeface="Consolas"/>
-              </a:rPr>
-              <a:t>    # -----------------------------------------------------------------------</a:t>
-            </a:r>
-          </a:p>
-          <a:p>
-            <a:r>
-              <a:rPr sz="1000">
-                <a:solidFill>
-                  <a:srgbClr val="CCCCCC"/>
-                </a:solidFill>
-                <a:latin typeface="Consolas"/>
-              </a:rPr>
-              <a:t>    vehicle_model, chase_dist = build_vehicle(VEHICLE)</a:t>
-            </a:r>
-          </a:p>
-          <a:p>
-            <a:r>
-              <a:rPr sz="1000">
-                <a:solidFill>
-                  <a:srgbClr val="CCCCCC"/>
-                </a:solidFill>
-                <a:latin typeface="Consolas"/>
-              </a:rPr>
-              <a:t> </a:t>
-            </a:r>
-          </a:p>
-          <a:p>
-            <a:r>
-              <a:rPr sz="1000">
-                <a:solidFill>
-                  <a:srgbClr val="CCCCCC"/>
-                </a:solidFill>
-                <a:latin typeface="Consolas"/>
-              </a:rPr>
-              <a:t>    vehicle = vehicle_model.GetVehicle()</a:t>
-            </a:r>
-          </a:p>
-          <a:p>
-            <a:r>
-              <a:rPr sz="1000">
-                <a:solidFill>
-                  <a:srgbClr val="CCCCCC"/>
-                </a:solidFill>
-                <a:latin typeface="Consolas"/>
-              </a:rPr>
-              <a:t>    system = vehicle_model.GetSystem()</a:t>
-            </a:r>
-          </a:p>
-          <a:p>
-            <a:r>
-              <a:rPr sz="1000">
-                <a:solidFill>
-                  <a:srgbClr val="CCCCCC"/>
-                </a:solidFill>
-                <a:latin typeface="Consolas"/>
-              </a:rPr>
-              <a:t>    system.SetCollisionSystemType(chrono.ChCollisionSystem.Type_BULLET)</a:t>
+            <a:pPr/>
+            <a:r>
+              <a:rPr sz="3302"/>
+              <a:t>One interface, many vehicles - and a HUD you don't have to build</a:t>
+            </a:r>
+          </a:p>
+        </p:txBody>
+      </p:sp>
+      <p:sp>
+        <p:nvSpPr>
+          <p:cNvPr id="3" name="Content Placeholder 2"/>
+          <p:cNvSpPr>
+            <a:spLocks noGrp="1"/>
+          </p:cNvSpPr>
+          <p:nvPr>
+            <p:ph idx="1"/>
+          </p:nvPr>
+        </p:nvSpPr>
+        <p:spPr/>
+        <p:txBody>
+          <a:bodyPr wrap="square"/>
+          <a:lstStyle/>
+          <a:p>
+            <a:pPr/>
+            <a:r>
+              <a:rPr sz="2000"/>
+              <a:t>Every full-vehicle model in Chrono::Vehicle (HMMWV_Full, Sedan, CityBus, Gator, ...) shares the same interface</a:t>
+            </a:r>
+          </a:p>
+          <a:p>
+            <a:pPr/>
+            <a:r>
+              <a:rPr sz="1800">
+                <a:latin typeface="Consolas"/>
+              </a:rPr>
+              <a:t>GetVehicle()</a:t>
+            </a:r>
+            <a:r>
+              <a:rPr sz="2000"/>
+              <a:t> / </a:t>
+            </a:r>
+            <a:r>
+              <a:rPr sz="1800">
+                <a:latin typeface="Consolas"/>
+              </a:rPr>
+              <a:t>GetSystem()</a:t>
+            </a:r>
+            <a:r>
+              <a:rPr sz="2000"/>
+              <a:t> / </a:t>
+            </a:r>
+            <a:r>
+              <a:rPr sz="1800">
+                <a:latin typeface="Consolas"/>
+              </a:rPr>
+              <a:t>Synchronize()</a:t>
+            </a:r>
+            <a:r>
+              <a:rPr sz="2000"/>
+              <a:t> / </a:t>
+            </a:r>
+            <a:r>
+              <a:rPr sz="1800">
+                <a:latin typeface="Consolas"/>
+              </a:rPr>
+              <a:t>Advance()</a:t>
+            </a:r>
+            <a:r>
+              <a:rPr sz="2000"/>
+              <a:t> - the same four calls no matter which model you picked</a:t>
+            </a:r>
+          </a:p>
+          <a:p>
+            <a:pPr/>
+            <a:r>
+              <a:rPr sz="2000"/>
+              <a:t>VEHICLE picks the model; build_vehicle() is the only place that knows the differences (init height, extra setup calls)</a:t>
+            </a:r>
+          </a:p>
+          <a:p>
+            <a:pPr/>
+            <a:r>
+              <a:rPr sz="2000"/>
+              <a:t>The Irrlicht window already ships with an on-screen HUD, plus Chrono's own tabbed info panel and a profiler</a:t>
+            </a:r>
+          </a:p>
+          <a:p>
+            <a:pPr/>
+            <a:r>
+              <a:rPr sz="2000"/>
+              <a:t>None of it is hand-drawn - add or remove pieces with flags on vis, no custom overlay needed</a:t>
             </a:r>
           </a:p>
         </p:txBody>
@@ -12275,33 +12344,6 @@
         </p:nvSpPr>
         <p:spPr>
           <a:xfrm>
-            <a:off x="400000" y="3515000"/>
-            <a:ext cx="11392000" cy="400000"/>
-          </a:xfrm>
-          <a:prstGeom prst="rect">
-            <a:avLst/>
-          </a:prstGeom>
-          <a:noFill/>
-        </p:spPr>
-        <p:txBody>
-          <a:bodyPr/>
-          <a:lstStyle/>
-          <a:p>
-            <a:r>
-              <a:rPr sz="1800"/>
-              <a:t>VEHICLE lives in CONFIGURATION - "hmmwv" | "sedan" | "citybus" | "gator"; everything below this line is unchanged</a:t>
-            </a:r>
-          </a:p>
-        </p:txBody>
-      </p:sp>
-      <p:sp>
-        <p:nvSpPr>
-          <p:cNvPr id="5" name="TextBox 4"/>
-          <p:cNvSpPr txBox="1"/>
-          <p:nvPr/>
-        </p:nvSpPr>
-        <p:spPr>
-          <a:xfrm>
             <a:off x="310974" y="6645811"/>
             <a:ext cx="11644805" cy="188527"/>
           </a:xfrm>
@@ -12325,7 +12367,7 @@
       </p:sp>
       <p:sp>
         <p:nvSpPr>
-          <p:cNvPr id="6" name="TextBox 5"/>
+          <p:cNvPr id="5" name="TextBox 4"/>
           <p:cNvSpPr txBox="1"/>
           <p:nvPr/>
         </p:nvSpPr>
@@ -12386,124 +12428,33 @@
           <a:lstStyle/>
           <a:p>
             <a:r>
-              <a:t>Add or remove overlay pieces (Lines 347 to 354)</a:t>
-            </a:r>
-          </a:p>
-        </p:txBody>
-      </p:sp>
-      <p:sp>
-        <p:nvSpPr>
-          <p:cNvPr id="3" name="TextBox 2"/>
-          <p:cNvSpPr txBox="1"/>
+              <a:t>What you'll actually see</a:t>
+            </a:r>
+          </a:p>
+        </p:txBody>
+      </p:sp>
+      <p:pic>
+        <p:nvPicPr>
+          <p:cNvPr id="3" name="Picture 1"/>
+          <p:cNvPicPr/>
           <p:nvPr/>
-        </p:nvSpPr>
-        <p:spPr>
-          <a:xfrm>
-            <a:off x="0" y="1050000"/>
-            <a:ext cx="12192000" cy="2130000"/>
-          </a:xfrm>
-          <a:prstGeom prst="rect">
-            <a:avLst/>
-          </a:prstGeom>
-          <a:solidFill>
-            <a:srgbClr val="000000"/>
-          </a:solidFill>
-        </p:spPr>
-        <p:txBody>
-          <a:bodyPr wrap="none" lIns="300000" rIns="300000">
-            <a:noAutofit/>
-          </a:bodyPr>
-          <a:lstStyle/>
-          <a:p>
-            <a:r>
-              <a:rPr sz="1000">
-                <a:solidFill>
-                  <a:srgbClr val="CCCCCC"/>
-                </a:solidFill>
-                <a:latin typeface="Consolas"/>
-              </a:rPr>
-              <a:t># PART 5: the built-in overlay - nothing here is hand-drawn, every piece</a:t>
-            </a:r>
-          </a:p>
-          <a:p>
-            <a:r>
-              <a:rPr sz="1000">
-                <a:solidFill>
-                  <a:srgbClr val="CCCCCC"/>
-                </a:solidFill>
-                <a:latin typeface="Consolas"/>
-              </a:rPr>
-              <a:t># is a flag or a method on `vis` itself</a:t>
-            </a:r>
-          </a:p>
-          <a:p>
-            <a:r>
-              <a:rPr sz="1000">
-                <a:solidFill>
-                  <a:srgbClr val="CCCCCC"/>
-                </a:solidFill>
-                <a:latin typeface="Consolas"/>
-              </a:rPr>
-              <a:t>vis.EnableStats(SHOW_VEHICLE_HUD)        # speed/steering/throttle/brake panel</a:t>
-            </a:r>
-          </a:p>
-          <a:p>
-            <a:r>
-              <a:rPr sz="1000">
-                <a:solidFill>
-                  <a:srgbClr val="CCCCCC"/>
-                </a:solidFill>
-                <a:latin typeface="Consolas"/>
-              </a:rPr>
-              <a:t>vis.SetHUDLocation(*HUD_CORNER)          # where that panel sits</a:t>
-            </a:r>
-          </a:p>
-          <a:p>
-            <a:r>
-              <a:rPr sz="1000">
-                <a:solidFill>
-                  <a:srgbClr val="CCCCCC"/>
-                </a:solidFill>
-                <a:latin typeface="Consolas"/>
-              </a:rPr>
-              <a:t>vis.ShowInfoPanel(SHOW_SIM_INFO_PANEL)   # Chrono's own tabbed info panel</a:t>
-            </a:r>
-          </a:p>
-          <a:p>
-            <a:r>
-              <a:rPr sz="1000">
-                <a:solidFill>
-                  <a:srgbClr val="CCCCCC"/>
-                </a:solidFill>
-                <a:latin typeface="Consolas"/>
-              </a:rPr>
-              <a:t>                                          # (bodies, contacts, timers); also</a:t>
-            </a:r>
-          </a:p>
-          <a:p>
-            <a:r>
-              <a:rPr sz="1000">
-                <a:solidFill>
-                  <a:srgbClr val="CCCCCC"/>
-                </a:solidFill>
-                <a:latin typeface="Consolas"/>
-              </a:rPr>
-              <a:t>                                          # toggles live with the 'i' key</a:t>
-            </a:r>
-          </a:p>
-          <a:p>
-            <a:r>
-              <a:rPr sz="1000">
-                <a:solidFill>
-                  <a:srgbClr val="CCCCCC"/>
-                </a:solidFill>
-                <a:latin typeface="Consolas"/>
-              </a:rPr>
-              <a:t>vis.ShowProfiler(SHOW_PROFILER)          # per-module timing bars</a:t>
-            </a:r>
-          </a:p>
-        </p:txBody>
-      </p:sp>
+        </p:nvPicPr>
+        <p:blipFill>
+          <a:blip r:embed="rId2"/>
+          <a:stretch>
+            <a:fillRect/>
+          </a:stretch>
+        </p:blipFill>
+        <p:spPr>
+          <a:xfrm>
+            <a:off x="2799541" y="1150000"/>
+            <a:ext cx="6592917" cy="5400000"/>
+          </a:xfrm>
+          <a:prstGeom prst="rect">
+            <a:avLst/>
+          </a:prstGeom>
+        </p:spPr>
+      </p:pic>
       <p:sp>
         <p:nvSpPr>
           <p:cNvPr id="4" name="TextBox 3"/>
@@ -12512,33 +12463,6 @@
         </p:nvSpPr>
         <p:spPr>
           <a:xfrm>
-            <a:off x="400000" y="3280000"/>
-            <a:ext cx="11392000" cy="400000"/>
-          </a:xfrm>
-          <a:prstGeom prst="rect">
-            <a:avLst/>
-          </a:prstGeom>
-          <a:noFill/>
-        </p:spPr>
-        <p:txBody>
-          <a:bodyPr/>
-          <a:lstStyle/>
-          <a:p>
-            <a:r>
-              <a:rPr sz="1800"/>
-              <a:t>SHOW_VEHICLE_HUD, HUD_CORNER, SHOW_SIM_INFO_PANEL, SHOW_PROFILER all live in CONFIGURATION, right next to VEHICLE</a:t>
-            </a:r>
-          </a:p>
-        </p:txBody>
-      </p:sp>
-      <p:sp>
-        <p:nvSpPr>
-          <p:cNvPr id="5" name="TextBox 4"/>
-          <p:cNvSpPr txBox="1"/>
-          <p:nvPr/>
-        </p:nvSpPr>
-        <p:spPr>
-          <a:xfrm>
             <a:off x="310974" y="6645811"/>
             <a:ext cx="11644805" cy="188527"/>
           </a:xfrm>
@@ -12562,7 +12486,7 @@
       </p:sp>
       <p:sp>
         <p:nvSpPr>
-          <p:cNvPr id="6" name="TextBox 5"/>
+          <p:cNvPr id="5" name="TextBox 4"/>
           <p:cNvSpPr txBox="1"/>
           <p:nvPr/>
         </p:nvSpPr>
@@ -12622,57 +12546,132 @@
           <a:bodyPr/>
           <a:lstStyle/>
           <a:p>
-            <a:pPr/>
-            <a:r>
-              <a:rPr sz="3302"/>
-              <a:t>Before running the code, please</a:t>
-            </a:r>
-          </a:p>
-        </p:txBody>
-      </p:sp>
-      <p:sp>
-        <p:nvSpPr>
-          <p:cNvPr id="3" name="Content Placeholder 2"/>
-          <p:cNvSpPr>
-            <a:spLocks noGrp="1"/>
-          </p:cNvSpPr>
-          <p:nvPr>
-            <p:ph idx="1"/>
-          </p:nvPr>
-        </p:nvSpPr>
-        <p:spPr/>
-        <p:txBody>
-          <a:bodyPr wrap="square"/>
-          <a:lstStyle/>
-          <a:p>
-            <a:pPr/>
-            <a:r>
-              <a:rPr sz="2000"/>
-              <a:t>Set VEHICLE = "citybus" (or "sedan", "gator") and re-run - same driver, same terrain, very different vehicle</a:t>
-            </a:r>
-          </a:p>
-          <a:p>
-            <a:pPr/>
-            <a:r>
-              <a:rPr sz="2000"/>
-              <a:t>Set SHOW_SIM_INFO_PANEL = True, then press the </a:t>
-            </a:r>
-            <a:r>
-              <a:rPr sz="1800">
-                <a:latin typeface="Consolas"/>
-              </a:rPr>
-              <a:t>i</a:t>
-            </a:r>
-            <a:r>
-              <a:rPr sz="2000"/>
-              <a:t> key while the sim is running - same panel, two ways to reach it</a:t>
-            </a:r>
-          </a:p>
-          <a:p>
-            <a:pPr/>
-            <a:r>
-              <a:rPr sz="2000"/>
-              <a:t>Try SHOW_VEHICLE_HUD = False - the 3D scene doesn't care, only the panel disappears</a:t>
+            <a:r>
+              <a:t>Choose your car (Lines 256 to 264)</a:t>
+            </a:r>
+          </a:p>
+        </p:txBody>
+      </p:sp>
+      <p:sp>
+        <p:nvSpPr>
+          <p:cNvPr id="3" name="TextBox 2"/>
+          <p:cNvSpPr txBox="1"/>
+          <p:nvPr/>
+        </p:nvSpPr>
+        <p:spPr>
+          <a:xfrm>
+            <a:off x="0" y="1050000"/>
+            <a:ext cx="12192000" cy="2365000"/>
+          </a:xfrm>
+          <a:prstGeom prst="rect">
+            <a:avLst/>
+          </a:prstGeom>
+          <a:solidFill>
+            <a:srgbClr val="000000"/>
+          </a:solidFill>
+        </p:spPr>
+        <p:txBody>
+          <a:bodyPr wrap="none" lIns="300000" rIns="300000">
+            <a:noAutofit/>
+          </a:bodyPr>
+          <a:lstStyle/>
+          <a:p>
+            <a:r>
+              <a:rPr sz="1000">
+                <a:solidFill>
+                  <a:srgbClr val="CCCCCC"/>
+                </a:solidFill>
+                <a:latin typeface="Consolas"/>
+              </a:rPr>
+              <a:t>def main():</a:t>
+            </a:r>
+          </a:p>
+          <a:p>
+            <a:r>
+              <a:rPr sz="1000">
+                <a:solidFill>
+                  <a:srgbClr val="CCCCCC"/>
+                </a:solidFill>
+                <a:latin typeface="Consolas"/>
+              </a:rPr>
+              <a:t>    # -----------------------------------------------------------------------</a:t>
+            </a:r>
+          </a:p>
+          <a:p>
+            <a:r>
+              <a:rPr sz="1000">
+                <a:solidFill>
+                  <a:srgbClr val="CCCCCC"/>
+                </a:solidFill>
+                <a:latin typeface="Consolas"/>
+              </a:rPr>
+              <a:t>    # Create the vehicle (PART 5) and initialize</a:t>
+            </a:r>
+          </a:p>
+          <a:p>
+            <a:r>
+              <a:rPr sz="1000">
+                <a:solidFill>
+                  <a:srgbClr val="CCCCCC"/>
+                </a:solidFill>
+                <a:latin typeface="Consolas"/>
+              </a:rPr>
+              <a:t>    # -----------------------------------------------------------------------</a:t>
+            </a:r>
+          </a:p>
+          <a:p>
+            <a:r>
+              <a:rPr sz="1000">
+                <a:solidFill>
+                  <a:srgbClr val="CCCCCC"/>
+                </a:solidFill>
+                <a:latin typeface="Consolas"/>
+              </a:rPr>
+              <a:t>    vehicle_model, chase_dist = build_vehicle(VEHICLE)</a:t>
+            </a:r>
+          </a:p>
+          <a:p>
+            <a:r>
+              <a:rPr sz="1000">
+                <a:solidFill>
+                  <a:srgbClr val="CCCCCC"/>
+                </a:solidFill>
+                <a:latin typeface="Consolas"/>
+              </a:rPr>
+              <a:t> </a:t>
+            </a:r>
+          </a:p>
+          <a:p>
+            <a:r>
+              <a:rPr sz="1000">
+                <a:solidFill>
+                  <a:srgbClr val="CCCCCC"/>
+                </a:solidFill>
+                <a:latin typeface="Consolas"/>
+              </a:rPr>
+              <a:t>    vehicle = vehicle_model.GetVehicle()</a:t>
+            </a:r>
+          </a:p>
+          <a:p>
+            <a:r>
+              <a:rPr sz="1000">
+                <a:solidFill>
+                  <a:srgbClr val="CCCCCC"/>
+                </a:solidFill>
+                <a:latin typeface="Consolas"/>
+              </a:rPr>
+              <a:t>    system = vehicle_model.GetSystem()</a:t>
+            </a:r>
+          </a:p>
+          <a:p>
+            <a:r>
+              <a:rPr sz="1000">
+                <a:solidFill>
+                  <a:srgbClr val="CCCCCC"/>
+                </a:solidFill>
+                <a:latin typeface="Consolas"/>
+              </a:rPr>
+              <a:t>    system.SetCollisionSystemType(chrono.ChCollisionSystem.Type_BULLET)</a:t>
             </a:r>
           </a:p>
         </p:txBody>
@@ -12685,6 +12684,33 @@
         </p:nvSpPr>
         <p:spPr>
           <a:xfrm>
+            <a:off x="400000" y="3515000"/>
+            <a:ext cx="11392000" cy="400000"/>
+          </a:xfrm>
+          <a:prstGeom prst="rect">
+            <a:avLst/>
+          </a:prstGeom>
+          <a:noFill/>
+        </p:spPr>
+        <p:txBody>
+          <a:bodyPr/>
+          <a:lstStyle/>
+          <a:p>
+            <a:r>
+              <a:rPr sz="1800"/>
+              <a:t>VEHICLE lives in CONFIGURATION - "hmmwv" | "sedan" | "citybus" | "gator"; everything below this line is unchanged</a:t>
+            </a:r>
+          </a:p>
+        </p:txBody>
+      </p:sp>
+      <p:sp>
+        <p:nvSpPr>
+          <p:cNvPr id="5" name="TextBox 4"/>
+          <p:cNvSpPr txBox="1"/>
+          <p:nvPr/>
+        </p:nvSpPr>
+        <p:spPr>
+          <a:xfrm>
             <a:off x="310974" y="6645811"/>
             <a:ext cx="11644805" cy="188527"/>
           </a:xfrm>
@@ -12708,7 +12734,7 @@
       </p:sp>
       <p:sp>
         <p:nvSpPr>
-          <p:cNvPr id="5" name="TextBox 4"/>
+          <p:cNvPr id="6" name="TextBox 5"/>
           <p:cNvSpPr txBox="1"/>
           <p:nvPr/>
         </p:nvSpPr>
@@ -12768,40 +12794,121 @@
           <a:bodyPr/>
           <a:lstStyle/>
           <a:p>
-            <a:pPr/>
-            <a:r>
-              <a:rPr sz="3302"/>
-              <a:t>Show Time</a:t>
-            </a:r>
-          </a:p>
-        </p:txBody>
-      </p:sp>
-      <p:sp>
-        <p:nvSpPr>
-          <p:cNvPr id="3" name="Content Placeholder 2"/>
-          <p:cNvSpPr>
-            <a:spLocks noGrp="1"/>
-          </p:cNvSpPr>
-          <p:nvPr>
-            <p:ph idx="1"/>
-          </p:nvPr>
-        </p:nvSpPr>
-        <p:spPr/>
-        <p:txBody>
-          <a:bodyPr wrap="square"/>
-          <a:lstStyle/>
-          <a:p>
-            <a:pPr/>
-            <a:r>
-              <a:rPr sz="2000"/>
-              <a:t>Everyone picks a different VEHICLE and compares how the same scripted course drives an HMMWV vs. a bus vs. a Gator</a:t>
-            </a:r>
-          </a:p>
-          <a:p>
-            <a:pPr/>
-            <a:r>
-              <a:rPr sz="2000"/>
-              <a:t>Toggle SHOW_VEHICLE_HUD / SHOW_SIM_INFO_PANEL live and watch the overlay change - nothing was re-rendered by hand</a:t>
+            <a:r>
+              <a:t>Add or remove overlay pieces (Lines 347 to 354)</a:t>
+            </a:r>
+          </a:p>
+        </p:txBody>
+      </p:sp>
+      <p:sp>
+        <p:nvSpPr>
+          <p:cNvPr id="3" name="TextBox 2"/>
+          <p:cNvSpPr txBox="1"/>
+          <p:nvPr/>
+        </p:nvSpPr>
+        <p:spPr>
+          <a:xfrm>
+            <a:off x="0" y="1050000"/>
+            <a:ext cx="12192000" cy="2130000"/>
+          </a:xfrm>
+          <a:prstGeom prst="rect">
+            <a:avLst/>
+          </a:prstGeom>
+          <a:solidFill>
+            <a:srgbClr val="000000"/>
+          </a:solidFill>
+        </p:spPr>
+        <p:txBody>
+          <a:bodyPr wrap="none" lIns="300000" rIns="300000">
+            <a:noAutofit/>
+          </a:bodyPr>
+          <a:lstStyle/>
+          <a:p>
+            <a:r>
+              <a:rPr sz="1000">
+                <a:solidFill>
+                  <a:srgbClr val="CCCCCC"/>
+                </a:solidFill>
+                <a:latin typeface="Consolas"/>
+              </a:rPr>
+              <a:t># PART 5: the built-in overlay - nothing here is hand-drawn, every piece</a:t>
+            </a:r>
+          </a:p>
+          <a:p>
+            <a:r>
+              <a:rPr sz="1000">
+                <a:solidFill>
+                  <a:srgbClr val="CCCCCC"/>
+                </a:solidFill>
+                <a:latin typeface="Consolas"/>
+              </a:rPr>
+              <a:t># is a flag or a method on `vis` itself</a:t>
+            </a:r>
+          </a:p>
+          <a:p>
+            <a:r>
+              <a:rPr sz="1000">
+                <a:solidFill>
+                  <a:srgbClr val="CCCCCC"/>
+                </a:solidFill>
+                <a:latin typeface="Consolas"/>
+              </a:rPr>
+              <a:t>vis.EnableStats(SHOW_VEHICLE_HUD)        # speed/steering/throttle/brake panel</a:t>
+            </a:r>
+          </a:p>
+          <a:p>
+            <a:r>
+              <a:rPr sz="1000">
+                <a:solidFill>
+                  <a:srgbClr val="CCCCCC"/>
+                </a:solidFill>
+                <a:latin typeface="Consolas"/>
+              </a:rPr>
+              <a:t>vis.SetHUDLocation(*HUD_CORNER)          # where that panel sits</a:t>
+            </a:r>
+          </a:p>
+          <a:p>
+            <a:r>
+              <a:rPr sz="1000">
+                <a:solidFill>
+                  <a:srgbClr val="CCCCCC"/>
+                </a:solidFill>
+                <a:latin typeface="Consolas"/>
+              </a:rPr>
+              <a:t>vis.ShowInfoPanel(SHOW_SIM_INFO_PANEL)   # Chrono's own tabbed info panel</a:t>
+            </a:r>
+          </a:p>
+          <a:p>
+            <a:r>
+              <a:rPr sz="1000">
+                <a:solidFill>
+                  <a:srgbClr val="CCCCCC"/>
+                </a:solidFill>
+                <a:latin typeface="Consolas"/>
+              </a:rPr>
+              <a:t>                                          # (bodies, contacts, timers); also</a:t>
+            </a:r>
+          </a:p>
+          <a:p>
+            <a:r>
+              <a:rPr sz="1000">
+                <a:solidFill>
+                  <a:srgbClr val="CCCCCC"/>
+                </a:solidFill>
+                <a:latin typeface="Consolas"/>
+              </a:rPr>
+              <a:t>                                          # toggles live with the 'i' key</a:t>
+            </a:r>
+          </a:p>
+          <a:p>
+            <a:r>
+              <a:rPr sz="1000">
+                <a:solidFill>
+                  <a:srgbClr val="CCCCCC"/>
+                </a:solidFill>
+                <a:latin typeface="Consolas"/>
+              </a:rPr>
+              <a:t>vis.ShowProfiler(SHOW_PROFILER)          # per-module timing bars</a:t>
             </a:r>
           </a:p>
         </p:txBody>
@@ -12814,6 +12921,33 @@
         </p:nvSpPr>
         <p:spPr>
           <a:xfrm>
+            <a:off x="400000" y="3280000"/>
+            <a:ext cx="11392000" cy="400000"/>
+          </a:xfrm>
+          <a:prstGeom prst="rect">
+            <a:avLst/>
+          </a:prstGeom>
+          <a:noFill/>
+        </p:spPr>
+        <p:txBody>
+          <a:bodyPr/>
+          <a:lstStyle/>
+          <a:p>
+            <a:r>
+              <a:rPr sz="1800"/>
+              <a:t>SHOW_VEHICLE_HUD, HUD_CORNER, SHOW_SIM_INFO_PANEL, SHOW_PROFILER all live in CONFIGURATION, right next to VEHICLE</a:t>
+            </a:r>
+          </a:p>
+        </p:txBody>
+      </p:sp>
+      <p:sp>
+        <p:nvSpPr>
+          <p:cNvPr id="5" name="TextBox 4"/>
+          <p:cNvSpPr txBox="1"/>
+          <p:nvPr/>
+        </p:nvSpPr>
+        <p:spPr>
+          <a:xfrm>
             <a:off x="310974" y="6645811"/>
             <a:ext cx="11644805" cy="188527"/>
           </a:xfrm>
@@ -12837,7 +12971,7 @@
       </p:sp>
       <p:sp>
         <p:nvSpPr>
-          <p:cNvPr id="5" name="TextBox 4"/>
+          <p:cNvPr id="6" name="TextBox 5"/>
           <p:cNvSpPr txBox="1"/>
           <p:nvPr/>
         </p:nvSpPr>
@@ -12864,30 +12998,6 @@
           </a:p>
         </p:txBody>
       </p:sp>
-      <p:pic>
-        <p:nvPicPr>
-          <p:cNvPr id="6" name="Picture 5" descr="overlay_hud.png"/>
-          <p:cNvPicPr>
-            <a:picLocks noChangeAspect="1"/>
-          </p:cNvPicPr>
-          <p:nvPr/>
-        </p:nvPicPr>
-        <p:blipFill>
-          <a:blip r:embed="rId3"/>
-          <a:stretch>
-            <a:fillRect/>
-          </a:stretch>
-        </p:blipFill>
-        <p:spPr>
-          <a:xfrm>
-            <a:off x="4196000" y="3450000"/>
-            <a:ext cx="3800000" cy="2571428"/>
-          </a:xfrm>
-          <a:prstGeom prst="rect">
-            <a:avLst/>
-          </a:prstGeom>
-        </p:spPr>
-      </p:pic>
     </p:spTree>
   </p:cSld>
   <p:clrMapOvr>
@@ -12916,98 +13026,62 @@
             <p:ph type="title"/>
           </p:nvPr>
         </p:nvSpPr>
-        <p:spPr>
-          <a:xfrm>
-            <a:off x="235228" y="150000"/>
-            <a:ext cx="9875520" cy="800000"/>
-          </a:xfrm>
-        </p:spPr>
+        <p:spPr/>
+        <p:txBody>
+          <a:bodyPr/>
+          <a:lstStyle/>
+          <a:p>
+            <a:pPr/>
+            <a:r>
+              <a:rPr sz="3302"/>
+              <a:t>Before running the code, please</a:t>
+            </a:r>
+          </a:p>
+        </p:txBody>
+      </p:sp>
+      <p:sp>
+        <p:nvSpPr>
+          <p:cNvPr id="3" name="Content Placeholder 2"/>
+          <p:cNvSpPr>
+            <a:spLocks noGrp="1"/>
+          </p:cNvSpPr>
+          <p:nvPr>
+            <p:ph idx="1"/>
+          </p:nvPr>
+        </p:nvSpPr>
+        <p:spPr/>
         <p:txBody>
           <a:bodyPr wrap="square"/>
           <a:lstStyle/>
           <a:p>
-            <a:r>
-              <a:rPr sz="2600"/>
-              <a:t>Where this goes next</a:t>
-            </a:r>
-          </a:p>
-        </p:txBody>
-      </p:sp>
-      <p:sp>
-        <p:nvSpPr>
-          <p:cNvPr id="3" name="Content Placeholder 2"/>
-          <p:cNvSpPr>
-            <a:spLocks noGrp="1"/>
-          </p:cNvSpPr>
-          <p:nvPr>
-            <p:ph idx="1"/>
-          </p:nvPr>
-        </p:nvSpPr>
-        <p:spPr/>
-        <p:txBody>
-          <a:bodyPr wrap="square"/>
-          <a:lstStyle/>
-          <a:p>
             <a:pPr/>
             <a:r>
               <a:rPr sz="2000"/>
-              <a:t>Chrono::HIL (github.com/zzhou292/chrono-HIL): the same three-float interface, scaled up</a:t>
-            </a:r>
-          </a:p>
-          <a:p>
-            <a:pPr lvl="1"/>
-            <a:r>
-              <a:rPr sz="1800"/>
-              <a:t>SDL steering wheels with force feedback, cumulative real-time timer, multi-vehicle traffic</a:t>
-            </a:r>
-          </a:p>
-          <a:p>
-            <a:pPr lvl="1"/>
-            <a:r>
-              <a:rPr sz="1800"/>
-              <a:t>ROS 2 and Unity bridges, teleoperation over the network, deformable (SCM) terrain</a:t>
+              <a:t>Set VEHICLE = "citybus" (or "sedan", "gator") and re-run - same driver, same terrain, very different vehicle</a:t>
             </a:r>
           </a:p>
           <a:p>
             <a:pPr/>
             <a:r>
               <a:rPr sz="2000"/>
-              <a:t>Chrono::Sensor: cameras/lidar rendered from the vehicle for the operator's screen</a:t>
+              <a:t>Set SHOW_SIM_INFO_PANEL = True, then press the </a:t>
+            </a:r>
+            <a:r>
+              <a:rPr sz="1800">
+                <a:latin typeface="Consolas"/>
+              </a:rPr>
+              <a:t>i</a:t>
+            </a:r>
+            <a:r>
+              <a:rPr sz="2000"/>
+              <a:t> key while the sim is running - same panel, two ways to reach it</a:t>
             </a:r>
           </a:p>
           <a:p>
             <a:pPr/>
             <a:r>
               <a:rPr sz="2000"/>
-              <a:t>Chrono::Synchrono: several humans in the same world, each on their own machine</a:t>
-            </a:r>
-          </a:p>
-          <a:p>
-            <a:pPr/>
-            <a:r>
-              <a:rPr sz="2000"/>
-              <a:t>Takeaways</a:t>
-            </a:r>
-          </a:p>
-          <a:p>
-            <a:pPr lvl="1"/>
-            <a:r>
-              <a:rPr sz="1800"/>
-              <a:t>Real time in Chrono is soft: spin once per step, and measure the drift</a:t>
-            </a:r>
-          </a:p>
-          <a:p>
-            <a:pPr lvl="1"/>
-            <a:r>
-              <a:rPr sz="1800"/>
-              <a:t>The human interface is three floats per step, sampled once and smoothed</a:t>
-            </a:r>
-          </a:p>
-          <a:p>
-            <a:pPr lvl="1"/>
-            <a:r>
-              <a:rPr sz="1800"/>
-              <a:t>Never let the input device block the physics loop</a:t>
+              <a:t>Try SHOW_VEHICLE_HUD = False - the 3D scene doesn't care, only the panel disappears</a:t>
             </a:r>
           </a:p>
         </p:txBody>
@@ -13103,27 +13177,42 @@
           <a:bodyPr/>
           <a:lstStyle/>
           <a:p>
-            <a:r>
-              <a:t>Any questions?</a:t>
-            </a:r>
-          </a:p>
-        </p:txBody>
-      </p:sp>
-      <p:sp>
-        <p:nvSpPr>
-          <p:cNvPr id="3" name="Text Placeholder 2"/>
-          <p:cNvSpPr>
-            <a:spLocks noGrp="1"/>
-          </p:cNvSpPr>
-          <p:nvPr>
-            <p:ph type="body" idx="1"/>
+            <a:pPr/>
+            <a:r>
+              <a:rPr sz="3302"/>
+              <a:t>Show Time</a:t>
+            </a:r>
+          </a:p>
+        </p:txBody>
+      </p:sp>
+      <p:sp>
+        <p:nvSpPr>
+          <p:cNvPr id="3" name="Content Placeholder 2"/>
+          <p:cNvSpPr>
+            <a:spLocks noGrp="1"/>
+          </p:cNvSpPr>
+          <p:nvPr>
+            <p:ph idx="1"/>
           </p:nvPr>
         </p:nvSpPr>
         <p:spPr/>
         <p:txBody>
-          <a:bodyPr/>
-          <a:lstStyle/>
-          <a:p/>
+          <a:bodyPr wrap="square"/>
+          <a:lstStyle/>
+          <a:p>
+            <a:pPr/>
+            <a:r>
+              <a:rPr sz="2000"/>
+              <a:t>Everyone picks a different VEHICLE and compares how the same scripted course drives an HMMWV vs. a bus vs. a Gator</a:t>
+            </a:r>
+          </a:p>
+          <a:p>
+            <a:pPr/>
+            <a:r>
+              <a:rPr sz="2000"/>
+              <a:t>Toggle SHOW_VEHICLE_HUD / SHOW_SIM_INFO_PANEL live and watch the overlay change - nothing was re-rendered by hand</a:t>
+            </a:r>
+          </a:p>
         </p:txBody>
       </p:sp>
       <p:sp>
@@ -13184,6 +13273,30 @@
           </a:p>
         </p:txBody>
       </p:sp>
+      <p:pic>
+        <p:nvPicPr>
+          <p:cNvPr id="6" name="Picture 5" descr="overlay_hud.png"/>
+          <p:cNvPicPr>
+            <a:picLocks noChangeAspect="1"/>
+          </p:cNvPicPr>
+          <p:nvPr/>
+        </p:nvPicPr>
+        <p:blipFill>
+          <a:blip r:embed="rId3"/>
+          <a:stretch>
+            <a:fillRect/>
+          </a:stretch>
+        </p:blipFill>
+        <p:spPr>
+          <a:xfrm>
+            <a:off x="4196000" y="3450000"/>
+            <a:ext cx="3800000" cy="2571428"/>
+          </a:xfrm>
+          <a:prstGeom prst="rect">
+            <a:avLst/>
+          </a:prstGeom>
+        </p:spPr>
+      </p:pic>
     </p:spTree>
   </p:cSld>
   <p:clrMapOvr>
@@ -13204,82 +13317,113 @@
       <p:grpSpPr/>
       <p:sp>
         <p:nvSpPr>
-          <p:cNvPr id="2" name="TextBox 1"/>
-          <p:cNvSpPr txBox="1"/>
-          <p:nvPr/>
-        </p:nvSpPr>
-        <p:spPr>
-          <a:xfrm>
-            <a:off x="914400" y="1371600"/>
-            <a:ext cx="10058400" cy="3657600"/>
-          </a:xfrm>
-          <a:prstGeom prst="rect">
-            <a:avLst/>
-          </a:prstGeom>
-          <a:noFill/>
-        </p:spPr>
-        <p:txBody>
-          <a:bodyPr wrap="square">
-            <a:spAutoFit/>
-          </a:bodyPr>
+          <p:cNvPr id="2" name="Title 1"/>
+          <p:cNvSpPr>
+            <a:spLocks noGrp="1"/>
+          </p:cNvSpPr>
+          <p:nvPr>
+            <p:ph type="title"/>
+          </p:nvPr>
+        </p:nvSpPr>
+        <p:spPr>
+          <a:xfrm>
+            <a:off x="235228" y="150000"/>
+            <a:ext cx="9875520" cy="800000"/>
+          </a:xfrm>
+        </p:spPr>
+        <p:txBody>
+          <a:bodyPr wrap="square"/>
+          <a:lstStyle/>
+          <a:p>
+            <a:r>
+              <a:rPr sz="2600"/>
+              <a:t>Where this goes next</a:t>
+            </a:r>
+          </a:p>
+        </p:txBody>
+      </p:sp>
+      <p:sp>
+        <p:nvSpPr>
+          <p:cNvPr id="3" name="Content Placeholder 2"/>
+          <p:cNvSpPr>
+            <a:spLocks noGrp="1"/>
+          </p:cNvSpPr>
+          <p:nvPr>
+            <p:ph idx="1"/>
+          </p:nvPr>
+        </p:nvSpPr>
+        <p:spPr/>
+        <p:txBody>
+          <a:bodyPr wrap="square"/>
           <a:lstStyle/>
           <a:p>
             <a:pPr/>
             <a:r>
               <a:rPr sz="2000"/>
-              <a:t>Thank you.</a:t>
+              <a:t>Chrono::HIL (github.com/zzhou292/chrono-HIL): the same three-float interface, scaled up</a:t>
+            </a:r>
+          </a:p>
+          <a:p>
+            <a:pPr lvl="1"/>
+            <a:r>
+              <a:rPr sz="1800"/>
+              <a:t>SDL steering wheels with force feedback, cumulative real-time timer, multi-vehicle traffic</a:t>
+            </a:r>
+          </a:p>
+          <a:p>
+            <a:pPr lvl="1"/>
+            <a:r>
+              <a:rPr sz="1800"/>
+              <a:t>ROS 2 and Unity bridges, teleoperation over the network, deformable (SCM) terrain</a:t>
             </a:r>
           </a:p>
           <a:p>
             <a:pPr/>
             <a:r>
               <a:rPr sz="2000"/>
-              <a:t>kasha2@wisc.edu</a:t>
+              <a:t>Chrono::Sensor: cameras/lidar rendered from the vehicle for the operator's screen</a:t>
             </a:r>
           </a:p>
           <a:p>
             <a:pPr/>
             <a:r>
               <a:rPr sz="2000"/>
-              <a:t>Simulation-Based Engineering Lab</a:t>
+              <a:t>Chrono::Synchrono: several humans in the same world, each on their own machine</a:t>
             </a:r>
           </a:p>
           <a:p>
             <a:pPr/>
             <a:r>
               <a:rPr sz="2000"/>
-              <a:t>University of Wisconsin - Madison</a:t>
-            </a:r>
-          </a:p>
-          <a:p>
-            <a:pPr/>
-          </a:p>
-          <a:p>
-            <a:pPr/>
-            <a:r>
-              <a:rPr sz="2000"/>
-              <a:t>Lab website: http://sbel.wisc.edu</a:t>
-            </a:r>
-          </a:p>
-          <a:p>
-            <a:pPr/>
-            <a:r>
-              <a:rPr sz="2000"/>
-              <a:t>Chrono website: http://www.projectchrono.org</a:t>
-            </a:r>
-          </a:p>
-          <a:p>
-            <a:pPr/>
-            <a:r>
-              <a:rPr sz="2000"/>
-              <a:t>Source code: https://github.com/projectchrono</a:t>
-            </a:r>
-          </a:p>
-        </p:txBody>
-      </p:sp>
-      <p:sp>
-        <p:nvSpPr>
-          <p:cNvPr id="3" name="TextBox 2"/>
+              <a:t>Takeaways</a:t>
+            </a:r>
+          </a:p>
+          <a:p>
+            <a:pPr lvl="1"/>
+            <a:r>
+              <a:rPr sz="1800"/>
+              <a:t>Real time in Chrono is soft: spin once per step, and measure the drift</a:t>
+            </a:r>
+          </a:p>
+          <a:p>
+            <a:pPr lvl="1"/>
+            <a:r>
+              <a:rPr sz="1800"/>
+              <a:t>The human interface is three floats per step, sampled once and smoothed</a:t>
+            </a:r>
+          </a:p>
+          <a:p>
+            <a:pPr lvl="1"/>
+            <a:r>
+              <a:rPr sz="1800"/>
+              <a:t>Never let the input device block the physics loop</a:t>
+            </a:r>
+          </a:p>
+        </p:txBody>
+      </p:sp>
+      <p:sp>
+        <p:nvSpPr>
+          <p:cNvPr id="4" name="TextBox 3"/>
           <p:cNvSpPr txBox="1"/>
           <p:nvPr/>
         </p:nvSpPr>
@@ -13308,14 +13452,99 @@
       </p:sp>
       <p:sp>
         <p:nvSpPr>
+          <p:cNvPr id="5" name="TextBox 4"/>
+          <p:cNvSpPr txBox="1"/>
+          <p:nvPr/>
+        </p:nvSpPr>
+        <p:spPr>
+          <a:xfrm>
+            <a:off x="10249563" y="6646310"/>
+            <a:ext cx="1706217" cy="188028"/>
+          </a:xfrm>
+          <a:prstGeom prst="rect">
+            <a:avLst/>
+          </a:prstGeom>
+          <a:noFill/>
+        </p:spPr>
+        <p:txBody>
+          <a:bodyPr wrap="none">
+            <a:spAutoFit/>
+          </a:bodyPr>
+          <a:lstStyle/>
+          <a:p>
+            <a:r>
+              <a:rPr sz="1000"/>
+              <a:t>48</a:t>
+            </a:r>
+          </a:p>
+        </p:txBody>
+      </p:sp>
+    </p:spTree>
+  </p:cSld>
+  <p:clrMapOvr>
+    <a:masterClrMapping/>
+  </p:clrMapOvr>
+</p:sld>
+</file>
+
+<file path=ppt/slides/slide49.xml><?xml version="1.0" encoding="utf-8"?>
+<p:sld xmlns:a="http://schemas.openxmlformats.org/drawingml/2006/main" xmlns:p="http://schemas.openxmlformats.org/presentationml/2006/main" xmlns:r="http://schemas.openxmlformats.org/officeDocument/2006/relationships">
+  <p:cSld>
+    <p:spTree>
+      <p:nvGrpSpPr>
+        <p:cNvPr id="1" name=""/>
+        <p:cNvGrpSpPr/>
+        <p:nvPr/>
+      </p:nvGrpSpPr>
+      <p:grpSpPr/>
+      <p:sp>
+        <p:nvSpPr>
+          <p:cNvPr id="2" name="Title 1"/>
+          <p:cNvSpPr>
+            <a:spLocks noGrp="1"/>
+          </p:cNvSpPr>
+          <p:nvPr>
+            <p:ph type="title"/>
+          </p:nvPr>
+        </p:nvSpPr>
+        <p:spPr/>
+        <p:txBody>
+          <a:bodyPr/>
+          <a:lstStyle/>
+          <a:p>
+            <a:r>
+              <a:t>Any questions?</a:t>
+            </a:r>
+          </a:p>
+        </p:txBody>
+      </p:sp>
+      <p:sp>
+        <p:nvSpPr>
+          <p:cNvPr id="3" name="Text Placeholder 2"/>
+          <p:cNvSpPr>
+            <a:spLocks noGrp="1"/>
+          </p:cNvSpPr>
+          <p:nvPr>
+            <p:ph type="body" idx="1"/>
+          </p:nvPr>
+        </p:nvSpPr>
+        <p:spPr/>
+        <p:txBody>
+          <a:bodyPr/>
+          <a:lstStyle/>
+          <a:p/>
+        </p:txBody>
+      </p:sp>
+      <p:sp>
+        <p:nvSpPr>
           <p:cNvPr id="4" name="TextBox 3"/>
           <p:cNvSpPr txBox="1"/>
           <p:nvPr/>
         </p:nvSpPr>
         <p:spPr>
           <a:xfrm>
-            <a:off x="10249563" y="6646310"/>
-            <a:ext cx="1706217" cy="188028"/>
+            <a:off x="310974" y="6645811"/>
+            <a:ext cx="11644805" cy="188527"/>
           </a:xfrm>
           <a:prstGeom prst="rect">
             <a:avLst/>
@@ -13330,7 +13559,36 @@
           <a:p>
             <a:r>
               <a:rPr sz="1000"/>
-              <a:t>48</a:t>
+              <a:t>University of Wisconsin - Madison</a:t>
+            </a:r>
+          </a:p>
+        </p:txBody>
+      </p:sp>
+      <p:sp>
+        <p:nvSpPr>
+          <p:cNvPr id="5" name="TextBox 4"/>
+          <p:cNvSpPr txBox="1"/>
+          <p:nvPr/>
+        </p:nvSpPr>
+        <p:spPr>
+          <a:xfrm>
+            <a:off x="10249563" y="6646310"/>
+            <a:ext cx="1706217" cy="188028"/>
+          </a:xfrm>
+          <a:prstGeom prst="rect">
+            <a:avLst/>
+          </a:prstGeom>
+          <a:noFill/>
+        </p:spPr>
+        <p:txBody>
+          <a:bodyPr wrap="none">
+            <a:spAutoFit/>
+          </a:bodyPr>
+          <a:lstStyle/>
+          <a:p>
+            <a:r>
+              <a:rPr sz="1000"/>
+              <a:t>49</a:t>
             </a:r>
           </a:p>
         </p:txBody>
@@ -13531,6 +13789,157 @@
 </p:sld>
 </file>
 
+<file path=ppt/slides/slide50.xml><?xml version="1.0" encoding="utf-8"?>
+<p:sld xmlns:a="http://schemas.openxmlformats.org/drawingml/2006/main" xmlns:p="http://schemas.openxmlformats.org/presentationml/2006/main" xmlns:r="http://schemas.openxmlformats.org/officeDocument/2006/relationships">
+  <p:cSld>
+    <p:spTree>
+      <p:nvGrpSpPr>
+        <p:cNvPr id="1" name=""/>
+        <p:cNvGrpSpPr/>
+        <p:nvPr/>
+      </p:nvGrpSpPr>
+      <p:grpSpPr/>
+      <p:sp>
+        <p:nvSpPr>
+          <p:cNvPr id="2" name="TextBox 1"/>
+          <p:cNvSpPr txBox="1"/>
+          <p:nvPr/>
+        </p:nvSpPr>
+        <p:spPr>
+          <a:xfrm>
+            <a:off x="914400" y="1371600"/>
+            <a:ext cx="10058400" cy="3657600"/>
+          </a:xfrm>
+          <a:prstGeom prst="rect">
+            <a:avLst/>
+          </a:prstGeom>
+          <a:noFill/>
+        </p:spPr>
+        <p:txBody>
+          <a:bodyPr wrap="square">
+            <a:spAutoFit/>
+          </a:bodyPr>
+          <a:lstStyle/>
+          <a:p>
+            <a:pPr/>
+            <a:r>
+              <a:rPr sz="2000"/>
+              <a:t>Thank you.</a:t>
+            </a:r>
+          </a:p>
+          <a:p>
+            <a:pPr/>
+            <a:r>
+              <a:rPr sz="2000"/>
+              <a:t>kasha2@wisc.edu</a:t>
+            </a:r>
+          </a:p>
+          <a:p>
+            <a:pPr/>
+            <a:r>
+              <a:rPr sz="2000"/>
+              <a:t>Simulation-Based Engineering Lab</a:t>
+            </a:r>
+          </a:p>
+          <a:p>
+            <a:pPr/>
+            <a:r>
+              <a:rPr sz="2000"/>
+              <a:t>University of Wisconsin - Madison</a:t>
+            </a:r>
+          </a:p>
+          <a:p>
+            <a:pPr/>
+          </a:p>
+          <a:p>
+            <a:pPr/>
+            <a:r>
+              <a:rPr sz="2000"/>
+              <a:t>Lab website: http://sbel.wisc.edu</a:t>
+            </a:r>
+          </a:p>
+          <a:p>
+            <a:pPr/>
+            <a:r>
+              <a:rPr sz="2000"/>
+              <a:t>Chrono website: http://www.projectchrono.org</a:t>
+            </a:r>
+          </a:p>
+          <a:p>
+            <a:pPr/>
+            <a:r>
+              <a:rPr sz="2000"/>
+              <a:t>Source code: https://github.com/projectchrono</a:t>
+            </a:r>
+          </a:p>
+        </p:txBody>
+      </p:sp>
+      <p:sp>
+        <p:nvSpPr>
+          <p:cNvPr id="3" name="TextBox 2"/>
+          <p:cNvSpPr txBox="1"/>
+          <p:nvPr/>
+        </p:nvSpPr>
+        <p:spPr>
+          <a:xfrm>
+            <a:off x="310974" y="6645811"/>
+            <a:ext cx="11644805" cy="188527"/>
+          </a:xfrm>
+          <a:prstGeom prst="rect">
+            <a:avLst/>
+          </a:prstGeom>
+          <a:noFill/>
+        </p:spPr>
+        <p:txBody>
+          <a:bodyPr wrap="none">
+            <a:spAutoFit/>
+          </a:bodyPr>
+          <a:lstStyle/>
+          <a:p>
+            <a:r>
+              <a:rPr sz="1000"/>
+              <a:t>University of Wisconsin - Madison</a:t>
+            </a:r>
+          </a:p>
+        </p:txBody>
+      </p:sp>
+      <p:sp>
+        <p:nvSpPr>
+          <p:cNvPr id="4" name="TextBox 3"/>
+          <p:cNvSpPr txBox="1"/>
+          <p:nvPr/>
+        </p:nvSpPr>
+        <p:spPr>
+          <a:xfrm>
+            <a:off x="10249563" y="6646310"/>
+            <a:ext cx="1706217" cy="188028"/>
+          </a:xfrm>
+          <a:prstGeom prst="rect">
+            <a:avLst/>
+          </a:prstGeom>
+          <a:noFill/>
+        </p:spPr>
+        <p:txBody>
+          <a:bodyPr wrap="none">
+            <a:spAutoFit/>
+          </a:bodyPr>
+          <a:lstStyle/>
+          <a:p>
+            <a:r>
+              <a:rPr sz="1000"/>
+              <a:t>50</a:t>
+            </a:r>
+          </a:p>
+        </p:txBody>
+      </p:sp>
+    </p:spTree>
+  </p:cSld>
+  <p:clrMapOvr>
+    <a:masterClrMapping/>
+  </p:clrMapOvr>
+</p:sld>
+</file>
+
 <file path=ppt/slides/slide6.xml><?xml version="1.0" encoding="utf-8"?>
 <p:sld xmlns:a="http://schemas.openxmlformats.org/drawingml/2006/main" xmlns:p="http://schemas.openxmlformats.org/presentationml/2006/main" xmlns:r="http://schemas.openxmlformats.org/officeDocument/2006/relationships">
   <p:cSld>
@@ -14424,7 +14833,7 @@
                 </a:solidFill>
                 <a:latin typeface="Consolas"/>
               </a:rPr>
-              <a:t>    # Get driver inputs (three floats) - this is the whole HIL contract</a:t>
+              <a:t>    # Get driver inputs (three floats) - this is the whole human-in-the-loop contract</a:t>
             </a:r>
           </a:p>
           <a:p>

--- a/tutorial_HIL_driver.pptx
+++ b/tutorial_HIL_driver.pptx
@@ -8333,14 +8333,22 @@
           <a:p>
             <a:pPr algn="ctr"/>
             <a:r>
-              <a:rPr sz="1800" b="1"/>
+              <a:rPr sz="1800" b="1">
+                <a:solidFill>
+                  <a:srgbClr val="FFFFFF"/>
+                </a:solidFill>
+              </a:rPr>
               <a:t>Operator machine</a:t>
             </a:r>
           </a:p>
           <a:p>
             <a:pPr algn="ctr"/>
             <a:r>
-              <a:rPr sz="1800"/>
+              <a:rPr sz="1800">
+                <a:solidFill>
+                  <a:srgbClr val="FFFFFF"/>
+                </a:solidFill>
+              </a:rPr>
               <a:t>operator_console.py</a:t>
             </a:r>
           </a:p>
@@ -8375,14 +8383,22 @@
           <a:p>
             <a:pPr algn="ctr"/>
             <a:r>
-              <a:rPr sz="1800" b="1"/>
+              <a:rPr sz="1800" b="1">
+                <a:solidFill>
+                  <a:srgbClr val="FFFFFF"/>
+                </a:solidFill>
+              </a:rPr>
               <a:t>Simulation machine</a:t>
             </a:r>
           </a:p>
           <a:p>
             <a:pPr algn="ctr"/>
             <a:r>
-              <a:rPr sz="1800"/>
+              <a:rPr sz="1800">
+                <a:solidFill>
+                  <a:srgbClr val="FFFFFF"/>
+                </a:solidFill>
+              </a:rPr>
               <a:t>tutorial_HIL_driver.py</a:t>
             </a:r>
           </a:p>
@@ -12267,7 +12283,7 @@
             <a:pPr/>
             <a:r>
               <a:rPr sz="2000"/>
-              <a:t>Every full-vehicle model in Chrono::Vehicle (HMMWV_Full, Sedan, CityBus, Gator, ...) shares the same interface</a:t>
+              <a:t>Every full-vehicle model in Chrono::Vehicle (HMMWV_Full, Sedan, UAZBUS, Gator, ...) shares the same interface</a:t>
             </a:r>
           </a:p>
           <a:p>
@@ -12433,14 +12449,74 @@
           </a:p>
         </p:txBody>
       </p:sp>
+      <p:sp>
+        <p:nvSpPr>
+          <p:cNvPr id="4" name="TextBox 3"/>
+          <p:cNvSpPr txBox="1"/>
+          <p:nvPr/>
+        </p:nvSpPr>
+        <p:spPr>
+          <a:xfrm>
+            <a:off x="310974" y="6645811"/>
+            <a:ext cx="11644805" cy="188527"/>
+          </a:xfrm>
+          <a:prstGeom prst="rect">
+            <a:avLst/>
+          </a:prstGeom>
+          <a:noFill/>
+        </p:spPr>
+        <p:txBody>
+          <a:bodyPr wrap="none">
+            <a:spAutoFit/>
+          </a:bodyPr>
+          <a:lstStyle/>
+          <a:p>
+            <a:r>
+              <a:rPr sz="1000"/>
+              <a:t>University of Wisconsin - Madison</a:t>
+            </a:r>
+          </a:p>
+        </p:txBody>
+      </p:sp>
+      <p:sp>
+        <p:nvSpPr>
+          <p:cNvPr id="5" name="TextBox 4"/>
+          <p:cNvSpPr txBox="1"/>
+          <p:nvPr/>
+        </p:nvSpPr>
+        <p:spPr>
+          <a:xfrm>
+            <a:off x="10249563" y="6646310"/>
+            <a:ext cx="1706217" cy="188028"/>
+          </a:xfrm>
+          <a:prstGeom prst="rect">
+            <a:avLst/>
+          </a:prstGeom>
+          <a:noFill/>
+        </p:spPr>
+        <p:txBody>
+          <a:bodyPr wrap="none">
+            <a:spAutoFit/>
+          </a:bodyPr>
+          <a:lstStyle/>
+          <a:p>
+            <a:r>
+              <a:rPr sz="1000"/>
+              <a:t>43</a:t>
+            </a:r>
+          </a:p>
+        </p:txBody>
+      </p:sp>
       <p:pic>
         <p:nvPicPr>
-          <p:cNvPr id="3" name="Picture 1"/>
-          <p:cNvPicPr/>
+          <p:cNvPr id="6" name="Picture 5" descr="vehicle_grid.png"/>
+          <p:cNvPicPr>
+            <a:picLocks noChangeAspect="1"/>
+          </p:cNvPicPr>
           <p:nvPr/>
         </p:nvPicPr>
         <p:blipFill>
-          <a:blip r:embed="rId2"/>
+          <a:blip r:embed="rId3"/>
           <a:stretch>
             <a:fillRect/>
           </a:stretch>
@@ -12455,64 +12531,6 @@
           </a:prstGeom>
         </p:spPr>
       </p:pic>
-      <p:sp>
-        <p:nvSpPr>
-          <p:cNvPr id="4" name="TextBox 3"/>
-          <p:cNvSpPr txBox="1"/>
-          <p:nvPr/>
-        </p:nvSpPr>
-        <p:spPr>
-          <a:xfrm>
-            <a:off x="310974" y="6645811"/>
-            <a:ext cx="11644805" cy="188527"/>
-          </a:xfrm>
-          <a:prstGeom prst="rect">
-            <a:avLst/>
-          </a:prstGeom>
-          <a:noFill/>
-        </p:spPr>
-        <p:txBody>
-          <a:bodyPr wrap="none">
-            <a:spAutoFit/>
-          </a:bodyPr>
-          <a:lstStyle/>
-          <a:p>
-            <a:r>
-              <a:rPr sz="1000"/>
-              <a:t>University of Wisconsin - Madison</a:t>
-            </a:r>
-          </a:p>
-        </p:txBody>
-      </p:sp>
-      <p:sp>
-        <p:nvSpPr>
-          <p:cNvPr id="5" name="TextBox 4"/>
-          <p:cNvSpPr txBox="1"/>
-          <p:nvPr/>
-        </p:nvSpPr>
-        <p:spPr>
-          <a:xfrm>
-            <a:off x="10249563" y="6646310"/>
-            <a:ext cx="1706217" cy="188028"/>
-          </a:xfrm>
-          <a:prstGeom prst="rect">
-            <a:avLst/>
-          </a:prstGeom>
-          <a:noFill/>
-        </p:spPr>
-        <p:txBody>
-          <a:bodyPr wrap="none">
-            <a:spAutoFit/>
-          </a:bodyPr>
-          <a:lstStyle/>
-          <a:p>
-            <a:r>
-              <a:rPr sz="1000"/>
-              <a:t>43</a:t>
-            </a:r>
-          </a:p>
-        </p:txBody>
-      </p:sp>
     </p:spTree>
   </p:cSld>
   <p:clrMapOvr>
@@ -12698,7 +12716,7 @@
           <a:p>
             <a:r>
               <a:rPr sz="1800"/>
-              <a:t>VEHICLE lives in CONFIGURATION - "hmmwv" | "sedan" | "citybus" | "gator"; everything below this line is unchanged</a:t>
+              <a:t>VEHICLE lives in CONFIGURATION - "hmmwv" | "sedan" | "uazbus" | "gator"; everything below this line is unchanged</a:t>
             </a:r>
           </a:p>
         </p:txBody>
@@ -13057,7 +13075,7 @@
             <a:pPr/>
             <a:r>
               <a:rPr sz="2000"/>
-              <a:t>Set VEHICLE = "citybus" (or "sedan", "gator") and re-run - same driver, same terrain, very different vehicle</a:t>
+              <a:t>Set VEHICLE = "uazbus" (or "sedan", "gator") and re-run - same driver, same terrain, very different vehicle</a:t>
             </a:r>
           </a:p>
           <a:p>

--- a/tutorial_HIL_driver.pptx
+++ b/tutorial_HIL_driver.pptx
@@ -6920,7 +6920,7 @@
             <a:pPr lvl="1"/>
             <a:r>
               <a:rPr sz="1800"/>
-              <a:t>PART 5: Customize the built-in overlay and choose your car</a:t>
+              <a:t>PART 5 (bonus): Customize the built-in overlay and choose your car -- cosmetic, not the core lesson</a:t>
             </a:r>
           </a:p>
           <a:p>
@@ -12163,7 +12163,11 @@
         <p:txBody>
           <a:bodyPr/>
           <a:lstStyle/>
-          <a:p/>
+          <a:p>
+            <a:r>
+              <a:t>Bonus material: the car picker and overlay flags are nice-to-haves. Parts 1 and 4 are the patterns worth taking with you.</a:t>
+            </a:r>
+          </a:p>
         </p:txBody>
       </p:sp>
       <p:sp>

--- a/tutorial_HIL_driver.pptx
+++ b/tutorial_HIL_driver.pptx
@@ -5787,7 +5787,7 @@
           <a:p>
             <a:r>
               <a:rPr sz="2600"/>
-              <a:t>Before running the code, please</a:t>
+              <a:t>Settings for this demo</a:t>
             </a:r>
           </a:p>
         </p:txBody>
@@ -5810,21 +5810,21 @@
             <a:pPr/>
             <a:r>
               <a:rPr sz="2000"/>
-              <a:t>Set REALTIME = "per_step" (Line 389), run for a while and note the drift</a:t>
+              <a:t>REALTIME = "per_step" (Line 443): run a while, note the drift</a:t>
             </a:r>
           </a:p>
           <a:p>
             <a:pPr/>
             <a:r>
               <a:rPr sz="2000"/>
-              <a:t>Set REALTIME = "cumulative" and compare</a:t>
+              <a:t>REALTIME = "cumulative": compare the two</a:t>
             </a:r>
           </a:p>
           <a:p>
             <a:pPr/>
             <a:r>
               <a:rPr sz="2000"/>
-              <a:t>Keep REALTIME = "vehicle" for the rest of the tutorial - it is the simplest</a:t>
+              <a:t>REALTIME = "vehicle" for the rest of the talk - it is the simplest</a:t>
             </a:r>
           </a:p>
         </p:txBody>
@@ -6715,7 +6715,7 @@
           <a:p>
             <a:r>
               <a:rPr sz="2600"/>
-              <a:t>Before running the code, please</a:t>
+              <a:t>Settings for this demo</a:t>
             </a:r>
           </a:p>
         </p:txBody>
@@ -6738,21 +6738,21 @@
             <a:pPr/>
             <a:r>
               <a:rPr sz="2000"/>
-              <a:t>Set INPUT_SOURCE = "keyboard" (Line 386)</a:t>
+              <a:t>INPUT_SOURCE = "keyboard" (Line 440)</a:t>
             </a:r>
           </a:p>
           <a:p>
             <a:pPr/>
             <a:r>
               <a:rPr sz="2000"/>
-              <a:t>Set REALTIME = "vehicle" (Line 389) - without real time the car is undrivable (why?)</a:t>
+              <a:t>REALTIME = "vehicle" (Line 443) - without real time the car is undrivable (why?)</a:t>
             </a:r>
           </a:p>
           <a:p>
             <a:pPr/>
             <a:r>
               <a:rPr sz="2000"/>
-              <a:t>Try SetGains(50, 50, 50) on Line 275 and feel what a step input does to the suspension</a:t>
+              <a:t>SetGains(50, 50, 50) on Line 307: what a step input does to the suspension</a:t>
             </a:r>
           </a:p>
         </p:txBody>
@@ -7060,7 +7060,7 @@
             <a:pPr/>
             <a:r>
               <a:rPr sz="2000"/>
-              <a:t>Volunteer: drive the HMMWV. Everyone else: watch the Irrlicht HUD (speed, inputs, RTF)</a:t>
+              <a:t>Driving the HMMWV with the arrow keys - watch the Irrlicht HUD (speed, inputs, RTF)</a:t>
             </a:r>
           </a:p>
         </p:txBody>
@@ -7364,11 +7364,7 @@
               <a:rPr sz="1800">
                 <a:latin typeface="Consolas"/>
               </a:rPr>
-              <a:t>SetJoystickDebug(True)</a:t>
-            </a:r>
-            <a:r>
-              <a:rPr sz="2000"/>
-              <a:t> prints live axis/button numbers twice a second - the same job probe_gamepad.py used to do, built in</a:t>
+              <a:t>SetJoystickDebug(True) prints live axis/button numbers twice a second - no separate probe script needed</a:t>
             </a:r>
           </a:p>
         </p:txBody>
@@ -7908,7 +7904,7 @@
             <a:pPr/>
             <a:r>
               <a:rPr sz="3302"/>
-              <a:t>Before running the code, please</a:t>
+              <a:t>Settings for this demo</a:t>
             </a:r>
           </a:p>
         </p:txBody>
@@ -7931,31 +7927,21 @@
             <a:pPr/>
             <a:r>
               <a:rPr sz="2000"/>
-              <a:t>Set INPUT_SOURCE = "gamepad" (Line 440), keep REALTIME = "vehicle"</a:t>
+              <a:t>INPUT_SOURCE = "gamepad" (Line 440), REALTIME = "vehicle"</a:t>
             </a:r>
           </a:p>
           <a:p>
             <a:pPr/>
             <a:r>
               <a:rPr sz="2000"/>
-              <a:t>Plug in a gamepad or wheel; set JOYSTICK_CONFIG to the preset that matches it</a:t>
+              <a:t>A gamepad or wheel plugged in, with JOYSTICK_CONFIG set to the matching preset</a:t>
             </a:r>
           </a:p>
           <a:p>
             <a:pPr/>
             <a:r>
               <a:rPr sz="2000"/>
-              <a:t>No matching preset? Set </a:t>
-            </a:r>
-            <a:r>
-              <a:rPr sz="1800">
-                <a:latin typeface="Consolas"/>
-              </a:rPr>
-              <a:t>JOYSTICK_DEBUG = True</a:t>
-            </a:r>
-            <a:r>
-              <a:rPr sz="2000"/>
-              <a:t> first and move one control at a time to read off the axis/button numbers</a:t>
+              <a:t>No matching preset? JOYSTICK_DEBUG = True, then move one control at a time to read off the axis/button numbers</a:t>
             </a:r>
           </a:p>
         </p:txBody>
@@ -8077,7 +8063,7 @@
             <a:pPr/>
             <a:r>
               <a:rPr sz="2000"/>
-              <a:t>Volunteer: drive the HMMWV with a gamepad or wheel - no second terminal, no pygame window</a:t>
+              <a:t>Driving the HMMWV with a gamepad or wheel - no second terminal, no pygame window</a:t>
             </a:r>
           </a:p>
           <a:p>
@@ -8706,7 +8692,7 @@
             <a:pPr/>
             <a:r>
               <a:rPr sz="2000"/>
-              <a:t>Today: a UDP operator console everybody can run (two terminals)</a:t>
+              <a:t>Today: a UDP operator console in a second terminal - the operator side has no Chrono dependency at all</a:t>
             </a:r>
           </a:p>
         </p:txBody>
@@ -8832,7 +8818,21 @@
             <a:pPr/>
             <a:r>
               <a:rPr sz="2000"/>
-              <a:t>Create a conda environment with PyChrono and pygame</a:t>
+              <a:t>This is a walkthrough - nothing to install right now; everything runs on my machine</a:t>
+            </a:r>
+          </a:p>
+          <a:p>
+            <a:pPr/>
+            <a:r>
+              <a:rPr sz="2000"/>
+              <a:t>Code, slides and a written walkthrough: github.com/ksha23/chrono-hil-tutorial</a:t>
+            </a:r>
+          </a:p>
+          <a:p>
+            <a:pPr/>
+            <a:r>
+              <a:rPr sz="2000"/>
+              <a:t>To run it yourself afterward:</a:t>
             </a:r>
           </a:p>
           <a:p>
@@ -8874,24 +8874,7 @@
             <a:pPr/>
             <a:r>
               <a:rPr sz="2000"/>
-              <a:t>Get the tutorial files: tutorial_HIL_driver.py, operator_console.py</a:t>
-            </a:r>
-          </a:p>
-          <a:p>
-            <a:pPr/>
-            <a:r>
-              <a:rPr sz="2000"/>
-              <a:t>Check that </a:t>
-            </a:r>
-            <a:r>
-              <a:rPr sz="1800">
-                <a:latin typeface="Consolas"/>
-              </a:rPr>
-              <a:t>python tutorial_HIL_driver.py</a:t>
-            </a:r>
-            <a:r>
-              <a:rPr sz="2000"/>
-              <a:t> opens an Irrlicht window with an HMMWV</a:t>
+              <a:t>python tutorial_HIL_driver.py opens an Irrlicht window with an HMMWV - drive it with the arrow keys</a:t>
             </a:r>
           </a:p>
           <a:p>
@@ -11035,7 +11018,7 @@
           <a:p>
             <a:r>
               <a:rPr sz="2600"/>
-              <a:t>Before running the code, please</a:t>
+              <a:t>Settings for this demo</a:t>
             </a:r>
           </a:p>
         </p:txBody>
@@ -11058,7 +11041,7 @@
             <a:pPr/>
             <a:r>
               <a:rPr sz="2000"/>
-              <a:t>Set INPUT_SOURCE = "udp" (Line 386), keep REALTIME = "vehicle"</a:t>
+              <a:t>INPUT_SOURCE = "udp" (Line 440), REALTIME = "vehicle"</a:t>
             </a:r>
           </a:p>
           <a:p>
@@ -11105,7 +11088,7 @@
             <a:pPr/>
             <a:r>
               <a:rPr sz="2000"/>
-              <a:t>Click the operator console window and drive with the arrow keys</a:t>
+              <a:t>Arrow keys in the operator console window drive the car</a:t>
             </a:r>
           </a:p>
         </p:txBody>
@@ -11231,7 +11214,7 @@
             <a:pPr/>
             <a:r>
               <a:rPr sz="2000"/>
-              <a:t>Pair up: one laptop runs the sim, the other runs the console and drives it over Wi-Fi</a:t>
+              <a:t>Two terminals on one laptop over localhost - or two machines over the network, same code either way</a:t>
             </a:r>
           </a:p>
           <a:p>
@@ -11776,7 +11759,7 @@
           <a:p>
             <a:r>
               <a:rPr sz="2600"/>
-              <a:t>Before running the code, please</a:t>
+              <a:t>Settings for this demo</a:t>
             </a:r>
           </a:p>
         </p:txBody>
@@ -11799,14 +11782,14 @@
             <a:pPr/>
             <a:r>
               <a:rPr sz="2000"/>
-              <a:t>Set SEND_FEEDBACK = True (Line 392)</a:t>
+              <a:t>SEND_FEEDBACK = True (Line 446)</a:t>
             </a:r>
           </a:p>
           <a:p>
             <a:pPr/>
             <a:r>
               <a:rPr sz="2000"/>
-              <a:t>Restart both scripts; the console now shows speed, sim time, RTF and lateral acceleration</a:t>
+              <a:t>Both scripts restarted: the console now shows speed, sim time, RTF and lateral acceleration</a:t>
             </a:r>
           </a:p>
           <a:p>
@@ -13056,7 +13039,7 @@
             <a:pPr/>
             <a:r>
               <a:rPr sz="3302"/>
-              <a:t>Before running the code, please</a:t>
+              <a:t>Settings for this demo</a:t>
             </a:r>
           </a:p>
         </p:txBody>
@@ -13079,31 +13062,21 @@
             <a:pPr/>
             <a:r>
               <a:rPr sz="2000"/>
-              <a:t>Set VEHICLE = "uazbus" (or "sedan", "gator") and re-run - same driver, same terrain, very different vehicle</a:t>
+              <a:t>VEHICLE = "uazbus" (or "sedan", "gator"), Line 433 - same driver, same terrain, very different vehicle</a:t>
             </a:r>
           </a:p>
           <a:p>
             <a:pPr/>
             <a:r>
               <a:rPr sz="2000"/>
-              <a:t>Set SHOW_SIM_INFO_PANEL = True, then press the </a:t>
-            </a:r>
-            <a:r>
-              <a:rPr sz="1800">
-                <a:latin typeface="Consolas"/>
-              </a:rPr>
-              <a:t>i</a:t>
-            </a:r>
+              <a:t>SHOW_SIM_INFO_PANEL = True, then the i key while the sim is running - same panel, two ways to reach it</a:t>
+            </a:r>
+          </a:p>
+          <a:p>
+            <a:pPr/>
             <a:r>
               <a:rPr sz="2000"/>
-              <a:t> key while the sim is running - same panel, two ways to reach it</a:t>
-            </a:r>
-          </a:p>
-          <a:p>
-            <a:pPr/>
-            <a:r>
-              <a:rPr sz="2000"/>
-              <a:t>Try SHOW_VEHICLE_HUD = False - the 3D scene doesn't care, only the panel disappears</a:t>
+              <a:t>SHOW_VEHICLE_HUD = False - the 3D scene doesn't care, only the panel disappears</a:t>
             </a:r>
           </a:p>
         </p:txBody>
@@ -13225,7 +13198,7 @@
             <a:pPr/>
             <a:r>
               <a:rPr sz="2000"/>
-              <a:t>Everyone picks a different VEHICLE and compares how the same scripted course drives an HMMWV vs. a bus vs. a Gator</a:t>
+              <a:t>The same scripted course driven by an HMMWV, a UAZBUS and a Gator - same driver, same terrain</a:t>
             </a:r>
           </a:p>
           <a:p>
@@ -13830,7 +13803,7 @@
         <p:spPr>
           <a:xfrm>
             <a:off x="914400" y="1371600"/>
-            <a:ext cx="10058400" cy="3657600"/>
+            <a:ext cx="10058400" cy="4057600"/>
           </a:xfrm>
           <a:prstGeom prst="rect">
             <a:avLst/>
@@ -13892,6 +13865,13 @@
             <a:r>
               <a:rPr sz="2000"/>
               <a:t>Source code: https://github.com/projectchrono</a:t>
+            </a:r>
+          </a:p>
+          <a:p>
+            <a:pPr/>
+            <a:r>
+              <a:rPr sz="2000"/>
+              <a:t>Tutorial code + slides: https://github.com/ksha23/chrono-hil-tutorial</a:t>
             </a:r>
           </a:p>
         </p:txBody>
